--- a/Design_of_a_Frequency_Synthesiser_Review-2.pptx
+++ b/Design_of_a_Frequency_Synthesiser_Review-2.pptx
@@ -12685,8 +12685,8 @@
         </p:blipFill>
         <p:spPr>
           <a:xfrm>
-            <a:off x="916078" y="1325880"/>
-            <a:ext cx="4448004" cy="3500000"/>
+            <a:off x="1005297" y="1325880"/>
+            <a:ext cx="4269565" cy="3500000"/>
           </a:xfrm>
           <a:prstGeom prst="rect">
             <a:avLst/>
@@ -19402,30 +19402,6 @@
           </a:prstGeom>
         </p:spPr>
       </p:pic>
-      <p:pic>
-        <p:nvPicPr>
-          <p:cNvPr id="5" name="Picture 4" descr="pll_block_diagram.png"/>
-          <p:cNvPicPr>
-            <a:picLocks noChangeAspect="1"/>
-          </p:cNvPicPr>
-          <p:nvPr/>
-        </p:nvPicPr>
-        <p:blipFill>
-          <a:blip r:embed="rId4"/>
-          <a:stretch>
-            <a:fillRect/>
-          </a:stretch>
-        </p:blipFill>
-        <p:spPr>
-          <a:xfrm>
-            <a:off x="640080" y="1327533"/>
-            <a:ext cx="10881360" cy="3196694"/>
-          </a:xfrm>
-          <a:prstGeom prst="rect">
-            <a:avLst/>
-          </a:prstGeom>
-        </p:spPr>
-      </p:pic>
       <p:sp>
         <p:nvSpPr>
           <p:cNvPr id="6" name="TextBox 5"/>
@@ -19500,6 +19476,30 @@
           </a:p>
         </p:txBody>
       </p:sp>
+      <p:pic>
+        <p:nvPicPr>
+          <p:cNvPr id="7" name="Picture 6" descr="pll_block_diagram.png"/>
+          <p:cNvPicPr>
+            <a:picLocks noChangeAspect="1"/>
+          </p:cNvPicPr>
+          <p:nvPr/>
+        </p:nvPicPr>
+        <p:blipFill>
+          <a:blip r:embed="rId5"/>
+          <a:stretch>
+            <a:fillRect/>
+          </a:stretch>
+        </p:blipFill>
+        <p:spPr>
+          <a:xfrm>
+            <a:off x="1390918" y="1327533"/>
+            <a:ext cx="9379683" cy="3196694"/>
+          </a:xfrm>
+          <a:prstGeom prst="rect">
+            <a:avLst/>
+          </a:prstGeom>
+        </p:spPr>
+      </p:pic>
     </p:spTree>
   </p:cSld>
   <p:clrMapOvr>

--- a/Design_of_a_Frequency_Synthesiser_Review-2.pptx
+++ b/Design_of_a_Frequency_Synthesiser_Review-2.pptx
@@ -21,14 +21,16 @@
     <p:sldId id="263" r:id="rId7"/>
     <p:sldId id="275" r:id="rId24"/>
     <p:sldId id="276" r:id="rId25"/>
+    <p:sldId id="277" r:id="rId26"/>
     <p:sldId id="264" r:id="rId8"/>
-    <p:sldId id="277" r:id="rId26"/>
     <p:sldId id="278" r:id="rId27"/>
+    <p:sldId id="279" r:id="rId28"/>
     <p:sldId id="269" r:id="rId18"/>
-    <p:sldId id="279" r:id="rId28"/>
-    <p:sldId id="270" r:id="rId19"/>
     <p:sldId id="280" r:id="rId29"/>
     <p:sldId id="281" r:id="rId30"/>
+    <p:sldId id="270" r:id="rId19"/>
+    <p:sldId id="282" r:id="rId31"/>
+    <p:sldId id="283" r:id="rId32"/>
     <p:sldId id="265" r:id="rId9"/>
     <p:sldId id="266" r:id="rId10"/>
     <p:sldId id="267" r:id="rId11"/>
@@ -790,6 +792,235 @@
 </c:chartSpace>
 </file>
 
+<file path=ppt/charts/chart10.xml><?xml version="1.0" encoding="utf-8"?>
+<c:chartSpace xmlns:c="http://schemas.openxmlformats.org/drawingml/2006/chart" xmlns:a="http://schemas.openxmlformats.org/drawingml/2006/main" xmlns:r="http://schemas.openxmlformats.org/officeDocument/2006/relationships">
+  <c:date1904 val="0"/>
+  <c:chart>
+    <c:autoTitleDeleted val="1"/>
+    <c:plotArea>
+      <c:barChart>
+        <c:barDir val="col"/>
+        <c:grouping val="clustered"/>
+        <c:ser>
+          <c:idx val="0"/>
+          <c:order val="0"/>
+          <c:tx>
+            <c:strRef>
+              <c:f>Sheet1!$B$1</c:f>
+              <c:strCache>
+                <c:ptCount val="1"/>
+                <c:pt idx="0">
+                  <c:v>mean |drift|</c:v>
+                </c:pt>
+              </c:strCache>
+            </c:strRef>
+          </c:tx>
+          <c:spPr>
+            <a:solidFill/>
+          </c:spPr>
+          <c:dPt>
+            <c:idx val="0"/>
+            <c:spPr>
+              <a:solidFill>
+                <a:srgbClr val="9AA0A6"/>
+              </a:solidFill>
+            </c:spPr>
+          </c:dPt>
+          <c:dPt>
+            <c:idx val="1"/>
+            <c:spPr>
+              <a:solidFill>
+                <a:srgbClr val="2A9D8F"/>
+              </a:solidFill>
+            </c:spPr>
+          </c:dPt>
+          <c:dPt>
+            <c:idx val="2"/>
+            <c:spPr>
+              <a:solidFill>
+                <a:srgbClr val="1D2F82"/>
+              </a:solidFill>
+            </c:spPr>
+          </c:dPt>
+          <c:errBars>
+            <c:errDir val="y"/>
+            <c:errBarType val="both"/>
+            <c:errValType val="cust"/>
+            <c:noEndCap val="0"/>
+            <c:plus>
+              <c:numLit>
+                <c:ptCount val="3"/>
+                <c:pt idx="0">
+                  <c:v>2.7268</c:v>
+                </c:pt>
+                <c:pt idx="1">
+                  <c:v>1.2393</c:v>
+                </c:pt>
+                <c:pt idx="2">
+                  <c:v>1.0397</c:v>
+                </c:pt>
+              </c:numLit>
+            </c:plus>
+            <c:minus>
+              <c:numLit>
+                <c:ptCount val="3"/>
+                <c:pt idx="0">
+                  <c:v>2.7268</c:v>
+                </c:pt>
+                <c:pt idx="1">
+                  <c:v>1.2393</c:v>
+                </c:pt>
+                <c:pt idx="2">
+                  <c:v>1.0397</c:v>
+                </c:pt>
+              </c:numLit>
+            </c:minus>
+            <c:spPr>
+              <a:ln w="19050">
+                <a:solidFill>
+                  <a:srgbClr val="333333"/>
+                </a:solidFill>
+              </a:ln>
+            </c:spPr>
+          </c:errBars>
+          <c:cat>
+            <c:strRef>
+              <c:f>Sheet1!$A$2:$A$4</c:f>
+              <c:strCache>
+                <c:ptCount val="3"/>
+                <c:pt idx="0">
+                  <c:v>uncompensated
+18.93 MHz (n=12)</c:v>
+                </c:pt>
+                <c:pt idx="1">
+                  <c:v>1st-order
+5.85 MHz (n=30)</c:v>
+                </c:pt>
+                <c:pt idx="2">
+                  <c:v>2nd-order
+3.37 MHz (n=30)</c:v>
+                </c:pt>
+              </c:strCache>
+            </c:strRef>
+          </c:cat>
+          <c:val>
+            <c:numRef>
+              <c:f>Sheet1!$B$2:$B$4</c:f>
+              <c:numCache>
+                <c:formatCode>General</c:formatCode>
+                <c:ptCount val="3"/>
+                <c:pt idx="0">
+                  <c:v>18.927422508939966</c:v>
+                </c:pt>
+                <c:pt idx="1">
+                  <c:v>5.854979326854094</c:v>
+                </c:pt>
+                <c:pt idx="2">
+                  <c:v>3.3729850400530608</c:v>
+                </c:pt>
+              </c:numCache>
+            </c:numRef>
+          </c:val>
+        </c:ser>
+        <c:gapWidth val="60"/>
+        <c:axId val="-2068027336"/>
+        <c:axId val="-2113994440"/>
+      </c:barChart>
+      <c:catAx>
+        <c:axId val="-2068027336"/>
+        <c:scaling>
+          <c:orientation val="minMax"/>
+        </c:scaling>
+        <c:delete val="0"/>
+        <c:axPos val="b"/>
+        <c:majorTickMark val="out"/>
+        <c:minorTickMark val="none"/>
+        <c:tickLblPos val="nextTo"/>
+        <c:txPr>
+          <a:bodyPr/>
+          <a:lstStyle/>
+          <a:p>
+            <a:pPr>
+              <a:defRPr sz="1000"/>
+            </a:pPr>
+          </a:p>
+        </c:txPr>
+        <c:crossAx val="-2113994440"/>
+        <c:crosses val="min"/>
+        <c:auto val="1"/>
+        <c:lblAlgn val="ctr"/>
+        <c:lblOffset val="100"/>
+        <c:noMultiLvlLbl val="0"/>
+      </c:catAx>
+      <c:valAx>
+        <c:axId val="-2113994440"/>
+        <c:scaling>
+          <c:max val="25.0"/>
+          <c:min val="0.0"/>
+        </c:scaling>
+        <c:delete val="0"/>
+        <c:axPos val="l"/>
+        <c:majorGridlines>
+          <c:spPr>
+            <a:ln>
+              <a:solidFill>
+                <a:srgbClr val="E3E3E3"/>
+              </a:solidFill>
+            </a:ln>
+          </c:spPr>
+        </c:majorGridlines>
+        <c:title>
+          <c:tx>
+            <c:rich>
+              <a:bodyPr/>
+              <a:lstStyle/>
+              <a:p>
+                <a:r>
+                  <a:rPr sz="1100"/>
+                  <a:t>mean |drift| 85 vs −40 °C (MHz)</a:t>
+                </a:r>
+              </a:p>
+            </c:rich>
+          </c:tx>
+          <c:layout/>
+          <c:overlay val="0"/>
+        </c:title>
+        <c:majorTickMark val="out"/>
+        <c:minorTickMark val="none"/>
+        <c:tickLblPos val="nextTo"/>
+        <c:txPr>
+          <a:bodyPr/>
+          <a:lstStyle/>
+          <a:p>
+            <a:pPr>
+              <a:defRPr sz="1000"/>
+            </a:pPr>
+          </a:p>
+        </c:txPr>
+        <c:crossAx val="-2068027336"/>
+        <c:crosses val="autoZero"/>
+      </c:valAx>
+    </c:plotArea>
+    <c:dispBlanksAs val="gap"/>
+  </c:chart>
+  <c:txPr>
+    <a:bodyPr/>
+    <a:lstStyle/>
+    <a:p>
+      <a:pPr>
+        <a:defRPr sz="1800">
+          <a:latin typeface="Calibri"/>
+        </a:defRPr>
+      </a:pPr>
+      <a:endParaRPr lang="en-US"/>
+    </a:p>
+  </c:txPr>
+  <c:externalData r:id="rId1">
+    <c:autoUpdate val="0"/>
+  </c:externalData>
+</c:chartSpace>
+</file>
+
 <file path=ppt/charts/chart2.xml><?xml version="1.0" encoding="utf-8"?>
 <c:chartSpace xmlns:c="http://schemas.openxmlformats.org/drawingml/2006/chart" xmlns:a="http://schemas.openxmlformats.org/drawingml/2006/main" xmlns:r="http://schemas.openxmlformats.org/officeDocument/2006/relationships">
   <c:chart>
@@ -1765,6 +1996,442 @@
 
 <file path=ppt/charts/chart4.xml><?xml version="1.0" encoding="utf-8"?>
 <c:chartSpace xmlns:c="http://schemas.openxmlformats.org/drawingml/2006/chart" xmlns:a="http://schemas.openxmlformats.org/drawingml/2006/main" xmlns:r="http://schemas.openxmlformats.org/officeDocument/2006/relationships">
+  <c:chart>
+    <c:autoTitleDeleted val="1"/>
+    <c:plotArea>
+      <c:scatterChart>
+        <c:scatterStyle val="lineMarker"/>
+        <c:varyColors val="0"/>
+        <c:ser>
+          <c:idx val="0"/>
+          <c:order val="0"/>
+          <c:tx>
+            <c:strRef>
+              <c:f>Sheet1!$B$1</c:f>
+              <c:strCache>
+                <c:ptCount val="1"/>
+                <c:pt idx="0">
+                  <c:v>sf</c:v>
+                </c:pt>
+              </c:strCache>
+            </c:strRef>
+          </c:tx>
+          <c:spPr>
+            <a:ln>
+              <a:noFill/>
+            </a:ln>
+          </c:spPr>
+          <c:marker>
+            <c:symbol val="diamond"/>
+            <c:size val="14"/>
+            <c:spPr>
+              <a:solidFill>
+                <a:srgbClr val="2A9D8F"/>
+              </a:solidFill>
+              <a:ln>
+                <a:solidFill>
+                  <a:srgbClr val="2A9D8F"/>
+                </a:solidFill>
+              </a:ln>
+            </c:spPr>
+          </c:marker>
+          <c:xVal>
+            <c:numRef>
+              <c:f>Sheet1!$A$2:$A$2</c:f>
+              <c:numCache>
+                <c:formatCode>General</c:formatCode>
+                <c:ptCount val="1"/>
+                <c:pt idx="0">
+                  <c:v>45.1</c:v>
+                </c:pt>
+              </c:numCache>
+            </c:numRef>
+          </c:xVal>
+          <c:yVal>
+            <c:numRef>
+              <c:f>Sheet1!$B$2:$B$2</c:f>
+              <c:numCache>
+                <c:formatCode>General</c:formatCode>
+                <c:ptCount val="1"/>
+                <c:pt idx="0">
+                  <c:v>112.21119176175905</c:v>
+                </c:pt>
+              </c:numCache>
+            </c:numRef>
+          </c:yVal>
+          <c:smooth val="0"/>
+        </c:ser>
+        <c:ser>
+          <c:idx val="1"/>
+          <c:order val="1"/>
+          <c:tx>
+            <c:strRef>
+              <c:f>Sheet1!$B$4</c:f>
+              <c:strCache>
+                <c:ptCount val="1"/>
+                <c:pt idx="0">
+                  <c:v>ff</c:v>
+                </c:pt>
+              </c:strCache>
+            </c:strRef>
+          </c:tx>
+          <c:spPr>
+            <a:ln>
+              <a:noFill/>
+            </a:ln>
+          </c:spPr>
+          <c:marker>
+            <c:symbol val="diamond"/>
+            <c:size val="14"/>
+            <c:spPr>
+              <a:solidFill>
+                <a:srgbClr val="E07A1F"/>
+              </a:solidFill>
+              <a:ln>
+                <a:solidFill>
+                  <a:srgbClr val="E07A1F"/>
+                </a:solidFill>
+              </a:ln>
+            </c:spPr>
+          </c:marker>
+          <c:xVal>
+            <c:numRef>
+              <c:f>Sheet1!$A$5:$A$5</c:f>
+              <c:numCache>
+                <c:formatCode>General</c:formatCode>
+                <c:ptCount val="1"/>
+                <c:pt idx="0">
+                  <c:v>42.8</c:v>
+                </c:pt>
+              </c:numCache>
+            </c:numRef>
+          </c:xVal>
+          <c:yVal>
+            <c:numRef>
+              <c:f>Sheet1!$B$5:$B$5</c:f>
+              <c:numCache>
+                <c:formatCode>General</c:formatCode>
+                <c:ptCount val="1"/>
+                <c:pt idx="0">
+                  <c:v>332.05573071288194</c:v>
+                </c:pt>
+              </c:numCache>
+            </c:numRef>
+          </c:yVal>
+          <c:smooth val="0"/>
+        </c:ser>
+        <c:ser>
+          <c:idx val="2"/>
+          <c:order val="2"/>
+          <c:tx>
+            <c:strRef>
+              <c:f>Sheet1!$B$7</c:f>
+              <c:strCache>
+                <c:ptCount val="1"/>
+                <c:pt idx="0">
+                  <c:v>tt</c:v>
+                </c:pt>
+              </c:strCache>
+            </c:strRef>
+          </c:tx>
+          <c:spPr>
+            <a:ln>
+              <a:noFill/>
+            </a:ln>
+          </c:spPr>
+          <c:marker>
+            <c:symbol val="diamond"/>
+            <c:size val="14"/>
+            <c:spPr>
+              <a:solidFill>
+                <a:srgbClr val="1D2F82"/>
+              </a:solidFill>
+              <a:ln>
+                <a:solidFill>
+                  <a:srgbClr val="1D2F82"/>
+                </a:solidFill>
+              </a:ln>
+            </c:spPr>
+          </c:marker>
+          <c:xVal>
+            <c:numRef>
+              <c:f>Sheet1!$A$8:$A$8</c:f>
+              <c:numCache>
+                <c:formatCode>General</c:formatCode>
+                <c:ptCount val="1"/>
+                <c:pt idx="0">
+                  <c:v>36.2</c:v>
+                </c:pt>
+              </c:numCache>
+            </c:numRef>
+          </c:xVal>
+          <c:yVal>
+            <c:numRef>
+              <c:f>Sheet1!$B$8:$B$8</c:f>
+              <c:numCache>
+                <c:formatCode>General</c:formatCode>
+                <c:ptCount val="1"/>
+                <c:pt idx="0">
+                  <c:v>680.7815053407337</c:v>
+                </c:pt>
+              </c:numCache>
+            </c:numRef>
+          </c:yVal>
+          <c:smooth val="0"/>
+        </c:ser>
+        <c:ser>
+          <c:idx val="3"/>
+          <c:order val="3"/>
+          <c:tx>
+            <c:strRef>
+              <c:f>Sheet1!$B$10</c:f>
+              <c:strCache>
+                <c:ptCount val="1"/>
+                <c:pt idx="0">
+                  <c:v>ss</c:v>
+                </c:pt>
+              </c:strCache>
+            </c:strRef>
+          </c:tx>
+          <c:spPr>
+            <a:ln>
+              <a:noFill/>
+            </a:ln>
+          </c:spPr>
+          <c:marker>
+            <c:symbol val="diamond"/>
+            <c:size val="14"/>
+            <c:spPr>
+              <a:solidFill>
+                <a:srgbClr val="6A3D9A"/>
+              </a:solidFill>
+              <a:ln>
+                <a:solidFill>
+                  <a:srgbClr val="6A3D9A"/>
+                </a:solidFill>
+              </a:ln>
+            </c:spPr>
+          </c:marker>
+          <c:xVal>
+            <c:numRef>
+              <c:f>Sheet1!$A$11:$A$11</c:f>
+              <c:numCache>
+                <c:formatCode>General</c:formatCode>
+                <c:ptCount val="1"/>
+                <c:pt idx="0">
+                  <c:v>30.3</c:v>
+                </c:pt>
+              </c:numCache>
+            </c:numRef>
+          </c:xVal>
+          <c:yVal>
+            <c:numRef>
+              <c:f>Sheet1!$B$11:$B$11</c:f>
+              <c:numCache>
+                <c:formatCode>General</c:formatCode>
+                <c:ptCount val="1"/>
+                <c:pt idx="0">
+                  <c:v>1069.741704840276</c:v>
+                </c:pt>
+              </c:numCache>
+            </c:numRef>
+          </c:yVal>
+          <c:smooth val="0"/>
+        </c:ser>
+        <c:ser>
+          <c:idx val="4"/>
+          <c:order val="4"/>
+          <c:tx>
+            <c:strRef>
+              <c:f>Sheet1!$B$13</c:f>
+              <c:strCache>
+                <c:ptCount val="1"/>
+                <c:pt idx="0">
+                  <c:v>fs</c:v>
+                </c:pt>
+              </c:strCache>
+            </c:strRef>
+          </c:tx>
+          <c:spPr>
+            <a:ln>
+              <a:noFill/>
+            </a:ln>
+          </c:spPr>
+          <c:marker>
+            <c:symbol val="diamond"/>
+            <c:size val="14"/>
+            <c:spPr>
+              <a:solidFill>
+                <a:srgbClr val="C0392B"/>
+              </a:solidFill>
+              <a:ln>
+                <a:solidFill>
+                  <a:srgbClr val="C0392B"/>
+                </a:solidFill>
+              </a:ln>
+            </c:spPr>
+          </c:marker>
+          <c:xVal>
+            <c:numRef>
+              <c:f>Sheet1!$A$14:$A$14</c:f>
+              <c:numCache>
+                <c:formatCode>General</c:formatCode>
+                <c:ptCount val="1"/>
+                <c:pt idx="0">
+                  <c:v>28.2</c:v>
+                </c:pt>
+              </c:numCache>
+            </c:numRef>
+          </c:xVal>
+          <c:yVal>
+            <c:numRef>
+              <c:f>Sheet1!$B$14:$B$14</c:f>
+              <c:numCache>
+                <c:formatCode>General</c:formatCode>
+                <c:ptCount val="1"/>
+                <c:pt idx="0">
+                  <c:v>1398.965438841836</c:v>
+                </c:pt>
+              </c:numCache>
+            </c:numRef>
+          </c:yVal>
+          <c:smooth val="0"/>
+        </c:ser>
+        <c:axId val="-2128940872"/>
+        <c:axId val="-2129643912"/>
+      </c:scatterChart>
+      <c:valAx>
+        <c:axId val="-2128940872"/>
+        <c:scaling>
+          <c:orientation val="minMax"/>
+          <c:max val="48.0"/>
+          <c:min val="26.0"/>
+        </c:scaling>
+        <c:delete val="0"/>
+        <c:axPos val="b"/>
+        <c:title>
+          <c:tx>
+            <c:rich>
+              <a:bodyPr/>
+              <a:lstStyle/>
+              <a:p>
+                <a:r>
+                  <a:rPr sz="1100"/>
+                  <a:t>NMOS drive current at |Vgs| = 0.9 V (µA)</a:t>
+                </a:r>
+              </a:p>
+            </c:rich>
+          </c:tx>
+          <c:layout/>
+          <c:overlay val="0"/>
+        </c:title>
+        <c:numFmt formatCode="General" sourceLinked="1"/>
+        <c:majorTickMark val="out"/>
+        <c:minorTickMark val="none"/>
+        <c:tickLblPos val="nextTo"/>
+        <c:txPr>
+          <a:bodyPr/>
+          <a:lstStyle/>
+          <a:p>
+            <a:pPr>
+              <a:defRPr sz="1000"/>
+            </a:pPr>
+          </a:p>
+        </c:txPr>
+        <c:crossAx val="-2129643912"/>
+        <c:crosses val="min"/>
+        <c:crossBetween val="midCat"/>
+      </c:valAx>
+      <c:valAx>
+        <c:axId val="-2129643912"/>
+        <c:scaling>
+          <c:orientation val="minMax"/>
+          <c:max val="1600.0"/>
+          <c:min val="0.0"/>
+        </c:scaling>
+        <c:delete val="0"/>
+        <c:axPos val="l"/>
+        <c:majorGridlines>
+          <c:spPr>
+            <a:ln>
+              <a:solidFill>
+                <a:srgbClr val="E3E3E3"/>
+              </a:solidFill>
+            </a:ln>
+          </c:spPr>
+        </c:majorGridlines>
+        <c:title>
+          <c:tx>
+            <c:rich>
+              <a:bodyPr/>
+              <a:lstStyle/>
+              <a:p>
+                <a:r>
+                  <a:rPr sz="1100"/>
+                  <a:t>Uncompensated tempco (ppm/°C)</a:t>
+                </a:r>
+              </a:p>
+            </c:rich>
+          </c:tx>
+          <c:layout/>
+          <c:overlay val="0"/>
+        </c:title>
+        <c:numFmt formatCode="General" sourceLinked="1"/>
+        <c:majorTickMark val="out"/>
+        <c:minorTickMark val="none"/>
+        <c:tickLblPos val="nextTo"/>
+        <c:txPr>
+          <a:bodyPr/>
+          <a:lstStyle/>
+          <a:p>
+            <a:pPr>
+              <a:defRPr sz="1000"/>
+            </a:pPr>
+          </a:p>
+        </c:txPr>
+        <c:crossAx val="-2128940872"/>
+        <c:crosses val="min"/>
+        <c:crossBetween val="midCat"/>
+      </c:valAx>
+    </c:plotArea>
+    <c:legend>
+      <c:legendPos val="b"/>
+      <c:layout/>
+      <c:overlay val="0"/>
+      <c:txPr>
+        <a:bodyPr/>
+        <a:lstStyle/>
+        <a:p>
+          <a:pPr>
+            <a:defRPr sz="1000"/>
+          </a:pPr>
+        </a:p>
+      </c:txPr>
+    </c:legend>
+    <c:plotVisOnly val="1"/>
+    <c:dispBlanksAs val="gap"/>
+    <c:showDLblsOverMax val="0"/>
+  </c:chart>
+  <c:txPr>
+    <a:bodyPr/>
+    <a:lstStyle/>
+    <a:p>
+      <a:pPr>
+        <a:defRPr sz="1800">
+          <a:latin typeface="Calibri"/>
+        </a:defRPr>
+      </a:pPr>
+      <a:endParaRPr lang="en-US"/>
+    </a:p>
+  </c:txPr>
+  <c:externalData r:id="rId1">
+    <c:autoUpdate val="0"/>
+  </c:externalData>
+</c:chartSpace>
+</file>
+
+<file path=ppt/charts/chart5.xml><?xml version="1.0" encoding="utf-8"?>
+<c:chartSpace xmlns:c="http://schemas.openxmlformats.org/drawingml/2006/chart" xmlns:a="http://schemas.openxmlformats.org/drawingml/2006/main" xmlns:r="http://schemas.openxmlformats.org/officeDocument/2006/relationships">
   <c:date1904 val="0"/>
   <c:chart>
     <c:autoTitleDeleted val="1"/>
@@ -1972,7 +2639,7 @@
 </c:chartSpace>
 </file>
 
-<file path=ppt/charts/chart5.xml><?xml version="1.0" encoding="utf-8"?>
+<file path=ppt/charts/chart6.xml><?xml version="1.0" encoding="utf-8"?>
 <c:chartSpace xmlns:c="http://schemas.openxmlformats.org/drawingml/2006/chart" xmlns:a="http://schemas.openxmlformats.org/drawingml/2006/main" xmlns:r="http://schemas.openxmlformats.org/officeDocument/2006/relationships">
   <c:chart>
     <c:autoTitleDeleted val="1"/>
@@ -2660,7 +3327,7 @@
 </c:chartSpace>
 </file>
 
-<file path=ppt/charts/chart6.xml><?xml version="1.0" encoding="utf-8"?>
+<file path=ppt/charts/chart7.xml><?xml version="1.0" encoding="utf-8"?>
 <c:chartSpace xmlns:c="http://schemas.openxmlformats.org/drawingml/2006/chart" xmlns:a="http://schemas.openxmlformats.org/drawingml/2006/main" xmlns:r="http://schemas.openxmlformats.org/officeDocument/2006/relationships">
   <c:chart>
     <c:autoTitleDeleted val="1"/>
@@ -7601,7 +8268,7 @@
               <c:strCache>
                 <c:ptCount val="1"/>
                 <c:pt idx="0">
-                  <c:v>VCO floor 0.63 V</c:v>
+                  <c:v>below 0.65 V the VCO is &lt; 18 MHz</c:v>
                 </c:pt>
               </c:strCache>
             </c:strRef>
@@ -7639,10 +8306,10 @@
                 <c:formatCode>General</c:formatCode>
                 <c:ptCount val="2"/>
                 <c:pt idx="0">
-                  <c:v>0.63</c:v>
+                  <c:v>0.65</c:v>
                 </c:pt>
                 <c:pt idx="1">
-                  <c:v>0.63</c:v>
+                  <c:v>0.65</c:v>
                 </c:pt>
               </c:numCache>
             </c:numRef>
@@ -7782,7 +8449,3555 @@
 </c:chartSpace>
 </file>
 
-<file path=ppt/charts/chart7.xml><?xml version="1.0" encoding="utf-8"?>
+<file path=ppt/charts/chart8.xml><?xml version="1.0" encoding="utf-8"?>
+<c:chartSpace xmlns:c="http://schemas.openxmlformats.org/drawingml/2006/chart" xmlns:a="http://schemas.openxmlformats.org/drawingml/2006/main" xmlns:r="http://schemas.openxmlformats.org/officeDocument/2006/relationships">
+  <c:chart>
+    <c:autoTitleDeleted val="1"/>
+    <c:plotArea>
+      <c:scatterChart>
+        <c:scatterStyle val="lineMarker"/>
+        <c:varyColors val="0"/>
+        <c:ser>
+          <c:idx val="0"/>
+          <c:order val="0"/>
+          <c:tx>
+            <c:strRef>
+              <c:f>Sheet1!$B$1</c:f>
+              <c:strCache>
+                <c:ptCount val="1"/>
+                <c:pt idx="0">
+                  <c:v>transistor-level transient (577 ns)</c:v>
+                </c:pt>
+              </c:strCache>
+            </c:strRef>
+          </c:tx>
+          <c:spPr>
+            <a:ln w="28575">
+              <a:solidFill>
+                <a:srgbClr val="2A9D8F"/>
+              </a:solidFill>
+            </a:ln>
+          </c:spPr>
+          <c:marker>
+            <c:symbol val="none"/>
+          </c:marker>
+          <c:xVal>
+            <c:numRef>
+              <c:f>Sheet1!$A$2:$A$404</c:f>
+              <c:numCache>
+                <c:formatCode>General</c:formatCode>
+                <c:ptCount val="403"/>
+                <c:pt idx="0">
+                  <c:v>0.0002</c:v>
+                </c:pt>
+                <c:pt idx="1">
+                  <c:v>4.67</c:v>
+                </c:pt>
+                <c:pt idx="2">
+                  <c:v>9.67</c:v>
+                </c:pt>
+                <c:pt idx="3">
+                  <c:v>14.67</c:v>
+                </c:pt>
+                <c:pt idx="4">
+                  <c:v>19.556</c:v>
+                </c:pt>
+                <c:pt idx="5">
+                  <c:v>24.556</c:v>
+                </c:pt>
+                <c:pt idx="6">
+                  <c:v>29.556</c:v>
+                </c:pt>
+                <c:pt idx="7">
+                  <c:v>34.556000000000004</c:v>
+                </c:pt>
+                <c:pt idx="8">
+                  <c:v>39.441</c:v>
+                </c:pt>
+                <c:pt idx="9">
+                  <c:v>44.441</c:v>
+                </c:pt>
+                <c:pt idx="10">
+                  <c:v>49.441</c:v>
+                </c:pt>
+                <c:pt idx="11">
+                  <c:v>54.327</c:v>
+                </c:pt>
+                <c:pt idx="12">
+                  <c:v>59.327</c:v>
+                </c:pt>
+                <c:pt idx="13">
+                  <c:v>64.327</c:v>
+                </c:pt>
+                <c:pt idx="14">
+                  <c:v>69.327</c:v>
+                </c:pt>
+                <c:pt idx="15">
+                  <c:v>74.212</c:v>
+                </c:pt>
+                <c:pt idx="16">
+                  <c:v>79.21199999999999</c:v>
+                </c:pt>
+                <c:pt idx="17">
+                  <c:v>84.212</c:v>
+                </c:pt>
+                <c:pt idx="18">
+                  <c:v>89.098</c:v>
+                </c:pt>
+                <c:pt idx="19">
+                  <c:v>94.098</c:v>
+                </c:pt>
+                <c:pt idx="20">
+                  <c:v>99.098</c:v>
+                </c:pt>
+                <c:pt idx="21">
+                  <c:v>104.098</c:v>
+                </c:pt>
+                <c:pt idx="22">
+                  <c:v>108.983</c:v>
+                </c:pt>
+                <c:pt idx="23">
+                  <c:v>113.98299999999999</c:v>
+                </c:pt>
+                <c:pt idx="24">
+                  <c:v>118.983</c:v>
+                </c:pt>
+                <c:pt idx="25">
+                  <c:v>123.929</c:v>
+                </c:pt>
+                <c:pt idx="26">
+                  <c:v>128.869</c:v>
+                </c:pt>
+                <c:pt idx="27">
+                  <c:v>133.869</c:v>
+                </c:pt>
+                <c:pt idx="28">
+                  <c:v>138.869</c:v>
+                </c:pt>
+                <c:pt idx="29">
+                  <c:v>143.754</c:v>
+                </c:pt>
+                <c:pt idx="30">
+                  <c:v>148.75400000000002</c:v>
+                </c:pt>
+                <c:pt idx="31">
+                  <c:v>153.754</c:v>
+                </c:pt>
+                <c:pt idx="32">
+                  <c:v>158.754</c:v>
+                </c:pt>
+                <c:pt idx="33">
+                  <c:v>163.64000000000001</c:v>
+                </c:pt>
+                <c:pt idx="34">
+                  <c:v>168.64000000000001</c:v>
+                </c:pt>
+                <c:pt idx="35">
+                  <c:v>173.64000000000001</c:v>
+                </c:pt>
+                <c:pt idx="36">
+                  <c:v>178.525</c:v>
+                </c:pt>
+                <c:pt idx="37">
+                  <c:v>183.525</c:v>
+                </c:pt>
+                <c:pt idx="38">
+                  <c:v>188.525</c:v>
+                </c:pt>
+                <c:pt idx="39">
+                  <c:v>193.525</c:v>
+                </c:pt>
+                <c:pt idx="40">
+                  <c:v>198.411</c:v>
+                </c:pt>
+                <c:pt idx="41">
+                  <c:v>203.411</c:v>
+                </c:pt>
+                <c:pt idx="42">
+                  <c:v>208.411</c:v>
+                </c:pt>
+                <c:pt idx="43">
+                  <c:v>213.296</c:v>
+                </c:pt>
+                <c:pt idx="44">
+                  <c:v>218.29600000000002</c:v>
+                </c:pt>
+                <c:pt idx="45">
+                  <c:v>223.296</c:v>
+                </c:pt>
+                <c:pt idx="46">
+                  <c:v>228.296</c:v>
+                </c:pt>
+                <c:pt idx="47">
+                  <c:v>233.18200000000002</c:v>
+                </c:pt>
+                <c:pt idx="48">
+                  <c:v>238.18200000000002</c:v>
+                </c:pt>
+                <c:pt idx="49">
+                  <c:v>243.182</c:v>
+                </c:pt>
+                <c:pt idx="50">
+                  <c:v>248.067</c:v>
+                </c:pt>
+                <c:pt idx="51">
+                  <c:v>253.067</c:v>
+                </c:pt>
+                <c:pt idx="52">
+                  <c:v>258.067</c:v>
+                </c:pt>
+                <c:pt idx="53">
+                  <c:v>263.067</c:v>
+                </c:pt>
+                <c:pt idx="54">
+                  <c:v>267.953</c:v>
+                </c:pt>
+                <c:pt idx="55">
+                  <c:v>272.953</c:v>
+                </c:pt>
+                <c:pt idx="56">
+                  <c:v>277.953</c:v>
+                </c:pt>
+                <c:pt idx="57">
+                  <c:v>282.95300000000003</c:v>
+                </c:pt>
+                <c:pt idx="58">
+                  <c:v>287.838</c:v>
+                </c:pt>
+                <c:pt idx="59">
+                  <c:v>292.838</c:v>
+                </c:pt>
+                <c:pt idx="60">
+                  <c:v>297.838</c:v>
+                </c:pt>
+                <c:pt idx="61">
+                  <c:v>302.724</c:v>
+                </c:pt>
+                <c:pt idx="62">
+                  <c:v>307.724</c:v>
+                </c:pt>
+                <c:pt idx="63">
+                  <c:v>312.724</c:v>
+                </c:pt>
+                <c:pt idx="64">
+                  <c:v>317.72400000000005</c:v>
+                </c:pt>
+                <c:pt idx="65">
+                  <c:v>322.609</c:v>
+                </c:pt>
+                <c:pt idx="66">
+                  <c:v>327.609</c:v>
+                </c:pt>
+                <c:pt idx="67">
+                  <c:v>332.609</c:v>
+                </c:pt>
+                <c:pt idx="68">
+                  <c:v>337.495</c:v>
+                </c:pt>
+                <c:pt idx="69">
+                  <c:v>342.495</c:v>
+                </c:pt>
+                <c:pt idx="70">
+                  <c:v>347.49499999999995</c:v>
+                </c:pt>
+                <c:pt idx="71">
+                  <c:v>352.495</c:v>
+                </c:pt>
+                <c:pt idx="72">
+                  <c:v>357.38</c:v>
+                </c:pt>
+                <c:pt idx="73">
+                  <c:v>362.38</c:v>
+                </c:pt>
+                <c:pt idx="74">
+                  <c:v>367.38</c:v>
+                </c:pt>
+                <c:pt idx="75">
+                  <c:v>372.26599999999996</c:v>
+                </c:pt>
+                <c:pt idx="76">
+                  <c:v>377.26599999999996</c:v>
+                </c:pt>
+                <c:pt idx="77">
+                  <c:v>382.26599999999996</c:v>
+                </c:pt>
+                <c:pt idx="78">
+                  <c:v>387.266</c:v>
+                </c:pt>
+                <c:pt idx="79">
+                  <c:v>392.151</c:v>
+                </c:pt>
+                <c:pt idx="80">
+                  <c:v>397.151</c:v>
+                </c:pt>
+                <c:pt idx="81">
+                  <c:v>402.151</c:v>
+                </c:pt>
+                <c:pt idx="82">
+                  <c:v>407.037</c:v>
+                </c:pt>
+                <c:pt idx="83">
+                  <c:v>412.037</c:v>
+                </c:pt>
+                <c:pt idx="84">
+                  <c:v>417.037</c:v>
+                </c:pt>
+                <c:pt idx="85">
+                  <c:v>422.03700000000003</c:v>
+                </c:pt>
+                <c:pt idx="86">
+                  <c:v>426.922</c:v>
+                </c:pt>
+                <c:pt idx="87">
+                  <c:v>431.922</c:v>
+                </c:pt>
+                <c:pt idx="88">
+                  <c:v>436.922</c:v>
+                </c:pt>
+                <c:pt idx="89">
+                  <c:v>441.92199999999997</c:v>
+                </c:pt>
+                <c:pt idx="90">
+                  <c:v>446.808</c:v>
+                </c:pt>
+                <c:pt idx="91">
+                  <c:v>451.808</c:v>
+                </c:pt>
+                <c:pt idx="92">
+                  <c:v>456.80800000000005</c:v>
+                </c:pt>
+                <c:pt idx="93">
+                  <c:v>461.693</c:v>
+                </c:pt>
+                <c:pt idx="94">
+                  <c:v>466.693</c:v>
+                </c:pt>
+                <c:pt idx="95">
+                  <c:v>471.693</c:v>
+                </c:pt>
+                <c:pt idx="96">
+                  <c:v>476.693</c:v>
+                </c:pt>
+                <c:pt idx="97">
+                  <c:v>481.579</c:v>
+                </c:pt>
+                <c:pt idx="98">
+                  <c:v>486.57899999999995</c:v>
+                </c:pt>
+                <c:pt idx="99">
+                  <c:v>491.57900000000006</c:v>
+                </c:pt>
+                <c:pt idx="100">
+                  <c:v>496.464</c:v>
+                </c:pt>
+                <c:pt idx="101">
+                  <c:v>501.46400000000006</c:v>
+                </c:pt>
+                <c:pt idx="102">
+                  <c:v>506.464</c:v>
+                </c:pt>
+                <c:pt idx="103">
+                  <c:v>511.46399999999994</c:v>
+                </c:pt>
+                <c:pt idx="104">
+                  <c:v>516.35</c:v>
+                </c:pt>
+                <c:pt idx="105">
+                  <c:v>521.35</c:v>
+                </c:pt>
+                <c:pt idx="106">
+                  <c:v>526.35</c:v>
+                </c:pt>
+                <c:pt idx="107">
+                  <c:v>531.235</c:v>
+                </c:pt>
+                <c:pt idx="108">
+                  <c:v>536.235</c:v>
+                </c:pt>
+                <c:pt idx="109">
+                  <c:v>541.235</c:v>
+                </c:pt>
+                <c:pt idx="110">
+                  <c:v>546.235</c:v>
+                </c:pt>
+                <c:pt idx="111">
+                  <c:v>551.121</c:v>
+                </c:pt>
+                <c:pt idx="112">
+                  <c:v>556.121</c:v>
+                </c:pt>
+                <c:pt idx="113">
+                  <c:v>561.121</c:v>
+                </c:pt>
+                <c:pt idx="114">
+                  <c:v>566.0379999999999</c:v>
+                </c:pt>
+                <c:pt idx="115">
+                  <c:v>571.006</c:v>
+                </c:pt>
+                <c:pt idx="116">
+                  <c:v>576.0060000000001</c:v>
+                </c:pt>
+                <c:pt idx="117">
+                  <c:v>581.006</c:v>
+                </c:pt>
+                <c:pt idx="118">
+                  <c:v>585.8919999999999</c:v>
+                </c:pt>
+                <c:pt idx="119">
+                  <c:v>590.892</c:v>
+                </c:pt>
+                <c:pt idx="120">
+                  <c:v>595.8919999999999</c:v>
+                </c:pt>
+                <c:pt idx="121">
+                  <c:v>600.892</c:v>
+                </c:pt>
+                <c:pt idx="122">
+                  <c:v>605.7769999999999</c:v>
+                </c:pt>
+                <c:pt idx="123">
+                  <c:v>610.777</c:v>
+                </c:pt>
+                <c:pt idx="124">
+                  <c:v>615.777</c:v>
+                </c:pt>
+                <c:pt idx="125">
+                  <c:v>620.663</c:v>
+                </c:pt>
+                <c:pt idx="126">
+                  <c:v>625.663</c:v>
+                </c:pt>
+                <c:pt idx="127">
+                  <c:v>630.663</c:v>
+                </c:pt>
+                <c:pt idx="128">
+                  <c:v>635.663</c:v>
+                </c:pt>
+                <c:pt idx="129">
+                  <c:v>640.548</c:v>
+                </c:pt>
+                <c:pt idx="130">
+                  <c:v>645.548</c:v>
+                </c:pt>
+                <c:pt idx="131">
+                  <c:v>650.548</c:v>
+                </c:pt>
+                <c:pt idx="132">
+                  <c:v>655.434</c:v>
+                </c:pt>
+                <c:pt idx="133">
+                  <c:v>660.4340000000001</c:v>
+                </c:pt>
+                <c:pt idx="134">
+                  <c:v>665.434</c:v>
+                </c:pt>
+                <c:pt idx="135">
+                  <c:v>670.434</c:v>
+                </c:pt>
+                <c:pt idx="136">
+                  <c:v>675.319</c:v>
+                </c:pt>
+                <c:pt idx="137">
+                  <c:v>680.319</c:v>
+                </c:pt>
+                <c:pt idx="138">
+                  <c:v>685.3190000000001</c:v>
+                </c:pt>
+                <c:pt idx="139">
+                  <c:v>690.205</c:v>
+                </c:pt>
+                <c:pt idx="140">
+                  <c:v>695.2049999999999</c:v>
+                </c:pt>
+                <c:pt idx="141">
+                  <c:v>700.205</c:v>
+                </c:pt>
+                <c:pt idx="142">
+                  <c:v>705.2049999999999</c:v>
+                </c:pt>
+                <c:pt idx="143">
+                  <c:v>710.09</c:v>
+                </c:pt>
+                <c:pt idx="144">
+                  <c:v>715.09</c:v>
+                </c:pt>
+                <c:pt idx="145">
+                  <c:v>720.09</c:v>
+                </c:pt>
+                <c:pt idx="146">
+                  <c:v>725.09</c:v>
+                </c:pt>
+                <c:pt idx="147">
+                  <c:v>729.976</c:v>
+                </c:pt>
+                <c:pt idx="148">
+                  <c:v>734.976</c:v>
+                </c:pt>
+                <c:pt idx="149">
+                  <c:v>739.976</c:v>
+                </c:pt>
+                <c:pt idx="150">
+                  <c:v>744.861</c:v>
+                </c:pt>
+                <c:pt idx="151">
+                  <c:v>749.861</c:v>
+                </c:pt>
+                <c:pt idx="152">
+                  <c:v>754.8610000000001</c:v>
+                </c:pt>
+                <c:pt idx="153">
+                  <c:v>759.861</c:v>
+                </c:pt>
+                <c:pt idx="154">
+                  <c:v>764.747</c:v>
+                </c:pt>
+                <c:pt idx="155">
+                  <c:v>769.7470000000001</c:v>
+                </c:pt>
+                <c:pt idx="156">
+                  <c:v>774.747</c:v>
+                </c:pt>
+                <c:pt idx="157">
+                  <c:v>779.632</c:v>
+                </c:pt>
+                <c:pt idx="158">
+                  <c:v>784.6320000000001</c:v>
+                </c:pt>
+                <c:pt idx="159">
+                  <c:v>789.632</c:v>
+                </c:pt>
+                <c:pt idx="160">
+                  <c:v>794.6320000000001</c:v>
+                </c:pt>
+                <c:pt idx="161">
+                  <c:v>799.518</c:v>
+                </c:pt>
+                <c:pt idx="162">
+                  <c:v>804.5179999999999</c:v>
+                </c:pt>
+                <c:pt idx="163">
+                  <c:v>809.518</c:v>
+                </c:pt>
+                <c:pt idx="164">
+                  <c:v>814.403</c:v>
+                </c:pt>
+                <c:pt idx="165">
+                  <c:v>819.403</c:v>
+                </c:pt>
+                <c:pt idx="166">
+                  <c:v>824.403</c:v>
+                </c:pt>
+                <c:pt idx="167">
+                  <c:v>829.403</c:v>
+                </c:pt>
+                <c:pt idx="168">
+                  <c:v>834.289</c:v>
+                </c:pt>
+                <c:pt idx="169">
+                  <c:v>839.289</c:v>
+                </c:pt>
+                <c:pt idx="170">
+                  <c:v>844.289</c:v>
+                </c:pt>
+                <c:pt idx="171">
+                  <c:v>849.174</c:v>
+                </c:pt>
+                <c:pt idx="172">
+                  <c:v>854.1740000000001</c:v>
+                </c:pt>
+                <c:pt idx="173">
+                  <c:v>859.174</c:v>
+                </c:pt>
+                <c:pt idx="174">
+                  <c:v>864.1740000000001</c:v>
+                </c:pt>
+                <c:pt idx="175">
+                  <c:v>869.0600000000001</c:v>
+                </c:pt>
+                <c:pt idx="176">
+                  <c:v>874.06</c:v>
+                </c:pt>
+                <c:pt idx="177">
+                  <c:v>879.0600000000001</c:v>
+                </c:pt>
+                <c:pt idx="178">
+                  <c:v>884.06</c:v>
+                </c:pt>
+                <c:pt idx="179">
+                  <c:v>888.945</c:v>
+                </c:pt>
+                <c:pt idx="180">
+                  <c:v>893.945</c:v>
+                </c:pt>
+                <c:pt idx="181">
+                  <c:v>898.9449999999999</c:v>
+                </c:pt>
+                <c:pt idx="182">
+                  <c:v>903.831</c:v>
+                </c:pt>
+                <c:pt idx="183">
+                  <c:v>908.831</c:v>
+                </c:pt>
+                <c:pt idx="184">
+                  <c:v>913.831</c:v>
+                </c:pt>
+                <c:pt idx="185">
+                  <c:v>918.831</c:v>
+                </c:pt>
+                <c:pt idx="186">
+                  <c:v>923.716</c:v>
+                </c:pt>
+                <c:pt idx="187">
+                  <c:v>928.716</c:v>
+                </c:pt>
+                <c:pt idx="188">
+                  <c:v>933.716</c:v>
+                </c:pt>
+                <c:pt idx="189">
+                  <c:v>938.602</c:v>
+                </c:pt>
+                <c:pt idx="190">
+                  <c:v>943.602</c:v>
+                </c:pt>
+                <c:pt idx="191">
+                  <c:v>948.602</c:v>
+                </c:pt>
+                <c:pt idx="192">
+                  <c:v>953.602</c:v>
+                </c:pt>
+                <c:pt idx="193">
+                  <c:v>958.4870000000001</c:v>
+                </c:pt>
+                <c:pt idx="194">
+                  <c:v>963.4870000000001</c:v>
+                </c:pt>
+                <c:pt idx="195">
+                  <c:v>968.487</c:v>
+                </c:pt>
+                <c:pt idx="196">
+                  <c:v>973.3729999999999</c:v>
+                </c:pt>
+                <c:pt idx="197">
+                  <c:v>978.3729999999999</c:v>
+                </c:pt>
+                <c:pt idx="198">
+                  <c:v>983.373</c:v>
+                </c:pt>
+                <c:pt idx="199">
+                  <c:v>988.373</c:v>
+                </c:pt>
+                <c:pt idx="200">
+                  <c:v>993.258</c:v>
+                </c:pt>
+                <c:pt idx="201">
+                  <c:v>998.2579999999999</c:v>
+                </c:pt>
+                <c:pt idx="202">
+                  <c:v>1003.2580000000002</c:v>
+                </c:pt>
+                <c:pt idx="203">
+                  <c:v>1008.2040000000001</c:v>
+                </c:pt>
+                <c:pt idx="204">
+                  <c:v>1013.144</c:v>
+                </c:pt>
+                <c:pt idx="205">
+                  <c:v>1018.144</c:v>
+                </c:pt>
+                <c:pt idx="206">
+                  <c:v>1023.1439999999999</c:v>
+                </c:pt>
+                <c:pt idx="207">
+                  <c:v>1028.029</c:v>
+                </c:pt>
+                <c:pt idx="208">
+                  <c:v>1033.029</c:v>
+                </c:pt>
+                <c:pt idx="209">
+                  <c:v>1038.029</c:v>
+                </c:pt>
+                <c:pt idx="210">
+                  <c:v>1043.029</c:v>
+                </c:pt>
+                <c:pt idx="211">
+                  <c:v>1047.915</c:v>
+                </c:pt>
+                <c:pt idx="212">
+                  <c:v>1052.915</c:v>
+                </c:pt>
+                <c:pt idx="213">
+                  <c:v>1057.915</c:v>
+                </c:pt>
+                <c:pt idx="214">
+                  <c:v>1062.8</c:v>
+                </c:pt>
+                <c:pt idx="215">
+                  <c:v>1067.8</c:v>
+                </c:pt>
+                <c:pt idx="216">
+                  <c:v>1072.8</c:v>
+                </c:pt>
+                <c:pt idx="217">
+                  <c:v>1077.8000000000002</c:v>
+                </c:pt>
+                <c:pt idx="218">
+                  <c:v>1082.6860000000001</c:v>
+                </c:pt>
+                <c:pt idx="219">
+                  <c:v>1087.686</c:v>
+                </c:pt>
+                <c:pt idx="220">
+                  <c:v>1092.686</c:v>
+                </c:pt>
+                <c:pt idx="221">
+                  <c:v>1097.571</c:v>
+                </c:pt>
+                <c:pt idx="222">
+                  <c:v>1102.5710000000001</c:v>
+                </c:pt>
+                <c:pt idx="223">
+                  <c:v>1107.5710000000001</c:v>
+                </c:pt>
+                <c:pt idx="224">
+                  <c:v>1112.571</c:v>
+                </c:pt>
+                <c:pt idx="225">
+                  <c:v>1117.4569999999999</c:v>
+                </c:pt>
+                <c:pt idx="226">
+                  <c:v>1122.4569999999999</c:v>
+                </c:pt>
+                <c:pt idx="227">
+                  <c:v>1127.457</c:v>
+                </c:pt>
+                <c:pt idx="228">
+                  <c:v>1132.342</c:v>
+                </c:pt>
+                <c:pt idx="229">
+                  <c:v>1137.342</c:v>
+                </c:pt>
+                <c:pt idx="230">
+                  <c:v>1142.3419999999999</c:v>
+                </c:pt>
+                <c:pt idx="231">
+                  <c:v>1147.3419999999999</c:v>
+                </c:pt>
+                <c:pt idx="232">
+                  <c:v>1152.228</c:v>
+                </c:pt>
+                <c:pt idx="233">
+                  <c:v>1157.228</c:v>
+                </c:pt>
+                <c:pt idx="234">
+                  <c:v>1162.228</c:v>
+                </c:pt>
+                <c:pt idx="235">
+                  <c:v>1167.2279999999998</c:v>
+                </c:pt>
+                <c:pt idx="236">
+                  <c:v>1172.1129999999998</c:v>
+                </c:pt>
+                <c:pt idx="237">
+                  <c:v>1177.113</c:v>
+                </c:pt>
+                <c:pt idx="238">
+                  <c:v>1182.113</c:v>
+                </c:pt>
+                <c:pt idx="239">
+                  <c:v>1186.999</c:v>
+                </c:pt>
+                <c:pt idx="240">
+                  <c:v>1191.999</c:v>
+                </c:pt>
+                <c:pt idx="241">
+                  <c:v>1196.9989999999998</c:v>
+                </c:pt>
+                <c:pt idx="242">
+                  <c:v>1201.999</c:v>
+                </c:pt>
+                <c:pt idx="243">
+                  <c:v>1206.884</c:v>
+                </c:pt>
+                <c:pt idx="244">
+                  <c:v>1211.884</c:v>
+                </c:pt>
+                <c:pt idx="245">
+                  <c:v>1216.884</c:v>
+                </c:pt>
+                <c:pt idx="246">
+                  <c:v>1221.77</c:v>
+                </c:pt>
+                <c:pt idx="247">
+                  <c:v>1226.77</c:v>
+                </c:pt>
+                <c:pt idx="248">
+                  <c:v>1231.77</c:v>
+                </c:pt>
+                <c:pt idx="249">
+                  <c:v>1236.77</c:v>
+                </c:pt>
+                <c:pt idx="250">
+                  <c:v>1241.655</c:v>
+                </c:pt>
+                <c:pt idx="251">
+                  <c:v>1246.6550000000002</c:v>
+                </c:pt>
+                <c:pt idx="252">
+                  <c:v>1251.655</c:v>
+                </c:pt>
+                <c:pt idx="253">
+                  <c:v>1256.541</c:v>
+                </c:pt>
+                <c:pt idx="254">
+                  <c:v>1261.541</c:v>
+                </c:pt>
+                <c:pt idx="255">
+                  <c:v>1266.541</c:v>
+                </c:pt>
+                <c:pt idx="256">
+                  <c:v>1271.5410000000002</c:v>
+                </c:pt>
+                <c:pt idx="257">
+                  <c:v>1276.4260000000002</c:v>
+                </c:pt>
+                <c:pt idx="258">
+                  <c:v>1281.426</c:v>
+                </c:pt>
+                <c:pt idx="259">
+                  <c:v>1286.426</c:v>
+                </c:pt>
+                <c:pt idx="260">
+                  <c:v>1291.312</c:v>
+                </c:pt>
+                <c:pt idx="261">
+                  <c:v>1296.3120000000001</c:v>
+                </c:pt>
+                <c:pt idx="262">
+                  <c:v>1301.3120000000001</c:v>
+                </c:pt>
+                <c:pt idx="263">
+                  <c:v>1306.312</c:v>
+                </c:pt>
+                <c:pt idx="264">
+                  <c:v>1311.197</c:v>
+                </c:pt>
+                <c:pt idx="265">
+                  <c:v>1316.197</c:v>
+                </c:pt>
+                <c:pt idx="266">
+                  <c:v>1321.1970000000001</c:v>
+                </c:pt>
+                <c:pt idx="267">
+                  <c:v>1326.1970000000001</c:v>
+                </c:pt>
+                <c:pt idx="268">
+                  <c:v>1331.083</c:v>
+                </c:pt>
+                <c:pt idx="269">
+                  <c:v>1336.0829999999999</c:v>
+                </c:pt>
+                <c:pt idx="270">
+                  <c:v>1341.0829999999999</c:v>
+                </c:pt>
+                <c:pt idx="271">
+                  <c:v>1345.968</c:v>
+                </c:pt>
+                <c:pt idx="272">
+                  <c:v>1350.968</c:v>
+                </c:pt>
+                <c:pt idx="273">
+                  <c:v>1355.968</c:v>
+                </c:pt>
+                <c:pt idx="274">
+                  <c:v>1360.9679999999998</c:v>
+                </c:pt>
+                <c:pt idx="275">
+                  <c:v>1365.8539999999998</c:v>
+                </c:pt>
+                <c:pt idx="276">
+                  <c:v>1370.854</c:v>
+                </c:pt>
+                <c:pt idx="277">
+                  <c:v>1375.854</c:v>
+                </c:pt>
+                <c:pt idx="278">
+                  <c:v>1380.739</c:v>
+                </c:pt>
+                <c:pt idx="279">
+                  <c:v>1385.739</c:v>
+                </c:pt>
+                <c:pt idx="280">
+                  <c:v>1390.739</c:v>
+                </c:pt>
+                <c:pt idx="281">
+                  <c:v>1395.739</c:v>
+                </c:pt>
+                <c:pt idx="282">
+                  <c:v>1400.625</c:v>
+                </c:pt>
+                <c:pt idx="283">
+                  <c:v>1405.625</c:v>
+                </c:pt>
+                <c:pt idx="284">
+                  <c:v>1410.625</c:v>
+                </c:pt>
+                <c:pt idx="285">
+                  <c:v>1415.51</c:v>
+                </c:pt>
+                <c:pt idx="286">
+                  <c:v>1420.51</c:v>
+                </c:pt>
+                <c:pt idx="287">
+                  <c:v>1425.51</c:v>
+                </c:pt>
+                <c:pt idx="288">
+                  <c:v>1430.51</c:v>
+                </c:pt>
+                <c:pt idx="289">
+                  <c:v>1435.396</c:v>
+                </c:pt>
+                <c:pt idx="290">
+                  <c:v>1440.396</c:v>
+                </c:pt>
+                <c:pt idx="291">
+                  <c:v>1445.396</c:v>
+                </c:pt>
+                <c:pt idx="292">
+                  <c:v>1450.313</c:v>
+                </c:pt>
+                <c:pt idx="293">
+                  <c:v>1455.281</c:v>
+                </c:pt>
+                <c:pt idx="294">
+                  <c:v>1460.281</c:v>
+                </c:pt>
+                <c:pt idx="295">
+                  <c:v>1465.2810000000002</c:v>
+                </c:pt>
+                <c:pt idx="296">
+                  <c:v>1470.1670000000001</c:v>
+                </c:pt>
+                <c:pt idx="297">
+                  <c:v>1475.167</c:v>
+                </c:pt>
+                <c:pt idx="298">
+                  <c:v>1480.167</c:v>
+                </c:pt>
+                <c:pt idx="299">
+                  <c:v>1485.167</c:v>
+                </c:pt>
+                <c:pt idx="300">
+                  <c:v>1490.0520000000001</c:v>
+                </c:pt>
+                <c:pt idx="301">
+                  <c:v>1495.0520000000001</c:v>
+                </c:pt>
+                <c:pt idx="302">
+                  <c:v>1500.052</c:v>
+                </c:pt>
+                <c:pt idx="303">
+                  <c:v>1504.9379999999999</c:v>
+                </c:pt>
+                <c:pt idx="304">
+                  <c:v>1509.9379999999999</c:v>
+                </c:pt>
+                <c:pt idx="305">
+                  <c:v>1514.938</c:v>
+                </c:pt>
+                <c:pt idx="306">
+                  <c:v>1519.938</c:v>
+                </c:pt>
+                <c:pt idx="307">
+                  <c:v>1524.823</c:v>
+                </c:pt>
+                <c:pt idx="308">
+                  <c:v>1529.8229999999999</c:v>
+                </c:pt>
+                <c:pt idx="309">
+                  <c:v>1534.8229999999999</c:v>
+                </c:pt>
+                <c:pt idx="310">
+                  <c:v>1539.709</c:v>
+                </c:pt>
+                <c:pt idx="311">
+                  <c:v>1544.709</c:v>
+                </c:pt>
+                <c:pt idx="312">
+                  <c:v>1549.709</c:v>
+                </c:pt>
+                <c:pt idx="313">
+                  <c:v>1554.709</c:v>
+                </c:pt>
+                <c:pt idx="314">
+                  <c:v>1559.5939999999998</c:v>
+                </c:pt>
+                <c:pt idx="315">
+                  <c:v>1564.594</c:v>
+                </c:pt>
+                <c:pt idx="316">
+                  <c:v>1569.594</c:v>
+                </c:pt>
+                <c:pt idx="317">
+                  <c:v>1574.48</c:v>
+                </c:pt>
+                <c:pt idx="318">
+                  <c:v>1579.48</c:v>
+                </c:pt>
+                <c:pt idx="319">
+                  <c:v>1584.48</c:v>
+                </c:pt>
+                <c:pt idx="320">
+                  <c:v>1589.48</c:v>
+                </c:pt>
+                <c:pt idx="321">
+                  <c:v>1594.365</c:v>
+                </c:pt>
+                <c:pt idx="322">
+                  <c:v>1599.365</c:v>
+                </c:pt>
+                <c:pt idx="323">
+                  <c:v>1604.365</c:v>
+                </c:pt>
+                <c:pt idx="324">
+                  <c:v>1609.365</c:v>
+                </c:pt>
+                <c:pt idx="325">
+                  <c:v>1614.251</c:v>
+                </c:pt>
+                <c:pt idx="326">
+                  <c:v>1619.251</c:v>
+                </c:pt>
+                <c:pt idx="327">
+                  <c:v>1624.251</c:v>
+                </c:pt>
+                <c:pt idx="328">
+                  <c:v>1629.136</c:v>
+                </c:pt>
+                <c:pt idx="329">
+                  <c:v>1634.1360000000002</c:v>
+                </c:pt>
+                <c:pt idx="330">
+                  <c:v>1639.136</c:v>
+                </c:pt>
+                <c:pt idx="331">
+                  <c:v>1644.136</c:v>
+                </c:pt>
+                <c:pt idx="332">
+                  <c:v>1649.022</c:v>
+                </c:pt>
+                <c:pt idx="333">
+                  <c:v>1654.022</c:v>
+                </c:pt>
+                <c:pt idx="334">
+                  <c:v>1659.0220000000002</c:v>
+                </c:pt>
+                <c:pt idx="335">
+                  <c:v>1663.9070000000002</c:v>
+                </c:pt>
+                <c:pt idx="336">
+                  <c:v>1668.907</c:v>
+                </c:pt>
+                <c:pt idx="337">
+                  <c:v>1673.907</c:v>
+                </c:pt>
+                <c:pt idx="338">
+                  <c:v>1678.907</c:v>
+                </c:pt>
+                <c:pt idx="339">
+                  <c:v>1683.7930000000001</c:v>
+                </c:pt>
+                <c:pt idx="340">
+                  <c:v>1688.7930000000001</c:v>
+                </c:pt>
+                <c:pt idx="341">
+                  <c:v>1693.793</c:v>
+                </c:pt>
+                <c:pt idx="342">
+                  <c:v>1698.6779999999999</c:v>
+                </c:pt>
+                <c:pt idx="343">
+                  <c:v>1703.6779999999999</c:v>
+                </c:pt>
+                <c:pt idx="344">
+                  <c:v>1708.678</c:v>
+                </c:pt>
+                <c:pt idx="345">
+                  <c:v>1713.678</c:v>
+                </c:pt>
+                <c:pt idx="346">
+                  <c:v>1718.564</c:v>
+                </c:pt>
+                <c:pt idx="347">
+                  <c:v>1723.5639999999999</c:v>
+                </c:pt>
+                <c:pt idx="348">
+                  <c:v>1728.5639999999999</c:v>
+                </c:pt>
+                <c:pt idx="349">
+                  <c:v>1733.449</c:v>
+                </c:pt>
+                <c:pt idx="350">
+                  <c:v>1738.449</c:v>
+                </c:pt>
+                <c:pt idx="351">
+                  <c:v>1743.449</c:v>
+                </c:pt>
+                <c:pt idx="352">
+                  <c:v>1748.4489999999998</c:v>
+                </c:pt>
+                <c:pt idx="353">
+                  <c:v>1753.3349999999998</c:v>
+                </c:pt>
+                <c:pt idx="354">
+                  <c:v>1758.335</c:v>
+                </c:pt>
+                <c:pt idx="355">
+                  <c:v>1763.335</c:v>
+                </c:pt>
+                <c:pt idx="356">
+                  <c:v>1768.335</c:v>
+                </c:pt>
+                <c:pt idx="357">
+                  <c:v>1773.22</c:v>
+                </c:pt>
+                <c:pt idx="358">
+                  <c:v>1778.22</c:v>
+                </c:pt>
+                <c:pt idx="359">
+                  <c:v>1783.22</c:v>
+                </c:pt>
+                <c:pt idx="360">
+                  <c:v>1788.106</c:v>
+                </c:pt>
+                <c:pt idx="361">
+                  <c:v>1793.106</c:v>
+                </c:pt>
+                <c:pt idx="362">
+                  <c:v>1798.106</c:v>
+                </c:pt>
+                <c:pt idx="363">
+                  <c:v>1803.106</c:v>
+                </c:pt>
+                <c:pt idx="364">
+                  <c:v>1807.991</c:v>
+                </c:pt>
+                <c:pt idx="365">
+                  <c:v>1812.991</c:v>
+                </c:pt>
+                <c:pt idx="366">
+                  <c:v>1817.991</c:v>
+                </c:pt>
+                <c:pt idx="367">
+                  <c:v>1822.877</c:v>
+                </c:pt>
+                <c:pt idx="368">
+                  <c:v>1827.877</c:v>
+                </c:pt>
+                <c:pt idx="369">
+                  <c:v>1832.877</c:v>
+                </c:pt>
+                <c:pt idx="370">
+                  <c:v>1837.877</c:v>
+                </c:pt>
+                <c:pt idx="371">
+                  <c:v>1842.762</c:v>
+                </c:pt>
+                <c:pt idx="372">
+                  <c:v>1847.762</c:v>
+                </c:pt>
+                <c:pt idx="373">
+                  <c:v>1852.7620000000002</c:v>
+                </c:pt>
+                <c:pt idx="374">
+                  <c:v>1857.6480000000001</c:v>
+                </c:pt>
+                <c:pt idx="375">
+                  <c:v>1862.648</c:v>
+                </c:pt>
+                <c:pt idx="376">
+                  <c:v>1867.648</c:v>
+                </c:pt>
+                <c:pt idx="377">
+                  <c:v>1872.648</c:v>
+                </c:pt>
+                <c:pt idx="378">
+                  <c:v>1877.5330000000001</c:v>
+                </c:pt>
+                <c:pt idx="379">
+                  <c:v>1882.5330000000001</c:v>
+                </c:pt>
+                <c:pt idx="380">
+                  <c:v>1887.533</c:v>
+                </c:pt>
+                <c:pt idx="381">
+                  <c:v>1892.479</c:v>
+                </c:pt>
+                <c:pt idx="382">
+                  <c:v>1897.4189999999999</c:v>
+                </c:pt>
+                <c:pt idx="383">
+                  <c:v>1902.419</c:v>
+                </c:pt>
+                <c:pt idx="384">
+                  <c:v>1907.419</c:v>
+                </c:pt>
+                <c:pt idx="385">
+                  <c:v>1912.304</c:v>
+                </c:pt>
+                <c:pt idx="386">
+                  <c:v>1917.3039999999999</c:v>
+                </c:pt>
+                <c:pt idx="387">
+                  <c:v>1922.3039999999999</c:v>
+                </c:pt>
+                <c:pt idx="388">
+                  <c:v>1927.3039999999999</c:v>
+                </c:pt>
+                <c:pt idx="389">
+                  <c:v>1932.19</c:v>
+                </c:pt>
+                <c:pt idx="390">
+                  <c:v>1937.19</c:v>
+                </c:pt>
+                <c:pt idx="391">
+                  <c:v>1942.19</c:v>
+                </c:pt>
+                <c:pt idx="392">
+                  <c:v>1947.0749999999998</c:v>
+                </c:pt>
+                <c:pt idx="393">
+                  <c:v>1952.0749999999998</c:v>
+                </c:pt>
+                <c:pt idx="394">
+                  <c:v>1957.0749999999998</c:v>
+                </c:pt>
+                <c:pt idx="395">
+                  <c:v>1962.0750000000003</c:v>
+                </c:pt>
+                <c:pt idx="396">
+                  <c:v>1966.961</c:v>
+                </c:pt>
+                <c:pt idx="397">
+                  <c:v>1971.961</c:v>
+                </c:pt>
+                <c:pt idx="398">
+                  <c:v>1976.9609999999998</c:v>
+                </c:pt>
+                <c:pt idx="399">
+                  <c:v>1981.8459999999998</c:v>
+                </c:pt>
+                <c:pt idx="400">
+                  <c:v>1986.8460000000002</c:v>
+                </c:pt>
+                <c:pt idx="401">
+                  <c:v>1991.8460000000002</c:v>
+                </c:pt>
+                <c:pt idx="402">
+                  <c:v>1996.846</c:v>
+                </c:pt>
+              </c:numCache>
+            </c:numRef>
+          </c:xVal>
+          <c:yVal>
+            <c:numRef>
+              <c:f>Sheet1!$B$2:$B$404</c:f>
+              <c:numCache>
+                <c:formatCode>General</c:formatCode>
+                <c:ptCount val="403"/>
+                <c:pt idx="0">
+                  <c:v>0.850577083</c:v>
+                </c:pt>
+                <c:pt idx="1">
+                  <c:v>0.860988905</c:v>
+                </c:pt>
+                <c:pt idx="2">
+                  <c:v>0.869249906</c:v>
+                </c:pt>
+                <c:pt idx="3">
+                  <c:v>0.874872644</c:v>
+                </c:pt>
+                <c:pt idx="4">
+                  <c:v>0.87880258</c:v>
+                </c:pt>
+                <c:pt idx="5">
+                  <c:v>0.881770475</c:v>
+                </c:pt>
+                <c:pt idx="6">
+                  <c:v>0.884189691</c:v>
+                </c:pt>
+                <c:pt idx="7">
+                  <c:v>0.886215609</c:v>
+                </c:pt>
+                <c:pt idx="8">
+                  <c:v>0.885826502</c:v>
+                </c:pt>
+                <c:pt idx="9">
+                  <c:v>0.876169828</c:v>
+                </c:pt>
+                <c:pt idx="10">
+                  <c:v>0.870178798</c:v>
+                </c:pt>
+                <c:pt idx="11">
+                  <c:v>0.86655537</c:v>
+                </c:pt>
+                <c:pt idx="12">
+                  <c:v>0.864234595</c:v>
+                </c:pt>
+                <c:pt idx="13">
+                  <c:v>0.862759371</c:v>
+                </c:pt>
+                <c:pt idx="14">
+                  <c:v>0.861795943</c:v>
+                </c:pt>
+                <c:pt idx="15">
+                  <c:v>0.869596662</c:v>
+                </c:pt>
+                <c:pt idx="16">
+                  <c:v>0.878319192</c:v>
+                </c:pt>
+                <c:pt idx="17">
+                  <c:v>0.872479169</c:v>
+                </c:pt>
+                <c:pt idx="18">
+                  <c:v>0.868832111</c:v>
+                </c:pt>
+                <c:pt idx="19">
+                  <c:v>0.86648488</c:v>
+                </c:pt>
+                <c:pt idx="20">
+                  <c:v>0.865013105</c:v>
+                </c:pt>
+                <c:pt idx="21">
+                  <c:v>0.864086592</c:v>
+                </c:pt>
+                <c:pt idx="22">
+                  <c:v>0.870434191</c:v>
+                </c:pt>
+                <c:pt idx="23">
+                  <c:v>0.879635343</c:v>
+                </c:pt>
+                <c:pt idx="24">
+                  <c:v>0.885919943</c:v>
+                </c:pt>
+                <c:pt idx="25">
+                  <c:v>0.879593443</c:v>
+                </c:pt>
+                <c:pt idx="26">
+                  <c:v>0.874561038</c:v>
+                </c:pt>
+                <c:pt idx="27">
+                  <c:v>0.87137629</c:v>
+                </c:pt>
+                <c:pt idx="28">
+                  <c:v>0.869393295</c:v>
+                </c:pt>
+                <c:pt idx="29">
+                  <c:v>0.873717686</c:v>
+                </c:pt>
+                <c:pt idx="30">
+                  <c:v>0.882972107</c:v>
+                </c:pt>
+                <c:pt idx="31">
+                  <c:v>0.88917838</c:v>
+                </c:pt>
+                <c:pt idx="32">
+                  <c:v>0.892685921</c:v>
+                </c:pt>
+                <c:pt idx="33">
+                  <c:v>0.88451785</c:v>
+                </c:pt>
+                <c:pt idx="34">
+                  <c:v>0.879210653</c:v>
+                </c:pt>
+                <c:pt idx="35">
+                  <c:v>0.875921734</c:v>
+                </c:pt>
+                <c:pt idx="36">
+                  <c:v>0.87795675</c:v>
+                </c:pt>
+                <c:pt idx="37">
+                  <c:v>0.887240983</c:v>
+                </c:pt>
+                <c:pt idx="38">
+                  <c:v>0.89354859</c:v>
+                </c:pt>
+                <c:pt idx="39">
+                  <c:v>0.897908153</c:v>
+                </c:pt>
+                <c:pt idx="40">
+                  <c:v>0.894878618</c:v>
+                </c:pt>
+                <c:pt idx="41">
+                  <c:v>0.887579354</c:v>
+                </c:pt>
+                <c:pt idx="42">
+                  <c:v>0.883119115</c:v>
+                </c:pt>
+                <c:pt idx="43">
+                  <c:v>0.882812635</c:v>
+                </c:pt>
+                <c:pt idx="44">
+                  <c:v>0.892041621</c:v>
+                </c:pt>
+                <c:pt idx="45">
+                  <c:v>0.898410556</c:v>
+                </c:pt>
+                <c:pt idx="46">
+                  <c:v>0.902780648</c:v>
+                </c:pt>
+                <c:pt idx="47">
+                  <c:v>0.904277964</c:v>
+                </c:pt>
+                <c:pt idx="48">
+                  <c:v>0.895533601</c:v>
+                </c:pt>
+                <c:pt idx="49">
+                  <c:v>0.89000812</c:v>
+                </c:pt>
+                <c:pt idx="50">
+                  <c:v>0.887455086</c:v>
+                </c:pt>
+                <c:pt idx="51">
+                  <c:v>0.897012956</c:v>
+                </c:pt>
+                <c:pt idx="52">
+                  <c:v>0.90341573</c:v>
+                </c:pt>
+                <c:pt idx="53">
+                  <c:v>0.907872904</c:v>
+                </c:pt>
+                <c:pt idx="54">
+                  <c:v>0.911146104</c:v>
+                </c:pt>
+                <c:pt idx="55">
+                  <c:v>0.902268047</c:v>
+                </c:pt>
+                <c:pt idx="56">
+                  <c:v>0.896295993</c:v>
+                </c:pt>
+                <c:pt idx="57">
+                  <c:v>0.892570863</c:v>
+                </c:pt>
+                <c:pt idx="58">
+                  <c:v>0.901570157</c:v>
+                </c:pt>
+                <c:pt idx="59">
+                  <c:v>0.908217114</c:v>
+                </c:pt>
+                <c:pt idx="60">
+                  <c:v>0.912888946</c:v>
+                </c:pt>
+                <c:pt idx="61">
+                  <c:v>0.916288121</c:v>
+                </c:pt>
+                <c:pt idx="62">
+                  <c:v>0.907599603</c:v>
+                </c:pt>
+                <c:pt idx="63">
+                  <c:v>0.901634595</c:v>
+                </c:pt>
+                <c:pt idx="64">
+                  <c:v>0.897853367</c:v>
+                </c:pt>
+                <c:pt idx="65">
+                  <c:v>0.905712345</c:v>
+                </c:pt>
+                <c:pt idx="66">
+                  <c:v>0.912775915</c:v>
+                </c:pt>
+                <c:pt idx="67">
+                  <c:v>0.917690514</c:v>
+                </c:pt>
+                <c:pt idx="68">
+                  <c:v>0.920509683</c:v>
+                </c:pt>
+                <c:pt idx="69">
+                  <c:v>0.911572423</c:v>
+                </c:pt>
+                <c:pt idx="70">
+                  <c:v>0.905965761</c:v>
+                </c:pt>
+                <c:pt idx="71">
+                  <c:v>0.902463723</c:v>
+                </c:pt>
+                <c:pt idx="72">
+                  <c:v>0.90919101</c:v>
+                </c:pt>
+                <c:pt idx="73">
+                  <c:v>0.916776739</c:v>
+                </c:pt>
+                <c:pt idx="74">
+                  <c:v>0.922010535</c:v>
+                </c:pt>
+                <c:pt idx="75">
+                  <c:v>0.922270901</c:v>
+                </c:pt>
+                <c:pt idx="76">
+                  <c:v>0.91439226</c:v>
+                </c:pt>
+                <c:pt idx="77">
+                  <c:v>0.909490783</c:v>
+                </c:pt>
+                <c:pt idx="78">
+                  <c:v>0.906423746</c:v>
+                </c:pt>
+                <c:pt idx="79">
+                  <c:v>0.911923942</c:v>
+                </c:pt>
+                <c:pt idx="80">
+                  <c:v>0.920122256</c:v>
+                </c:pt>
+                <c:pt idx="81">
+                  <c:v>0.92575764</c:v>
+                </c:pt>
+                <c:pt idx="82">
+                  <c:v>0.922947439</c:v>
+                </c:pt>
+                <c:pt idx="83">
+                  <c:v>0.916350462</c:v>
+                </c:pt>
+                <c:pt idx="84">
+                  <c:v>0.912222933</c:v>
+                </c:pt>
+                <c:pt idx="85">
+                  <c:v>0.909646404</c:v>
+                </c:pt>
+                <c:pt idx="86">
+                  <c:v>0.91404779</c:v>
+                </c:pt>
+                <c:pt idx="87">
+                  <c:v>0.922911114</c:v>
+                </c:pt>
+                <c:pt idx="88">
+                  <c:v>0.928988697</c:v>
+                </c:pt>
+                <c:pt idx="89">
+                  <c:v>0.922715947</c:v>
+                </c:pt>
+                <c:pt idx="90">
+                  <c:v>0.917595329</c:v>
+                </c:pt>
+                <c:pt idx="91">
+                  <c:v>0.914306014</c:v>
+                </c:pt>
+                <c:pt idx="92">
+                  <c:v>0.912260587</c:v>
+                </c:pt>
+                <c:pt idx="93">
+                  <c:v>0.915518839</c:v>
+                </c:pt>
+                <c:pt idx="94">
+                  <c:v>0.925094157</c:v>
+                </c:pt>
+                <c:pt idx="95">
+                  <c:v>0.928493548</c:v>
+                </c:pt>
+                <c:pt idx="96">
+                  <c:v>0.922157432</c:v>
+                </c:pt>
+                <c:pt idx="97">
+                  <c:v>0.918294326</c:v>
+                </c:pt>
+                <c:pt idx="98">
+                  <c:v>0.915812123</c:v>
+                </c:pt>
+                <c:pt idx="99">
+                  <c:v>0.914264052</c:v>
+                </c:pt>
+                <c:pt idx="100">
+                  <c:v>0.916303853</c:v>
+                </c:pt>
+                <c:pt idx="101">
+                  <c:v>0.926593515</c:v>
+                </c:pt>
+                <c:pt idx="102">
+                  <c:v>0.925774667</c:v>
+                </c:pt>
+                <c:pt idx="103">
+                  <c:v>0.921255811</c:v>
+                </c:pt>
+                <c:pt idx="104">
+                  <c:v>0.918497549</c:v>
+                </c:pt>
+                <c:pt idx="105">
+                  <c:v>0.916722907</c:v>
+                </c:pt>
+                <c:pt idx="106">
+                  <c:v>0.915622925</c:v>
+                </c:pt>
+                <c:pt idx="107">
+                  <c:v>0.916304984</c:v>
+                </c:pt>
+                <c:pt idx="108">
+                  <c:v>0.927309285</c:v>
+                </c:pt>
+                <c:pt idx="109">
+                  <c:v>0.92300355</c:v>
+                </c:pt>
+                <c:pt idx="110">
+                  <c:v>0.9201249</c:v>
+                </c:pt>
+                <c:pt idx="111">
+                  <c:v>0.918343068</c:v>
+                </c:pt>
+                <c:pt idx="112">
+                  <c:v>0.917224099</c:v>
+                </c:pt>
+                <c:pt idx="113">
+                  <c:v>0.916509076</c:v>
+                </c:pt>
+                <c:pt idx="114">
+                  <c:v>0.916053546</c:v>
+                </c:pt>
+                <c:pt idx="115">
+                  <c:v>0.922692223</c:v>
+                </c:pt>
+                <c:pt idx="116">
+                  <c:v>0.920257814</c:v>
+                </c:pt>
+                <c:pt idx="117">
+                  <c:v>0.918731855</c:v>
+                </c:pt>
+                <c:pt idx="118">
+                  <c:v>0.91778074</c:v>
+                </c:pt>
+                <c:pt idx="119">
+                  <c:v>0.917182823</c:v>
+                </c:pt>
+                <c:pt idx="120">
+                  <c:v>0.916802657</c:v>
+                </c:pt>
+                <c:pt idx="121">
+                  <c:v>0.916574688</c:v>
+                </c:pt>
+                <c:pt idx="122">
+                  <c:v>0.918030592</c:v>
+                </c:pt>
+                <c:pt idx="123">
+                  <c:v>0.917407619</c:v>
+                </c:pt>
+                <c:pt idx="124">
+                  <c:v>0.91702657</c:v>
+                </c:pt>
+                <c:pt idx="125">
+                  <c:v>0.916768709</c:v>
+                </c:pt>
+                <c:pt idx="126">
+                  <c:v>0.916630375</c:v>
+                </c:pt>
+                <c:pt idx="127">
+                  <c:v>0.916544608</c:v>
+                </c:pt>
+                <c:pt idx="128">
+                  <c:v>0.915870678</c:v>
+                </c:pt>
+                <c:pt idx="129">
+                  <c:v>0.913522215</c:v>
+                </c:pt>
+                <c:pt idx="130">
+                  <c:v>0.914426306</c:v>
+                </c:pt>
+                <c:pt idx="131">
+                  <c:v>0.915000595</c:v>
+                </c:pt>
+                <c:pt idx="132">
+                  <c:v>0.915349025</c:v>
+                </c:pt>
+                <c:pt idx="133">
+                  <c:v>0.915578402</c:v>
+                </c:pt>
+                <c:pt idx="134">
+                  <c:v>0.915715556</c:v>
+                </c:pt>
+                <c:pt idx="135">
+                  <c:v>0.911612162</c:v>
+                </c:pt>
+                <c:pt idx="136">
+                  <c:v>0.909343918</c:v>
+                </c:pt>
+                <c:pt idx="137">
+                  <c:v>0.911518118</c:v>
+                </c:pt>
+                <c:pt idx="138">
+                  <c:v>0.912873692</c:v>
+                </c:pt>
+                <c:pt idx="139">
+                  <c:v>0.913673245</c:v>
+                </c:pt>
+                <c:pt idx="140">
+                  <c:v>0.914200888</c:v>
+                </c:pt>
+                <c:pt idx="141">
+                  <c:v>0.914515536</c:v>
+                </c:pt>
+                <c:pt idx="142">
+                  <c:v>0.907976448</c:v>
+                </c:pt>
+                <c:pt idx="143">
+                  <c:v>0.905198454</c:v>
+                </c:pt>
+                <c:pt idx="144">
+                  <c:v>0.908454817</c:v>
+                </c:pt>
+                <c:pt idx="145">
+                  <c:v>0.910453451</c:v>
+                </c:pt>
+                <c:pt idx="146">
+                  <c:v>0.911702227</c:v>
+                </c:pt>
+                <c:pt idx="147">
+                  <c:v>0.912412825</c:v>
+                </c:pt>
+                <c:pt idx="148">
+                  <c:v>0.912903827</c:v>
+                </c:pt>
+                <c:pt idx="149">
+                  <c:v>0.904876372</c:v>
+                </c:pt>
+                <c:pt idx="150">
+                  <c:v>0.901254973</c:v>
+                </c:pt>
+                <c:pt idx="151">
+                  <c:v>0.90529992</c:v>
+                </c:pt>
+                <c:pt idx="152">
+                  <c:v>0.907820802</c:v>
+                </c:pt>
+                <c:pt idx="153">
+                  <c:v>0.909419299</c:v>
+                </c:pt>
+                <c:pt idx="154">
+                  <c:v>0.910459405</c:v>
+                </c:pt>
+                <c:pt idx="155">
+                  <c:v>0.911076143</c:v>
+                </c:pt>
+                <c:pt idx="156">
+                  <c:v>0.902293554</c:v>
+                </c:pt>
+                <c:pt idx="157">
+                  <c:v>0.897365432</c:v>
+                </c:pt>
+                <c:pt idx="158">
+                  <c:v>0.902203062</c:v>
+                </c:pt>
+                <c:pt idx="159">
+                  <c:v>0.905166838</c:v>
+                </c:pt>
+                <c:pt idx="160">
+                  <c:v>0.907001628</c:v>
+                </c:pt>
+                <c:pt idx="161">
+                  <c:v>0.908219234</c:v>
+                </c:pt>
+                <c:pt idx="162">
+                  <c:v>0.908956439</c:v>
+                </c:pt>
+                <c:pt idx="163">
+                  <c:v>0.90015188</c:v>
+                </c:pt>
+                <c:pt idx="164">
+                  <c:v>0.893702088</c:v>
+                </c:pt>
+                <c:pt idx="165">
+                  <c:v>0.89910042</c:v>
+                </c:pt>
+                <c:pt idx="166">
+                  <c:v>0.902412247</c:v>
+                </c:pt>
+                <c:pt idx="167">
+                  <c:v>0.904561766</c:v>
+                </c:pt>
+                <c:pt idx="168">
+                  <c:v>0.905852399</c:v>
+                </c:pt>
+                <c:pt idx="169">
+                  <c:v>0.906640574</c:v>
+                </c:pt>
+                <c:pt idx="170">
+                  <c:v>0.898581376</c:v>
+                </c:pt>
+                <c:pt idx="171">
+                  <c:v>0.890304822</c:v>
+                </c:pt>
+                <c:pt idx="172">
+                  <c:v>0.896141287</c:v>
+                </c:pt>
+                <c:pt idx="173">
+                  <c:v>0.899818057</c:v>
+                </c:pt>
+                <c:pt idx="174">
+                  <c:v>0.902037642</c:v>
+                </c:pt>
+                <c:pt idx="175">
+                  <c:v>0.903488205</c:v>
+                </c:pt>
+                <c:pt idx="176">
+                  <c:v>0.904379156</c:v>
+                </c:pt>
+                <c:pt idx="177">
+                  <c:v>0.897777738</c:v>
+                </c:pt>
+                <c:pt idx="178">
+                  <c:v>0.888678151</c:v>
+                </c:pt>
+                <c:pt idx="179">
+                  <c:v>0.893383331</c:v>
+                </c:pt>
+                <c:pt idx="180">
+                  <c:v>0.897312883</c:v>
+                </c:pt>
+                <c:pt idx="181">
+                  <c:v>0.899652984</c:v>
+                </c:pt>
+                <c:pt idx="182">
+                  <c:v>0.901186415</c:v>
+                </c:pt>
+                <c:pt idx="183">
+                  <c:v>0.902121591</c:v>
+                </c:pt>
+                <c:pt idx="184">
+                  <c:v>0.897846814</c:v>
+                </c:pt>
+                <c:pt idx="185">
+                  <c:v>0.888008947</c:v>
+                </c:pt>
+                <c:pt idx="186">
+                  <c:v>0.891051665</c:v>
+                </c:pt>
+                <c:pt idx="187">
+                  <c:v>0.895038439</c:v>
+                </c:pt>
+                <c:pt idx="188">
+                  <c:v>0.89746211</c:v>
+                </c:pt>
+                <c:pt idx="189">
+                  <c:v>0.899033201</c:v>
+                </c:pt>
+                <c:pt idx="190">
+                  <c:v>0.89993587</c:v>
+                </c:pt>
+                <c:pt idx="191">
+                  <c:v>0.899041955</c:v>
+                </c:pt>
+                <c:pt idx="192">
+                  <c:v>0.888001276</c:v>
+                </c:pt>
+                <c:pt idx="193">
+                  <c:v>0.889161596</c:v>
+                </c:pt>
+                <c:pt idx="194">
+                  <c:v>0.893072264</c:v>
+                </c:pt>
+                <c:pt idx="195">
+                  <c:v>0.89559385</c:v>
+                </c:pt>
+                <c:pt idx="196">
+                  <c:v>0.897073278</c:v>
+                </c:pt>
+                <c:pt idx="197">
+                  <c:v>0.898086253</c:v>
+                </c:pt>
+                <c:pt idx="198">
+                  <c:v>0.898627524</c:v>
+                </c:pt>
+                <c:pt idx="199">
+                  <c:v>0.888901407</c:v>
+                </c:pt>
+                <c:pt idx="200">
+                  <c:v>0.887742846</c:v>
+                </c:pt>
+                <c:pt idx="201">
+                  <c:v>0.891590177</c:v>
+                </c:pt>
+                <c:pt idx="202">
+                  <c:v>0.894018568</c:v>
+                </c:pt>
+                <c:pt idx="203">
+                  <c:v>0.895472699</c:v>
+                </c:pt>
+                <c:pt idx="204">
+                  <c:v>0.896432626</c:v>
+                </c:pt>
+                <c:pt idx="205">
+                  <c:v>0.896998982</c:v>
+                </c:pt>
+                <c:pt idx="206">
+                  <c:v>0.890657777</c:v>
+                </c:pt>
+                <c:pt idx="207">
+                  <c:v>0.886936353</c:v>
+                </c:pt>
+                <c:pt idx="208">
+                  <c:v>0.890605132</c:v>
+                </c:pt>
+                <c:pt idx="209">
+                  <c:v>0.892785262</c:v>
+                </c:pt>
+                <c:pt idx="210">
+                  <c:v>0.894252286</c:v>
+                </c:pt>
+                <c:pt idx="211">
+                  <c:v>0.895066923</c:v>
+                </c:pt>
+                <c:pt idx="212">
+                  <c:v>0.895650304</c:v>
+                </c:pt>
+                <c:pt idx="213">
+                  <c:v>0.893592216</c:v>
+                </c:pt>
+                <c:pt idx="214">
+                  <c:v>0.886971631</c:v>
+                </c:pt>
+                <c:pt idx="215">
+                  <c:v>0.890182324</c:v>
+                </c:pt>
+                <c:pt idx="216">
+                  <c:v>0.892085393</c:v>
+                </c:pt>
+                <c:pt idx="217">
+                  <c:v>0.893394462</c:v>
+                </c:pt>
+                <c:pt idx="218">
+                  <c:v>0.894080192</c:v>
+                </c:pt>
+                <c:pt idx="219">
+                  <c:v>0.894629926</c:v>
+                </c:pt>
+                <c:pt idx="220">
+                  <c:v>0.894862777</c:v>
+                </c:pt>
+                <c:pt idx="221">
+                  <c:v>0.887708602</c:v>
+                </c:pt>
+                <c:pt idx="222">
+                  <c:v>0.890301428</c:v>
+                </c:pt>
+                <c:pt idx="223">
+                  <c:v>0.891879947</c:v>
+                </c:pt>
+                <c:pt idx="224">
+                  <c:v>0.892935186</c:v>
+                </c:pt>
+                <c:pt idx="225">
+                  <c:v>0.893482335</c:v>
+                </c:pt>
+                <c:pt idx="226">
+                  <c:v>0.893953422</c:v>
+                </c:pt>
+                <c:pt idx="227">
+                  <c:v>0.894124023</c:v>
+                </c:pt>
+                <c:pt idx="228">
+                  <c:v>0.889175469</c:v>
+                </c:pt>
+                <c:pt idx="229">
+                  <c:v>0.890970793</c:v>
+                </c:pt>
+                <c:pt idx="230">
+                  <c:v>0.892166757</c:v>
+                </c:pt>
+                <c:pt idx="231">
+                  <c:v>0.892845017</c:v>
+                </c:pt>
+                <c:pt idx="232">
+                  <c:v>0.893297624</c:v>
+                </c:pt>
+                <c:pt idx="233">
+                  <c:v>0.893611412</c:v>
+                </c:pt>
+                <c:pt idx="234">
+                  <c:v>0.893748102</c:v>
+                </c:pt>
+                <c:pt idx="235">
+                  <c:v>0.892041836</c:v>
+                </c:pt>
+                <c:pt idx="236">
+                  <c:v>0.892248504</c:v>
+                </c:pt>
+                <c:pt idx="237">
+                  <c:v>0.892897968</c:v>
+                </c:pt>
+                <c:pt idx="238">
+                  <c:v>0.893179094</c:v>
+                </c:pt>
+                <c:pt idx="239">
+                  <c:v>0.893463842</c:v>
+                </c:pt>
+                <c:pt idx="240">
+                  <c:v>0.89354795</c:v>
+                </c:pt>
+                <c:pt idx="241">
+                  <c:v>0.893698755</c:v>
+                </c:pt>
+                <c:pt idx="242">
+                  <c:v>0.893687174</c:v>
+                </c:pt>
+                <c:pt idx="243">
+                  <c:v>0.894079122</c:v>
+                </c:pt>
+                <c:pt idx="244">
+                  <c:v>0.893958237</c:v>
+                </c:pt>
+                <c:pt idx="245">
+                  <c:v>0.893953213</c:v>
+                </c:pt>
+                <c:pt idx="246">
+                  <c:v>0.893904742</c:v>
+                </c:pt>
+                <c:pt idx="247">
+                  <c:v>0.893900811</c:v>
+                </c:pt>
+                <c:pt idx="248">
+                  <c:v>0.893855816</c:v>
+                </c:pt>
+                <c:pt idx="249">
+                  <c:v>0.893877277</c:v>
+                </c:pt>
+                <c:pt idx="250">
+                  <c:v>0.89619615</c:v>
+                </c:pt>
+                <c:pt idx="251">
+                  <c:v>0.895424175</c:v>
+                </c:pt>
+                <c:pt idx="252">
+                  <c:v>0.894898902</c:v>
+                </c:pt>
+                <c:pt idx="253">
+                  <c:v>0.894645928</c:v>
+                </c:pt>
+                <c:pt idx="254">
+                  <c:v>0.89444592</c:v>
+                </c:pt>
+                <c:pt idx="255">
+                  <c:v>0.894338286</c:v>
+                </c:pt>
+                <c:pt idx="256">
+                  <c:v>0.894227021</c:v>
+                </c:pt>
+                <c:pt idx="257">
+                  <c:v>0.898562104</c:v>
+                </c:pt>
+                <c:pt idx="258">
+                  <c:v>0.897023919</c:v>
+                </c:pt>
+                <c:pt idx="259">
+                  <c:v>0.896156147</c:v>
+                </c:pt>
+                <c:pt idx="260">
+                  <c:v>0.895532971</c:v>
+                </c:pt>
+                <c:pt idx="261">
+                  <c:v>0.895227418</c:v>
+                </c:pt>
+                <c:pt idx="262">
+                  <c:v>0.894932499</c:v>
+                </c:pt>
+                <c:pt idx="263">
+                  <c:v>0.894866218</c:v>
+                </c:pt>
+                <c:pt idx="264">
+                  <c:v>0.900735329</c:v>
+                </c:pt>
+                <c:pt idx="265">
+                  <c:v>0.898806917</c:v>
+                </c:pt>
+                <c:pt idx="266">
+                  <c:v>0.897435758</c:v>
+                </c:pt>
+                <c:pt idx="267">
+                  <c:v>0.896576015</c:v>
+                </c:pt>
+                <c:pt idx="268">
+                  <c:v>0.896086699</c:v>
+                </c:pt>
+                <c:pt idx="269">
+                  <c:v>0.895744833</c:v>
+                </c:pt>
+                <c:pt idx="270">
+                  <c:v>0.895579083</c:v>
+                </c:pt>
+                <c:pt idx="271">
+                  <c:v>0.899955246</c:v>
+                </c:pt>
+                <c:pt idx="272">
+                  <c:v>0.900533069</c:v>
+                </c:pt>
+                <c:pt idx="273">
+                  <c:v>0.898761878</c:v>
+                </c:pt>
+                <c:pt idx="274">
+                  <c:v>0.89771825</c:v>
+                </c:pt>
+                <c:pt idx="275">
+                  <c:v>0.897069496</c:v>
+                </c:pt>
+                <c:pt idx="276">
+                  <c:v>0.896620018</c:v>
+                </c:pt>
+                <c:pt idx="277">
+                  <c:v>0.89640176</c:v>
+                </c:pt>
+                <c:pt idx="278">
+                  <c:v>0.899186577</c:v>
+                </c:pt>
+                <c:pt idx="279">
+                  <c:v>0.902142087</c:v>
+                </c:pt>
+                <c:pt idx="280">
+                  <c:v>0.900099283</c:v>
+                </c:pt>
+                <c:pt idx="281">
+                  <c:v>0.898807437</c:v>
+                </c:pt>
+                <c:pt idx="282">
+                  <c:v>0.898083096</c:v>
+                </c:pt>
+                <c:pt idx="283">
+                  <c:v>0.897528021</c:v>
+                </c:pt>
+                <c:pt idx="284">
+                  <c:v>0.897296566</c:v>
+                </c:pt>
+                <c:pt idx="285">
+                  <c:v>0.898374224</c:v>
+                </c:pt>
+                <c:pt idx="286">
+                  <c:v>0.903535261</c:v>
+                </c:pt>
+                <c:pt idx="287">
+                  <c:v>0.901316343</c:v>
+                </c:pt>
+                <c:pt idx="288">
+                  <c:v>0.899871805</c:v>
+                </c:pt>
+                <c:pt idx="289">
+                  <c:v>0.89907362</c:v>
+                </c:pt>
+                <c:pt idx="290">
+                  <c:v>0.898499707</c:v>
+                </c:pt>
+                <c:pt idx="291">
+                  <c:v>0.898117468</c:v>
+                </c:pt>
+                <c:pt idx="292">
+                  <c:v>0.897965457</c:v>
+                </c:pt>
+                <c:pt idx="293">
+                  <c:v>0.904627468</c:v>
+                </c:pt>
+                <c:pt idx="294">
+                  <c:v>0.902295361</c:v>
+                </c:pt>
+                <c:pt idx="295">
+                  <c:v>0.900875594</c:v>
+                </c:pt>
+                <c:pt idx="296">
+                  <c:v>0.899906541</c:v>
+                </c:pt>
+                <c:pt idx="297">
+                  <c:v>0.899395686</c:v>
+                </c:pt>
+                <c:pt idx="298">
+                  <c:v>0.899025822</c:v>
+                </c:pt>
+                <c:pt idx="299">
+                  <c:v>0.898744421</c:v>
+                </c:pt>
+                <c:pt idx="300">
+                  <c:v>0.905526829</c:v>
+                </c:pt>
+                <c:pt idx="301">
+                  <c:v>0.90313017</c:v>
+                </c:pt>
+                <c:pt idx="302">
+                  <c:v>0.901606428</c:v>
+                </c:pt>
+                <c:pt idx="303">
+                  <c:v>0.900779266</c:v>
+                </c:pt>
+                <c:pt idx="304">
+                  <c:v>0.90017154</c:v>
+                </c:pt>
+                <c:pt idx="305">
+                  <c:v>0.899776957</c:v>
+                </c:pt>
+                <c:pt idx="306">
+                  <c:v>0.899609982</c:v>
+                </c:pt>
+                <c:pt idx="307">
+                  <c:v>0.906008741</c:v>
+                </c:pt>
+                <c:pt idx="308">
+                  <c:v>0.903703595</c:v>
+                </c:pt>
+                <c:pt idx="309">
+                  <c:v>0.902343303</c:v>
+                </c:pt>
+                <c:pt idx="310">
+                  <c:v>0.901413116</c:v>
+                </c:pt>
+                <c:pt idx="311">
+                  <c:v>0.900840064</c:v>
+                </c:pt>
+                <c:pt idx="312">
+                  <c:v>0.90055087</c:v>
+                </c:pt>
+                <c:pt idx="313">
+                  <c:v>0.90028201</c:v>
+                </c:pt>
+                <c:pt idx="314">
+                  <c:v>0.906320367</c:v>
+                </c:pt>
+                <c:pt idx="315">
+                  <c:v>0.904197825</c:v>
+                </c:pt>
+                <c:pt idx="316">
+                  <c:v>0.902818785</c:v>
+                </c:pt>
+                <c:pt idx="317">
+                  <c:v>0.90197301</c:v>
+                </c:pt>
+                <c:pt idx="318">
+                  <c:v>0.901502592</c:v>
+                </c:pt>
+                <c:pt idx="319">
+                  <c:v>0.901145961</c:v>
+                </c:pt>
+                <c:pt idx="320">
+                  <c:v>0.900903504</c:v>
+                </c:pt>
+                <c:pt idx="321">
+                  <c:v>0.906277391</c:v>
+                </c:pt>
+                <c:pt idx="322">
+                  <c:v>0.904339518</c:v>
+                </c:pt>
+                <c:pt idx="323">
+                  <c:v>0.903090524</c:v>
+                </c:pt>
+                <c:pt idx="324">
+                  <c:v>0.902412092</c:v>
+                </c:pt>
+                <c:pt idx="325">
+                  <c:v>0.901945866</c:v>
+                </c:pt>
+                <c:pt idx="326">
+                  <c:v>0.901599194</c:v>
+                </c:pt>
+                <c:pt idx="327">
+                  <c:v>0.901489103</c:v>
+                </c:pt>
+                <c:pt idx="328">
+                  <c:v>0.90590031</c:v>
+                </c:pt>
+                <c:pt idx="329">
+                  <c:v>0.904243148</c:v>
+                </c:pt>
+                <c:pt idx="330">
+                  <c:v>0.903275349</c:v>
+                </c:pt>
+                <c:pt idx="331">
+                  <c:v>0.90267342</c:v>
+                </c:pt>
+                <c:pt idx="332">
+                  <c:v>0.90222554</c:v>
+                </c:pt>
+                <c:pt idx="333">
+                  <c:v>0.902018953</c:v>
+                </c:pt>
+                <c:pt idx="334">
+                  <c:v>0.901894933</c:v>
+                </c:pt>
+                <c:pt idx="335">
+                  <c:v>0.905244248</c:v>
+                </c:pt>
+                <c:pt idx="336">
+                  <c:v>0.904040612</c:v>
+                </c:pt>
+                <c:pt idx="337">
+                  <c:v>0.903292031</c:v>
+                </c:pt>
+                <c:pt idx="338">
+                  <c:v>0.902760159</c:v>
+                </c:pt>
+                <c:pt idx="339">
+                  <c:v>0.902447157</c:v>
+                </c:pt>
+                <c:pt idx="340">
+                  <c:v>0.902306086</c:v>
+                </c:pt>
+                <c:pt idx="341">
+                  <c:v>0.902162625</c:v>
+                </c:pt>
+                <c:pt idx="342">
+                  <c:v>0.903971894</c:v>
+                </c:pt>
+                <c:pt idx="343">
+                  <c:v>0.90368584</c:v>
+                </c:pt>
+                <c:pt idx="344">
+                  <c:v>0.903113342</c:v>
+                </c:pt>
+                <c:pt idx="345">
+                  <c:v>0.902708216</c:v>
+                </c:pt>
+                <c:pt idx="346">
+                  <c:v>0.902577451</c:v>
+                </c:pt>
+                <c:pt idx="347">
+                  <c:v>0.902422593</c:v>
+                </c:pt>
+                <c:pt idx="348">
+                  <c:v>0.902280941</c:v>
+                </c:pt>
+                <c:pt idx="349">
+                  <c:v>0.902509846</c:v>
+                </c:pt>
+                <c:pt idx="350">
+                  <c:v>0.903147531</c:v>
+                </c:pt>
+                <c:pt idx="351">
+                  <c:v>0.902780426</c:v>
+                </c:pt>
+                <c:pt idx="352">
+                  <c:v>0.902622281</c:v>
+                </c:pt>
+                <c:pt idx="353">
+                  <c:v>0.902520167</c:v>
+                </c:pt>
+                <c:pt idx="354">
+                  <c:v>0.902391653</c:v>
+                </c:pt>
+                <c:pt idx="355">
+                  <c:v>0.902382691</c:v>
+                </c:pt>
+                <c:pt idx="356">
+                  <c:v>0.902384891</c:v>
+                </c:pt>
+                <c:pt idx="357">
+                  <c:v>0.902456119</c:v>
+                </c:pt>
+                <c:pt idx="358">
+                  <c:v>0.902436236</c:v>
+                </c:pt>
+                <c:pt idx="359">
+                  <c:v>0.902421249</c:v>
+                </c:pt>
+                <c:pt idx="360">
+                  <c:v>0.90232435</c:v>
+                </c:pt>
+                <c:pt idx="361">
+                  <c:v>0.902360867</c:v>
+                </c:pt>
+                <c:pt idx="362">
+                  <c:v>0.902370133</c:v>
+                </c:pt>
+                <c:pt idx="363">
+                  <c:v>0.902325359</c:v>
+                </c:pt>
+                <c:pt idx="364">
+                  <c:v>0.901800343</c:v>
+                </c:pt>
+                <c:pt idx="365">
+                  <c:v>0.901983361</c:v>
+                </c:pt>
+                <c:pt idx="366">
+                  <c:v>0.902045803</c:v>
+                </c:pt>
+                <c:pt idx="367">
+                  <c:v>0.902154987</c:v>
+                </c:pt>
+                <c:pt idx="368">
+                  <c:v>0.902202124</c:v>
+                </c:pt>
+                <c:pt idx="369">
+                  <c:v>0.902179693</c:v>
+                </c:pt>
+                <c:pt idx="370">
+                  <c:v>0.902206715</c:v>
+                </c:pt>
+                <c:pt idx="371">
+                  <c:v>0.901085118</c:v>
+                </c:pt>
+                <c:pt idx="372">
+                  <c:v>0.901413492</c:v>
+                </c:pt>
+                <c:pt idx="373">
+                  <c:v>0.901709802</c:v>
+                </c:pt>
+                <c:pt idx="374">
+                  <c:v>0.901870389</c:v>
+                </c:pt>
+                <c:pt idx="375">
+                  <c:v>0.901904798</c:v>
+                </c:pt>
+                <c:pt idx="376">
+                  <c:v>0.902032896</c:v>
+                </c:pt>
+                <c:pt idx="377">
+                  <c:v>0.902071731</c:v>
+                </c:pt>
+                <c:pt idx="378">
+                  <c:v>0.90026102</c:v>
+                </c:pt>
+                <c:pt idx="379">
+                  <c:v>0.900938819</c:v>
+                </c:pt>
+                <c:pt idx="380">
+                  <c:v>0.901291837</c:v>
+                </c:pt>
+                <c:pt idx="381">
+                  <c:v>0.901473158</c:v>
+                </c:pt>
+                <c:pt idx="382">
+                  <c:v>0.901691286</c:v>
+                </c:pt>
+                <c:pt idx="383">
+                  <c:v>0.901741296</c:v>
+                </c:pt>
+                <c:pt idx="384">
+                  <c:v>0.901768558</c:v>
+                </c:pt>
+                <c:pt idx="385">
+                  <c:v>0.89955454</c:v>
+                </c:pt>
+                <c:pt idx="386">
+                  <c:v>0.900298742</c:v>
+                </c:pt>
+                <c:pt idx="387">
+                  <c:v>0.90081648</c:v>
+                </c:pt>
+                <c:pt idx="388">
+                  <c:v>0.901153062</c:v>
+                </c:pt>
+                <c:pt idx="389">
+                  <c:v>0.901274098</c:v>
+                </c:pt>
+                <c:pt idx="390">
+                  <c:v>0.901449388</c:v>
+                </c:pt>
+                <c:pt idx="391">
+                  <c:v>0.901530893</c:v>
+                </c:pt>
+                <c:pt idx="392">
+                  <c:v>0.898803017</c:v>
+                </c:pt>
+                <c:pt idx="393">
+                  <c:v>0.899818383</c:v>
+                </c:pt>
+                <c:pt idx="394">
+                  <c:v>0.900378911</c:v>
+                </c:pt>
+                <c:pt idx="395">
+                  <c:v>0.900706288</c:v>
+                </c:pt>
+                <c:pt idx="396">
+                  <c:v>0.900985153</c:v>
+                </c:pt>
+                <c:pt idx="397">
+                  <c:v>0.901076974</c:v>
+                </c:pt>
+                <c:pt idx="398">
+                  <c:v>0.901173227</c:v>
+                </c:pt>
+                <c:pt idx="399">
+                  <c:v>0.898204719</c:v>
+                </c:pt>
+                <c:pt idx="400">
+                  <c:v>0.899219868</c:v>
+                </c:pt>
+                <c:pt idx="401">
+                  <c:v>0.899959296</c:v>
+                </c:pt>
+                <c:pt idx="402">
+                  <c:v>0.900356481</c:v>
+                </c:pt>
+              </c:numCache>
+            </c:numRef>
+          </c:yVal>
+          <c:smooth val="0"/>
+        </c:ser>
+        <c:ser>
+          <c:idx val="1"/>
+          <c:order val="1"/>
+          <c:tx>
+            <c:strRef>
+              <c:f>Sheet1!$B$406</c:f>
+              <c:strCache>
+                <c:ptCount val="1"/>
+                <c:pt idx="0">
+                  <c:v>averaged behavioural model (573 ns)</c:v>
+                </c:pt>
+              </c:strCache>
+            </c:strRef>
+          </c:tx>
+          <c:spPr>
+            <a:ln w="19050">
+              <a:solidFill>
+                <a:srgbClr val="E07A1F"/>
+              </a:solidFill>
+              <a:prstDash val="dash"/>
+            </a:ln>
+          </c:spPr>
+          <c:marker>
+            <c:symbol val="none"/>
+          </c:marker>
+          <c:xVal>
+            <c:numRef>
+              <c:f>Sheet1!$A$407:$A$556</c:f>
+              <c:numCache>
+                <c:formatCode>General</c:formatCode>
+                <c:ptCount val="150"/>
+                <c:pt idx="0">
+                  <c:v>0.2</c:v>
+                </c:pt>
+                <c:pt idx="1">
+                  <c:v>20.19999999999997</c:v>
+                </c:pt>
+                <c:pt idx="2">
+                  <c:v>40.19999999999999</c:v>
+                </c:pt>
+                <c:pt idx="3">
+                  <c:v>60.200000000000166</c:v>
+                </c:pt>
+                <c:pt idx="4">
+                  <c:v>80.20000000000034</c:v>
+                </c:pt>
+                <c:pt idx="5">
+                  <c:v>100.20000000000053</c:v>
+                </c:pt>
+                <c:pt idx="6">
+                  <c:v>120.20000000000064</c:v>
+                </c:pt>
+                <c:pt idx="7">
+                  <c:v>140.1999999999995</c:v>
+                </c:pt>
+                <c:pt idx="8">
+                  <c:v>160.19999999999834</c:v>
+                </c:pt>
+                <c:pt idx="9">
+                  <c:v>180.1999999999972</c:v>
+                </c:pt>
+                <c:pt idx="10">
+                  <c:v>200.19999999999607</c:v>
+                </c:pt>
+                <c:pt idx="11">
+                  <c:v>220.19999999999493</c:v>
+                </c:pt>
+                <c:pt idx="12">
+                  <c:v>240.19999999999402</c:v>
+                </c:pt>
+                <c:pt idx="13">
+                  <c:v>260.1999999999955</c:v>
+                </c:pt>
+                <c:pt idx="14">
+                  <c:v>280.19999999999703</c:v>
+                </c:pt>
+                <c:pt idx="15">
+                  <c:v>300.1999999999985</c:v>
+                </c:pt>
+                <c:pt idx="16">
+                  <c:v>320.20000000000005</c:v>
+                </c:pt>
+                <c:pt idx="17">
+                  <c:v>340.2000000000015</c:v>
+                </c:pt>
+                <c:pt idx="18">
+                  <c:v>360.200000000003</c:v>
+                </c:pt>
+                <c:pt idx="19">
+                  <c:v>380.20000000000454</c:v>
+                </c:pt>
+                <c:pt idx="20">
+                  <c:v>400.200000000006</c:v>
+                </c:pt>
+                <c:pt idx="21">
+                  <c:v>420.20000000000755</c:v>
+                </c:pt>
+                <c:pt idx="22">
+                  <c:v>440.200000000009</c:v>
+                </c:pt>
+                <c:pt idx="23">
+                  <c:v>460.20000000001056</c:v>
+                </c:pt>
+                <c:pt idx="24">
+                  <c:v>480.20000000001204</c:v>
+                </c:pt>
+                <c:pt idx="25">
+                  <c:v>500.2000000000135</c:v>
+                </c:pt>
+                <c:pt idx="26">
+                  <c:v>520.200000000015</c:v>
+                </c:pt>
+                <c:pt idx="27">
+                  <c:v>540.2000000000165</c:v>
+                </c:pt>
+                <c:pt idx="28">
+                  <c:v>560.200000000018</c:v>
+                </c:pt>
+                <c:pt idx="29">
+                  <c:v>580.2000000000196</c:v>
+                </c:pt>
+                <c:pt idx="30">
+                  <c:v>600.2000000000211</c:v>
+                </c:pt>
+                <c:pt idx="31">
+                  <c:v>620.2000000000226</c:v>
+                </c:pt>
+                <c:pt idx="32">
+                  <c:v>640.200000000024</c:v>
+                </c:pt>
+                <c:pt idx="33">
+                  <c:v>660.2000000000255</c:v>
+                </c:pt>
+                <c:pt idx="34">
+                  <c:v>680.2000000000271</c:v>
+                </c:pt>
+                <c:pt idx="35">
+                  <c:v>700.2000000000286</c:v>
+                </c:pt>
+                <c:pt idx="36">
+                  <c:v>720.2000000000301</c:v>
+                </c:pt>
+                <c:pt idx="37">
+                  <c:v>740.2000000000315</c:v>
+                </c:pt>
+                <c:pt idx="38">
+                  <c:v>760.2000000000331</c:v>
+                </c:pt>
+                <c:pt idx="39">
+                  <c:v>780.2000000000346</c:v>
+                </c:pt>
+                <c:pt idx="40">
+                  <c:v>800.2000000000361</c:v>
+                </c:pt>
+                <c:pt idx="41">
+                  <c:v>820.2000000000376</c:v>
+                </c:pt>
+                <c:pt idx="42">
+                  <c:v>840.200000000039</c:v>
+                </c:pt>
+                <c:pt idx="43">
+                  <c:v>860.2000000000406</c:v>
+                </c:pt>
+                <c:pt idx="44">
+                  <c:v>880.2000000000421</c:v>
+                </c:pt>
+                <c:pt idx="45">
+                  <c:v>900.2000000000436</c:v>
+                </c:pt>
+                <c:pt idx="46">
+                  <c:v>920.2000000000451</c:v>
+                </c:pt>
+                <c:pt idx="47">
+                  <c:v>940.2000000000467</c:v>
+                </c:pt>
+                <c:pt idx="48">
+                  <c:v>960.200000000048</c:v>
+                </c:pt>
+                <c:pt idx="49">
+                  <c:v>980.2000000000495</c:v>
+                </c:pt>
+                <c:pt idx="50">
+                  <c:v>1000.200000000051</c:v>
+                </c:pt>
+                <c:pt idx="51">
+                  <c:v>1020.2000000000525</c:v>
+                </c:pt>
+                <c:pt idx="52">
+                  <c:v>1040.200000000054</c:v>
+                </c:pt>
+                <c:pt idx="53">
+                  <c:v>1060.2000000000555</c:v>
+                </c:pt>
+                <c:pt idx="54">
+                  <c:v>1080.2000000000571</c:v>
+                </c:pt>
+                <c:pt idx="55">
+                  <c:v>1100.2000000000585</c:v>
+                </c:pt>
+                <c:pt idx="56">
+                  <c:v>1120.20000000006</c:v>
+                </c:pt>
+                <c:pt idx="57">
+                  <c:v>1140.2000000000614</c:v>
+                </c:pt>
+                <c:pt idx="58">
+                  <c:v>1160.200000000063</c:v>
+                </c:pt>
+                <c:pt idx="59">
+                  <c:v>1180.2000000000646</c:v>
+                </c:pt>
+                <c:pt idx="60">
+                  <c:v>1200.200000000066</c:v>
+                </c:pt>
+                <c:pt idx="61">
+                  <c:v>1220.2000000000676</c:v>
+                </c:pt>
+                <c:pt idx="62">
+                  <c:v>1240.200000000069</c:v>
+                </c:pt>
+                <c:pt idx="63">
+                  <c:v>1260.2000000000705</c:v>
+                </c:pt>
+                <c:pt idx="64">
+                  <c:v>1280.2000000000721</c:v>
+                </c:pt>
+                <c:pt idx="65">
+                  <c:v>1300.2000000000735</c:v>
+                </c:pt>
+                <c:pt idx="66">
+                  <c:v>1320.200000000075</c:v>
+                </c:pt>
+                <c:pt idx="67">
+                  <c:v>1340.2000000000764</c:v>
+                </c:pt>
+                <c:pt idx="68">
+                  <c:v>1360.200000000078</c:v>
+                </c:pt>
+                <c:pt idx="69">
+                  <c:v>1380.2000000000796</c:v>
+                </c:pt>
+                <c:pt idx="70">
+                  <c:v>1400.200000000081</c:v>
+                </c:pt>
+                <c:pt idx="71">
+                  <c:v>1420.2000000000826</c:v>
+                </c:pt>
+                <c:pt idx="72">
+                  <c:v>1440.2000000000842</c:v>
+                </c:pt>
+                <c:pt idx="73">
+                  <c:v>1460.2000000000855</c:v>
+                </c:pt>
+                <c:pt idx="74">
+                  <c:v>1480.2000000000871</c:v>
+                </c:pt>
+                <c:pt idx="75">
+                  <c:v>1500.2000000000885</c:v>
+                </c:pt>
+                <c:pt idx="76">
+                  <c:v>1520.20000000009</c:v>
+                </c:pt>
+                <c:pt idx="77">
+                  <c:v>1540.2000000000917</c:v>
+                </c:pt>
+                <c:pt idx="78">
+                  <c:v>1560.200000000093</c:v>
+                </c:pt>
+                <c:pt idx="79">
+                  <c:v>1580.2000000000946</c:v>
+                </c:pt>
+                <c:pt idx="80">
+                  <c:v>1600.200000000096</c:v>
+                </c:pt>
+                <c:pt idx="81">
+                  <c:v>1620.2000000000976</c:v>
+                </c:pt>
+                <c:pt idx="82">
+                  <c:v>1640.2000000000992</c:v>
+                </c:pt>
+                <c:pt idx="83">
+                  <c:v>1660.2000000001005</c:v>
+                </c:pt>
+                <c:pt idx="84">
+                  <c:v>1680.2000000001021</c:v>
+                </c:pt>
+                <c:pt idx="85">
+                  <c:v>1700.2000000001035</c:v>
+                </c:pt>
+                <c:pt idx="86">
+                  <c:v>1720.200000000105</c:v>
+                </c:pt>
+                <c:pt idx="87">
+                  <c:v>1740.2000000001067</c:v>
+                </c:pt>
+                <c:pt idx="88">
+                  <c:v>1760.200000000108</c:v>
+                </c:pt>
+                <c:pt idx="89">
+                  <c:v>1780.2000000001096</c:v>
+                </c:pt>
+                <c:pt idx="90">
+                  <c:v>1800.200000000111</c:v>
+                </c:pt>
+                <c:pt idx="91">
+                  <c:v>1820.2000000001126</c:v>
+                </c:pt>
+                <c:pt idx="92">
+                  <c:v>1840.2000000001142</c:v>
+                </c:pt>
+                <c:pt idx="93">
+                  <c:v>1860.2000000001156</c:v>
+                </c:pt>
+                <c:pt idx="94">
+                  <c:v>1880.2000000001171</c:v>
+                </c:pt>
+                <c:pt idx="95">
+                  <c:v>1900.2000000001185</c:v>
+                </c:pt>
+                <c:pt idx="96">
+                  <c:v>1920.20000000012</c:v>
+                </c:pt>
+                <c:pt idx="97">
+                  <c:v>1940.2000000001217</c:v>
+                </c:pt>
+                <c:pt idx="98">
+                  <c:v>1960.200000000123</c:v>
+                </c:pt>
+                <c:pt idx="99">
+                  <c:v>1980.2000000001246</c:v>
+                </c:pt>
+                <c:pt idx="100">
+                  <c:v>2000.2000000001262</c:v>
+                </c:pt>
+                <c:pt idx="101">
+                  <c:v>2020.2000000001276</c:v>
+                </c:pt>
+                <c:pt idx="102">
+                  <c:v>2040.2000000001292</c:v>
+                </c:pt>
+                <c:pt idx="103">
+                  <c:v>2060.200000000131</c:v>
+                </c:pt>
+                <c:pt idx="104">
+                  <c:v>2080.200000000132</c:v>
+                </c:pt>
+                <c:pt idx="105">
+                  <c:v>2100.2000000001335</c:v>
+                </c:pt>
+                <c:pt idx="106">
+                  <c:v>2120.2000000001353</c:v>
+                </c:pt>
+                <c:pt idx="107">
+                  <c:v>2140.2000000001367</c:v>
+                </c:pt>
+                <c:pt idx="108">
+                  <c:v>2160.200000000138</c:v>
+                </c:pt>
+                <c:pt idx="109">
+                  <c:v>2180.20000000014</c:v>
+                </c:pt>
+                <c:pt idx="110">
+                  <c:v>2200.2000000001412</c:v>
+                </c:pt>
+                <c:pt idx="111">
+                  <c:v>2220.2000000001426</c:v>
+                </c:pt>
+                <c:pt idx="112">
+                  <c:v>2240.200000000144</c:v>
+                </c:pt>
+                <c:pt idx="113">
+                  <c:v>2260.200000000146</c:v>
+                </c:pt>
+                <c:pt idx="114">
+                  <c:v>2280.200000000147</c:v>
+                </c:pt>
+                <c:pt idx="115">
+                  <c:v>2300.2000000001485</c:v>
+                </c:pt>
+                <c:pt idx="116">
+                  <c:v>2320.2000000001503</c:v>
+                </c:pt>
+                <c:pt idx="117">
+                  <c:v>2340.2000000001517</c:v>
+                </c:pt>
+                <c:pt idx="118">
+                  <c:v>2360.200000000153</c:v>
+                </c:pt>
+                <c:pt idx="119">
+                  <c:v>2380.200000000155</c:v>
+                </c:pt>
+                <c:pt idx="120">
+                  <c:v>2400.2000000001563</c:v>
+                </c:pt>
+                <c:pt idx="121">
+                  <c:v>2420.2000000001576</c:v>
+                </c:pt>
+                <c:pt idx="122">
+                  <c:v>2440.200000000159</c:v>
+                </c:pt>
+                <c:pt idx="123">
+                  <c:v>2460.200000000161</c:v>
+                </c:pt>
+                <c:pt idx="124">
+                  <c:v>2480.200000000162</c:v>
+                </c:pt>
+                <c:pt idx="125">
+                  <c:v>2500.2000000001635</c:v>
+                </c:pt>
+                <c:pt idx="126">
+                  <c:v>2520.2000000001653</c:v>
+                </c:pt>
+                <c:pt idx="127">
+                  <c:v>2540.2000000001667</c:v>
+                </c:pt>
+                <c:pt idx="128">
+                  <c:v>2560.200000000168</c:v>
+                </c:pt>
+                <c:pt idx="129">
+                  <c:v>2580.20000000017</c:v>
+                </c:pt>
+                <c:pt idx="130">
+                  <c:v>2600.2000000001713</c:v>
+                </c:pt>
+                <c:pt idx="131">
+                  <c:v>2620.2000000001726</c:v>
+                </c:pt>
+                <c:pt idx="132">
+                  <c:v>2640.2000000001744</c:v>
+                </c:pt>
+                <c:pt idx="133">
+                  <c:v>2660.200000000176</c:v>
+                </c:pt>
+                <c:pt idx="134">
+                  <c:v>2680.200000000177</c:v>
+                </c:pt>
+                <c:pt idx="135">
+                  <c:v>2700.2000000001785</c:v>
+                </c:pt>
+                <c:pt idx="136">
+                  <c:v>2720.2000000001804</c:v>
+                </c:pt>
+                <c:pt idx="137">
+                  <c:v>2740.2000000001817</c:v>
+                </c:pt>
+                <c:pt idx="138">
+                  <c:v>2760.200000000183</c:v>
+                </c:pt>
+                <c:pt idx="139">
+                  <c:v>2780.200000000185</c:v>
+                </c:pt>
+                <c:pt idx="140">
+                  <c:v>2800.2000000001863</c:v>
+                </c:pt>
+                <c:pt idx="141">
+                  <c:v>2820.2000000001876</c:v>
+                </c:pt>
+                <c:pt idx="142">
+                  <c:v>2840.2000000001894</c:v>
+                </c:pt>
+                <c:pt idx="143">
+                  <c:v>2860.200000000191</c:v>
+                </c:pt>
+                <c:pt idx="144">
+                  <c:v>2880.200000000192</c:v>
+                </c:pt>
+                <c:pt idx="145">
+                  <c:v>2900.2000000001935</c:v>
+                </c:pt>
+                <c:pt idx="146">
+                  <c:v>2920.2000000001954</c:v>
+                </c:pt>
+                <c:pt idx="147">
+                  <c:v>2940.2000000001967</c:v>
+                </c:pt>
+                <c:pt idx="148">
+                  <c:v>2960.200000000198</c:v>
+                </c:pt>
+                <c:pt idx="149">
+                  <c:v>2980.2000000002</c:v>
+                </c:pt>
+              </c:numCache>
+            </c:numRef>
+          </c:xVal>
+          <c:yVal>
+            <c:numRef>
+              <c:f>Sheet1!$B$407:$B$556</c:f>
+              <c:numCache>
+                <c:formatCode>General</c:formatCode>
+                <c:ptCount val="150"/>
+                <c:pt idx="0">
+                  <c:v>0.85</c:v>
+                </c:pt>
+                <c:pt idx="1">
+                  <c:v>0.8543157291048418</c:v>
+                </c:pt>
+                <c:pt idx="2">
+                  <c:v>0.8589027030962246</c:v>
+                </c:pt>
+                <c:pt idx="3">
+                  <c:v>0.8636732839258702</c:v>
+                </c:pt>
+                <c:pt idx="4">
+                  <c:v>0.8685444289478741</c:v>
+                </c:pt>
+                <c:pt idx="5">
+                  <c:v>0.8734384954441365</c:v>
+                </c:pt>
+                <c:pt idx="6">
+                  <c:v>0.8782904638583512</c:v>
+                </c:pt>
+                <c:pt idx="7">
+                  <c:v>0.8830568553391512</c:v>
+                </c:pt>
+                <c:pt idx="8">
+                  <c:v>0.8876821750815724</c:v>
+                </c:pt>
+                <c:pt idx="9">
+                  <c:v>0.8921156983043147</c:v>
+                </c:pt>
+                <c:pt idx="10">
+                  <c:v>0.8963131542115823</c:v>
+                </c:pt>
+                <c:pt idx="11">
+                  <c:v>0.9002368673492809</c:v>
+                </c:pt>
+                <c:pt idx="12">
+                  <c:v>0.9038719170092868</c:v>
+                </c:pt>
+                <c:pt idx="13">
+                  <c:v>0.9072064910239869</c:v>
+                </c:pt>
+                <c:pt idx="14">
+                  <c:v>0.9102212743293345</c:v>
+                </c:pt>
+                <c:pt idx="15">
+                  <c:v>0.9129021623419571</c:v>
+                </c:pt>
+                <c:pt idx="16">
+                  <c:v>0.9152400677948725</c:v>
+                </c:pt>
+                <c:pt idx="17">
+                  <c:v>0.9172306804445577</c:v>
+                </c:pt>
+                <c:pt idx="18">
+                  <c:v>0.9188741858401552</c:v>
+                </c:pt>
+                <c:pt idx="19">
+                  <c:v>0.9201749494081439</c:v>
+                </c:pt>
+                <c:pt idx="20">
+                  <c:v>0.9211411720884838</c:v>
+                </c:pt>
+                <c:pt idx="21">
+                  <c:v>0.9217845236667862</c:v>
+                </c:pt>
+                <c:pt idx="22">
+                  <c:v>0.922119759787781</c:v>
+                </c:pt>
+                <c:pt idx="23">
+                  <c:v>0.9221643284148551</c:v>
+                </c:pt>
+                <c:pt idx="24">
+                  <c:v>0.9219379712257297</c:v>
+                </c:pt>
+                <c:pt idx="25">
+                  <c:v>0.9214623251124554</c:v>
+                </c:pt>
+                <c:pt idx="26">
+                  <c:v>0.920760528592058</c:v>
+                </c:pt>
+                <c:pt idx="27">
+                  <c:v>0.9198568375395151</c:v>
+                </c:pt>
+                <c:pt idx="28">
+                  <c:v>0.9187762542343284</c:v>
+                </c:pt>
+                <c:pt idx="29">
+                  <c:v>0.9175441732726566</c:v>
+                </c:pt>
+                <c:pt idx="30">
+                  <c:v>0.9161860474454444</c:v>
+                </c:pt>
+                <c:pt idx="31">
+                  <c:v>0.9147270762254632</c:v>
+                </c:pt>
+                <c:pt idx="32">
+                  <c:v>0.9131919190487113</c:v>
+                </c:pt>
+                <c:pt idx="33">
+                  <c:v>0.9116044351236117</c:v>
+                </c:pt>
+                <c:pt idx="34">
+                  <c:v>0.9099874510600836</c:v>
+                </c:pt>
+                <c:pt idx="35">
+                  <c:v>0.9083625571843679</c:v>
+                </c:pt>
+                <c:pt idx="36">
+                  <c:v>0.9067499329985598</c:v>
+                </c:pt>
+                <c:pt idx="37">
+                  <c:v>0.9051682018597408</c:v>
+                </c:pt>
+                <c:pt idx="38">
+                  <c:v>0.9036343145954204</c:v>
+                </c:pt>
+                <c:pt idx="39">
+                  <c:v>0.9021634614422375</c:v>
+                </c:pt>
+                <c:pt idx="40">
+                  <c:v>0.9007690113954966</c:v>
+                </c:pt>
+                <c:pt idx="41">
+                  <c:v>0.8994633415905177</c:v>
+                </c:pt>
+                <c:pt idx="42">
+                  <c:v>0.8982635653340961</c:v>
+                </c:pt>
+                <c:pt idx="43">
+                  <c:v>0.8971790823274429</c:v>
+                </c:pt>
+                <c:pt idx="44">
+                  <c:v>0.8962154633556673</c:v>
+                </c:pt>
+                <c:pt idx="45">
+                  <c:v>0.8953762418413285</c:v>
+                </c:pt>
+                <c:pt idx="46">
+                  <c:v>0.8946630234805052</c:v>
+                </c:pt>
+                <c:pt idx="47">
+                  <c:v>0.8940756131101252</c:v>
+                </c:pt>
+                <c:pt idx="48">
+                  <c:v>0.8936121557925786</c:v>
+                </c:pt>
+                <c:pt idx="49">
+                  <c:v>0.8932692891461576</c:v>
+                </c:pt>
+                <c:pt idx="50">
+                  <c:v>0.8930423040286596</c:v>
+                </c:pt>
+                <c:pt idx="51">
+                  <c:v>0.8929253107927345</c:v>
+                </c:pt>
+                <c:pt idx="52">
+                  <c:v>0.8929114084712914</c:v>
+                </c:pt>
+                <c:pt idx="53">
+                  <c:v>0.8929928544153981</c:v>
+                </c:pt>
+                <c:pt idx="54">
+                  <c:v>0.8931612320916316</c:v>
+                </c:pt>
+                <c:pt idx="55">
+                  <c:v>0.8934076149466512</c:v>
+                </c:pt>
+                <c:pt idx="56">
+                  <c:v>0.8937227244600459</c:v>
+                </c:pt>
+                <c:pt idx="57">
+                  <c:v>0.894097080728325</c:v>
+                </c:pt>
+                <c:pt idx="58">
+                  <c:v>0.8945211441498181</c:v>
+                </c:pt>
+                <c:pt idx="59">
+                  <c:v>0.8949854470086803</c:v>
+                </c:pt>
+                <c:pt idx="60">
+                  <c:v>0.8954807139830918</c:v>
+                </c:pt>
+                <c:pt idx="61">
+                  <c:v>0.8959979708251549</c:v>
+                </c:pt>
+                <c:pt idx="62">
+                  <c:v>0.8965286406753166</c:v>
+                </c:pt>
+                <c:pt idx="63">
+                  <c:v>0.8970646276800678</c:v>
+                </c:pt>
+                <c:pt idx="64">
+                  <c:v>0.8975983877761652</c:v>
+                </c:pt>
+                <c:pt idx="65">
+                  <c:v>0.8981229866859758</c:v>
+                </c:pt>
+                <c:pt idx="66">
+                  <c:v>0.8986321453353722</c:v>
+                </c:pt>
+                <c:pt idx="67">
+                  <c:v>0.8991202730567656</c:v>
+                </c:pt>
+                <c:pt idx="68">
+                  <c:v>0.899582489074609</c:v>
+                </c:pt>
+                <c:pt idx="69">
+                  <c:v>0.9000146343464409</c:v>
+                </c:pt>
+                <c:pt idx="70">
+                  <c:v>0.9004149745323579</c:v>
+                </c:pt>
+                <c:pt idx="71">
+                  <c:v>0.9007822841489054</c:v>
+                </c:pt>
+                <c:pt idx="72">
+                  <c:v>0.9011144309035377</c:v>
+                </c:pt>
+                <c:pt idx="73">
+                  <c:v>0.9014098560188047</c:v>
+                </c:pt>
+                <c:pt idx="74">
+                  <c:v>0.9016675530468606</c:v>
+                </c:pt>
+                <c:pt idx="75">
+                  <c:v>0.9018870414903323</c:v>
+                </c:pt>
+                <c:pt idx="76">
+                  <c:v>0.902068335910539</c:v>
+                </c:pt>
+                <c:pt idx="77">
+                  <c:v>0.9022119112110736</c:v>
+                </c:pt>
+                <c:pt idx="78">
+                  <c:v>0.9023186647829459</c:v>
+                </c:pt>
+                <c:pt idx="79">
+                  <c:v>0.902389876187508</c:v>
+                </c:pt>
+                <c:pt idx="80">
+                  <c:v>0.9024271650359673</c:v>
+                </c:pt>
+                <c:pt idx="81">
+                  <c:v>0.9024324477000973</c:v>
+                </c:pt>
+                <c:pt idx="82">
+                  <c:v>0.9024078934585953</c:v>
+                </c:pt>
+                <c:pt idx="83">
+                  <c:v>0.9023558806481856</c:v>
+                </c:pt>
+                <c:pt idx="84">
+                  <c:v>0.9022789533488098</c:v>
+                </c:pt>
+                <c:pt idx="85">
+                  <c:v>0.902179779088845</c:v>
+                </c:pt>
+                <c:pt idx="86">
+                  <c:v>0.9020611080100762</c:v>
+                </c:pt>
+                <c:pt idx="87">
+                  <c:v>0.901925733883845</c:v>
+                </c:pt>
+                <c:pt idx="88">
+                  <c:v>0.9017764573201014</c:v>
+                </c:pt>
+                <c:pt idx="89">
+                  <c:v>0.9016160514607764</c:v>
+                </c:pt>
+                <c:pt idx="90">
+                  <c:v>0.9014472303985452</c:v>
+                </c:pt>
+                <c:pt idx="91">
+                  <c:v>0.9012726205123052</c:v>
+                </c:pt>
+                <c:pt idx="92">
+                  <c:v>0.9010947348621158</c:v>
+                </c:pt>
+                <c:pt idx="93">
+                  <c:v>0.9009159507394383</c:v>
+                </c:pt>
+                <c:pt idx="94">
+                  <c:v>0.9007384904236994</c:v>
+                </c:pt>
+                <c:pt idx="95">
+                  <c:v>0.9005644051539197</c:v>
+                </c:pt>
+                <c:pt idx="96">
+                  <c:v>0.9003955622847076</c:v>
+                </c:pt>
+                <c:pt idx="97">
+                  <c:v>0.9002336355595874</c:v>
+                </c:pt>
+                <c:pt idx="98">
+                  <c:v>0.9000800984016522</c:v>
+                </c:pt>
+                <c:pt idx="99">
+                  <c:v>0.8999363307366542</c:v>
+                </c:pt>
+                <c:pt idx="100">
+                  <c:v>0.8998042257463015</c:v>
+                </c:pt>
+                <c:pt idx="101">
+                  <c:v>0.8996848001947872</c:v>
+                </c:pt>
+                <c:pt idx="102">
+                  <c:v>0.8995786688480406</c:v>
+                </c:pt>
+                <c:pt idx="103">
+                  <c:v>0.899486222221052</c:v>
+                </c:pt>
+                <c:pt idx="104">
+                  <c:v>0.8994076386242114</c:v>
+                </c:pt>
+                <c:pt idx="105">
+                  <c:v>0.8993428981081949</c:v>
+                </c:pt>
+                <c:pt idx="106">
+                  <c:v>0.8992917979757635</c:v>
+                </c:pt>
+                <c:pt idx="107">
+                  <c:v>0.8992539695334723</c:v>
+                </c:pt>
+                <c:pt idx="108">
+                  <c:v>0.899228895764952</c:v>
+                </c:pt>
+                <c:pt idx="109">
+                  <c:v>0.8992159296196152</c:v>
+                </c:pt>
+                <c:pt idx="110">
+                  <c:v>0.8992143126259937</c:v>
+                </c:pt>
+                <c:pt idx="111">
+                  <c:v>0.8992231935569723</c:v>
+                </c:pt>
+                <c:pt idx="112">
+                  <c:v>0.8992416468944365</c:v>
+                </c:pt>
+                <c:pt idx="113">
+                  <c:v>0.8992686908629641</c:v>
+                </c:pt>
+                <c:pt idx="114">
+                  <c:v>0.8993033048256316</c:v>
+                </c:pt>
+                <c:pt idx="115">
+                  <c:v>0.8993444458594072</c:v>
+                </c:pt>
+                <c:pt idx="116">
+                  <c:v>0.8993910643525738</c:v>
+                </c:pt>
+                <c:pt idx="117">
+                  <c:v>0.8994421184917414</c:v>
+                </c:pt>
+                <c:pt idx="118">
+                  <c:v>0.8994965875309971</c:v>
+                </c:pt>
+                <c:pt idx="119">
+                  <c:v>0.899553483760194</c:v>
+                </c:pt>
+                <c:pt idx="120">
+                  <c:v>0.8996118631130979</c:v>
+                </c:pt>
+                <c:pt idx="121">
+                  <c:v>0.8996708343787723</c:v>
+                </c:pt>
+                <c:pt idx="122">
+                  <c:v>0.8997295670009761</c:v>
+                </c:pt>
+                <c:pt idx="123">
+                  <c:v>0.8997872974703437</c:v>
+                </c:pt>
+                <c:pt idx="124">
+                  <c:v>0.8998433343324601</c:v>
+                </c:pt>
+                <c:pt idx="125">
+                  <c:v>0.8998970618516032</c:v>
+                </c:pt>
+                <c:pt idx="126">
+                  <c:v>0.8999479423847592</c:v>
+                </c:pt>
+                <c:pt idx="127">
+                  <c:v>0.8999955175334904</c:v>
+                </c:pt>
+                <c:pt idx="128">
+                  <c:v>0.900039549196252</c:v>
+                </c:pt>
+                <c:pt idx="129">
+                  <c:v>0.9000799432933446</c:v>
+                </c:pt>
+                <c:pt idx="130">
+                  <c:v>0.900116467418084</c:v>
+                </c:pt>
+                <c:pt idx="131">
+                  <c:v>0.9001489503936806</c:v>
+                </c:pt>
+                <c:pt idx="132">
+                  <c:v>0.90017728180082</c:v>
+                </c:pt>
+                <c:pt idx="133">
+                  <c:v>0.9002014090723756</c:v>
+                </c:pt>
+                <c:pt idx="134">
+                  <c:v>0.9002213340919999</c:v>
+                </c:pt>
+                <c:pt idx="135">
+                  <c:v>0.9002371093723138</c:v>
+                </c:pt>
+                <c:pt idx="136">
+                  <c:v>0.9002488338881728</c:v>
+                </c:pt>
+                <c:pt idx="137">
+                  <c:v>0.9002566486394237</c:v>
+                </c:pt>
+                <c:pt idx="138">
+                  <c:v>0.9002607320156111</c:v>
+                </c:pt>
+                <c:pt idx="139">
+                  <c:v>0.9002612950324527</c:v>
+                </c:pt>
+                <c:pt idx="140">
+                  <c:v>0.9002585765065619</c:v>
+                </c:pt>
+                <c:pt idx="141">
+                  <c:v>0.9002528382310198</c:v>
+                </c:pt>
+                <c:pt idx="142">
+                  <c:v>0.900244360210009</c:v>
+                </c:pt>
+                <c:pt idx="143">
+                  <c:v>0.9002334360059502</c:v>
+                </c:pt>
+                <c:pt idx="144">
+                  <c:v>0.9002203682475003</c:v>
+                </c:pt>
+                <c:pt idx="145">
+                  <c:v>0.900205464341445</c:v>
+                </c:pt>
+                <c:pt idx="146">
+                  <c:v>0.9001890324260555</c:v>
+                </c:pt>
+                <c:pt idx="147">
+                  <c:v>0.9001713775979503</c:v>
+                </c:pt>
+                <c:pt idx="148">
+                  <c:v>0.9001527984389489</c:v>
+                </c:pt>
+                <c:pt idx="149">
+                  <c:v>0.9001335838639453</c:v>
+                </c:pt>
+              </c:numCache>
+            </c:numRef>
+          </c:yVal>
+          <c:smooth val="0"/>
+        </c:ser>
+        <c:axId val="-2128940872"/>
+        <c:axId val="-2129643912"/>
+      </c:scatterChart>
+      <c:valAx>
+        <c:axId val="-2128940872"/>
+        <c:scaling>
+          <c:orientation val="minMax"/>
+          <c:max val="3000.0"/>
+          <c:min val="0.0"/>
+        </c:scaling>
+        <c:delete val="0"/>
+        <c:axPos val="b"/>
+        <c:title>
+          <c:tx>
+            <c:rich>
+              <a:bodyPr/>
+              <a:lstStyle/>
+              <a:p>
+                <a:r>
+                  <a:rPr sz="1100"/>
+                  <a:t>Time (ns)</a:t>
+                </a:r>
+              </a:p>
+            </c:rich>
+          </c:tx>
+          <c:layout/>
+          <c:overlay val="0"/>
+        </c:title>
+        <c:numFmt formatCode="General" sourceLinked="1"/>
+        <c:majorTickMark val="out"/>
+        <c:minorTickMark val="none"/>
+        <c:tickLblPos val="nextTo"/>
+        <c:txPr>
+          <a:bodyPr/>
+          <a:lstStyle/>
+          <a:p>
+            <a:pPr>
+              <a:defRPr sz="1000"/>
+            </a:pPr>
+          </a:p>
+        </c:txPr>
+        <c:crossAx val="-2129643912"/>
+        <c:crosses val="min"/>
+        <c:crossBetween val="midCat"/>
+      </c:valAx>
+      <c:valAx>
+        <c:axId val="-2129643912"/>
+        <c:scaling>
+          <c:orientation val="minMax"/>
+          <c:max val="1.0"/>
+          <c:min val="0.8"/>
+        </c:scaling>
+        <c:delete val="0"/>
+        <c:axPos val="l"/>
+        <c:majorGridlines>
+          <c:spPr>
+            <a:ln>
+              <a:solidFill>
+                <a:srgbClr val="E3E3E3"/>
+              </a:solidFill>
+            </a:ln>
+          </c:spPr>
+        </c:majorGridlines>
+        <c:title>
+          <c:tx>
+            <c:rich>
+              <a:bodyPr/>
+              <a:lstStyle/>
+              <a:p>
+                <a:r>
+                  <a:rPr sz="1100"/>
+                  <a:t>V_ctrl (V)</a:t>
+                </a:r>
+              </a:p>
+            </c:rich>
+          </c:tx>
+          <c:layout/>
+          <c:overlay val="0"/>
+        </c:title>
+        <c:numFmt formatCode="General" sourceLinked="1"/>
+        <c:majorTickMark val="out"/>
+        <c:minorTickMark val="none"/>
+        <c:tickLblPos val="nextTo"/>
+        <c:txPr>
+          <a:bodyPr/>
+          <a:lstStyle/>
+          <a:p>
+            <a:pPr>
+              <a:defRPr sz="1000"/>
+            </a:pPr>
+          </a:p>
+        </c:txPr>
+        <c:crossAx val="-2128940872"/>
+        <c:crosses val="min"/>
+        <c:crossBetween val="midCat"/>
+      </c:valAx>
+    </c:plotArea>
+    <c:legend>
+      <c:legendPos val="b"/>
+      <c:layout/>
+      <c:overlay val="0"/>
+      <c:txPr>
+        <a:bodyPr/>
+        <a:lstStyle/>
+        <a:p>
+          <a:pPr>
+            <a:defRPr sz="1000"/>
+          </a:pPr>
+        </a:p>
+      </c:txPr>
+    </c:legend>
+    <c:plotVisOnly val="1"/>
+    <c:dispBlanksAs val="gap"/>
+    <c:showDLblsOverMax val="0"/>
+  </c:chart>
+  <c:txPr>
+    <a:bodyPr/>
+    <a:lstStyle/>
+    <a:p>
+      <a:pPr>
+        <a:defRPr sz="1800">
+          <a:latin typeface="Calibri"/>
+        </a:defRPr>
+      </a:pPr>
+      <a:endParaRPr lang="en-US"/>
+    </a:p>
+  </c:txPr>
+  <c:externalData r:id="rId1">
+    <c:autoUpdate val="0"/>
+  </c:externalData>
+</c:chartSpace>
+</file>
+
+<file path=ppt/charts/chart9.xml><?xml version="1.0" encoding="utf-8"?>
 <c:chartSpace xmlns:c="http://schemas.openxmlformats.org/drawingml/2006/chart" xmlns:a="http://schemas.openxmlformats.org/drawingml/2006/main" xmlns:r="http://schemas.openxmlformats.org/officeDocument/2006/relationships">
   <c:chart>
     <c:autoTitleDeleted val="1"/>
@@ -8194,235 +12409,6 @@
     <c:plotVisOnly val="1"/>
     <c:dispBlanksAs val="gap"/>
     <c:showDLblsOverMax val="0"/>
-  </c:chart>
-  <c:txPr>
-    <a:bodyPr/>
-    <a:lstStyle/>
-    <a:p>
-      <a:pPr>
-        <a:defRPr sz="1800">
-          <a:latin typeface="Calibri"/>
-        </a:defRPr>
-      </a:pPr>
-      <a:endParaRPr lang="en-US"/>
-    </a:p>
-  </c:txPr>
-  <c:externalData r:id="rId1">
-    <c:autoUpdate val="0"/>
-  </c:externalData>
-</c:chartSpace>
-</file>
-
-<file path=ppt/charts/chart8.xml><?xml version="1.0" encoding="utf-8"?>
-<c:chartSpace xmlns:c="http://schemas.openxmlformats.org/drawingml/2006/chart" xmlns:a="http://schemas.openxmlformats.org/drawingml/2006/main" xmlns:r="http://schemas.openxmlformats.org/officeDocument/2006/relationships">
-  <c:date1904 val="0"/>
-  <c:chart>
-    <c:autoTitleDeleted val="1"/>
-    <c:plotArea>
-      <c:barChart>
-        <c:barDir val="col"/>
-        <c:grouping val="clustered"/>
-        <c:ser>
-          <c:idx val="0"/>
-          <c:order val="0"/>
-          <c:tx>
-            <c:strRef>
-              <c:f>Sheet1!$B$1</c:f>
-              <c:strCache>
-                <c:ptCount val="1"/>
-                <c:pt idx="0">
-                  <c:v>mean |drift|</c:v>
-                </c:pt>
-              </c:strCache>
-            </c:strRef>
-          </c:tx>
-          <c:spPr>
-            <a:solidFill/>
-          </c:spPr>
-          <c:dPt>
-            <c:idx val="0"/>
-            <c:spPr>
-              <a:solidFill>
-                <a:srgbClr val="9AA0A6"/>
-              </a:solidFill>
-            </c:spPr>
-          </c:dPt>
-          <c:dPt>
-            <c:idx val="1"/>
-            <c:spPr>
-              <a:solidFill>
-                <a:srgbClr val="2A9D8F"/>
-              </a:solidFill>
-            </c:spPr>
-          </c:dPt>
-          <c:dPt>
-            <c:idx val="2"/>
-            <c:spPr>
-              <a:solidFill>
-                <a:srgbClr val="1D2F82"/>
-              </a:solidFill>
-            </c:spPr>
-          </c:dPt>
-          <c:errBars>
-            <c:errDir val="y"/>
-            <c:errBarType val="both"/>
-            <c:errValType val="cust"/>
-            <c:noEndCap val="0"/>
-            <c:plus>
-              <c:numLit>
-                <c:ptCount val="3"/>
-                <c:pt idx="0">
-                  <c:v>2.7268</c:v>
-                </c:pt>
-                <c:pt idx="1">
-                  <c:v>1.2393</c:v>
-                </c:pt>
-                <c:pt idx="2">
-                  <c:v>1.0397</c:v>
-                </c:pt>
-              </c:numLit>
-            </c:plus>
-            <c:minus>
-              <c:numLit>
-                <c:ptCount val="3"/>
-                <c:pt idx="0">
-                  <c:v>2.7268</c:v>
-                </c:pt>
-                <c:pt idx="1">
-                  <c:v>1.2393</c:v>
-                </c:pt>
-                <c:pt idx="2">
-                  <c:v>1.0397</c:v>
-                </c:pt>
-              </c:numLit>
-            </c:minus>
-            <c:spPr>
-              <a:ln w="19050">
-                <a:solidFill>
-                  <a:srgbClr val="333333"/>
-                </a:solidFill>
-              </a:ln>
-            </c:spPr>
-          </c:errBars>
-          <c:cat>
-            <c:strRef>
-              <c:f>Sheet1!$A$2:$A$4</c:f>
-              <c:strCache>
-                <c:ptCount val="3"/>
-                <c:pt idx="0">
-                  <c:v>uncompensated
-18.93 MHz (n=12)</c:v>
-                </c:pt>
-                <c:pt idx="1">
-                  <c:v>1st-order
-5.85 MHz (n=30)</c:v>
-                </c:pt>
-                <c:pt idx="2">
-                  <c:v>2nd-order
-3.37 MHz (n=30)</c:v>
-                </c:pt>
-              </c:strCache>
-            </c:strRef>
-          </c:cat>
-          <c:val>
-            <c:numRef>
-              <c:f>Sheet1!$B$2:$B$4</c:f>
-              <c:numCache>
-                <c:formatCode>General</c:formatCode>
-                <c:ptCount val="3"/>
-                <c:pt idx="0">
-                  <c:v>18.927422508939966</c:v>
-                </c:pt>
-                <c:pt idx="1">
-                  <c:v>5.854979326854094</c:v>
-                </c:pt>
-                <c:pt idx="2">
-                  <c:v>3.3729850400530608</c:v>
-                </c:pt>
-              </c:numCache>
-            </c:numRef>
-          </c:val>
-        </c:ser>
-        <c:gapWidth val="60"/>
-        <c:axId val="-2068027336"/>
-        <c:axId val="-2113994440"/>
-      </c:barChart>
-      <c:catAx>
-        <c:axId val="-2068027336"/>
-        <c:scaling>
-          <c:orientation val="minMax"/>
-        </c:scaling>
-        <c:delete val="0"/>
-        <c:axPos val="b"/>
-        <c:majorTickMark val="out"/>
-        <c:minorTickMark val="none"/>
-        <c:tickLblPos val="nextTo"/>
-        <c:txPr>
-          <a:bodyPr/>
-          <a:lstStyle/>
-          <a:p>
-            <a:pPr>
-              <a:defRPr sz="1000"/>
-            </a:pPr>
-          </a:p>
-        </c:txPr>
-        <c:crossAx val="-2113994440"/>
-        <c:crosses val="min"/>
-        <c:auto val="1"/>
-        <c:lblAlgn val="ctr"/>
-        <c:lblOffset val="100"/>
-        <c:noMultiLvlLbl val="0"/>
-      </c:catAx>
-      <c:valAx>
-        <c:axId val="-2113994440"/>
-        <c:scaling>
-          <c:max val="25.0"/>
-          <c:min val="0.0"/>
-        </c:scaling>
-        <c:delete val="0"/>
-        <c:axPos val="l"/>
-        <c:majorGridlines>
-          <c:spPr>
-            <a:ln>
-              <a:solidFill>
-                <a:srgbClr val="E3E3E3"/>
-              </a:solidFill>
-            </a:ln>
-          </c:spPr>
-        </c:majorGridlines>
-        <c:title>
-          <c:tx>
-            <c:rich>
-              <a:bodyPr/>
-              <a:lstStyle/>
-              <a:p>
-                <a:r>
-                  <a:rPr sz="1100"/>
-                  <a:t>mean |drift| 85 vs −40 °C (MHz)</a:t>
-                </a:r>
-              </a:p>
-            </c:rich>
-          </c:tx>
-          <c:layout/>
-          <c:overlay val="0"/>
-        </c:title>
-        <c:majorTickMark val="out"/>
-        <c:minorTickMark val="none"/>
-        <c:tickLblPos val="nextTo"/>
-        <c:txPr>
-          <a:bodyPr/>
-          <a:lstStyle/>
-          <a:p>
-            <a:pPr>
-              <a:defRPr sz="1000"/>
-            </a:pPr>
-          </a:p>
-        </c:txPr>
-        <c:crossAx val="-2068027336"/>
-        <c:crosses val="autoZero"/>
-      </c:valAx>
-    </c:plotArea>
-    <c:dispBlanksAs val="gap"/>
   </c:chart>
   <c:txPr>
     <a:bodyPr/>
@@ -10562,7 +14548,7 @@
                 </a:solidFill>
                 <a:latin typeface="Calibri"/>
               </a:rPr>
-              <a:t>19</a:t>
+              <a:t>21</a:t>
             </a:r>
           </a:p>
         </p:txBody>
@@ -11688,7 +15674,7 @@
                 <a:ea typeface="Calibri" pitchFamily="34" charset="-122"/>
                 <a:cs typeface="Calibri" pitchFamily="34" charset="-120"/>
               </a:rPr>
-              <a:t>22</a:t>
+              <a:t>24</a:t>
             </a:r>
             <a:endParaRPr lang="en-US" sz="1000" dirty="0"/>
           </a:p>
@@ -11911,7 +15897,7 @@
                 </a:solidFill>
                 <a:latin typeface="Calibri"/>
               </a:rPr>
-              <a:t>Transistor-level charge pump; layout in Magic, DRC, LVS (netgen), post-layout re-simulation.</a:t>
+              <a:t>Retune the loop (zeta ~0.33 now; R2 ~3.6 kOhm for zeta ~0.7) and re-verify lock; transistor-level charge pump; layout in Magic, DRC, LVS (netgen), post-layout re-simulation.</a:t>
             </a:r>
           </a:p>
           <a:p>
@@ -12033,7 +16019,7 @@
                 <a:ea typeface="Calibri" pitchFamily="34" charset="-122"/>
                 <a:cs typeface="Calibri" pitchFamily="34" charset="-120"/>
               </a:rPr>
-              <a:t>23</a:t>
+              <a:t>25</a:t>
             </a:r>
             <a:endParaRPr lang="en-US" sz="1000" dirty="0"/>
           </a:p>
@@ -12446,7 +16432,7 @@
                 <a:ea typeface="Calibri" pitchFamily="34" charset="-122"/>
                 <a:cs typeface="Calibri" pitchFamily="34" charset="-120"/>
               </a:rPr>
-              <a:t>24</a:t>
+              <a:t>26</a:t>
             </a:r>
             <a:endParaRPr lang="en-US" sz="1000" dirty="0"/>
           </a:p>
@@ -12760,7 +16746,7 @@
                 </a:solidFill>
                 <a:latin typeface="Calibri"/>
               </a:rPr>
-              <a:t>669 MHz/V</a:t>
+              <a:t>887 MHz/V</a:t>
             </a:r>
           </a:p>
           <a:p>
@@ -12772,7 +16758,7 @@
                 </a:solidFill>
                 <a:latin typeface="Calibri"/>
               </a:rPr>
-              <a:t>K_VCO at 0.9 V (tt)</a:t>
+              <a:t>local K_VCO at 0.9 V (tt)</a:t>
             </a:r>
           </a:p>
         </p:txBody>
@@ -12826,7 +16812,7 @@
                 </a:solidFill>
                 <a:latin typeface="Calibri"/>
               </a:rPr>
-              <a:t>≈ 0.63 V</a:t>
+              <a:t>&lt; 18 MHz</a:t>
             </a:r>
           </a:p>
           <a:p>
@@ -12838,7 +16824,7 @@
                 </a:solidFill>
                 <a:latin typeface="Calibri"/>
               </a:rPr>
-              <a:t>oscillation floor</a:t>
+              <a:t>below 0.65 V (still oscillates)</a:t>
             </a:r>
           </a:p>
         </p:txBody>
@@ -13529,7 +17515,7 @@
                 </a:solidFill>
                 <a:latin typeface="Calibri"/>
               </a:rPr>
-              <a:t>From a true 0 V start, V_ctrl sits below the 0.63 V oscillation floor: no VCO edges → divider silent → PFD sees only REF → slow pump-up.</a:t>
+              <a:t>From a true 0 V start the VCO is in deep subthreshold (0.6 MHz at 0.5 V, 6.5 MHz at 0.6 V, vs 226 MHz target): the divided clock is effectively absent → PFD sees only REF → slow pump-up at 20 µA.</a:t>
             </a:r>
           </a:p>
           <a:p>
@@ -13697,8 +17683,8 @@
         </p:blipFill>
         <p:spPr>
           <a:xfrm>
-            <a:off x="2281331" y="1325880"/>
-            <a:ext cx="7598858" cy="4600000"/>
+            <a:off x="2282166" y="1325880"/>
+            <a:ext cx="7597187" cy="4600000"/>
           </a:xfrm>
           <a:prstGeom prst="rect">
             <a:avLst/>
@@ -14022,7 +18008,7 @@
                 </a:solidFill>
                 <a:latin typeface="Calibri"/>
               </a:rPr>
-              <a:t>Every corner is far outside ±0.3 % uncompensated. N/P-mismatched corners (sf, fs) bracket the range.</a:t>
+              <a:t>Every corner is far outside ±0.3 % uncompensated. Tempco ranks with NMOS drive: see next slide.</a:t>
             </a:r>
           </a:p>
         </p:txBody>
@@ -14079,6 +18065,741 @@
                 <a:cs typeface="Calibri" pitchFamily="34" charset="-120"/>
               </a:rPr>
               <a:t>13</a:t>
+            </a:r>
+            <a:endParaRPr lang="en-US" sz="1000" dirty="0"/>
+          </a:p>
+        </p:txBody>
+      </p:sp>
+      <p:sp>
+        <p:nvSpPr>
+          <p:cNvPr id="3" name="TextBox 2"/>
+          <p:cNvSpPr txBox="1"/>
+          <p:nvPr/>
+        </p:nvSpPr>
+        <p:spPr>
+          <a:xfrm>
+            <a:off x="548640" y="320040"/>
+            <a:ext cx="9601200" cy="685800"/>
+          </a:xfrm>
+          <a:prstGeom prst="rect">
+            <a:avLst/>
+          </a:prstGeom>
+          <a:noFill/>
+        </p:spPr>
+        <p:txBody>
+          <a:bodyPr wrap="square">
+            <a:spAutoFit/>
+          </a:bodyPr>
+          <a:lstStyle/>
+          <a:p>
+            <a:r>
+              <a:rPr sz="2800" b="1">
+                <a:solidFill>
+                  <a:srgbClr val="1D2F82"/>
+                </a:solidFill>
+                <a:latin typeface="Calibri"/>
+              </a:rPr>
+              <a:t>Why the Corners Order This Way</a:t>
+            </a:r>
+          </a:p>
+        </p:txBody>
+      </p:sp>
+      <p:pic>
+        <p:nvPicPr>
+          <p:cNvPr id="4" name="Picture 3" descr="image.png"/>
+          <p:cNvPicPr>
+            <a:picLocks noChangeAspect="1"/>
+          </p:cNvPicPr>
+          <p:nvPr/>
+        </p:nvPicPr>
+        <p:blipFill>
+          <a:blip r:embed="rId2"/>
+          <a:stretch>
+            <a:fillRect/>
+          </a:stretch>
+        </p:blipFill>
+        <p:spPr>
+          <a:xfrm>
+            <a:off x="10362895" y="320040"/>
+            <a:ext cx="1371600" cy="518746"/>
+          </a:xfrm>
+          <a:prstGeom prst="rect">
+            <a:avLst/>
+          </a:prstGeom>
+        </p:spPr>
+      </p:pic>
+      <p:graphicFrame>
+        <p:nvGraphicFramePr>
+          <p:cNvPr id="5" name="Chart 4"/>
+          <p:cNvGraphicFramePr>
+            <a:graphicFrameLocks noGrp="1"/>
+          </p:cNvGraphicFramePr>
+          <p:nvPr/>
+        </p:nvGraphicFramePr>
+        <p:xfrm>
+          <a:off x="640080" y="1225880"/>
+          <a:ext cx="6200000" cy="4500000"/>
+        </p:xfrm>
+        <a:graphic>
+          <a:graphicData uri="http://schemas.openxmlformats.org/drawingml/2006/chart">
+            <c:chart xmlns:c="http://schemas.openxmlformats.org/drawingml/2006/chart" r:id="rId3"/>
+          </a:graphicData>
+        </a:graphic>
+      </p:graphicFrame>
+      <p:sp>
+        <p:nvSpPr>
+          <p:cNvPr id="6" name="TextBox 5"/>
+          <p:cNvSpPr txBox="1"/>
+          <p:nvPr/>
+        </p:nvSpPr>
+        <p:spPr>
+          <a:xfrm>
+            <a:off x="7000000" y="1325880"/>
+            <a:ext cx="4500000" cy="3300000"/>
+          </a:xfrm>
+          <a:prstGeom prst="rect">
+            <a:avLst/>
+          </a:prstGeom>
+          <a:noFill/>
+        </p:spPr>
+        <p:txBody>
+          <a:bodyPr wrap="square">
+            <a:spAutoFit/>
+          </a:bodyPr>
+          <a:lstStyle/>
+          <a:p>
+            <a:pPr>
+              <a:spcAft>
+                <a:spcPts val="600"/>
+              </a:spcAft>
+            </a:pPr>
+            <a:r>
+              <a:rPr sz="1200" b="1">
+                <a:solidFill>
+                  <a:srgbClr val="1D2F82"/>
+                </a:solidFill>
+                <a:latin typeface="Calibri"/>
+              </a:rPr>
+              <a:t>Reading the chart</a:t>
+            </a:r>
+          </a:p>
+          <a:p>
+            <a:pPr>
+              <a:spcAft>
+                <a:spcPts val="600"/>
+              </a:spcAft>
+            </a:pPr>
+            <a:r>
+              <a:rPr sz="1200" b="0">
+                <a:solidFill>
+                  <a:srgbClr val="333333"/>
+                </a:solidFill>
+                <a:latin typeface="Calibri"/>
+              </a:rPr>
+              <a:t>V_ctrl drives the NMOS starving gate directly and sets the PMOS bias through a mirror, so NMOS overdrive sets the ring current.</a:t>
+            </a:r>
+          </a:p>
+          <a:p>
+            <a:pPr>
+              <a:spcAft>
+                <a:spcPts val="600"/>
+              </a:spcAft>
+            </a:pPr>
+            <a:r>
+              <a:rPr sz="1200" b="0">
+                <a:solidFill>
+                  <a:srgbClr val="333333"/>
+                </a:solidFill>
+                <a:latin typeface="Calibri"/>
+              </a:rPr>
+              <a:t>Less overdrive → the threshold-voltage drop with temperature is a bigger share of it and beats the mobility drop → stronger positive tempco.</a:t>
+            </a:r>
+          </a:p>
+          <a:p>
+            <a:pPr>
+              <a:spcAft>
+                <a:spcPts val="600"/>
+              </a:spcAft>
+            </a:pPr>
+            <a:r>
+              <a:rPr sz="1200" b="1">
+                <a:solidFill>
+                  <a:srgbClr val="1D2F82"/>
+                </a:solidFill>
+                <a:latin typeface="Calibri"/>
+              </a:rPr>
+              <a:t>Corner labels in this PDK</a:t>
+            </a:r>
+          </a:p>
+          <a:p>
+            <a:pPr>
+              <a:spcAft>
+                <a:spcPts val="600"/>
+              </a:spcAft>
+            </a:pPr>
+            <a:r>
+              <a:rPr sz="1200" b="0">
+                <a:solidFill>
+                  <a:srgbClr val="333333"/>
+                </a:solidFill>
+                <a:latin typeface="Calibri"/>
+              </a:rPr>
+              <a:t>sf = fast-NMOS / slow-PMOS, fs = slow-NMOS / fast-PMOS. The skew corners shift NMOS Vth ±27 mV (ss/ff only ±15 mV), so they bracket the range.</a:t>
+            </a:r>
+          </a:p>
+        </p:txBody>
+      </p:sp>
+      <p:sp>
+        <p:nvSpPr>
+          <p:cNvPr id="7" name="Rectangle 6"/>
+          <p:cNvSpPr/>
+          <p:nvPr/>
+        </p:nvSpPr>
+        <p:spPr>
+          <a:xfrm>
+            <a:off x="7000000" y="4750000"/>
+            <a:ext cx="2150000" cy="1150000"/>
+          </a:xfrm>
+          <a:prstGeom prst="rect">
+            <a:avLst/>
+          </a:prstGeom>
+          <a:solidFill>
+            <a:srgbClr val="F2F4FB"/>
+          </a:solidFill>
+          <a:ln>
+            <a:solidFill>
+              <a:srgbClr val="2A9D8F"/>
+            </a:solidFill>
+          </a:ln>
+        </p:spPr>
+        <p:style>
+          <a:lnRef idx="1">
+            <a:schemeClr val="accent1"/>
+          </a:lnRef>
+          <a:fillRef idx="3">
+            <a:schemeClr val="accent1"/>
+          </a:fillRef>
+          <a:effectRef idx="2">
+            <a:schemeClr val="accent1"/>
+          </a:effectRef>
+          <a:fontRef idx="minor">
+            <a:schemeClr val="lt1"/>
+          </a:fontRef>
+        </p:style>
+        <p:txBody>
+          <a:bodyPr rtlCol="0" anchor="ctr" wrap="square"/>
+          <a:lstStyle/>
+          <a:p>
+            <a:pPr algn="ctr"/>
+            <a:r>
+              <a:rPr sz="2000" b="1">
+                <a:solidFill>
+                  <a:srgbClr val="2A9D8F"/>
+                </a:solidFill>
+                <a:latin typeface="Calibri"/>
+              </a:rPr>
+              <a:t>−816 ppm/°C</a:t>
+            </a:r>
+          </a:p>
+          <a:p>
+            <a:pPr algn="ctr"/>
+            <a:r>
+              <a:rPr sz="1100" b="0">
+                <a:solidFill>
+                  <a:srgbClr val="333333"/>
+                </a:solidFill>
+                <a:latin typeface="Calibri"/>
+              </a:rPr>
+              <a:t>tt tempco at V_ctrl = 1.4 V (sign flips)</a:t>
+            </a:r>
+          </a:p>
+        </p:txBody>
+      </p:sp>
+      <p:sp>
+        <p:nvSpPr>
+          <p:cNvPr id="8" name="Rectangle 7"/>
+          <p:cNvSpPr/>
+          <p:nvPr/>
+        </p:nvSpPr>
+        <p:spPr>
+          <a:xfrm>
+            <a:off x="9350000" y="4750000"/>
+            <a:ext cx="2150000" cy="1150000"/>
+          </a:xfrm>
+          <a:prstGeom prst="rect">
+            <a:avLst/>
+          </a:prstGeom>
+          <a:solidFill>
+            <a:srgbClr val="F2F4FB"/>
+          </a:solidFill>
+          <a:ln>
+            <a:solidFill>
+              <a:srgbClr val="1D2F82"/>
+            </a:solidFill>
+          </a:ln>
+        </p:spPr>
+        <p:style>
+          <a:lnRef idx="1">
+            <a:schemeClr val="accent1"/>
+          </a:lnRef>
+          <a:fillRef idx="3">
+            <a:schemeClr val="accent1"/>
+          </a:fillRef>
+          <a:effectRef idx="2">
+            <a:schemeClr val="accent1"/>
+          </a:effectRef>
+          <a:fontRef idx="minor">
+            <a:schemeClr val="lt1"/>
+          </a:fontRef>
+        </p:style>
+        <p:txBody>
+          <a:bodyPr rtlCol="0" anchor="ctr" wrap="square"/>
+          <a:lstStyle/>
+          <a:p>
+            <a:pPr algn="ctr"/>
+            <a:r>
+              <a:rPr sz="2000" b="1">
+                <a:solidFill>
+                  <a:srgbClr val="1D2F82"/>
+                </a:solidFill>
+                <a:latin typeface="Calibri"/>
+              </a:rPr>
+              <a:t>+681 ppm/°C</a:t>
+            </a:r>
+          </a:p>
+          <a:p>
+            <a:pPr algn="ctr"/>
+            <a:r>
+              <a:rPr sz="1100" b="0">
+                <a:solidFill>
+                  <a:srgbClr val="333333"/>
+                </a:solidFill>
+                <a:latin typeface="Calibri"/>
+              </a:rPr>
+              <a:t>tt tempco at V_ctrl = 0.9 V</a:t>
+            </a:r>
+          </a:p>
+        </p:txBody>
+      </p:sp>
+      <p:sp>
+        <p:nvSpPr>
+          <p:cNvPr id="9" name="TextBox 8"/>
+          <p:cNvSpPr txBox="1"/>
+          <p:nvPr/>
+        </p:nvSpPr>
+        <p:spPr>
+          <a:xfrm>
+            <a:off x="640080" y="5900000"/>
+            <a:ext cx="6200000" cy="300000"/>
+          </a:xfrm>
+          <a:prstGeom prst="rect">
+            <a:avLst/>
+          </a:prstGeom>
+          <a:noFill/>
+        </p:spPr>
+        <p:txBody>
+          <a:bodyPr wrap="square">
+            <a:spAutoFit/>
+          </a:bodyPr>
+          <a:lstStyle/>
+          <a:p>
+            <a:pPr>
+              <a:spcAft>
+                <a:spcPts val="600"/>
+              </a:spcAft>
+            </a:pPr>
+            <a:r>
+              <a:rPr sz="1100" b="0">
+                <a:solidFill>
+                  <a:srgbClr val="333333"/>
+                </a:solidFill>
+                <a:latin typeface="Calibri"/>
+              </a:rPr>
+              <a:t>Sign flip = a zero-tempco bias point exists between 0.9 and 1.4 V (textbook behaviour).</a:t>
+            </a:r>
+          </a:p>
+        </p:txBody>
+      </p:sp>
+    </p:spTree>
+  </p:cSld>
+  <p:clrMapOvr>
+    <a:masterClrMapping/>
+  </p:clrMapOvr>
+</p:sld>
+</file>
+
+<file path=ppt/slides/slide2.xml><?xml version="1.0" encoding="utf-8"?>
+<p:sld xmlns:a="http://schemas.openxmlformats.org/drawingml/2006/main" xmlns:r="http://schemas.openxmlformats.org/officeDocument/2006/relationships" xmlns:p="http://schemas.openxmlformats.org/presentationml/2006/main">
+  <p:cSld name="Slide 4">
+    <p:bg>
+      <p:bgPr>
+        <a:solidFill>
+          <a:srgbClr val="FFFFFF"/>
+        </a:solidFill>
+        <a:effectLst/>
+      </p:bgPr>
+    </p:bg>
+    <p:spTree>
+      <p:nvGrpSpPr>
+        <p:cNvPr id="1" name=""/>
+        <p:cNvGrpSpPr/>
+        <p:nvPr/>
+      </p:nvGrpSpPr>
+      <p:grpSpPr>
+        <a:xfrm>
+          <a:off x="0" y="0"/>
+          <a:ext cx="0" cy="0"/>
+          <a:chOff x="0" y="0"/>
+          <a:chExt cx="0" cy="0"/>
+        </a:xfrm>
+      </p:grpSpPr>
+      <p:sp>
+        <p:nvSpPr>
+          <p:cNvPr id="2" name="Text 0"/>
+          <p:cNvSpPr txBox="1"/>
+          <p:nvPr/>
+        </p:nvSpPr>
+        <p:spPr>
+          <a:xfrm>
+            <a:off x="11460175" y="6446520"/>
+            <a:ext cx="457200" cy="274320"/>
+          </a:xfrm>
+          <a:prstGeom prst="rect">
+            <a:avLst/>
+          </a:prstGeom>
+          <a:noFill/>
+          <a:ln/>
+        </p:spPr>
+        <p:txBody>
+          <a:bodyPr wrap="square" lIns="0" tIns="0" rIns="0" bIns="0" rtlCol="0" anchor="ctr"/>
+          <a:lstStyle/>
+          <a:p>
+            <a:pPr marL="0" indent="0" algn="r">
+              <a:buNone/>
+            </a:pPr>
+            <a:r>
+              <a:rPr lang="en-US" sz="1000" dirty="0">
+                <a:solidFill>
+                  <a:srgbClr val="808080"/>
+                </a:solidFill>
+                <a:latin typeface="Calibri" pitchFamily="34" charset="0"/>
+                <a:ea typeface="Calibri" pitchFamily="34" charset="-122"/>
+                <a:cs typeface="Calibri" pitchFamily="34" charset="-120"/>
+              </a:rPr>
+              <a:t>2</a:t>
+            </a:r>
+            <a:endParaRPr lang="en-US" sz="1000" dirty="0"/>
+          </a:p>
+        </p:txBody>
+      </p:sp>
+      <p:sp>
+        <p:nvSpPr>
+          <p:cNvPr id="3" name="Text 1"/>
+          <p:cNvSpPr txBox="1"/>
+          <p:nvPr/>
+        </p:nvSpPr>
+        <p:spPr>
+          <a:xfrm>
+            <a:off x="548640" y="320040"/>
+            <a:ext cx="9601200" cy="685800"/>
+          </a:xfrm>
+          <a:prstGeom prst="rect">
+            <a:avLst/>
+          </a:prstGeom>
+          <a:noFill/>
+          <a:ln/>
+        </p:spPr>
+        <p:txBody>
+          <a:bodyPr wrap="square" lIns="0" tIns="0" rIns="0" bIns="0" rtlCol="0" anchor="ctr"/>
+          <a:lstStyle/>
+          <a:p>
+            <a:pPr marL="0" indent="0">
+              <a:buNone/>
+            </a:pPr>
+            <a:r>
+              <a:rPr lang="en-US" sz="2800" b="1" dirty="0">
+                <a:solidFill>
+                  <a:srgbClr val="1D2F82"/>
+                </a:solidFill>
+                <a:latin typeface="Calibri" pitchFamily="34" charset="0"/>
+                <a:ea typeface="Calibri" pitchFamily="34" charset="-122"/>
+                <a:cs typeface="Calibri" pitchFamily="34" charset="-120"/>
+              </a:rPr>
+              <a:t>Introduction &amp; Problem Recap</a:t>
+            </a:r>
+            <a:endParaRPr lang="en-US" sz="2800" dirty="0"/>
+          </a:p>
+        </p:txBody>
+      </p:sp>
+      <p:pic>
+        <p:nvPicPr>
+          <p:cNvPr id="4" name="Image 0" descr="logo.png"/>
+          <p:cNvPicPr>
+            <a:picLocks noChangeAspect="1"/>
+          </p:cNvPicPr>
+          <p:nvPr/>
+        </p:nvPicPr>
+        <p:blipFill>
+          <a:blip r:embed="rId3"/>
+          <a:stretch>
+            <a:fillRect/>
+          </a:stretch>
+        </p:blipFill>
+        <p:spPr>
+          <a:xfrm>
+            <a:off x="10362895" y="320040"/>
+            <a:ext cx="1371600" cy="518746"/>
+          </a:xfrm>
+          <a:prstGeom prst="rect">
+            <a:avLst/>
+          </a:prstGeom>
+        </p:spPr>
+      </p:pic>
+      <p:sp>
+        <p:nvSpPr>
+          <p:cNvPr id="5" name="TextBox 4"/>
+          <p:cNvSpPr txBox="1"/>
+          <p:nvPr/>
+        </p:nvSpPr>
+        <p:spPr>
+          <a:xfrm>
+            <a:off x="640080" y="1325880"/>
+            <a:ext cx="10881360" cy="4937760"/>
+          </a:xfrm>
+          <a:prstGeom prst="rect">
+            <a:avLst/>
+          </a:prstGeom>
+          <a:noFill/>
+        </p:spPr>
+        <p:txBody>
+          <a:bodyPr wrap="square" lIns="0" rIns="0" tIns="0" bIns="0">
+            <a:spAutoFit/>
+          </a:bodyPr>
+          <a:lstStyle/>
+          <a:p>
+            <a:pPr marL="177800" indent="-177800">
+              <a:spcAft>
+                <a:spcPts val="800"/>
+              </a:spcAft>
+              <a:buChar char="•"/>
+            </a:pPr>
+            <a:r>
+              <a:rPr sz="1500" b="1">
+                <a:solidFill>
+                  <a:srgbClr val="1D2F82"/>
+                </a:solidFill>
+                <a:latin typeface="Calibri"/>
+              </a:rPr>
+              <a:t>Problem recap</a:t>
+            </a:r>
+          </a:p>
+          <a:p>
+            <a:pPr marL="450000" indent="-177800">
+              <a:spcAft>
+                <a:spcPts val="800"/>
+              </a:spcAft>
+              <a:buChar char="-"/>
+            </a:pPr>
+            <a:r>
+              <a:rPr sz="1300" b="0">
+                <a:solidFill>
+                  <a:srgbClr val="000000"/>
+                </a:solidFill>
+                <a:latin typeface="Calibri"/>
+              </a:rPr>
+              <a:t>A PLL's ring-VCO drifts with temperature -- threshold voltage, mobility and capacitance all shift, so the same control voltage gives a different frequency hot vs. cold.</a:t>
+            </a:r>
+          </a:p>
+          <a:p>
+            <a:pPr marL="450000" indent="-177800">
+              <a:spcAft>
+                <a:spcPts val="800"/>
+              </a:spcAft>
+              <a:buChar char="-"/>
+            </a:pPr>
+            <a:r>
+              <a:rPr sz="1300" b="0">
+                <a:solidFill>
+                  <a:srgbClr val="000000"/>
+                </a:solidFill>
+                <a:latin typeface="Calibri"/>
+              </a:rPr>
+              <a:t>A compensation network cancels this by design, but sizing it needs a drift figure measured on the real topology, in the real process -- not assumed.</a:t>
+            </a:r>
+          </a:p>
+          <a:p>
+            <a:pPr marL="177800" indent="-177800">
+              <a:spcAft>
+                <a:spcPts val="800"/>
+              </a:spcAft>
+              <a:buChar char="•"/>
+            </a:pPr>
+            <a:r>
+              <a:rPr sz="1500" b="1">
+                <a:solidFill>
+                  <a:srgbClr val="1D2F82"/>
+                </a:solidFill>
+                <a:latin typeface="Calibri"/>
+              </a:rPr>
+              <a:t>Objectives</a:t>
+            </a:r>
+          </a:p>
+          <a:p>
+            <a:pPr marL="450000" indent="-177800">
+              <a:spcAft>
+                <a:spcPts val="800"/>
+              </a:spcAft>
+              <a:buChar char="-"/>
+            </a:pPr>
+            <a:r>
+              <a:rPr sz="1300" b="0">
+                <a:solidFill>
+                  <a:srgbClr val="000000"/>
+                </a:solidFill>
+                <a:latin typeface="Calibri"/>
+              </a:rPr>
+              <a:t>Design an integer-N charge-pump PLL (ref -&gt; PFD -&gt; charge pump -&gt; loop filter -&gt; 5-stage current-starved ring VCO -&gt; /8 divider) in sky130, open-source, headless.</a:t>
+            </a:r>
+          </a:p>
+          <a:p>
+            <a:pPr marL="450000" indent="-177800">
+              <a:spcAft>
+                <a:spcPts val="800"/>
+              </a:spcAft>
+              <a:buChar char="-"/>
+            </a:pPr>
+            <a:r>
+              <a:rPr sz="1300" b="0">
+                <a:solidFill>
+                  <a:srgbClr val="000000"/>
+                </a:solidFill>
+                <a:latin typeface="Calibri"/>
+              </a:rPr>
+              <a:t>Measure uncompensated drift across all 5 process corners, then design and validate a temperature-compensation network with real statistical rigor (Monte Carlo + hypothesis testing).</a:t>
+            </a:r>
+          </a:p>
+          <a:p>
+            <a:pPr marL="177800" indent="-177800">
+              <a:spcAft>
+                <a:spcPts val="800"/>
+              </a:spcAft>
+              <a:buChar char="•"/>
+            </a:pPr>
+            <a:r>
+              <a:rPr sz="1500" b="1">
+                <a:solidFill>
+                  <a:srgbClr val="1D2F82"/>
+                </a:solidFill>
+                <a:latin typeface="Calibri"/>
+              </a:rPr>
+              <a:t>Refinements after Review-I feedback</a:t>
+            </a:r>
+          </a:p>
+          <a:p>
+            <a:pPr marL="450000" indent="-177800">
+              <a:spcAft>
+                <a:spcPts val="800"/>
+              </a:spcAft>
+              <a:buChar char="-"/>
+            </a:pPr>
+            <a:r>
+              <a:rPr sz="1300" b="0">
+                <a:solidFill>
+                  <a:srgbClr val="000000"/>
+                </a:solidFill>
+                <a:latin typeface="Calibri"/>
+              </a:rPr>
+              <a:t>Full 5-corner grid run (tt/ff/ss/sf/fs), not a 3-corner spot-check -- corrected the reported tempco spread from 3.4x to the real 12.5x (112-1399 ppm/C).</a:t>
+            </a:r>
+          </a:p>
+          <a:p>
+            <a:pPr marL="450000" indent="-177800">
+              <a:spcAft>
+                <a:spcPts val="800"/>
+              </a:spcAft>
+              <a:buChar char="-"/>
+            </a:pPr>
+            <a:r>
+              <a:rPr sz="1300" b="0">
+                <a:solidFill>
+                  <a:srgbClr val="000000"/>
+                </a:solidFill>
+                <a:latin typeface="Calibri"/>
+              </a:rPr>
+              <a:t>Cold-start acquisition risk (flagged as open in Review 1) fixed and verified: a true 0V cold start now locks in 839 ns.</a:t>
+            </a:r>
+          </a:p>
+          <a:p>
+            <a:pPr marL="450000" indent="-177800">
+              <a:spcAft>
+                <a:spcPts val="800"/>
+              </a:spcAft>
+              <a:buChar char="-"/>
+            </a:pPr>
+            <a:r>
+              <a:rPr sz="1300" b="0">
+                <a:solidFill>
+                  <a:srgbClr val="000000"/>
+                </a:solidFill>
+                <a:latin typeface="Calibri"/>
+              </a:rPr>
+              <a:t>Added a second-order (curvature-matched) compensation network, novelty-checked against prior art before committing to the claim (see Literature Review).</a:t>
+            </a:r>
+          </a:p>
+        </p:txBody>
+      </p:sp>
+    </p:spTree>
+  </p:cSld>
+  <p:clrMapOvr>
+    <a:masterClrMapping/>
+  </p:clrMapOvr>
+</p:sld>
+</file>
+
+<file path=ppt/slides/slide20.xml><?xml version="1.0" encoding="utf-8"?>
+<p:sld xmlns:a="http://schemas.openxmlformats.org/drawingml/2006/main" xmlns:p="http://schemas.openxmlformats.org/presentationml/2006/main" xmlns:r="http://schemas.openxmlformats.org/officeDocument/2006/relationships">
+  <p:cSld>
+    <p:spTree>
+      <p:nvGrpSpPr>
+        <p:cNvPr id="1" name=""/>
+        <p:cNvGrpSpPr/>
+        <p:nvPr/>
+      </p:nvGrpSpPr>
+      <p:grpSpPr/>
+      <p:sp>
+        <p:nvSpPr>
+          <p:cNvPr id="2" name="Text 0"/>
+          <p:cNvSpPr txBox="1"/>
+          <p:nvPr/>
+        </p:nvSpPr>
+        <p:spPr>
+          <a:xfrm>
+            <a:off x="11460175" y="6446520"/>
+            <a:ext cx="457200" cy="274320"/>
+          </a:xfrm>
+          <a:prstGeom prst="rect">
+            <a:avLst/>
+          </a:prstGeom>
+          <a:noFill/>
+          <a:ln/>
+        </p:spPr>
+        <p:txBody>
+          <a:bodyPr wrap="square" lIns="0" tIns="0" rIns="0" bIns="0" rtlCol="0" anchor="ctr"/>
+          <a:lstStyle/>
+          <a:p>
+            <a:pPr marL="0" indent="0" algn="r">
+              <a:buNone/>
+            </a:pPr>
+            <a:r>
+              <a:rPr lang="en-US" sz="1000" dirty="0">
+                <a:solidFill>
+                  <a:srgbClr val="808080"/>
+                </a:solidFill>
+                <a:latin typeface="Calibri" pitchFamily="34" charset="0"/>
+                <a:ea typeface="Calibri" pitchFamily="34" charset="-122"/>
+                <a:cs typeface="Calibri" pitchFamily="34" charset="-120"/>
+              </a:rPr>
+              <a:t>14</a:t>
             </a:r>
             <a:endParaRPr lang="en-US" sz="1000" dirty="0"/>
           </a:p>
@@ -14287,335 +19008,7 @@
 </p:sld>
 </file>
 
-<file path=ppt/slides/slide2.xml><?xml version="1.0" encoding="utf-8"?>
-<p:sld xmlns:a="http://schemas.openxmlformats.org/drawingml/2006/main" xmlns:r="http://schemas.openxmlformats.org/officeDocument/2006/relationships" xmlns:p="http://schemas.openxmlformats.org/presentationml/2006/main">
-  <p:cSld name="Slide 4">
-    <p:bg>
-      <p:bgPr>
-        <a:solidFill>
-          <a:srgbClr val="FFFFFF"/>
-        </a:solidFill>
-        <a:effectLst/>
-      </p:bgPr>
-    </p:bg>
-    <p:spTree>
-      <p:nvGrpSpPr>
-        <p:cNvPr id="1" name=""/>
-        <p:cNvGrpSpPr/>
-        <p:nvPr/>
-      </p:nvGrpSpPr>
-      <p:grpSpPr>
-        <a:xfrm>
-          <a:off x="0" y="0"/>
-          <a:ext cx="0" cy="0"/>
-          <a:chOff x="0" y="0"/>
-          <a:chExt cx="0" cy="0"/>
-        </a:xfrm>
-      </p:grpSpPr>
-      <p:sp>
-        <p:nvSpPr>
-          <p:cNvPr id="2" name="Text 0"/>
-          <p:cNvSpPr txBox="1"/>
-          <p:nvPr/>
-        </p:nvSpPr>
-        <p:spPr>
-          <a:xfrm>
-            <a:off x="11460175" y="6446520"/>
-            <a:ext cx="457200" cy="274320"/>
-          </a:xfrm>
-          <a:prstGeom prst="rect">
-            <a:avLst/>
-          </a:prstGeom>
-          <a:noFill/>
-          <a:ln/>
-        </p:spPr>
-        <p:txBody>
-          <a:bodyPr wrap="square" lIns="0" tIns="0" rIns="0" bIns="0" rtlCol="0" anchor="ctr"/>
-          <a:lstStyle/>
-          <a:p>
-            <a:pPr marL="0" indent="0" algn="r">
-              <a:buNone/>
-            </a:pPr>
-            <a:r>
-              <a:rPr lang="en-US" sz="1000" dirty="0">
-                <a:solidFill>
-                  <a:srgbClr val="808080"/>
-                </a:solidFill>
-                <a:latin typeface="Calibri" pitchFamily="34" charset="0"/>
-                <a:ea typeface="Calibri" pitchFamily="34" charset="-122"/>
-                <a:cs typeface="Calibri" pitchFamily="34" charset="-120"/>
-              </a:rPr>
-              <a:t>2</a:t>
-            </a:r>
-            <a:endParaRPr lang="en-US" sz="1000" dirty="0"/>
-          </a:p>
-        </p:txBody>
-      </p:sp>
-      <p:sp>
-        <p:nvSpPr>
-          <p:cNvPr id="3" name="Text 1"/>
-          <p:cNvSpPr txBox="1"/>
-          <p:nvPr/>
-        </p:nvSpPr>
-        <p:spPr>
-          <a:xfrm>
-            <a:off x="548640" y="320040"/>
-            <a:ext cx="9601200" cy="685800"/>
-          </a:xfrm>
-          <a:prstGeom prst="rect">
-            <a:avLst/>
-          </a:prstGeom>
-          <a:noFill/>
-          <a:ln/>
-        </p:spPr>
-        <p:txBody>
-          <a:bodyPr wrap="square" lIns="0" tIns="0" rIns="0" bIns="0" rtlCol="0" anchor="ctr"/>
-          <a:lstStyle/>
-          <a:p>
-            <a:pPr marL="0" indent="0">
-              <a:buNone/>
-            </a:pPr>
-            <a:r>
-              <a:rPr lang="en-US" sz="2800" b="1" dirty="0">
-                <a:solidFill>
-                  <a:srgbClr val="1D2F82"/>
-                </a:solidFill>
-                <a:latin typeface="Calibri" pitchFamily="34" charset="0"/>
-                <a:ea typeface="Calibri" pitchFamily="34" charset="-122"/>
-                <a:cs typeface="Calibri" pitchFamily="34" charset="-120"/>
-              </a:rPr>
-              <a:t>Introduction &amp; Problem Recap</a:t>
-            </a:r>
-            <a:endParaRPr lang="en-US" sz="2800" dirty="0"/>
-          </a:p>
-        </p:txBody>
-      </p:sp>
-      <p:pic>
-        <p:nvPicPr>
-          <p:cNvPr id="4" name="Image 0" descr="logo.png"/>
-          <p:cNvPicPr>
-            <a:picLocks noChangeAspect="1"/>
-          </p:cNvPicPr>
-          <p:nvPr/>
-        </p:nvPicPr>
-        <p:blipFill>
-          <a:blip r:embed="rId3"/>
-          <a:stretch>
-            <a:fillRect/>
-          </a:stretch>
-        </p:blipFill>
-        <p:spPr>
-          <a:xfrm>
-            <a:off x="10362895" y="320040"/>
-            <a:ext cx="1371600" cy="518746"/>
-          </a:xfrm>
-          <a:prstGeom prst="rect">
-            <a:avLst/>
-          </a:prstGeom>
-        </p:spPr>
-      </p:pic>
-      <p:sp>
-        <p:nvSpPr>
-          <p:cNvPr id="5" name="TextBox 4"/>
-          <p:cNvSpPr txBox="1"/>
-          <p:nvPr/>
-        </p:nvSpPr>
-        <p:spPr>
-          <a:xfrm>
-            <a:off x="640080" y="1325880"/>
-            <a:ext cx="10881360" cy="4937760"/>
-          </a:xfrm>
-          <a:prstGeom prst="rect">
-            <a:avLst/>
-          </a:prstGeom>
-          <a:noFill/>
-        </p:spPr>
-        <p:txBody>
-          <a:bodyPr wrap="square" lIns="0" rIns="0" tIns="0" bIns="0">
-            <a:spAutoFit/>
-          </a:bodyPr>
-          <a:lstStyle/>
-          <a:p>
-            <a:pPr marL="177800" indent="-177800">
-              <a:spcAft>
-                <a:spcPts val="800"/>
-              </a:spcAft>
-              <a:buChar char="•"/>
-            </a:pPr>
-            <a:r>
-              <a:rPr sz="1500" b="1">
-                <a:solidFill>
-                  <a:srgbClr val="1D2F82"/>
-                </a:solidFill>
-                <a:latin typeface="Calibri"/>
-              </a:rPr>
-              <a:t>Problem recap</a:t>
-            </a:r>
-          </a:p>
-          <a:p>
-            <a:pPr marL="450000" indent="-177800">
-              <a:spcAft>
-                <a:spcPts val="800"/>
-              </a:spcAft>
-              <a:buChar char="-"/>
-            </a:pPr>
-            <a:r>
-              <a:rPr sz="1300" b="0">
-                <a:solidFill>
-                  <a:srgbClr val="000000"/>
-                </a:solidFill>
-                <a:latin typeface="Calibri"/>
-              </a:rPr>
-              <a:t>A PLL's ring-VCO drifts with temperature -- threshold voltage, mobility and capacitance all shift, so the same control voltage gives a different frequency hot vs. cold.</a:t>
-            </a:r>
-          </a:p>
-          <a:p>
-            <a:pPr marL="450000" indent="-177800">
-              <a:spcAft>
-                <a:spcPts val="800"/>
-              </a:spcAft>
-              <a:buChar char="-"/>
-            </a:pPr>
-            <a:r>
-              <a:rPr sz="1300" b="0">
-                <a:solidFill>
-                  <a:srgbClr val="000000"/>
-                </a:solidFill>
-                <a:latin typeface="Calibri"/>
-              </a:rPr>
-              <a:t>A compensation network cancels this by design, but sizing it needs a drift figure measured on the real topology, in the real process -- not assumed.</a:t>
-            </a:r>
-          </a:p>
-          <a:p>
-            <a:pPr marL="177800" indent="-177800">
-              <a:spcAft>
-                <a:spcPts val="800"/>
-              </a:spcAft>
-              <a:buChar char="•"/>
-            </a:pPr>
-            <a:r>
-              <a:rPr sz="1500" b="1">
-                <a:solidFill>
-                  <a:srgbClr val="1D2F82"/>
-                </a:solidFill>
-                <a:latin typeface="Calibri"/>
-              </a:rPr>
-              <a:t>Objectives</a:t>
-            </a:r>
-          </a:p>
-          <a:p>
-            <a:pPr marL="450000" indent="-177800">
-              <a:spcAft>
-                <a:spcPts val="800"/>
-              </a:spcAft>
-              <a:buChar char="-"/>
-            </a:pPr>
-            <a:r>
-              <a:rPr sz="1300" b="0">
-                <a:solidFill>
-                  <a:srgbClr val="000000"/>
-                </a:solidFill>
-                <a:latin typeface="Calibri"/>
-              </a:rPr>
-              <a:t>Design an integer-N charge-pump PLL (ref -&gt; PFD -&gt; charge pump -&gt; loop filter -&gt; 5-stage current-starved ring VCO -&gt; /8 divider) in sky130, open-source, headless.</a:t>
-            </a:r>
-          </a:p>
-          <a:p>
-            <a:pPr marL="450000" indent="-177800">
-              <a:spcAft>
-                <a:spcPts val="800"/>
-              </a:spcAft>
-              <a:buChar char="-"/>
-            </a:pPr>
-            <a:r>
-              <a:rPr sz="1300" b="0">
-                <a:solidFill>
-                  <a:srgbClr val="000000"/>
-                </a:solidFill>
-                <a:latin typeface="Calibri"/>
-              </a:rPr>
-              <a:t>Measure uncompensated drift across all 5 process corners, then design and validate a temperature-compensation network with real statistical rigor (Monte Carlo + hypothesis testing).</a:t>
-            </a:r>
-          </a:p>
-          <a:p>
-            <a:pPr marL="177800" indent="-177800">
-              <a:spcAft>
-                <a:spcPts val="800"/>
-              </a:spcAft>
-              <a:buChar char="•"/>
-            </a:pPr>
-            <a:r>
-              <a:rPr sz="1500" b="1">
-                <a:solidFill>
-                  <a:srgbClr val="1D2F82"/>
-                </a:solidFill>
-                <a:latin typeface="Calibri"/>
-              </a:rPr>
-              <a:t>Refinements after Review-I feedback</a:t>
-            </a:r>
-          </a:p>
-          <a:p>
-            <a:pPr marL="450000" indent="-177800">
-              <a:spcAft>
-                <a:spcPts val="800"/>
-              </a:spcAft>
-              <a:buChar char="-"/>
-            </a:pPr>
-            <a:r>
-              <a:rPr sz="1300" b="0">
-                <a:solidFill>
-                  <a:srgbClr val="000000"/>
-                </a:solidFill>
-                <a:latin typeface="Calibri"/>
-              </a:rPr>
-              <a:t>Full 5-corner grid run (tt/ff/ss/sf/fs), not a 3-corner spot-check -- corrected the reported tempco spread from 3.4x to the real 12.5x (112-1399 ppm/C).</a:t>
-            </a:r>
-          </a:p>
-          <a:p>
-            <a:pPr marL="450000" indent="-177800">
-              <a:spcAft>
-                <a:spcPts val="800"/>
-              </a:spcAft>
-              <a:buChar char="-"/>
-            </a:pPr>
-            <a:r>
-              <a:rPr sz="1300" b="0">
-                <a:solidFill>
-                  <a:srgbClr val="000000"/>
-                </a:solidFill>
-                <a:latin typeface="Calibri"/>
-              </a:rPr>
-              <a:t>Cold-start acquisition risk (flagged as open in Review 1) fixed and verified: a true 0V cold start now locks in 839 ns.</a:t>
-            </a:r>
-          </a:p>
-          <a:p>
-            <a:pPr marL="450000" indent="-177800">
-              <a:spcAft>
-                <a:spcPts val="800"/>
-              </a:spcAft>
-              <a:buChar char="-"/>
-            </a:pPr>
-            <a:r>
-              <a:rPr sz="1300" b="0">
-                <a:solidFill>
-                  <a:srgbClr val="000000"/>
-                </a:solidFill>
-                <a:latin typeface="Calibri"/>
-              </a:rPr>
-              <a:t>Added a second-order (curvature-matched) compensation network, novelty-checked against prior art before committing to the claim (see Literature Review).</a:t>
-            </a:r>
-          </a:p>
-        </p:txBody>
-      </p:sp>
-    </p:spTree>
-  </p:cSld>
-  <p:clrMapOvr>
-    <a:masterClrMapping/>
-  </p:clrMapOvr>
-</p:sld>
-</file>
-
-<file path=ppt/slides/slide20.xml><?xml version="1.0" encoding="utf-8"?>
+<file path=ppt/slides/slide21.xml><?xml version="1.0" encoding="utf-8"?>
 <p:sld xmlns:a="http://schemas.openxmlformats.org/drawingml/2006/main" xmlns:p="http://schemas.openxmlformats.org/presentationml/2006/main" xmlns:r="http://schemas.openxmlformats.org/officeDocument/2006/relationships">
   <p:cSld>
     <p:spTree>
@@ -14658,7 +19051,7 @@
                 <a:ea typeface="Calibri" pitchFamily="34" charset="-122"/>
                 <a:cs typeface="Calibri" pitchFamily="34" charset="-120"/>
               </a:rPr>
-              <a:t>15</a:t>
+              <a:t>16</a:t>
             </a:r>
             <a:endParaRPr lang="en-US" sz="1000" dirty="0"/>
           </a:p>
@@ -15040,7 +19433,7 @@
 </p:sld>
 </file>
 
-<file path=ppt/slides/slide21.xml><?xml version="1.0" encoding="utf-8"?>
+<file path=ppt/slides/slide22.xml><?xml version="1.0" encoding="utf-8"?>
 <p:sld xmlns:a="http://schemas.openxmlformats.org/drawingml/2006/main" xmlns:p="http://schemas.openxmlformats.org/presentationml/2006/main" xmlns:r="http://schemas.openxmlformats.org/officeDocument/2006/relationships">
   <p:cSld>
     <p:spTree>
@@ -15083,7 +19476,7 @@
                 <a:ea typeface="Calibri" pitchFamily="34" charset="-122"/>
                 <a:cs typeface="Calibri" pitchFamily="34" charset="-120"/>
               </a:rPr>
-              <a:t>16</a:t>
+              <a:t>17</a:t>
             </a:r>
             <a:endParaRPr lang="en-US" sz="1000" dirty="0"/>
           </a:p>
@@ -15548,7 +19941,7 @@
 </p:sld>
 </file>
 
-<file path=ppt/slides/slide22.xml><?xml version="1.0" encoding="utf-8"?>
+<file path=ppt/slides/slide23.xml><?xml version="1.0" encoding="utf-8"?>
 <p:sld xmlns:a="http://schemas.openxmlformats.org/drawingml/2006/main" xmlns:p="http://schemas.openxmlformats.org/presentationml/2006/main" xmlns:r="http://schemas.openxmlformats.org/officeDocument/2006/relationships">
   <p:cSld>
     <p:spTree>
@@ -15591,7 +19984,7 @@
                 <a:ea typeface="Calibri" pitchFamily="34" charset="-122"/>
                 <a:cs typeface="Calibri" pitchFamily="34" charset="-120"/>
               </a:rPr>
-              <a:t>18</a:t>
+              <a:t>19</a:t>
             </a:r>
             <a:endParaRPr lang="en-US" sz="1000" dirty="0"/>
           </a:p>
@@ -15866,7 +20259,7 @@
                 </a:solidFill>
                 <a:latin typeface="Calibri"/>
               </a:rPr>
-              <a:t>spec (analytic model: 450 ns)</a:t>
+              <a:t>spec (averaged model: 573 ns)</a:t>
             </a:r>
           </a:p>
         </p:txBody>
@@ -15957,7 +20350,7 @@
 </p:sld>
 </file>
 
-<file path=ppt/slides/slide23.xml><?xml version="1.0" encoding="utf-8"?>
+<file path=ppt/slides/slide24.xml><?xml version="1.0" encoding="utf-8"?>
 <p:sld xmlns:a="http://schemas.openxmlformats.org/drawingml/2006/main" xmlns:p="http://schemas.openxmlformats.org/presentationml/2006/main" xmlns:r="http://schemas.openxmlformats.org/officeDocument/2006/relationships">
   <p:cSld>
     <p:spTree>
@@ -16001,6 +20394,600 @@
                 <a:cs typeface="Calibri" pitchFamily="34" charset="-120"/>
               </a:rPr>
               <a:t>20</a:t>
+            </a:r>
+            <a:endParaRPr lang="en-US" sz="1000" dirty="0"/>
+          </a:p>
+        </p:txBody>
+      </p:sp>
+      <p:sp>
+        <p:nvSpPr>
+          <p:cNvPr id="3" name="TextBox 2"/>
+          <p:cNvSpPr txBox="1"/>
+          <p:nvPr/>
+        </p:nvSpPr>
+        <p:spPr>
+          <a:xfrm>
+            <a:off x="548640" y="320040"/>
+            <a:ext cx="9601200" cy="685800"/>
+          </a:xfrm>
+          <a:prstGeom prst="rect">
+            <a:avLst/>
+          </a:prstGeom>
+          <a:noFill/>
+        </p:spPr>
+        <p:txBody>
+          <a:bodyPr wrap="square">
+            <a:spAutoFit/>
+          </a:bodyPr>
+          <a:lstStyle/>
+          <a:p>
+            <a:r>
+              <a:rPr sz="2800" b="1">
+                <a:solidFill>
+                  <a:srgbClr val="1D2F82"/>
+                </a:solidFill>
+                <a:latin typeface="Calibri"/>
+              </a:rPr>
+              <a:t>Loop Dynamics: Corrected Numbers</a:t>
+            </a:r>
+          </a:p>
+        </p:txBody>
+      </p:sp>
+      <p:pic>
+        <p:nvPicPr>
+          <p:cNvPr id="4" name="Picture 3" descr="image.png"/>
+          <p:cNvPicPr>
+            <a:picLocks noChangeAspect="1"/>
+          </p:cNvPicPr>
+          <p:nvPr/>
+        </p:nvPicPr>
+        <p:blipFill>
+          <a:blip r:embed="rId2"/>
+          <a:stretch>
+            <a:fillRect/>
+          </a:stretch>
+        </p:blipFill>
+        <p:spPr>
+          <a:xfrm>
+            <a:off x="10362895" y="320040"/>
+            <a:ext cx="1371600" cy="518746"/>
+          </a:xfrm>
+          <a:prstGeom prst="rect">
+            <a:avLst/>
+          </a:prstGeom>
+        </p:spPr>
+      </p:pic>
+      <p:graphicFrame>
+        <p:nvGraphicFramePr>
+          <p:cNvPr id="5" name="Chart 4"/>
+          <p:cNvGraphicFramePr>
+            <a:graphicFrameLocks noGrp="1"/>
+          </p:cNvGraphicFramePr>
+          <p:nvPr/>
+        </p:nvGraphicFramePr>
+        <p:xfrm>
+          <a:off x="640080" y="1225880"/>
+          <a:ext cx="6000000" cy="4300000"/>
+        </p:xfrm>
+        <a:graphic>
+          <a:graphicData uri="http://schemas.openxmlformats.org/drawingml/2006/chart">
+            <c:chart xmlns:c="http://schemas.openxmlformats.org/drawingml/2006/chart" r:id="rId3"/>
+          </a:graphicData>
+        </a:graphic>
+      </p:graphicFrame>
+      <p:sp>
+        <p:nvSpPr>
+          <p:cNvPr id="6" name="Rectangle 5"/>
+          <p:cNvSpPr/>
+          <p:nvPr/>
+        </p:nvSpPr>
+        <p:spPr>
+          <a:xfrm>
+            <a:off x="6900000" y="1325880"/>
+            <a:ext cx="2150000" cy="1050000"/>
+          </a:xfrm>
+          <a:prstGeom prst="rect">
+            <a:avLst/>
+          </a:prstGeom>
+          <a:solidFill>
+            <a:srgbClr val="F2F4FB"/>
+          </a:solidFill>
+          <a:ln>
+            <a:solidFill>
+              <a:srgbClr val="C0392B"/>
+            </a:solidFill>
+          </a:ln>
+        </p:spPr>
+        <p:style>
+          <a:lnRef idx="1">
+            <a:schemeClr val="accent1"/>
+          </a:lnRef>
+          <a:fillRef idx="3">
+            <a:schemeClr val="accent1"/>
+          </a:fillRef>
+          <a:effectRef idx="2">
+            <a:schemeClr val="accent1"/>
+          </a:effectRef>
+          <a:fontRef idx="minor">
+            <a:schemeClr val="lt1"/>
+          </a:fontRef>
+        </p:style>
+        <p:txBody>
+          <a:bodyPr rtlCol="0" anchor="ctr" wrap="square"/>
+          <a:lstStyle/>
+          <a:p>
+            <a:pPr algn="ctr"/>
+            <a:r>
+              <a:rPr sz="2200" b="1">
+                <a:solidFill>
+                  <a:srgbClr val="C0392B"/>
+                </a:solidFill>
+                <a:latin typeface="Calibri"/>
+              </a:rPr>
+              <a:t>ζ ≈ 0.33</a:t>
+            </a:r>
+          </a:p>
+          <a:p>
+            <a:pPr algn="ctr"/>
+            <a:r>
+              <a:rPr sz="1100" b="0">
+                <a:solidFill>
+                  <a:srgbClr val="333333"/>
+                </a:solidFill>
+                <a:latin typeface="Calibri"/>
+              </a:rPr>
+              <a:t>damping (Review 1 claimed 0.72)</a:t>
+            </a:r>
+          </a:p>
+        </p:txBody>
+      </p:sp>
+      <p:sp>
+        <p:nvSpPr>
+          <p:cNvPr id="7" name="Rectangle 6"/>
+          <p:cNvSpPr/>
+          <p:nvPr/>
+        </p:nvSpPr>
+        <p:spPr>
+          <a:xfrm>
+            <a:off x="9250000" y="1325880"/>
+            <a:ext cx="2250000" cy="1050000"/>
+          </a:xfrm>
+          <a:prstGeom prst="rect">
+            <a:avLst/>
+          </a:prstGeom>
+          <a:solidFill>
+            <a:srgbClr val="F2F4FB"/>
+          </a:solidFill>
+          <a:ln>
+            <a:solidFill>
+              <a:srgbClr val="C0392B"/>
+            </a:solidFill>
+          </a:ln>
+        </p:spPr>
+        <p:style>
+          <a:lnRef idx="1">
+            <a:schemeClr val="accent1"/>
+          </a:lnRef>
+          <a:fillRef idx="3">
+            <a:schemeClr val="accent1"/>
+          </a:fillRef>
+          <a:effectRef idx="2">
+            <a:schemeClr val="accent1"/>
+          </a:effectRef>
+          <a:fontRef idx="minor">
+            <a:schemeClr val="lt1"/>
+          </a:fontRef>
+        </p:style>
+        <p:txBody>
+          <a:bodyPr rtlCol="0" anchor="ctr" wrap="square"/>
+          <a:lstStyle/>
+          <a:p>
+            <a:pPr algn="ctr"/>
+            <a:r>
+              <a:rPr sz="2000" b="1">
+                <a:solidFill>
+                  <a:srgbClr val="C0392B"/>
+                </a:solidFill>
+                <a:latin typeface="Calibri"/>
+              </a:rPr>
+              <a:t>f_n ≈ 0.9 MHz</a:t>
+            </a:r>
+          </a:p>
+          <a:p>
+            <a:pPr algn="ctr"/>
+            <a:r>
+              <a:rPr sz="1100" b="0">
+                <a:solidFill>
+                  <a:srgbClr val="333333"/>
+                </a:solidFill>
+                <a:latin typeface="Calibri"/>
+              </a:rPr>
+              <a:t>natural freq. (claimed 2 MHz)</a:t>
+            </a:r>
+          </a:p>
+        </p:txBody>
+      </p:sp>
+      <p:sp>
+        <p:nvSpPr>
+          <p:cNvPr id="8" name="Rectangle 7"/>
+          <p:cNvSpPr/>
+          <p:nvPr/>
+        </p:nvSpPr>
+        <p:spPr>
+          <a:xfrm>
+            <a:off x="6900000" y="2525880"/>
+            <a:ext cx="2150000" cy="1050000"/>
+          </a:xfrm>
+          <a:prstGeom prst="rect">
+            <a:avLst/>
+          </a:prstGeom>
+          <a:solidFill>
+            <a:srgbClr val="F2F4FB"/>
+          </a:solidFill>
+          <a:ln>
+            <a:solidFill>
+              <a:srgbClr val="C0392B"/>
+            </a:solidFill>
+          </a:ln>
+        </p:spPr>
+        <p:style>
+          <a:lnRef idx="1">
+            <a:schemeClr val="accent1"/>
+          </a:lnRef>
+          <a:fillRef idx="3">
+            <a:schemeClr val="accent1"/>
+          </a:fillRef>
+          <a:effectRef idx="2">
+            <a:schemeClr val="accent1"/>
+          </a:effectRef>
+          <a:fontRef idx="minor">
+            <a:schemeClr val="lt1"/>
+          </a:fontRef>
+        </p:style>
+        <p:txBody>
+          <a:bodyPr rtlCol="0" anchor="ctr" wrap="square"/>
+          <a:lstStyle/>
+          <a:p>
+            <a:pPr algn="ctr"/>
+            <a:r>
+              <a:rPr sz="2200" b="1">
+                <a:solidFill>
+                  <a:srgbClr val="C0392B"/>
+                </a:solidFill>
+                <a:latin typeface="Calibri"/>
+              </a:rPr>
+              <a:t>≈ 30°</a:t>
+            </a:r>
+          </a:p>
+          <a:p>
+            <a:pPr algn="ctr"/>
+            <a:r>
+              <a:rPr sz="1100" b="0">
+                <a:solidFill>
+                  <a:srgbClr val="333333"/>
+                </a:solidFill>
+                <a:latin typeface="Calibri"/>
+              </a:rPr>
+              <a:t>phase margin (claimed 70°)</a:t>
+            </a:r>
+          </a:p>
+        </p:txBody>
+      </p:sp>
+      <p:sp>
+        <p:nvSpPr>
+          <p:cNvPr id="9" name="Rectangle 8"/>
+          <p:cNvSpPr/>
+          <p:nvPr/>
+        </p:nvSpPr>
+        <p:spPr>
+          <a:xfrm>
+            <a:off x="9250000" y="2525880"/>
+            <a:ext cx="2250000" cy="1050000"/>
+          </a:xfrm>
+          <a:prstGeom prst="rect">
+            <a:avLst/>
+          </a:prstGeom>
+          <a:solidFill>
+            <a:srgbClr val="F2F4FB"/>
+          </a:solidFill>
+          <a:ln>
+            <a:solidFill>
+              <a:srgbClr val="2E8B57"/>
+            </a:solidFill>
+          </a:ln>
+        </p:spPr>
+        <p:style>
+          <a:lnRef idx="1">
+            <a:schemeClr val="accent1"/>
+          </a:lnRef>
+          <a:fillRef idx="3">
+            <a:schemeClr val="accent1"/>
+          </a:fillRef>
+          <a:effectRef idx="2">
+            <a:schemeClr val="accent1"/>
+          </a:effectRef>
+          <a:fontRef idx="minor">
+            <a:schemeClr val="lt1"/>
+          </a:fontRef>
+        </p:style>
+        <p:txBody>
+          <a:bodyPr rtlCol="0" anchor="ctr" wrap="square"/>
+          <a:lstStyle/>
+          <a:p>
+            <a:pPr algn="ctr"/>
+            <a:r>
+              <a:rPr sz="2000" b="1">
+                <a:solidFill>
+                  <a:srgbClr val="2E8B57"/>
+                </a:solidFill>
+                <a:latin typeface="Calibri"/>
+              </a:rPr>
+              <a:t>573 vs 577 ns</a:t>
+            </a:r>
+          </a:p>
+          <a:p>
+            <a:pPr algn="ctr"/>
+            <a:r>
+              <a:rPr sz="1100" b="0">
+                <a:solidFill>
+                  <a:srgbClr val="333333"/>
+                </a:solidFill>
+                <a:latin typeface="Calibri"/>
+              </a:rPr>
+              <a:t>model vs transistor lock</a:t>
+            </a:r>
+          </a:p>
+        </p:txBody>
+      </p:sp>
+      <p:sp>
+        <p:nvSpPr>
+          <p:cNvPr id="10" name="TextBox 9"/>
+          <p:cNvSpPr txBox="1"/>
+          <p:nvPr/>
+        </p:nvSpPr>
+        <p:spPr>
+          <a:xfrm>
+            <a:off x="6900000" y="3775880"/>
+            <a:ext cx="4600000" cy="2200000"/>
+          </a:xfrm>
+          <a:prstGeom prst="rect">
+            <a:avLst/>
+          </a:prstGeom>
+          <a:noFill/>
+        </p:spPr>
+        <p:txBody>
+          <a:bodyPr wrap="square">
+            <a:spAutoFit/>
+          </a:bodyPr>
+          <a:lstStyle/>
+          <a:p>
+            <a:pPr>
+              <a:spcAft>
+                <a:spcPts val="600"/>
+              </a:spcAft>
+            </a:pPr>
+            <a:r>
+              <a:rPr sz="1100" b="1">
+                <a:solidFill>
+                  <a:srgbClr val="1D2F82"/>
+                </a:solidFill>
+                <a:latin typeface="Calibri"/>
+              </a:rPr>
+              <a:t>What was wrong</a:t>
+            </a:r>
+          </a:p>
+          <a:p>
+            <a:pPr>
+              <a:spcAft>
+                <a:spcPts val="600"/>
+              </a:spcAft>
+            </a:pPr>
+            <a:r>
+              <a:rPr sz="1100" b="0">
+                <a:solidFill>
+                  <a:srgbClr val="333333"/>
+                </a:solidFill>
+                <a:latin typeface="Calibri"/>
+              </a:rPr>
+              <a:t>Review 1 dropped the 1/(2π) of the charge-pump gain in ω_n², overstating ω_n by √(2π) and ζ likewise.</a:t>
+            </a:r>
+          </a:p>
+          <a:p>
+            <a:pPr>
+              <a:spcAft>
+                <a:spcPts val="600"/>
+              </a:spcAft>
+            </a:pPr>
+            <a:r>
+              <a:rPr sz="1100" b="1">
+                <a:solidFill>
+                  <a:srgbClr val="1D2F82"/>
+                </a:solidFill>
+                <a:latin typeface="Calibri"/>
+              </a:rPr>
+              <a:t>What stands</a:t>
+            </a:r>
+          </a:p>
+          <a:p>
+            <a:pPr>
+              <a:spcAft>
+                <a:spcPts val="600"/>
+              </a:spcAft>
+            </a:pPr>
+            <a:r>
+              <a:rPr sz="1100" b="0">
+                <a:solidFill>
+                  <a:srgbClr val="333333"/>
+                </a:solidFill>
+                <a:latin typeface="Calibri"/>
+              </a:rPr>
+              <a:t>Simulated lock times (577 / 839 ns) are direct results; an independent model reproduces them. Spec &lt; 2 µs met.</a:t>
+            </a:r>
+          </a:p>
+          <a:p>
+            <a:pPr>
+              <a:spcAft>
+                <a:spcPts val="600"/>
+              </a:spcAft>
+            </a:pPr>
+            <a:r>
+              <a:rPr sz="1100" b="1">
+                <a:solidFill>
+                  <a:srgbClr val="1D2F82"/>
+                </a:solidFill>
+                <a:latin typeface="Calibri"/>
+              </a:rPr>
+              <a:t>Next</a:t>
+            </a:r>
+          </a:p>
+          <a:p>
+            <a:pPr>
+              <a:spcAft>
+                <a:spcPts val="600"/>
+              </a:spcAft>
+            </a:pPr>
+            <a:r>
+              <a:rPr sz="1100" b="0">
+                <a:solidFill>
+                  <a:srgbClr val="333333"/>
+                </a:solidFill>
+                <a:latin typeface="Calibri"/>
+              </a:rPr>
+              <a:t>Underdamped loop: retune R2 ≈ 3.6 kΩ for ζ ≈ 0.7 and re-verify (Review 3).</a:t>
+            </a:r>
+          </a:p>
+        </p:txBody>
+      </p:sp>
+      <p:sp>
+        <p:nvSpPr>
+          <p:cNvPr id="11" name="TextBox 10"/>
+          <p:cNvSpPr txBox="1"/>
+          <p:nvPr/>
+        </p:nvSpPr>
+        <p:spPr>
+          <a:xfrm>
+            <a:off x="640080" y="5500000"/>
+            <a:ext cx="6000000" cy="500000"/>
+          </a:xfrm>
+          <a:prstGeom prst="rect">
+            <a:avLst/>
+          </a:prstGeom>
+          <a:noFill/>
+        </p:spPr>
+        <p:txBody>
+          <a:bodyPr wrap="square">
+            <a:spAutoFit/>
+          </a:bodyPr>
+          <a:lstStyle/>
+          <a:p>
+            <a:pPr>
+              <a:spcAft>
+                <a:spcPts val="600"/>
+              </a:spcAft>
+            </a:pPr>
+            <a:r>
+              <a:rPr sz="1100" b="0">
+                <a:solidFill>
+                  <a:srgbClr val="333333"/>
+                </a:solidFill>
+                <a:latin typeface="Calibri"/>
+              </a:rPr>
+              <a:t>Measured local K_VCO = 887 MHz/V (Review 1 used 669), so ζ = 0.33, not 0.29.</a:t>
+            </a:r>
+          </a:p>
+        </p:txBody>
+      </p:sp>
+      <p:sp>
+        <p:nvSpPr>
+          <p:cNvPr id="12" name="TextBox 11"/>
+          <p:cNvSpPr txBox="1"/>
+          <p:nvPr/>
+        </p:nvSpPr>
+        <p:spPr>
+          <a:xfrm>
+            <a:off x="640080" y="6130000"/>
+            <a:ext cx="10500000" cy="280000"/>
+          </a:xfrm>
+          <a:prstGeom prst="rect">
+            <a:avLst/>
+          </a:prstGeom>
+          <a:noFill/>
+        </p:spPr>
+        <p:txBody>
+          <a:bodyPr wrap="square">
+            <a:spAutoFit/>
+          </a:bodyPr>
+          <a:lstStyle/>
+          <a:p>
+            <a:pPr>
+              <a:spcAft>
+                <a:spcPts val="600"/>
+              </a:spcAft>
+            </a:pPr>
+            <a:r>
+              <a:rPr sz="1000" b="0">
+                <a:solidFill>
+                  <a:srgbClr val="777777"/>
+                </a:solidFill>
+                <a:latin typeface="Calibri"/>
+              </a:rPr>
+              <a:t>Scope: compensation is an ideal behavioural correction voltage (transistor-level in Review 3); closed-loop results are tt / 27 °C.</a:t>
+            </a:r>
+          </a:p>
+        </p:txBody>
+      </p:sp>
+    </p:spTree>
+  </p:cSld>
+  <p:clrMapOvr>
+    <a:masterClrMapping/>
+  </p:clrMapOvr>
+</p:sld>
+</file>
+
+<file path=ppt/slides/slide25.xml><?xml version="1.0" encoding="utf-8"?>
+<p:sld xmlns:a="http://schemas.openxmlformats.org/drawingml/2006/main" xmlns:p="http://schemas.openxmlformats.org/presentationml/2006/main" xmlns:r="http://schemas.openxmlformats.org/officeDocument/2006/relationships">
+  <p:cSld>
+    <p:spTree>
+      <p:nvGrpSpPr>
+        <p:cNvPr id="1" name=""/>
+        <p:cNvGrpSpPr/>
+        <p:nvPr/>
+      </p:nvGrpSpPr>
+      <p:grpSpPr/>
+      <p:sp>
+        <p:nvSpPr>
+          <p:cNvPr id="2" name="Text 0"/>
+          <p:cNvSpPr txBox="1"/>
+          <p:nvPr/>
+        </p:nvSpPr>
+        <p:spPr>
+          <a:xfrm>
+            <a:off x="11460175" y="6446520"/>
+            <a:ext cx="457200" cy="274320"/>
+          </a:xfrm>
+          <a:prstGeom prst="rect">
+            <a:avLst/>
+          </a:prstGeom>
+          <a:noFill/>
+          <a:ln/>
+        </p:spPr>
+        <p:txBody>
+          <a:bodyPr wrap="square" lIns="0" tIns="0" rIns="0" bIns="0" rtlCol="0" anchor="ctr"/>
+          <a:lstStyle/>
+          <a:p>
+            <a:pPr marL="0" indent="0" algn="r">
+              <a:buNone/>
+            </a:pPr>
+            <a:r>
+              <a:rPr lang="en-US" sz="1000" dirty="0">
+                <a:solidFill>
+                  <a:srgbClr val="808080"/>
+                </a:solidFill>
+                <a:latin typeface="Calibri" pitchFamily="34" charset="0"/>
+                <a:ea typeface="Calibri" pitchFamily="34" charset="-122"/>
+                <a:cs typeface="Calibri" pitchFamily="34" charset="-120"/>
+              </a:rPr>
+              <a:t>22</a:t>
             </a:r>
             <a:endParaRPr lang="en-US" sz="1000" dirty="0"/>
           </a:p>
@@ -16345,7 +21332,7 @@
 </p:sld>
 </file>
 
-<file path=ppt/slides/slide24.xml><?xml version="1.0" encoding="utf-8"?>
+<file path=ppt/slides/slide26.xml><?xml version="1.0" encoding="utf-8"?>
 <p:sld xmlns:a="http://schemas.openxmlformats.org/drawingml/2006/main" xmlns:p="http://schemas.openxmlformats.org/presentationml/2006/main" xmlns:r="http://schemas.openxmlformats.org/officeDocument/2006/relationships">
   <p:cSld>
     <p:spTree>
@@ -16388,7 +21375,7 @@
                 <a:ea typeface="Calibri" pitchFamily="34" charset="-122"/>
                 <a:cs typeface="Calibri" pitchFamily="34" charset="-120"/>
               </a:rPr>
-              <a:t>21</a:t>
+              <a:t>23</a:t>
             </a:r>
             <a:endParaRPr lang="en-US" sz="1000" dirty="0"/>
           </a:p>
@@ -16567,7 +21554,7 @@
                 </a:solidFill>
                 <a:latin typeface="Calibri"/>
               </a:rPr>
-              <a:t>669 MHz/V</a:t>
+              <a:t>887 MHz/V</a:t>
             </a:r>
           </a:p>
           <a:p>
@@ -16579,7 +21566,7 @@
                 </a:solidFill>
                 <a:latin typeface="Calibri"/>
               </a:rPr>
-              <a:t>K_VCO at 0.9 V, tt</a:t>
+              <a:t>local K_VCO at 0.9 V, tt</a:t>
             </a:r>
           </a:p>
         </p:txBody>
@@ -19492,8 +24479,8 @@
         </p:blipFill>
         <p:spPr>
           <a:xfrm>
-            <a:off x="1390918" y="1327533"/>
-            <a:ext cx="9379683" cy="3196694"/>
+            <a:off x="1185374" y="1327533"/>
+            <a:ext cx="9790771" cy="3196694"/>
           </a:xfrm>
           <a:prstGeom prst="rect">
             <a:avLst/>
@@ -20000,7 +24987,7 @@
                 </a:solidFill>
                 <a:latin typeface="Calibri"/>
               </a:rPr>
-              <a:t>VCO tuning: K_VCO ~= 669 MHz/V at 0.9V (polynomial fit, not a secant); 18-&gt;358 MHz over 0.65-&gt;1.40V. Oscillation lost below ~0.60-0.65V (device-threshold-limited).</a:t>
+              <a:t>VCO tuning: local K_VCO ~= 890 MHz/V at 0.9 V (tt, central difference +/-50 mV; an earlier whole-curve quadratic fit gave 669, too low); 18-&gt;358 MHz over 0.65-&gt;1.40 V. No hard floor: below 0.65 V the ring still oscillates, slowly (6.5 MHz at 0.6 V, 0.6 MHz at 0.5 V).</a:t>
             </a:r>
           </a:p>
           <a:p>
@@ -20171,7 +25158,7 @@
                           </a:solidFill>
                           <a:latin typeface="Calibri"/>
                         </a:rPr>
-                        <a:t>slow / fast</a:t>
+                        <a:t>fast / slow</a:t>
                       </a:r>
                     </a:p>
                   </a:txBody>
@@ -20193,7 +25180,7 @@
                           </a:solidFill>
                           <a:latin typeface="Calibri"/>
                         </a:rPr>
-                        <a:t>580.2</a:t>
+                        <a:t>582</a:t>
                       </a:r>
                     </a:p>
                   </a:txBody>
@@ -20283,7 +25270,7 @@
                           </a:solidFill>
                           <a:latin typeface="Calibri"/>
                         </a:rPr>
-                        <a:t>763.6</a:t>
+                        <a:t>936</a:t>
                       </a:r>
                     </a:p>
                   </a:txBody>
@@ -20373,7 +25360,7 @@
                           </a:solidFill>
                           <a:latin typeface="Calibri"/>
                         </a:rPr>
-                        <a:t>669.3</a:t>
+                        <a:t>887</a:t>
                       </a:r>
                     </a:p>
                   </a:txBody>
@@ -20463,7 +25450,7 @@
                           </a:solidFill>
                           <a:latin typeface="Calibri"/>
                         </a:rPr>
-                        <a:t>568.2</a:t>
+                        <a:t>815</a:t>
                       </a:r>
                     </a:p>
                   </a:txBody>
@@ -20531,7 +25518,7 @@
                           </a:solidFill>
                           <a:latin typeface="Calibri"/>
                         </a:rPr>
-                        <a:t>fast / slow</a:t>
+                        <a:t>slow / fast</a:t>
                       </a:r>
                     </a:p>
                   </a:txBody>
@@ -20553,7 +25540,7 @@
                           </a:solidFill>
                           <a:latin typeface="Calibri"/>
                         </a:rPr>
-                        <a:t>688.7</a:t>
+                        <a:t>1018</a:t>
                       </a:r>
                     </a:p>
                   </a:txBody>
@@ -20668,7 +25655,7 @@
                 </a:solidFill>
                 <a:latin typeface="Calibri"/>
               </a:rPr>
-              <a:t>669</a:t>
+              <a:t>887</a:t>
             </a:r>
           </a:p>
           <a:p>
@@ -20681,7 +25668,7 @@
                 <a:latin typeface="Calibri"/>
               </a:rPr>
               <a:t>MHz/V K_VCO
-(tt, 0.9V, fit-derivative)</a:t>
+(tt, 0.9 V, local slope)</a:t>
             </a:r>
           </a:p>
         </p:txBody>
@@ -20721,7 +25708,7 @@
                 </a:solidFill>
                 <a:latin typeface="Calibri"/>
               </a:rPr>
-              <a:t>Sensitivity insight: N/P-mismatched corners (sf, fs) bracket the entire tempco range, not the matched-speed corners (ff, ss) -- points at current-source balance, not absolute device speed, as the driving mechanism.</a:t>
+              <a:t>Tempco ranks with NMOS drive at 0.9 V (sf 45 uA ... fs 28 uA): less overdrive =&gt; the threshold drop with temperature dominates =&gt; stronger positive tempco. Sign flips at V_ctrl = 1.4 V (-816 ppm/C). sf/fs bracket the range because sky130 skew corners shift NMOS Vth +/-27 mV (ss/ff +/-15 mV).</a:t>
             </a:r>
           </a:p>
         </p:txBody>
@@ -20792,7 +25779,7 @@
                 <a:ea typeface="Calibri" pitchFamily="34" charset="-122"/>
                 <a:cs typeface="Calibri" pitchFamily="34" charset="-120"/>
               </a:rPr>
-              <a:t>14</a:t>
+              <a:t>15</a:t>
             </a:r>
             <a:endParaRPr lang="en-US" sz="1000" dirty="0"/>
           </a:p>
@@ -21787,7 +26774,7 @@
                 </a:solidFill>
                 <a:latin typeface="Calibri"/>
               </a:rPr>
-              <a:t>Naive analytical 2nd-order coefficients made tt worse (4.49% vs 3.05%): they assume constant K_VCO, which is false. Refitting against the measured 1st-order residual fixed it.</a:t>
+              <a:t>Naive analytical 2nd-order coefficients made tt worse (4.49% vs 3.05%): they assume constant K_VCO (false) and used a K_VCO ~25% too low (669 vs 887 MHz/V). Refitting against the measured 1st-order residual fixed it.</a:t>
             </a:r>
           </a:p>
         </p:txBody>
@@ -21874,7 +26861,7 @@
                 </a:solidFill>
                 <a:latin typeface="Calibri"/>
               </a:rPr>
-              <a:t>17</a:t>
+              <a:t>18</a:t>
             </a:r>
           </a:p>
         </p:txBody>
@@ -22267,7 +27254,7 @@
                           </a:solidFill>
                           <a:latin typeface="Calibri"/>
                         </a:rPr>
-                        <a:t>&lt; 2us spec; ~450ns analytical</a:t>
+                        <a:t>&lt; 2us spec; 573 ns averaged model</a:t>
                       </a:r>
                     </a:p>
                   </a:txBody>

--- a/Design_of_a_Frequency_Synthesiser_Review-2.pptx
+++ b/Design_of_a_Frequency_Synthesiser_Review-2.pptx
@@ -28,9 +28,10 @@
     <p:sldId id="269" r:id="rId18"/>
     <p:sldId id="280" r:id="rId29"/>
     <p:sldId id="281" r:id="rId30"/>
+    <p:sldId id="282" r:id="rId31"/>
     <p:sldId id="270" r:id="rId19"/>
-    <p:sldId id="282" r:id="rId31"/>
     <p:sldId id="283" r:id="rId32"/>
+    <p:sldId id="284" r:id="rId33"/>
     <p:sldId id="265" r:id="rId9"/>
     <p:sldId id="266" r:id="rId10"/>
     <p:sldId id="267" r:id="rId11"/>
@@ -793,6 +794,437 @@
 </file>
 
 <file path=ppt/charts/chart10.xml><?xml version="1.0" encoding="utf-8"?>
+<c:chartSpace xmlns:c="http://schemas.openxmlformats.org/drawingml/2006/chart" xmlns:a="http://schemas.openxmlformats.org/drawingml/2006/main" xmlns:r="http://schemas.openxmlformats.org/officeDocument/2006/relationships">
+  <c:chart>
+    <c:autoTitleDeleted val="1"/>
+    <c:plotArea>
+      <c:scatterChart>
+        <c:scatterStyle val="lineMarker"/>
+        <c:varyColors val="0"/>
+        <c:ser>
+          <c:idx val="0"/>
+          <c:order val="0"/>
+          <c:tx>
+            <c:strRef>
+              <c:f>Sheet1!$B$1</c:f>
+              <c:strCache>
+                <c:ptCount val="1"/>
+                <c:pt idx="0">
+                  <c:v>one mismatch sample (seed)</c:v>
+                </c:pt>
+              </c:strCache>
+            </c:strRef>
+          </c:tx>
+          <c:spPr>
+            <a:ln>
+              <a:noFill/>
+            </a:ln>
+          </c:spPr>
+          <c:marker>
+            <c:symbol val="diamond"/>
+            <c:size val="8"/>
+            <c:spPr>
+              <a:solidFill>
+                <a:srgbClr val="1D2F82"/>
+              </a:solidFill>
+              <a:ln>
+                <a:solidFill>
+                  <a:srgbClr val="1D2F82"/>
+                </a:solidFill>
+              </a:ln>
+            </c:spPr>
+          </c:marker>
+          <c:xVal>
+            <c:numRef>
+              <c:f>Sheet1!$A$2:$A$31</c:f>
+              <c:numCache>
+                <c:formatCode>General</c:formatCode>
+                <c:ptCount val="30"/>
+                <c:pt idx="0">
+                  <c:v>1.1537029941431456</c:v>
+                </c:pt>
+                <c:pt idx="1">
+                  <c:v>8.640458363324</c:v>
+                </c:pt>
+                <c:pt idx="2">
+                  <c:v>5.6690017407786115</c:v>
+                </c:pt>
+                <c:pt idx="3">
+                  <c:v>2.2448358320205557</c:v>
+                </c:pt>
+                <c:pt idx="4">
+                  <c:v>9.58542009738619</c:v>
+                </c:pt>
+                <c:pt idx="5">
+                  <c:v>10.335970311657235</c:v>
+                </c:pt>
+                <c:pt idx="6">
+                  <c:v>4.870823962301472</c:v>
+                </c:pt>
+                <c:pt idx="7">
+                  <c:v>0.9323409747617291</c:v>
+                </c:pt>
+                <c:pt idx="8">
+                  <c:v>4.862134551367404</c:v>
+                </c:pt>
+                <c:pt idx="9">
+                  <c:v>8.913721257168248</c:v>
+                </c:pt>
+                <c:pt idx="10">
+                  <c:v>5.584980329335451</c:v>
+                </c:pt>
+                <c:pt idx="11">
+                  <c:v>11.026122757231747</c:v>
+                </c:pt>
+                <c:pt idx="12">
+                  <c:v>10.986658991488525</c:v>
+                </c:pt>
+                <c:pt idx="13">
+                  <c:v>5.3256497329858234</c:v>
+                </c:pt>
+                <c:pt idx="14">
+                  <c:v>6.426030525425546</c:v>
+                </c:pt>
+                <c:pt idx="15">
+                  <c:v>10.265433625927585</c:v>
+                </c:pt>
+                <c:pt idx="16">
+                  <c:v>2.8653404507835205</c:v>
+                </c:pt>
+                <c:pt idx="17">
+                  <c:v>5.084656477163179</c:v>
+                </c:pt>
+                <c:pt idx="18">
+                  <c:v>9.458758595392283</c:v>
+                </c:pt>
+                <c:pt idx="19">
+                  <c:v>7.0532532663401355</c:v>
+                </c:pt>
+                <c:pt idx="20">
+                  <c:v>7.7103041126266305</c:v>
+                </c:pt>
+                <c:pt idx="21">
+                  <c:v>4.888840801641038</c:v>
+                </c:pt>
+                <c:pt idx="22">
+                  <c:v>1.3849672604091268</c:v>
+                </c:pt>
+                <c:pt idx="23">
+                  <c:v>9.097053735245993</c:v>
+                </c:pt>
+                <c:pt idx="24">
+                  <c:v>2.9111485504091092</c:v>
+                </c:pt>
+                <c:pt idx="25">
+                  <c:v>8.18486739254493</c:v>
+                </c:pt>
+                <c:pt idx="26">
+                  <c:v>2.180846103669978</c:v>
+                </c:pt>
+                <c:pt idx="27">
+                  <c:v>1.4730638678668981</c:v>
+                </c:pt>
+                <c:pt idx="28">
+                  <c:v>5.9907220077638215</c:v>
+                </c:pt>
+                <c:pt idx="29">
+                  <c:v>0.5422711364629151</c:v>
+                </c:pt>
+              </c:numCache>
+            </c:numRef>
+          </c:xVal>
+          <c:yVal>
+            <c:numRef>
+              <c:f>Sheet1!$B$2:$B$31</c:f>
+              <c:numCache>
+                <c:formatCode>General</c:formatCode>
+                <c:ptCount val="30"/>
+                <c:pt idx="0">
+                  <c:v>5.000154675904582</c:v>
+                </c:pt>
+                <c:pt idx="1">
+                  <c:v>0.7719357772297997</c:v>
+                </c:pt>
+                <c:pt idx="2">
+                  <c:v>0.3850189796386303</c:v>
+                </c:pt>
+                <c:pt idx="3">
+                  <c:v>9.689649051350898</c:v>
+                </c:pt>
+                <c:pt idx="4">
+                  <c:v>2.2400585783824454</c:v>
+                </c:pt>
+                <c:pt idx="5">
+                  <c:v>2.909281963766972</c:v>
+                </c:pt>
+                <c:pt idx="6">
+                  <c:v>2.742800501007281</c:v>
+                </c:pt>
+                <c:pt idx="7">
+                  <c:v>2.6134651611668573</c:v>
+                </c:pt>
+                <c:pt idx="8">
+                  <c:v>3.0019139774422854</c:v>
+                </c:pt>
+                <c:pt idx="9">
+                  <c:v>1.1615538380850694</c:v>
+                </c:pt>
+                <c:pt idx="10">
+                  <c:v>1.26639026432494</c:v>
+                </c:pt>
+                <c:pt idx="11">
+                  <c:v>7.519996206686159</c:v>
+                </c:pt>
+                <c:pt idx="12">
+                  <c:v>5.380585377735571</c:v>
+                </c:pt>
+                <c:pt idx="13">
+                  <c:v>10.412402886607424</c:v>
+                </c:pt>
+                <c:pt idx="14">
+                  <c:v>6.197966117928189</c:v>
+                </c:pt>
+                <c:pt idx="15">
+                  <c:v>3.116043215288016</c:v>
+                </c:pt>
+                <c:pt idx="16">
+                  <c:v>4.119589346609587</c:v>
+                </c:pt>
+                <c:pt idx="17">
+                  <c:v>1.010266889321116</c:v>
+                </c:pt>
+                <c:pt idx="18">
+                  <c:v>5.376494168516928</c:v>
+                </c:pt>
+                <c:pt idx="19">
+                  <c:v>0.08198286038896185</c:v>
+                </c:pt>
+                <c:pt idx="20">
+                  <c:v>0.7442914059852797</c:v>
+                </c:pt>
+                <c:pt idx="21">
+                  <c:v>3.2653102087044203</c:v>
+                </c:pt>
+                <c:pt idx="22">
+                  <c:v>1.0710245150384878</c:v>
+                </c:pt>
+                <c:pt idx="23">
+                  <c:v>2.4121407422191226</c:v>
+                </c:pt>
+                <c:pt idx="24">
+                  <c:v>2.458641156206255</c:v>
+                </c:pt>
+                <c:pt idx="25">
+                  <c:v>0.14678076440785048</c:v>
+                </c:pt>
+                <c:pt idx="26">
+                  <c:v>2.076328107148271</c:v>
+                </c:pt>
+                <c:pt idx="27">
+                  <c:v>7.840686308281988</c:v>
+                </c:pt>
+                <c:pt idx="28">
+                  <c:v>5.174064755073573</c:v>
+                </c:pt>
+                <c:pt idx="29">
+                  <c:v>1.0027334011448659</c:v>
+                </c:pt>
+              </c:numCache>
+            </c:numRef>
+          </c:yVal>
+          <c:smooth val="0"/>
+        </c:ser>
+        <c:ser>
+          <c:idx val="1"/>
+          <c:order val="1"/>
+          <c:tx>
+            <c:strRef>
+              <c:f>Sheet1!$B$33</c:f>
+              <c:strCache>
+                <c:ptCount val="1"/>
+                <c:pt idx="0">
+                  <c:v>equal drift (y = x)</c:v>
+                </c:pt>
+              </c:strCache>
+            </c:strRef>
+          </c:tx>
+          <c:spPr>
+            <a:ln w="19050">
+              <a:solidFill>
+                <a:srgbClr val="9AA0A6"/>
+              </a:solidFill>
+              <a:prstDash val="dash"/>
+            </a:ln>
+          </c:spPr>
+          <c:marker>
+            <c:symbol val="none"/>
+          </c:marker>
+          <c:xVal>
+            <c:numRef>
+              <c:f>Sheet1!$A$34:$A$35</c:f>
+              <c:numCache>
+                <c:formatCode>General</c:formatCode>
+                <c:ptCount val="2"/>
+                <c:pt idx="0">
+                  <c:v>0</c:v>
+                </c:pt>
+                <c:pt idx="1">
+                  <c:v>16</c:v>
+                </c:pt>
+              </c:numCache>
+            </c:numRef>
+          </c:xVal>
+          <c:yVal>
+            <c:numRef>
+              <c:f>Sheet1!$B$34:$B$35</c:f>
+              <c:numCache>
+                <c:formatCode>General</c:formatCode>
+                <c:ptCount val="2"/>
+                <c:pt idx="0">
+                  <c:v>0</c:v>
+                </c:pt>
+                <c:pt idx="1">
+                  <c:v>16</c:v>
+                </c:pt>
+              </c:numCache>
+            </c:numRef>
+          </c:yVal>
+          <c:smooth val="0"/>
+        </c:ser>
+        <c:axId val="-2128940872"/>
+        <c:axId val="-2129643912"/>
+      </c:scatterChart>
+      <c:valAx>
+        <c:axId val="-2128940872"/>
+        <c:scaling>
+          <c:orientation val="minMax"/>
+          <c:max val="16.0"/>
+          <c:min val="0.0"/>
+        </c:scaling>
+        <c:delete val="0"/>
+        <c:axPos val="b"/>
+        <c:title>
+          <c:tx>
+            <c:rich>
+              <a:bodyPr/>
+              <a:lstStyle/>
+              <a:p>
+                <a:r>
+                  <a:rPr sz="1100"/>
+                  <a:t>1st-order |drift| (MHz)</a:t>
+                </a:r>
+              </a:p>
+            </c:rich>
+          </c:tx>
+          <c:layout/>
+          <c:overlay val="0"/>
+        </c:title>
+        <c:numFmt formatCode="General" sourceLinked="1"/>
+        <c:majorTickMark val="out"/>
+        <c:minorTickMark val="none"/>
+        <c:tickLblPos val="nextTo"/>
+        <c:txPr>
+          <a:bodyPr/>
+          <a:lstStyle/>
+          <a:p>
+            <a:pPr>
+              <a:defRPr sz="1000"/>
+            </a:pPr>
+          </a:p>
+        </c:txPr>
+        <c:crossAx val="-2129643912"/>
+        <c:crosses val="min"/>
+        <c:crossBetween val="midCat"/>
+      </c:valAx>
+      <c:valAx>
+        <c:axId val="-2129643912"/>
+        <c:scaling>
+          <c:orientation val="minMax"/>
+          <c:max val="16.0"/>
+          <c:min val="0.0"/>
+        </c:scaling>
+        <c:delete val="0"/>
+        <c:axPos val="l"/>
+        <c:majorGridlines>
+          <c:spPr>
+            <a:ln>
+              <a:solidFill>
+                <a:srgbClr val="E3E3E3"/>
+              </a:solidFill>
+            </a:ln>
+          </c:spPr>
+        </c:majorGridlines>
+        <c:title>
+          <c:tx>
+            <c:rich>
+              <a:bodyPr/>
+              <a:lstStyle/>
+              <a:p>
+                <a:r>
+                  <a:rPr sz="1100"/>
+                  <a:t>2nd-order |drift| (MHz)</a:t>
+                </a:r>
+              </a:p>
+            </c:rich>
+          </c:tx>
+          <c:layout/>
+          <c:overlay val="0"/>
+        </c:title>
+        <c:numFmt formatCode="General" sourceLinked="1"/>
+        <c:majorTickMark val="out"/>
+        <c:minorTickMark val="none"/>
+        <c:tickLblPos val="nextTo"/>
+        <c:txPr>
+          <a:bodyPr/>
+          <a:lstStyle/>
+          <a:p>
+            <a:pPr>
+              <a:defRPr sz="1000"/>
+            </a:pPr>
+          </a:p>
+        </c:txPr>
+        <c:crossAx val="-2128940872"/>
+        <c:crosses val="min"/>
+        <c:crossBetween val="midCat"/>
+      </c:valAx>
+    </c:plotArea>
+    <c:legend>
+      <c:legendPos val="b"/>
+      <c:layout/>
+      <c:overlay val="0"/>
+      <c:txPr>
+        <a:bodyPr/>
+        <a:lstStyle/>
+        <a:p>
+          <a:pPr>
+            <a:defRPr sz="1000"/>
+          </a:pPr>
+        </a:p>
+      </c:txPr>
+    </c:legend>
+    <c:plotVisOnly val="1"/>
+    <c:dispBlanksAs val="gap"/>
+    <c:showDLblsOverMax val="0"/>
+  </c:chart>
+  <c:txPr>
+    <a:bodyPr/>
+    <a:lstStyle/>
+    <a:p>
+      <a:pPr>
+        <a:defRPr sz="1800">
+          <a:latin typeface="Calibri"/>
+        </a:defRPr>
+      </a:pPr>
+      <a:endParaRPr lang="en-US"/>
+    </a:p>
+  </c:txPr>
+  <c:externalData r:id="rId1">
+    <c:autoUpdate val="0"/>
+  </c:externalData>
+</c:chartSpace>
+</file>
+
+<file path=ppt/charts/chart11.xml><?xml version="1.0" encoding="utf-8"?>
 <c:chartSpace xmlns:c="http://schemas.openxmlformats.org/drawingml/2006/chart" xmlns:a="http://schemas.openxmlformats.org/drawingml/2006/main" xmlns:r="http://schemas.openxmlformats.org/officeDocument/2006/relationships">
   <c:date1904 val="0"/>
   <c:chart>
@@ -3344,7 +3776,7 @@
               <c:strCache>
                 <c:ptCount val="1"/>
                 <c:pt idx="0">
-                  <c:v>start 0.85 V (coarse-tuned): 577 ns</c:v>
+                  <c:v>start 0.85 V (coarse-tuned): 503 ns</c:v>
                 </c:pt>
               </c:strCache>
             </c:strRef>
@@ -4584,1213 +5016,1213 @@
                 <c:formatCode>General</c:formatCode>
                 <c:ptCount val="403"/>
                 <c:pt idx="0">
-                  <c:v>0.850577083</c:v>
+                  <c:v>0.850577088</c:v>
                 </c:pt>
                 <c:pt idx="1">
-                  <c:v>0.860988905</c:v>
+                  <c:v>0.862101619</c:v>
                 </c:pt>
                 <c:pt idx="2">
-                  <c:v>0.869249906</c:v>
+                  <c:v>0.873168534</c:v>
                 </c:pt>
                 <c:pt idx="3">
-                  <c:v>0.874872644</c:v>
+                  <c:v>0.882241574</c:v>
                 </c:pt>
                 <c:pt idx="4">
-                  <c:v>0.87880258</c:v>
+                  <c:v>0.889654152</c:v>
                 </c:pt>
                 <c:pt idx="5">
-                  <c:v>0.881770475</c:v>
+                  <c:v>0.896025959</c:v>
                 </c:pt>
                 <c:pt idx="6">
-                  <c:v>0.884189691</c:v>
+                  <c:v>0.901344818</c:v>
                 </c:pt>
                 <c:pt idx="7">
-                  <c:v>0.886215609</c:v>
+                  <c:v>0.905814559</c:v>
                 </c:pt>
                 <c:pt idx="8">
-                  <c:v>0.885826502</c:v>
+                  <c:v>0.903304051</c:v>
                 </c:pt>
                 <c:pt idx="9">
-                  <c:v>0.876169828</c:v>
+                  <c:v>0.894617623</c:v>
                 </c:pt>
                 <c:pt idx="10">
-                  <c:v>0.870178798</c:v>
+                  <c:v>0.887647554</c:v>
                 </c:pt>
                 <c:pt idx="11">
-                  <c:v>0.86655537</c:v>
+                  <c:v>0.88217211</c:v>
                 </c:pt>
                 <c:pt idx="12">
-                  <c:v>0.864234595</c:v>
+                  <c:v>0.877735504</c:v>
                 </c:pt>
                 <c:pt idx="13">
-                  <c:v>0.862759371</c:v>
+                  <c:v>0.874190205</c:v>
                 </c:pt>
                 <c:pt idx="14">
-                  <c:v>0.861795943</c:v>
+                  <c:v>0.871335038</c:v>
                 </c:pt>
                 <c:pt idx="15">
-                  <c:v>0.869596662</c:v>
+                  <c:v>0.878015729</c:v>
                 </c:pt>
                 <c:pt idx="16">
-                  <c:v>0.878319192</c:v>
+                  <c:v>0.876416158</c:v>
                 </c:pt>
                 <c:pt idx="17">
-                  <c:v>0.872479169</c:v>
+                  <c:v>0.873334312</c:v>
                 </c:pt>
                 <c:pt idx="18">
-                  <c:v>0.868832111</c:v>
+                  <c:v>0.870903145</c:v>
                 </c:pt>
                 <c:pt idx="19">
-                  <c:v>0.86648488</c:v>
+                  <c:v>0.868902448</c:v>
                 </c:pt>
                 <c:pt idx="20">
-                  <c:v>0.865013105</c:v>
+                  <c:v>0.867284533</c:v>
                 </c:pt>
                 <c:pt idx="21">
-                  <c:v>0.864086592</c:v>
+                  <c:v>0.866004812</c:v>
                 </c:pt>
                 <c:pt idx="22">
-                  <c:v>0.870434191</c:v>
+                  <c:v>0.872462063</c:v>
                 </c:pt>
                 <c:pt idx="23">
-                  <c:v>0.879635343</c:v>
+                  <c:v>0.88349098</c:v>
                 </c:pt>
                 <c:pt idx="24">
-                  <c:v>0.885919943</c:v>
+                  <c:v>0.881957792</c:v>
                 </c:pt>
                 <c:pt idx="25">
-                  <c:v>0.879593443</c:v>
+                  <c:v>0.878294911</c:v>
                 </c:pt>
                 <c:pt idx="26">
-                  <c:v>0.874561038</c:v>
+                  <c:v>0.875336647</c:v>
                 </c:pt>
                 <c:pt idx="27">
-                  <c:v>0.87137629</c:v>
+                  <c:v>0.872936411</c:v>
                 </c:pt>
                 <c:pt idx="28">
-                  <c:v>0.869393295</c:v>
+                  <c:v>0.87101313</c:v>
                 </c:pt>
                 <c:pt idx="29">
-                  <c:v>0.873717686</c:v>
+                  <c:v>0.875285594</c:v>
                 </c:pt>
                 <c:pt idx="30">
-                  <c:v>0.882972107</c:v>
+                  <c:v>0.886249476</c:v>
                 </c:pt>
                 <c:pt idx="31">
-                  <c:v>0.88917838</c:v>
+                  <c:v>0.895219745</c:v>
                 </c:pt>
                 <c:pt idx="32">
-                  <c:v>0.892685921</c:v>
+                  <c:v>0.889823642</c:v>
                 </c:pt>
                 <c:pt idx="33">
-                  <c:v>0.88451785</c:v>
+                  <c:v>0.885283085</c:v>
                 </c:pt>
                 <c:pt idx="34">
-                  <c:v>0.879210653</c:v>
+                  <c:v>0.881482075</c:v>
                 </c:pt>
                 <c:pt idx="35">
-                  <c:v>0.875921734</c:v>
+                  <c:v>0.878478022</c:v>
                 </c:pt>
                 <c:pt idx="36">
-                  <c:v>0.87795675</c:v>
+                  <c:v>0.880305332</c:v>
                 </c:pt>
                 <c:pt idx="37">
-                  <c:v>0.887240983</c:v>
+                  <c:v>0.890914391</c:v>
                 </c:pt>
                 <c:pt idx="38">
-                  <c:v>0.89354859</c:v>
+                  <c:v>0.899553473</c:v>
                 </c:pt>
                 <c:pt idx="39">
-                  <c:v>0.897908153</c:v>
+                  <c:v>0.900525616</c:v>
                 </c:pt>
                 <c:pt idx="40">
-                  <c:v>0.894878618</c:v>
+                  <c:v>0.894551621</c:v>
                 </c:pt>
                 <c:pt idx="41">
-                  <c:v>0.887579354</c:v>
+                  <c:v>0.88977063</c:v>
                 </c:pt>
                 <c:pt idx="42">
-                  <c:v>0.883119115</c:v>
+                  <c:v>0.885816904</c:v>
                 </c:pt>
                 <c:pt idx="43">
-                  <c:v>0.882812635</c:v>
+                  <c:v>0.885295137</c:v>
                 </c:pt>
                 <c:pt idx="44">
-                  <c:v>0.892041621</c:v>
+                  <c:v>0.895630837</c:v>
                 </c:pt>
                 <c:pt idx="45">
-                  <c:v>0.898410556</c:v>
+                  <c:v>0.904076745</c:v>
                 </c:pt>
                 <c:pt idx="46">
-                  <c:v>0.902780648</c:v>
+                  <c:v>0.908720617</c:v>
                 </c:pt>
                 <c:pt idx="47">
-                  <c:v>0.904277964</c:v>
+                  <c:v>0.902044313</c:v>
                 </c:pt>
                 <c:pt idx="48">
-                  <c:v>0.895533601</c:v>
+                  <c:v>0.896498833</c:v>
                 </c:pt>
                 <c:pt idx="49">
-                  <c:v>0.89000812</c:v>
+                  <c:v>0.892043458</c:v>
                 </c:pt>
                 <c:pt idx="50">
-                  <c:v>0.887455086</c:v>
+                  <c:v>0.889360498</c:v>
                 </c:pt>
                 <c:pt idx="51">
-                  <c:v>0.897012956</c:v>
+                  <c:v>0.899644636</c:v>
                 </c:pt>
                 <c:pt idx="52">
-                  <c:v>0.90341573</c:v>
+                  <c:v>0.90810573</c:v>
                 </c:pt>
                 <c:pt idx="53">
-                  <c:v>0.907872904</c:v>
+                  <c:v>0.914513645</c:v>
                 </c:pt>
                 <c:pt idx="54">
-                  <c:v>0.911146104</c:v>
+                  <c:v>0.907388292</c:v>
                 </c:pt>
                 <c:pt idx="55">
-                  <c:v>0.902268047</c:v>
+                  <c:v>0.901584667</c:v>
                 </c:pt>
                 <c:pt idx="56">
-                  <c:v>0.896295993</c:v>
+                  <c:v>0.896994864</c:v>
                 </c:pt>
                 <c:pt idx="57">
-                  <c:v>0.892570863</c:v>
+                  <c:v>0.893212595</c:v>
                 </c:pt>
                 <c:pt idx="58">
-                  <c:v>0.901570157</c:v>
+                  <c:v>0.902806484</c:v>
                 </c:pt>
                 <c:pt idx="59">
-                  <c:v>0.908217114</c:v>
+                  <c:v>0.911396914</c:v>
                 </c:pt>
                 <c:pt idx="60">
-                  <c:v>0.912888946</c:v>
+                  <c:v>0.918034724</c:v>
                 </c:pt>
                 <c:pt idx="61">
-                  <c:v>0.916288121</c:v>
+                  <c:v>0.910991074</c:v>
                 </c:pt>
                 <c:pt idx="62">
-                  <c:v>0.907599603</c:v>
+                  <c:v>0.905222483</c:v>
                 </c:pt>
                 <c:pt idx="63">
-                  <c:v>0.901634595</c:v>
+                  <c:v>0.900692424</c:v>
                 </c:pt>
                 <c:pt idx="64">
-                  <c:v>0.897853367</c:v>
+                  <c:v>0.89700265</c:v>
                 </c:pt>
                 <c:pt idx="65">
-                  <c:v>0.905712345</c:v>
+                  <c:v>0.90503767</c:v>
                 </c:pt>
                 <c:pt idx="66">
-                  <c:v>0.912775915</c:v>
+                  <c:v>0.913973694</c:v>
                 </c:pt>
                 <c:pt idx="67">
-                  <c:v>0.917690514</c:v>
+                  <c:v>0.919797288</c:v>
                 </c:pt>
                 <c:pt idx="68">
-                  <c:v>0.920509683</c:v>
+                  <c:v>0.913180041</c:v>
                 </c:pt>
                 <c:pt idx="69">
-                  <c:v>0.911572423</c:v>
+                  <c:v>0.907719349</c:v>
                 </c:pt>
                 <c:pt idx="70">
-                  <c:v>0.905965761</c:v>
+                  <c:v>0.903342324</c:v>
                 </c:pt>
                 <c:pt idx="71">
-                  <c:v>0.902463723</c:v>
+                  <c:v>0.899799893</c:v>
                 </c:pt>
                 <c:pt idx="72">
-                  <c:v>0.90919101</c:v>
+                  <c:v>0.906598521</c:v>
                 </c:pt>
                 <c:pt idx="73">
-                  <c:v>0.916776739</c:v>
+                  <c:v>0.915863162</c:v>
                 </c:pt>
                 <c:pt idx="74">
-                  <c:v>0.922010535</c:v>
+                  <c:v>0.920277196</c:v>
                 </c:pt>
                 <c:pt idx="75">
-                  <c:v>0.922270901</c:v>
+                  <c:v>0.914174048</c:v>
                 </c:pt>
                 <c:pt idx="76">
-                  <c:v>0.91439226</c:v>
+                  <c:v>0.909175688</c:v>
                 </c:pt>
                 <c:pt idx="77">
-                  <c:v>0.909490783</c:v>
+                  <c:v>0.905137945</c:v>
                 </c:pt>
                 <c:pt idx="78">
-                  <c:v>0.906423746</c:v>
+                  <c:v>0.901945226</c:v>
                 </c:pt>
                 <c:pt idx="79">
-                  <c:v>0.911923942</c:v>
+                  <c:v>0.907399619</c:v>
                 </c:pt>
                 <c:pt idx="80">
-                  <c:v>0.920122256</c:v>
+                  <c:v>0.917136628</c:v>
                 </c:pt>
                 <c:pt idx="81">
-                  <c:v>0.92575764</c:v>
+                  <c:v>0.919772759</c:v>
                 </c:pt>
                 <c:pt idx="82">
-                  <c:v>0.922947439</c:v>
+                  <c:v>0.914351983</c:v>
                 </c:pt>
                 <c:pt idx="83">
-                  <c:v>0.916350462</c:v>
+                  <c:v>0.90990125</c:v>
                 </c:pt>
                 <c:pt idx="84">
-                  <c:v>0.912222933</c:v>
+                  <c:v>0.906292519</c:v>
                 </c:pt>
                 <c:pt idx="85">
-                  <c:v>0.909646404</c:v>
+                  <c:v>0.903452702</c:v>
                 </c:pt>
                 <c:pt idx="86">
-                  <c:v>0.91404779</c:v>
+                  <c:v>0.90761678</c:v>
                 </c:pt>
                 <c:pt idx="87">
-                  <c:v>0.922911114</c:v>
+                  <c:v>0.91785552</c:v>
                 </c:pt>
                 <c:pt idx="88">
-                  <c:v>0.928988697</c:v>
+                  <c:v>0.91862799</c:v>
                 </c:pt>
                 <c:pt idx="89">
-                  <c:v>0.922715947</c:v>
+                  <c:v>0.913837004</c:v>
                 </c:pt>
                 <c:pt idx="90">
-                  <c:v>0.917595329</c:v>
+                  <c:v>0.910056671</c:v>
                 </c:pt>
                 <c:pt idx="91">
-                  <c:v>0.914306014</c:v>
+                  <c:v>0.906937939</c:v>
                 </c:pt>
                 <c:pt idx="92">
-                  <c:v>0.912260587</c:v>
+                  <c:v>0.904459124</c:v>
                 </c:pt>
                 <c:pt idx="93">
-                  <c:v>0.915518839</c:v>
+                  <c:v>0.907312447</c:v>
                 </c:pt>
                 <c:pt idx="94">
-                  <c:v>0.925094157</c:v>
+                  <c:v>0.918095452</c:v>
                 </c:pt>
                 <c:pt idx="95">
-                  <c:v>0.928493548</c:v>
+                  <c:v>0.917085695</c:v>
                 </c:pt>
                 <c:pt idx="96">
-                  <c:v>0.922157432</c:v>
+                  <c:v>0.913025972</c:v>
                 </c:pt>
                 <c:pt idx="97">
-                  <c:v>0.918294326</c:v>
+                  <c:v>0.909830882</c:v>
                 </c:pt>
                 <c:pt idx="98">
-                  <c:v>0.915812123</c:v>
+                  <c:v>0.907174431</c:v>
                 </c:pt>
                 <c:pt idx="99">
-                  <c:v>0.914264052</c:v>
+                  <c:v>0.905088347</c:v>
                 </c:pt>
                 <c:pt idx="100">
-                  <c:v>0.916303853</c:v>
+                  <c:v>0.90658152</c:v>
                 </c:pt>
                 <c:pt idx="101">
-                  <c:v>0.926593515</c:v>
+                  <c:v>0.91790725</c:v>
                 </c:pt>
                 <c:pt idx="102">
-                  <c:v>0.925774667</c:v>
+                  <c:v>0.915288592</c:v>
                 </c:pt>
                 <c:pt idx="103">
-                  <c:v>0.921255811</c:v>
+                  <c:v>0.911942687</c:v>
                 </c:pt>
                 <c:pt idx="104">
-                  <c:v>0.918497549</c:v>
+                  <c:v>0.909275833</c:v>
                 </c:pt>
                 <c:pt idx="105">
-                  <c:v>0.916722907</c:v>
+                  <c:v>0.907104149</c:v>
                 </c:pt>
                 <c:pt idx="106">
-                  <c:v>0.915622925</c:v>
+                  <c:v>0.905400653</c:v>
                 </c:pt>
                 <c:pt idx="107">
-                  <c:v>0.916304984</c:v>
+                  <c:v>0.9054665</c:v>
                 </c:pt>
                 <c:pt idx="108">
-                  <c:v>0.927309285</c:v>
+                  <c:v>0.916658981</c:v>
                 </c:pt>
                 <c:pt idx="109">
-                  <c:v>0.92300355</c:v>
+                  <c:v>0.913320436</c:v>
                 </c:pt>
                 <c:pt idx="110">
-                  <c:v>0.9201249</c:v>
+                  <c:v>0.910624786</c:v>
                 </c:pt>
                 <c:pt idx="111">
-                  <c:v>0.918343068</c:v>
+                  <c:v>0.908493694</c:v>
                 </c:pt>
                 <c:pt idx="112">
-                  <c:v>0.917224099</c:v>
+                  <c:v>0.906794631</c:v>
                 </c:pt>
                 <c:pt idx="113">
-                  <c:v>0.916509076</c:v>
+                  <c:v>0.905477926</c:v>
                 </c:pt>
                 <c:pt idx="114">
-                  <c:v>0.916053546</c:v>
+                  <c:v>0.904367121</c:v>
                 </c:pt>
                 <c:pt idx="115">
-                  <c:v>0.922692223</c:v>
+                  <c:v>0.913869639</c:v>
                 </c:pt>
                 <c:pt idx="116">
-                  <c:v>0.920257814</c:v>
+                  <c:v>0.91127736</c:v>
                 </c:pt>
                 <c:pt idx="117">
-                  <c:v>0.918731855</c:v>
+                  <c:v>0.909221828</c:v>
                 </c:pt>
                 <c:pt idx="118">
-                  <c:v>0.91778074</c:v>
+                  <c:v>0.907674672</c:v>
                 </c:pt>
                 <c:pt idx="119">
-                  <c:v>0.917182823</c:v>
+                  <c:v>0.906346789</c:v>
                 </c:pt>
                 <c:pt idx="120">
-                  <c:v>0.916802657</c:v>
+                  <c:v>0.905252644</c:v>
                 </c:pt>
                 <c:pt idx="121">
-                  <c:v>0.916574688</c:v>
+                  <c:v>0.904365691</c:v>
                 </c:pt>
                 <c:pt idx="122">
-                  <c:v>0.918030592</c:v>
+                  <c:v>0.911265022</c:v>
                 </c:pt>
                 <c:pt idx="123">
-                  <c:v>0.917407619</c:v>
+                  <c:v>0.909392891</c:v>
                 </c:pt>
                 <c:pt idx="124">
-                  <c:v>0.91702657</c:v>
+                  <c:v>0.907867017</c:v>
                 </c:pt>
                 <c:pt idx="125">
-                  <c:v>0.916768709</c:v>
+                  <c:v>0.90662838</c:v>
                 </c:pt>
                 <c:pt idx="126">
-                  <c:v>0.916630375</c:v>
+                  <c:v>0.905648313</c:v>
                 </c:pt>
                 <c:pt idx="127">
-                  <c:v>0.916544608</c:v>
+                  <c:v>0.904926667</c:v>
                 </c:pt>
                 <c:pt idx="128">
-                  <c:v>0.915870678</c:v>
+                  <c:v>0.904303382</c:v>
                 </c:pt>
                 <c:pt idx="129">
-                  <c:v>0.913522215</c:v>
+                  <c:v>0.908780137</c:v>
                 </c:pt>
                 <c:pt idx="130">
-                  <c:v>0.914426306</c:v>
+                  <c:v>0.907473634</c:v>
                 </c:pt>
                 <c:pt idx="131">
-                  <c:v>0.915000595</c:v>
+                  <c:v>0.906466525</c:v>
                 </c:pt>
                 <c:pt idx="132">
-                  <c:v>0.915349025</c:v>
+                  <c:v>0.905680084</c:v>
                 </c:pt>
                 <c:pt idx="133">
-                  <c:v>0.915578402</c:v>
+                  <c:v>0.904964829</c:v>
                 </c:pt>
                 <c:pt idx="134">
-                  <c:v>0.915715556</c:v>
+                  <c:v>0.904403365</c:v>
                 </c:pt>
                 <c:pt idx="135">
-                  <c:v>0.911612162</c:v>
+                  <c:v>0.904029908</c:v>
                 </c:pt>
                 <c:pt idx="136">
-                  <c:v>0.909343918</c:v>
+                  <c:v>0.90659231</c:v>
                 </c:pt>
                 <c:pt idx="137">
-                  <c:v>0.911518118</c:v>
+                  <c:v>0.905755587</c:v>
                 </c:pt>
                 <c:pt idx="138">
-                  <c:v>0.912873692</c:v>
+                  <c:v>0.905105646</c:v>
                 </c:pt>
                 <c:pt idx="139">
-                  <c:v>0.913673245</c:v>
+                  <c:v>0.90467773</c:v>
                 </c:pt>
                 <c:pt idx="140">
-                  <c:v>0.914200888</c:v>
+                  <c:v>0.904244746</c:v>
                 </c:pt>
                 <c:pt idx="141">
-                  <c:v>0.914515536</c:v>
+                  <c:v>0.903864094</c:v>
                 </c:pt>
                 <c:pt idx="142">
-                  <c:v>0.907976448</c:v>
+                  <c:v>0.903626309</c:v>
                 </c:pt>
                 <c:pt idx="143">
-                  <c:v>0.905198454</c:v>
+                  <c:v>0.904573132</c:v>
                 </c:pt>
                 <c:pt idx="144">
-                  <c:v>0.908454817</c:v>
+                  <c:v>0.904162558</c:v>
                 </c:pt>
                 <c:pt idx="145">
-                  <c:v>0.910453451</c:v>
+                  <c:v>0.903852194</c:v>
                 </c:pt>
                 <c:pt idx="146">
-                  <c:v>0.911702227</c:v>
+                  <c:v>0.903685608</c:v>
                 </c:pt>
                 <c:pt idx="147">
-                  <c:v>0.912412825</c:v>
+                  <c:v>0.903464327</c:v>
                 </c:pt>
                 <c:pt idx="148">
-                  <c:v>0.912903827</c:v>
+                  <c:v>0.903272439</c:v>
                 </c:pt>
                 <c:pt idx="149">
-                  <c:v>0.904876372</c:v>
+                  <c:v>0.903207912</c:v>
                 </c:pt>
                 <c:pt idx="150">
-                  <c:v>0.901254973</c:v>
+                  <c:v>0.902816642</c:v>
                 </c:pt>
                 <c:pt idx="151">
-                  <c:v>0.90529992</c:v>
+                  <c:v>0.902743347</c:v>
                 </c:pt>
                 <c:pt idx="152">
-                  <c:v>0.907820802</c:v>
+                  <c:v>0.902773056</c:v>
                 </c:pt>
                 <c:pt idx="153">
-                  <c:v>0.909419299</c:v>
+                  <c:v>0.902775167</c:v>
                 </c:pt>
                 <c:pt idx="154">
-                  <c:v>0.910459405</c:v>
+                  <c:v>0.902690318</c:v>
                 </c:pt>
                 <c:pt idx="155">
-                  <c:v>0.911076143</c:v>
+                  <c:v>0.902728078</c:v>
                 </c:pt>
                 <c:pt idx="156">
-                  <c:v>0.902293554</c:v>
+                  <c:v>0.902739617</c:v>
                 </c:pt>
                 <c:pt idx="157">
-                  <c:v>0.897365432</c:v>
+                  <c:v>0.901327755</c:v>
                 </c:pt>
                 <c:pt idx="158">
-                  <c:v>0.902203062</c:v>
+                  <c:v>0.901624587</c:v>
                 </c:pt>
                 <c:pt idx="159">
-                  <c:v>0.905166838</c:v>
+                  <c:v>0.901819241</c:v>
                 </c:pt>
                 <c:pt idx="160">
-                  <c:v>0.907001628</c:v>
+                  <c:v>0.901919349</c:v>
                 </c:pt>
                 <c:pt idx="161">
-                  <c:v>0.908219234</c:v>
+                  <c:v>0.902091109</c:v>
                 </c:pt>
                 <c:pt idx="162">
-                  <c:v>0.908956439</c:v>
+                  <c:v>0.902180598</c:v>
                 </c:pt>
                 <c:pt idx="163">
-                  <c:v>0.90015188</c:v>
+                  <c:v>0.902203435</c:v>
                 </c:pt>
                 <c:pt idx="164">
-                  <c:v>0.893702088</c:v>
+                  <c:v>0.900182122</c:v>
                 </c:pt>
                 <c:pt idx="165">
-                  <c:v>0.89910042</c:v>
+                  <c:v>0.900603604</c:v>
                 </c:pt>
                 <c:pt idx="166">
-                  <c:v>0.902412247</c:v>
+                  <c:v>0.900901774</c:v>
                 </c:pt>
                 <c:pt idx="167">
-                  <c:v>0.904561766</c:v>
+                  <c:v>0.901247645</c:v>
                 </c:pt>
                 <c:pt idx="168">
-                  <c:v>0.905852399</c:v>
+                  <c:v>0.901450301</c:v>
                 </c:pt>
                 <c:pt idx="169">
-                  <c:v>0.906640574</c:v>
+                  <c:v>0.901588555</c:v>
                 </c:pt>
                 <c:pt idx="170">
-                  <c:v>0.898581376</c:v>
+                  <c:v>0.901801135</c:v>
                 </c:pt>
                 <c:pt idx="171">
-                  <c:v>0.890304822</c:v>
+                  <c:v>0.899165399</c:v>
                 </c:pt>
                 <c:pt idx="172">
-                  <c:v>0.896141287</c:v>
+                  <c:v>0.899736902</c:v>
                 </c:pt>
                 <c:pt idx="173">
-                  <c:v>0.899818057</c:v>
+                  <c:v>0.90025083</c:v>
                 </c:pt>
                 <c:pt idx="174">
-                  <c:v>0.902037642</c:v>
+                  <c:v>0.900574258</c:v>
                 </c:pt>
                 <c:pt idx="175">
-                  <c:v>0.903488205</c:v>
+                  <c:v>0.900915464</c:v>
                 </c:pt>
                 <c:pt idx="176">
-                  <c:v>0.904379156</c:v>
+                  <c:v>0.901157567</c:v>
                 </c:pt>
                 <c:pt idx="177">
-                  <c:v>0.897777738</c:v>
+                  <c:v>0.901281385</c:v>
                 </c:pt>
                 <c:pt idx="178">
-                  <c:v>0.888678151</c:v>
+                  <c:v>0.89973154</c:v>
                 </c:pt>
                 <c:pt idx="179">
-                  <c:v>0.893383331</c:v>
+                  <c:v>0.899146719</c:v>
                 </c:pt>
                 <c:pt idx="180">
-                  <c:v>0.897312883</c:v>
+                  <c:v>0.89964394</c:v>
                 </c:pt>
                 <c:pt idx="181">
-                  <c:v>0.899652984</c:v>
+                  <c:v>0.900135286</c:v>
                 </c:pt>
                 <c:pt idx="182">
-                  <c:v>0.901186415</c:v>
+                  <c:v>0.900401676</c:v>
                 </c:pt>
                 <c:pt idx="183">
-                  <c:v>0.902121591</c:v>
+                  <c:v>0.900728231</c:v>
                 </c:pt>
                 <c:pt idx="184">
-                  <c:v>0.897846814</c:v>
+                  <c:v>0.90096411</c:v>
                 </c:pt>
                 <c:pt idx="185">
-                  <c:v>0.888008947</c:v>
+                  <c:v>0.900985076</c:v>
                 </c:pt>
                 <c:pt idx="186">
-                  <c:v>0.891051665</c:v>
+                  <c:v>0.89872595</c:v>
                 </c:pt>
                 <c:pt idx="187">
-                  <c:v>0.895038439</c:v>
+                  <c:v>0.899254997</c:v>
                 </c:pt>
                 <c:pt idx="188">
-                  <c:v>0.89746211</c:v>
+                  <c:v>0.899684544</c:v>
                 </c:pt>
                 <c:pt idx="189">
-                  <c:v>0.899033201</c:v>
+                  <c:v>0.900088235</c:v>
                 </c:pt>
                 <c:pt idx="190">
-                  <c:v>0.89993587</c:v>
+                  <c:v>0.900324255</c:v>
                 </c:pt>
                 <c:pt idx="191">
-                  <c:v>0.899041955</c:v>
+                  <c:v>0.900619711</c:v>
                 </c:pt>
                 <c:pt idx="192">
-                  <c:v>0.888001276</c:v>
+                  <c:v>0.900813988</c:v>
                 </c:pt>
                 <c:pt idx="193">
-                  <c:v>0.889161596</c:v>
+                  <c:v>0.898339807</c:v>
                 </c:pt>
                 <c:pt idx="194">
-                  <c:v>0.893072264</c:v>
+                  <c:v>0.898970825</c:v>
                 </c:pt>
                 <c:pt idx="195">
-                  <c:v>0.89559385</c:v>
+                  <c:v>0.899380525</c:v>
                 </c:pt>
                 <c:pt idx="196">
-                  <c:v>0.897073278</c:v>
+                  <c:v>0.899799042</c:v>
                 </c:pt>
                 <c:pt idx="197">
-                  <c:v>0.898086253</c:v>
+                  <c:v>0.900074851</c:v>
                 </c:pt>
                 <c:pt idx="198">
-                  <c:v>0.898627524</c:v>
+                  <c:v>0.900267847</c:v>
                 </c:pt>
                 <c:pt idx="199">
-                  <c:v>0.888901407</c:v>
+                  <c:v>0.900531628</c:v>
                 </c:pt>
                 <c:pt idx="200">
-                  <c:v>0.887742846</c:v>
+                  <c:v>0.898091163</c:v>
                 </c:pt>
                 <c:pt idx="201">
-                  <c:v>0.891590177</c:v>
+                  <c:v>0.898709621</c:v>
                 </c:pt>
                 <c:pt idx="202">
-                  <c:v>0.894018568</c:v>
+                  <c:v>0.899173734</c:v>
                 </c:pt>
                 <c:pt idx="203">
-                  <c:v>0.895472699</c:v>
+                  <c:v>0.899479047</c:v>
                 </c:pt>
                 <c:pt idx="204">
-                  <c:v>0.896432626</c:v>
+                  <c:v>0.899845923</c:v>
                 </c:pt>
                 <c:pt idx="205">
-                  <c:v>0.896998982</c:v>
+                  <c:v>0.900028182</c:v>
                 </c:pt>
                 <c:pt idx="206">
-                  <c:v>0.890657777</c:v>
+                  <c:v>0.900216631</c:v>
                 </c:pt>
                 <c:pt idx="207">
-                  <c:v>0.886936353</c:v>
+                  <c:v>0.898072851</c:v>
                 </c:pt>
                 <c:pt idx="208">
-                  <c:v>0.890605132</c:v>
+                  <c:v>0.898553308</c:v>
                 </c:pt>
                 <c:pt idx="209">
-                  <c:v>0.892785262</c:v>
+                  <c:v>0.899063621</c:v>
                 </c:pt>
                 <c:pt idx="210">
-                  <c:v>0.894252286</c:v>
+                  <c:v>0.899372326</c:v>
                 </c:pt>
                 <c:pt idx="211">
-                  <c:v>0.895066923</c:v>
+                  <c:v>0.899654345</c:v>
                 </c:pt>
                 <c:pt idx="212">
-                  <c:v>0.895650304</c:v>
+                  <c:v>0.899894053</c:v>
                 </c:pt>
                 <c:pt idx="213">
-                  <c:v>0.893592216</c:v>
+                  <c:v>0.900004899</c:v>
                 </c:pt>
                 <c:pt idx="214">
-                  <c:v>0.886971631</c:v>
+                  <c:v>0.898095169</c:v>
                 </c:pt>
                 <c:pt idx="215">
-                  <c:v>0.890182324</c:v>
+                  <c:v>0.898546134</c:v>
                 </c:pt>
                 <c:pt idx="216">
-                  <c:v>0.892085393</c:v>
+                  <c:v>0.898940808</c:v>
                 </c:pt>
                 <c:pt idx="217">
-                  <c:v>0.893394462</c:v>
+                  <c:v>0.899307255</c:v>
                 </c:pt>
                 <c:pt idx="218">
-                  <c:v>0.894080192</c:v>
+                  <c:v>0.899489718</c:v>
                 </c:pt>
                 <c:pt idx="219">
-                  <c:v>0.894629926</c:v>
+                  <c:v>0.899767848</c:v>
                 </c:pt>
                 <c:pt idx="220">
-                  <c:v>0.894862777</c:v>
+                  <c:v>0.899905366</c:v>
                 </c:pt>
                 <c:pt idx="221">
-                  <c:v>0.887708602</c:v>
+                  <c:v>0.898112027</c:v>
                 </c:pt>
                 <c:pt idx="222">
-                  <c:v>0.890301428</c:v>
+                  <c:v>0.898587294</c:v>
                 </c:pt>
                 <c:pt idx="223">
-                  <c:v>0.891879947</c:v>
+                  <c:v>0.898888738</c:v>
                 </c:pt>
                 <c:pt idx="224">
-                  <c:v>0.892935186</c:v>
+                  <c:v>0.89924794</c:v>
                 </c:pt>
                 <c:pt idx="225">
-                  <c:v>0.893482335</c:v>
+                  <c:v>0.899429809</c:v>
                 </c:pt>
                 <c:pt idx="226">
-                  <c:v>0.893953422</c:v>
+                  <c:v>0.89962571</c:v>
                 </c:pt>
                 <c:pt idx="227">
-                  <c:v>0.894124023</c:v>
+                  <c:v>0.899802414</c:v>
                 </c:pt>
                 <c:pt idx="228">
-                  <c:v>0.889175469</c:v>
+                  <c:v>0.898238417</c:v>
                 </c:pt>
                 <c:pt idx="229">
-                  <c:v>0.890970793</c:v>
+                  <c:v>0.898702248</c:v>
                 </c:pt>
                 <c:pt idx="230">
-                  <c:v>0.892166757</c:v>
+                  <c:v>0.898965082</c:v>
                 </c:pt>
                 <c:pt idx="231">
-                  <c:v>0.892845017</c:v>
+                  <c:v>0.899200607</c:v>
                 </c:pt>
                 <c:pt idx="232">
-                  <c:v>0.893297624</c:v>
+                  <c:v>0.899441973</c:v>
                 </c:pt>
                 <c:pt idx="233">
-                  <c:v>0.893611412</c:v>
+                  <c:v>0.899538749</c:v>
                 </c:pt>
                 <c:pt idx="234">
-                  <c:v>0.893748102</c:v>
+                  <c:v>0.89973991</c:v>
                 </c:pt>
                 <c:pt idx="235">
-                  <c:v>0.892041836</c:v>
+                  <c:v>0.899097013</c:v>
                 </c:pt>
                 <c:pt idx="236">
-                  <c:v>0.892248504</c:v>
+                  <c:v>0.898761775</c:v>
                 </c:pt>
                 <c:pt idx="237">
-                  <c:v>0.892897968</c:v>
+                  <c:v>0.899064476</c:v>
                 </c:pt>
                 <c:pt idx="238">
-                  <c:v>0.893179094</c:v>
+                  <c:v>0.89920731</c:v>
                 </c:pt>
                 <c:pt idx="239">
-                  <c:v>0.893463842</c:v>
+                  <c:v>0.899449874</c:v>
                 </c:pt>
                 <c:pt idx="240">
-                  <c:v>0.89354795</c:v>
+                  <c:v>0.899549998</c:v>
                 </c:pt>
                 <c:pt idx="241">
-                  <c:v>0.893698755</c:v>
+                  <c:v>0.89962731</c:v>
                 </c:pt>
                 <c:pt idx="242">
-                  <c:v>0.893687174</c:v>
+                  <c:v>0.899779886</c:v>
                 </c:pt>
                 <c:pt idx="243">
-                  <c:v>0.894079122</c:v>
+                  <c:v>0.898874827</c:v>
                 </c:pt>
                 <c:pt idx="244">
-                  <c:v>0.893958237</c:v>
+                  <c:v>0.899163062</c:v>
                 </c:pt>
                 <c:pt idx="245">
-                  <c:v>0.893953213</c:v>
+                  <c:v>0.899320993</c:v>
                 </c:pt>
                 <c:pt idx="246">
-                  <c:v>0.893904742</c:v>
+                  <c:v>0.899420368</c:v>
                 </c:pt>
                 <c:pt idx="247">
-                  <c:v>0.893900811</c:v>
+                  <c:v>0.899573947</c:v>
                 </c:pt>
                 <c:pt idx="248">
-                  <c:v>0.893855816</c:v>
+                  <c:v>0.899606868</c:v>
                 </c:pt>
                 <c:pt idx="249">
-                  <c:v>0.893877277</c:v>
+                  <c:v>0.899717408</c:v>
                 </c:pt>
                 <c:pt idx="250">
-                  <c:v>0.89619615</c:v>
+                  <c:v>0.899061657</c:v>
                 </c:pt>
                 <c:pt idx="251">
-                  <c:v>0.895424175</c:v>
+                  <c:v>0.899195723</c:v>
                 </c:pt>
                 <c:pt idx="252">
-                  <c:v>0.894898902</c:v>
+                  <c:v>0.899394097</c:v>
                 </c:pt>
                 <c:pt idx="253">
-                  <c:v>0.894645928</c:v>
+                  <c:v>0.899431227</c:v>
                 </c:pt>
                 <c:pt idx="254">
-                  <c:v>0.89444592</c:v>
+                  <c:v>0.899583027</c:v>
                 </c:pt>
                 <c:pt idx="255">
-                  <c:v>0.894338286</c:v>
+                  <c:v>0.899644524</c:v>
                 </c:pt>
                 <c:pt idx="256">
-                  <c:v>0.894227021</c:v>
+                  <c:v>0.899650511</c:v>
                 </c:pt>
                 <c:pt idx="257">
-                  <c:v>0.898562104</c:v>
+                  <c:v>0.899227932</c:v>
                 </c:pt>
                 <c:pt idx="258">
-                  <c:v>0.897023919</c:v>
+                  <c:v>0.89930879</c:v>
                 </c:pt>
                 <c:pt idx="259">
-                  <c:v>0.896156147</c:v>
+                  <c:v>0.899448005</c:v>
                 </c:pt>
                 <c:pt idx="260">
-                  <c:v>0.895532971</c:v>
+                  <c:v>0.899532372</c:v>
                 </c:pt>
                 <c:pt idx="261">
-                  <c:v>0.895227418</c:v>
+                  <c:v>0.899552952</c:v>
                 </c:pt>
                 <c:pt idx="262">
-                  <c:v>0.894932499</c:v>
+                  <c:v>0.899681351</c:v>
                 </c:pt>
                 <c:pt idx="263">
-                  <c:v>0.894866218</c:v>
+                  <c:v>0.899677794</c:v>
                 </c:pt>
                 <c:pt idx="264">
-                  <c:v>0.900735329</c:v>
+                  <c:v>0.899366309</c:v>
                 </c:pt>
                 <c:pt idx="265">
-                  <c:v>0.898806917</c:v>
+                  <c:v>0.899469557</c:v>
                 </c:pt>
                 <c:pt idx="266">
-                  <c:v>0.897435758</c:v>
+                  <c:v>0.899482652</c:v>
                 </c:pt>
                 <c:pt idx="267">
-                  <c:v>0.896576015</c:v>
+                  <c:v>0.899615529</c:v>
                 </c:pt>
                 <c:pt idx="268">
-                  <c:v>0.896086699</c:v>
+                  <c:v>0.89961596</c:v>
                 </c:pt>
                 <c:pt idx="269">
-                  <c:v>0.895744833</c:v>
+                  <c:v>0.899649205</c:v>
                 </c:pt>
                 <c:pt idx="270">
-                  <c:v>0.895579083</c:v>
+                  <c:v>0.899732509</c:v>
                 </c:pt>
                 <c:pt idx="271">
-                  <c:v>0.899955246</c:v>
+                  <c:v>0.899469922</c:v>
                 </c:pt>
                 <c:pt idx="272">
-                  <c:v>0.900533069</c:v>
+                  <c:v>0.899606416</c:v>
                 </c:pt>
                 <c:pt idx="273">
-                  <c:v>0.898761878</c:v>
+                  <c:v>0.899633836</c:v>
                 </c:pt>
                 <c:pt idx="274">
-                  <c:v>0.89771825</c:v>
+                  <c:v>0.899617671</c:v>
                 </c:pt>
                 <c:pt idx="275">
-                  <c:v>0.897069496</c:v>
+                  <c:v>0.899716845</c:v>
                 </c:pt>
                 <c:pt idx="276">
-                  <c:v>0.896620018</c:v>
+                  <c:v>0.899676055</c:v>
                 </c:pt>
                 <c:pt idx="277">
-                  <c:v>0.89640176</c:v>
+                  <c:v>0.899735433</c:v>
                 </c:pt>
                 <c:pt idx="278">
-                  <c:v>0.899186577</c:v>
+                  <c:v>0.899646089</c:v>
                 </c:pt>
                 <c:pt idx="279">
-                  <c:v>0.902142087</c:v>
+                  <c:v>0.899624976</c:v>
                 </c:pt>
                 <c:pt idx="280">
-                  <c:v>0.900099283</c:v>
+                  <c:v>0.899726001</c:v>
                 </c:pt>
                 <c:pt idx="281">
-                  <c:v>0.898807437</c:v>
+                  <c:v>0.899709473</c:v>
                 </c:pt>
                 <c:pt idx="282">
-                  <c:v>0.898083096</c:v>
+                  <c:v>0.899736476</c:v>
                 </c:pt>
                 <c:pt idx="283">
-                  <c:v>0.897528021</c:v>
+                  <c:v>0.899770537</c:v>
                 </c:pt>
                 <c:pt idx="284">
-                  <c:v>0.897296566</c:v>
+                  <c:v>0.899712054</c:v>
                 </c:pt>
                 <c:pt idx="285">
-                  <c:v>0.898374224</c:v>
+                  <c:v>0.899795947</c:v>
                 </c:pt>
                 <c:pt idx="286">
-                  <c:v>0.903535261</c:v>
+                  <c:v>0.899764136</c:v>
                 </c:pt>
                 <c:pt idx="287">
-                  <c:v>0.901316343</c:v>
+                  <c:v>0.899741447</c:v>
                 </c:pt>
                 <c:pt idx="288">
-                  <c:v>0.899871805</c:v>
+                  <c:v>0.899805782</c:v>
                 </c:pt>
                 <c:pt idx="289">
-                  <c:v>0.89907362</c:v>
+                  <c:v>0.899740996</c:v>
                 </c:pt>
                 <c:pt idx="290">
-                  <c:v>0.898499707</c:v>
+                  <c:v>0.899809533</c:v>
                 </c:pt>
                 <c:pt idx="291">
-                  <c:v>0.898117468</c:v>
+                  <c:v>0.899811905</c:v>
                 </c:pt>
                 <c:pt idx="292">
-                  <c:v>0.897965457</c:v>
+                  <c:v>0.899761872</c:v>
                 </c:pt>
                 <c:pt idx="293">
-                  <c:v>0.904627468</c:v>
+                  <c:v>0.899867728</c:v>
                 </c:pt>
                 <c:pt idx="294">
-                  <c:v>0.902295361</c:v>
+                  <c:v>0.899811276</c:v>
                 </c:pt>
                 <c:pt idx="295">
-                  <c:v>0.900875594</c:v>
+                  <c:v>0.899804963</c:v>
                 </c:pt>
                 <c:pt idx="296">
-                  <c:v>0.899906541</c:v>
+                  <c:v>0.899831303</c:v>
                 </c:pt>
                 <c:pt idx="297">
-                  <c:v>0.899395686</c:v>
+                  <c:v>0.899776223</c:v>
                 </c:pt>
                 <c:pt idx="298">
-                  <c:v>0.899025822</c:v>
+                  <c:v>0.899846312</c:v>
                 </c:pt>
                 <c:pt idx="299">
-                  <c:v>0.898744421</c:v>
+                  <c:v>0.899830256</c:v>
                 </c:pt>
                 <c:pt idx="300">
-                  <c:v>0.905526829</c:v>
+                  <c:v>0.899905111</c:v>
                 </c:pt>
                 <c:pt idx="301">
-                  <c:v>0.90313017</c:v>
+                  <c:v>0.899914228</c:v>
                 </c:pt>
                 <c:pt idx="302">
-                  <c:v>0.901606428</c:v>
+                  <c:v>0.899843008</c:v>
                 </c:pt>
                 <c:pt idx="303">
-                  <c:v>0.900779266</c:v>
+                  <c:v>0.89989242</c:v>
                 </c:pt>
                 <c:pt idx="304">
-                  <c:v>0.90017154</c:v>
+                  <c:v>0.89985506</c:v>
                 </c:pt>
                 <c:pt idx="305">
-                  <c:v>0.899776957</c:v>
+                  <c:v>0.899806131</c:v>
                 </c:pt>
                 <c:pt idx="306">
-                  <c:v>0.899609982</c:v>
+                  <c:v>0.899873016</c:v>
                 </c:pt>
                 <c:pt idx="307">
-                  <c:v>0.906008741</c:v>
+                  <c:v>0.899957083</c:v>
                 </c:pt>
                 <c:pt idx="308">
-                  <c:v>0.903703595</c:v>
+                  <c:v>0.899963001</c:v>
                 </c:pt>
                 <c:pt idx="309">
-                  <c:v>0.902343303</c:v>
+                  <c:v>0.899951065</c:v>
                 </c:pt>
                 <c:pt idx="310">
-                  <c:v>0.901413116</c:v>
+                  <c:v>0.899868874</c:v>
                 </c:pt>
                 <c:pt idx="311">
-                  <c:v>0.900840064</c:v>
+                  <c:v>0.899926985</c:v>
                 </c:pt>
                 <c:pt idx="312">
-                  <c:v>0.90055087</c:v>
+                  <c:v>0.899874845</c:v>
                 </c:pt>
                 <c:pt idx="313">
-                  <c:v>0.90028201</c:v>
+                  <c:v>0.899835257</c:v>
                 </c:pt>
                 <c:pt idx="314">
-                  <c:v>0.906320367</c:v>
+                  <c:v>0.900041286</c:v>
                 </c:pt>
                 <c:pt idx="315">
-                  <c:v>0.904197825</c:v>
+                  <c:v>0.899948789</c:v>
                 </c:pt>
                 <c:pt idx="316">
-                  <c:v>0.902818785</c:v>
+                  <c:v>0.899973414</c:v>
                 </c:pt>
                 <c:pt idx="317">
-                  <c:v>0.90197301</c:v>
+                  <c:v>0.899937897</c:v>
                 </c:pt>
                 <c:pt idx="318">
-                  <c:v>0.901502592</c:v>
+                  <c:v>0.899878132</c:v>
                 </c:pt>
                 <c:pt idx="319">
-                  <c:v>0.901145961</c:v>
+                  <c:v>0.899936332</c:v>
                 </c:pt>
                 <c:pt idx="320">
-                  <c:v>0.900903504</c:v>
+                  <c:v>0.89987727</c:v>
                 </c:pt>
                 <c:pt idx="321">
-                  <c:v>0.906277391</c:v>
+                  <c:v>0.900050595</c:v>
                 </c:pt>
                 <c:pt idx="322">
-                  <c:v>0.904339518</c:v>
+                  <c:v>0.900027236</c:v>
                 </c:pt>
                 <c:pt idx="323">
-                  <c:v>0.903090524</c:v>
+                  <c:v>0.899937739</c:v>
                 </c:pt>
                 <c:pt idx="324">
-                  <c:v>0.902412092</c:v>
+                  <c:v>0.899976821</c:v>
                 </c:pt>
                 <c:pt idx="325">
-                  <c:v>0.901945866</c:v>
+                  <c:v>0.899932347</c:v>
                 </c:pt>
                 <c:pt idx="326">
-                  <c:v>0.901599194</c:v>
+                  <c:v>0.899885561</c:v>
                 </c:pt>
                 <c:pt idx="327">
-                  <c:v>0.901489103</c:v>
+                  <c:v>0.89994219</c:v>
                 </c:pt>
                 <c:pt idx="328">
-                  <c:v>0.90590031</c:v>
+                  <c:v>0.900018556</c:v>
                 </c:pt>
                 <c:pt idx="329">
-                  <c:v>0.904243148</c:v>
+                  <c:v>0.900042733</c:v>
                 </c:pt>
                 <c:pt idx="330">
-                  <c:v>0.903275349</c:v>
+                  <c:v>0.900016812</c:v>
                 </c:pt>
                 <c:pt idx="331">
-                  <c:v>0.90267342</c:v>
+                  <c:v>0.899931046</c:v>
                 </c:pt>
                 <c:pt idx="332">
-                  <c:v>0.90222554</c:v>
+                  <c:v>0.899987274</c:v>
                 </c:pt>
                 <c:pt idx="333">
-                  <c:v>0.902018953</c:v>
+                  <c:v>0.8999287</c:v>
                 </c:pt>
                 <c:pt idx="334">
-                  <c:v>0.901894933</c:v>
+                  <c:v>0.89989496</c:v>
                 </c:pt>
                 <c:pt idx="335">
-                  <c:v>0.905244248</c:v>
+                  <c:v>0.900105804</c:v>
                 </c:pt>
                 <c:pt idx="336">
-                  <c:v>0.904040612</c:v>
+                  <c:v>0.900000329</c:v>
                 </c:pt>
                 <c:pt idx="337">
-                  <c:v>0.903292031</c:v>
+                  <c:v>0.900037266</c:v>
                 </c:pt>
                 <c:pt idx="338">
-                  <c:v>0.902760159</c:v>
+                  <c:v>0.900010647</c:v>
                 </c:pt>
                 <c:pt idx="339">
-                  <c:v>0.902447157</c:v>
+                  <c:v>0.899935819</c:v>
                 </c:pt>
                 <c:pt idx="340">
-                  <c:v>0.902306086</c:v>
+                  <c:v>0.899989126</c:v>
                 </c:pt>
                 <c:pt idx="341">
-                  <c:v>0.902162625</c:v>
+                  <c:v>0.899928379</c:v>
                 </c:pt>
                 <c:pt idx="342">
-                  <c:v>0.903971894</c:v>
+                  <c:v>0.900121058</c:v>
                 </c:pt>
                 <c:pt idx="343">
-                  <c:v>0.90368584</c:v>
+                  <c:v>0.90008716</c:v>
                 </c:pt>
                 <c:pt idx="344">
-                  <c:v>0.903113342</c:v>
+                  <c:v>0.899988595</c:v>
                 </c:pt>
                 <c:pt idx="345">
-                  <c:v>0.902708216</c:v>
+                  <c:v>0.900034941</c:v>
                 </c:pt>
                 <c:pt idx="346">
-                  <c:v>0.902577451</c:v>
+                  <c:v>0.899984457</c:v>
                 </c:pt>
                 <c:pt idx="347">
-                  <c:v>0.902422593</c:v>
+                  <c:v>0.899940522</c:v>
                 </c:pt>
                 <c:pt idx="348">
-                  <c:v>0.902280941</c:v>
+                  <c:v>0.899993444</c:v>
                 </c:pt>
                 <c:pt idx="349">
-                  <c:v>0.902509846</c:v>
+                  <c:v>0.90002558</c:v>
                 </c:pt>
                 <c:pt idx="350">
-                  <c:v>0.903147531</c:v>
+                  <c:v>0.900058574</c:v>
                 </c:pt>
                 <c:pt idx="351">
-                  <c:v>0.902780426</c:v>
+                  <c:v>0.900035354</c:v>
                 </c:pt>
                 <c:pt idx="352">
-                  <c:v>0.902622281</c:v>
+                  <c:v>0.899949715</c:v>
                 </c:pt>
                 <c:pt idx="353">
-                  <c:v>0.902520167</c:v>
+                  <c:v>0.900011158</c:v>
                 </c:pt>
                 <c:pt idx="354">
-                  <c:v>0.902391653</c:v>
+                  <c:v>0.899958037</c:v>
                 </c:pt>
                 <c:pt idx="355">
-                  <c:v>0.902382691</c:v>
+                  <c:v>0.899929092</c:v>
                 </c:pt>
                 <c:pt idx="356">
-                  <c:v>0.902384891</c:v>
+                  <c:v>0.899982644</c:v>
                 </c:pt>
                 <c:pt idx="357">
-                  <c:v>0.902456119</c:v>
+                  <c:v>0.900000474</c:v>
                 </c:pt>
                 <c:pt idx="358">
-                  <c:v>0.902436236</c:v>
+                  <c:v>0.900044638</c:v>
                 </c:pt>
                 <c:pt idx="359">
-                  <c:v>0.902421249</c:v>
+                  <c:v>0.900022299</c:v>
                 </c:pt>
                 <c:pt idx="360">
-                  <c:v>0.90232435</c:v>
+                  <c:v>0.899952499</c:v>
                 </c:pt>
                 <c:pt idx="361">
-                  <c:v>0.902360867</c:v>
+                  <c:v>0.900005194</c:v>
                 </c:pt>
                 <c:pt idx="362">
-                  <c:v>0.902370133</c:v>
+                  <c:v>0.899952203</c:v>
                 </c:pt>
                 <c:pt idx="363">
-                  <c:v>0.902325359</c:v>
+                  <c:v>0.899934444</c:v>
                 </c:pt>
                 <c:pt idx="364">
-                  <c:v>0.901800343</c:v>
+                  <c:v>0.900080364</c:v>
                 </c:pt>
                 <c:pt idx="365">
-                  <c:v>0.901983361</c:v>
+                  <c:v>0.899989767</c:v>
                 </c:pt>
                 <c:pt idx="366">
-                  <c:v>0.902045803</c:v>
+                  <c:v>0.900041045</c:v>
                 </c:pt>
                 <c:pt idx="367">
-                  <c:v>0.902154987</c:v>
+                  <c:v>0.899991604</c:v>
                 </c:pt>
                 <c:pt idx="368">
-                  <c:v>0.902202124</c:v>
+                  <c:v>0.899955074</c:v>
                 </c:pt>
                 <c:pt idx="369">
-                  <c:v>0.902179693</c:v>
+                  <c:v>0.900005266</c:v>
                 </c:pt>
                 <c:pt idx="370">
-                  <c:v>0.902206715</c:v>
+                  <c:v>0.899951536</c:v>
                 </c:pt>
                 <c:pt idx="371">
-                  <c:v>0.901085118</c:v>
+                  <c:v>0.900038487</c:v>
                 </c:pt>
                 <c:pt idx="372">
-                  <c:v>0.901413492</c:v>
+                  <c:v>0.900027628</c:v>
                 </c:pt>
                 <c:pt idx="373">
-                  <c:v>0.901709802</c:v>
+                  <c:v>0.899949979</c:v>
                 </c:pt>
                 <c:pt idx="374">
-                  <c:v>0.901870389</c:v>
+                  <c:v>0.900013525</c:v>
                 </c:pt>
                 <c:pt idx="375">
-                  <c:v>0.901904798</c:v>
+                  <c:v>0.899962205</c:v>
                 </c:pt>
                 <c:pt idx="376">
-                  <c:v>0.902032896</c:v>
+                  <c:v>0.89994079</c:v>
                 </c:pt>
                 <c:pt idx="377">
-                  <c:v>0.902071731</c:v>
+                  <c:v>0.899989743</c:v>
                 </c:pt>
                 <c:pt idx="378">
-                  <c:v>0.90026102</c:v>
+                  <c:v>0.899971959</c:v>
                 </c:pt>
                 <c:pt idx="379">
-                  <c:v>0.900938819</c:v>
+                  <c:v>0.900027292</c:v>
                 </c:pt>
                 <c:pt idx="380">
-                  <c:v>0.901291837</c:v>
+                  <c:v>0.900015288</c:v>
                 </c:pt>
                 <c:pt idx="381">
-                  <c:v>0.901473158</c:v>
+                  <c:v>0.899950117</c:v>
                 </c:pt>
                 <c:pt idx="382">
-                  <c:v>0.901691286</c:v>
+                  <c:v>0.900006458</c:v>
                 </c:pt>
                 <c:pt idx="383">
-                  <c:v>0.901741296</c:v>
+                  <c:v>0.899953799</c:v>
                 </c:pt>
                 <c:pt idx="384">
-                  <c:v>0.901768558</c:v>
+                  <c:v>0.89994442</c:v>
                 </c:pt>
                 <c:pt idx="385">
-                  <c:v>0.89955454</c:v>
+                  <c:v>0.900030591</c:v>
                 </c:pt>
                 <c:pt idx="386">
-                  <c:v>0.900298742</c:v>
+                  <c:v>0.89996473</c:v>
                 </c:pt>
                 <c:pt idx="387">
-                  <c:v>0.90081648</c:v>
+                  <c:v>0.900025642</c:v>
                 </c:pt>
                 <c:pt idx="388">
-                  <c:v>0.901153062</c:v>
+                  <c:v>0.900010574</c:v>
                 </c:pt>
                 <c:pt idx="389">
-                  <c:v>0.901274098</c:v>
+                  <c:v>0.899969467</c:v>
                 </c:pt>
                 <c:pt idx="390">
-                  <c:v>0.901449388</c:v>
+                  <c:v>0.900004753</c:v>
                 </c:pt>
                 <c:pt idx="391">
-                  <c:v>0.901530893</c:v>
+                  <c:v>0.899949932</c:v>
                 </c:pt>
                 <c:pt idx="392">
-                  <c:v>0.898803017</c:v>
+                  <c:v>0.900049934</c:v>
                 </c:pt>
                 <c:pt idx="393">
-                  <c:v>0.899818383</c:v>
+                  <c:v>0.900022194</c:v>
                 </c:pt>
                 <c:pt idx="394">
-                  <c:v>0.900378911</c:v>
+                  <c:v>0.899961642</c:v>
                 </c:pt>
                 <c:pt idx="395">
-                  <c:v>0.900706288</c:v>
+                  <c:v>0.900026297</c:v>
                 </c:pt>
                 <c:pt idx="396">
-                  <c:v>0.900985153</c:v>
+                  <c:v>0.899973436</c:v>
                 </c:pt>
                 <c:pt idx="397">
-                  <c:v>0.901076974</c:v>
+                  <c:v>0.899976243</c:v>
                 </c:pt>
                 <c:pt idx="398">
-                  <c:v>0.901173227</c:v>
+                  <c:v>0.900004887</c:v>
                 </c:pt>
                 <c:pt idx="399">
-                  <c:v>0.898204719</c:v>
+                  <c:v>0.899990014</c:v>
                 </c:pt>
                 <c:pt idx="400">
-                  <c:v>0.899219868</c:v>
+                  <c:v>0.900047151</c:v>
                 </c:pt>
                 <c:pt idx="401">
-                  <c:v>0.899959296</c:v>
+                  <c:v>0.900015784</c:v>
                 </c:pt>
                 <c:pt idx="402">
-                  <c:v>0.900356481</c:v>
+                  <c:v>0.899960709</c:v>
                 </c:pt>
               </c:numCache>
             </c:numRef>
@@ -5806,7 +6238,7 @@
               <c:strCache>
                 <c:ptCount val="1"/>
                 <c:pt idx="0">
-                  <c:v>true 0 V cold start (boosted): 839 ns</c:v>
+                  <c:v>true 0 V cold start (boosted): 1352 ns</c:v>
                 </c:pt>
               </c:strCache>
             </c:strRef>
@@ -7046,1213 +7478,1213 @@
                 <c:formatCode>General</c:formatCode>
                 <c:ptCount val="403"/>
                 <c:pt idx="0">
-                  <c:v>0.000294911709</c:v>
+                  <c:v>0.000294914395</c:v>
                 </c:pt>
                 <c:pt idx="1">
-                  <c:v>0.0774610454</c:v>
+                  <c:v>0.0893585461</c:v>
                 </c:pt>
                 <c:pt idx="2">
-                  <c:v>0.124313413</c:v>
+                  <c:v>0.161442864</c:v>
                 </c:pt>
                 <c:pt idx="3">
-                  <c:v>0.15206774</c:v>
+                  <c:v>0.215087275</c:v>
                 </c:pt>
                 <c:pt idx="4">
-                  <c:v>0.171056293</c:v>
+                  <c:v>0.256953296</c:v>
                 </c:pt>
                 <c:pt idx="5">
-                  <c:v>0.185279066</c:v>
+                  <c:v>0.289278489</c:v>
                 </c:pt>
                 <c:pt idx="6">
-                  <c:v>0.197485457</c:v>
+                  <c:v>0.315639096</c:v>
                 </c:pt>
                 <c:pt idx="7">
-                  <c:v>0.208580472</c:v>
+                  <c:v>0.33733422</c:v>
                 </c:pt>
                 <c:pt idx="8">
-                  <c:v>0.218972246</c:v>
+                  <c:v>0.355436693</c:v>
                 </c:pt>
                 <c:pt idx="9">
-                  <c:v>0.229257071</c:v>
+                  <c:v>0.371447155</c:v>
                 </c:pt>
                 <c:pt idx="10">
-                  <c:v>0.239254058</c:v>
+                  <c:v>0.385537904</c:v>
                 </c:pt>
                 <c:pt idx="11">
-                  <c:v>0.249341605</c:v>
+                  <c:v>0.398630823</c:v>
                 </c:pt>
                 <c:pt idx="12">
-                  <c:v>0.259244093</c:v>
+                  <c:v>0.410664841</c:v>
                 </c:pt>
                 <c:pt idx="13">
-                  <c:v>0.26928352</c:v>
+                  <c:v>0.422259226</c:v>
                 </c:pt>
                 <c:pt idx="14">
-                  <c:v>0.279315011</c:v>
+                  <c:v>0.433402074</c:v>
                 </c:pt>
                 <c:pt idx="15">
-                  <c:v>0.289188827</c:v>
+                  <c:v>0.444057907</c:v>
                 </c:pt>
                 <c:pt idx="16">
-                  <c:v>0.299214418</c:v>
+                  <c:v>0.454649208</c:v>
                 </c:pt>
                 <c:pt idx="17">
-                  <c:v>0.309086599</c:v>
+                  <c:v>0.464916156</c:v>
                 </c:pt>
                 <c:pt idx="18">
-                  <c:v>0.319110575</c:v>
+                  <c:v>0.475225435</c:v>
                 </c:pt>
                 <c:pt idx="19">
-                  <c:v>0.329134186</c:v>
+                  <c:v>0.48545417</c:v>
                 </c:pt>
                 <c:pt idx="20">
-                  <c:v>0.339003832</c:v>
+                  <c:v>0.495470467</c:v>
                 </c:pt>
                 <c:pt idx="21">
-                  <c:v>0.349026925</c:v>
+                  <c:v>0.505600448</c:v>
                 </c:pt>
                 <c:pt idx="22">
-                  <c:v>0.358897416</c:v>
+                  <c:v>0.515544327</c:v>
                 </c:pt>
                 <c:pt idx="23">
-                  <c:v>0.368919969</c:v>
+                  <c:v>0.525616079</c:v>
                 </c:pt>
                 <c:pt idx="24">
-                  <c:v>0.378788515</c:v>
+                  <c:v>0.535508292</c:v>
                 </c:pt>
                 <c:pt idx="25">
-                  <c:v>0.388810341</c:v>
+                  <c:v>0.54553536</c:v>
                 </c:pt>
                 <c:pt idx="26">
-                  <c:v>0.398831695</c:v>
+                  <c:v>0.555583436</c:v>
                 </c:pt>
                 <c:pt idx="27">
-                  <c:v>0.408700184</c:v>
+                  <c:v>0.565471325</c:v>
                 </c:pt>
                 <c:pt idx="28">
-                  <c:v>0.418720358</c:v>
+                  <c:v>0.575507364</c:v>
                 </c:pt>
                 <c:pt idx="29">
-                  <c:v>0.428586197</c:v>
+                  <c:v>0.585391247</c:v>
                 </c:pt>
                 <c:pt idx="30">
-                  <c:v>0.438604868</c:v>
+                  <c:v>0.595424377</c:v>
                 </c:pt>
                 <c:pt idx="31">
-                  <c:v>0.448470165</c:v>
+                  <c:v>0.605332122</c:v>
                 </c:pt>
                 <c:pt idx="32">
-                  <c:v>0.458486775</c:v>
+                  <c:v>0.615380103</c:v>
                 </c:pt>
                 <c:pt idx="33">
-                  <c:v>0.468504431</c:v>
+                  <c:v>0.625382356</c:v>
                 </c:pt>
                 <c:pt idx="34">
-                  <c:v>0.478371084</c:v>
+                  <c:v>0.63524289</c:v>
                 </c:pt>
                 <c:pt idx="35">
-                  <c:v>0.4883935</c:v>
+                  <c:v>0.645262826</c:v>
                 </c:pt>
                 <c:pt idx="36">
-                  <c:v>0.498263626</c:v>
+                  <c:v>0.655147343</c:v>
                 </c:pt>
                 <c:pt idx="37">
-                  <c:v>0.508284609</c:v>
+                  <c:v>0.665135557</c:v>
                 </c:pt>
                 <c:pt idx="38">
-                  <c:v>0.518303192</c:v>
+                  <c:v>0.675149409</c:v>
                 </c:pt>
                 <c:pt idx="39">
-                  <c:v>0.528164411</c:v>
+                  <c:v>0.685026786</c:v>
                 </c:pt>
                 <c:pt idx="40">
-                  <c:v>0.538166156</c:v>
+                  <c:v>0.695073983</c:v>
                 </c:pt>
                 <c:pt idx="41">
-                  <c:v>0.548036523</c:v>
+                  <c:v>0.704886717</c:v>
                 </c:pt>
                 <c:pt idx="42">
-                  <c:v>0.55806613</c:v>
+                  <c:v>0.714910834</c:v>
                 </c:pt>
                 <c:pt idx="43">
-                  <c:v>0.567936415</c:v>
+                  <c:v>0.724776673</c:v>
                 </c:pt>
                 <c:pt idx="44">
-                  <c:v>0.577962862</c:v>
+                  <c:v>0.734807845</c:v>
                 </c:pt>
                 <c:pt idx="45">
-                  <c:v>0.587988109</c:v>
+                  <c:v>0.744839654</c:v>
                 </c:pt>
                 <c:pt idx="46">
-                  <c:v>0.597861796</c:v>
+                  <c:v>0.754725498</c:v>
                 </c:pt>
                 <c:pt idx="47">
-                  <c:v>0.607913298</c:v>
+                  <c:v>0.764718018</c:v>
                 </c:pt>
                 <c:pt idx="48">
-                  <c:v>0.617791813</c:v>
+                  <c:v>0.774613712</c:v>
                 </c:pt>
                 <c:pt idx="49">
-                  <c:v>0.627770392</c:v>
+                  <c:v>0.784616397</c:v>
                 </c:pt>
                 <c:pt idx="50">
-                  <c:v>0.637662375</c:v>
+                  <c:v>0.794505543</c:v>
                 </c:pt>
                 <c:pt idx="51">
-                  <c:v>0.647646347</c:v>
+                  <c:v>0.770374367</c:v>
                 </c:pt>
                 <c:pt idx="52">
-                  <c:v>0.65771296</c:v>
+                  <c:v>0.694613617</c:v>
                 </c:pt>
                 <c:pt idx="53">
-                  <c:v>0.667569941</c:v>
+                  <c:v>0.71136637</c:v>
                 </c:pt>
                 <c:pt idx="54">
-                  <c:v>0.677592424</c:v>
+                  <c:v>0.748981168</c:v>
                 </c:pt>
                 <c:pt idx="55">
-                  <c:v>0.687469755</c:v>
+                  <c:v>0.778402639</c:v>
                 </c:pt>
                 <c:pt idx="56">
-                  <c:v>0.697422936</c:v>
+                  <c:v>0.802603286</c:v>
                 </c:pt>
                 <c:pt idx="57">
-                  <c:v>0.707442786</c:v>
+                  <c:v>0.822610243</c:v>
                 </c:pt>
                 <c:pt idx="58">
-                  <c:v>0.717359579</c:v>
+                  <c:v>0.83980772</c:v>
                 </c:pt>
                 <c:pt idx="59">
-                  <c:v>0.727397414</c:v>
+                  <c:v>0.855064552</c:v>
                 </c:pt>
                 <c:pt idx="60">
-                  <c:v>0.737234139</c:v>
+                  <c:v>0.868632418</c:v>
                 </c:pt>
                 <c:pt idx="61">
-                  <c:v>0.74728676</c:v>
+                  <c:v>0.793427922</c:v>
                 </c:pt>
                 <c:pt idx="62">
-                  <c:v>0.757140856</c:v>
+                  <c:v>0.757245055</c:v>
                 </c:pt>
                 <c:pt idx="63">
-                  <c:v>0.767159548</c:v>
+                  <c:v>0.802531299</c:v>
                 </c:pt>
                 <c:pt idx="64">
-                  <c:v>0.777190803</c:v>
+                  <c:v>0.837737513</c:v>
                 </c:pt>
                 <c:pt idx="65">
-                  <c:v>0.787050391</c:v>
+                  <c:v>0.865418587</c:v>
                 </c:pt>
                 <c:pt idx="66">
-                  <c:v>0.797071142</c:v>
+                  <c:v>0.888422836</c:v>
                 </c:pt>
                 <c:pt idx="67">
-                  <c:v>0.799293318</c:v>
+                  <c:v>0.899204495</c:v>
                 </c:pt>
                 <c:pt idx="68">
-                  <c:v>0.812670169</c:v>
+                  <c:v>0.82343292</c:v>
                 </c:pt>
                 <c:pt idx="69">
-                  <c:v>0.824235734</c:v>
+                  <c:v>0.769904555</c:v>
                 </c:pt>
                 <c:pt idx="70">
-                  <c:v>0.835075885</c:v>
+                  <c:v>0.730909292</c:v>
                 </c:pt>
                 <c:pt idx="71">
-                  <c:v>0.845513783</c:v>
+                  <c:v>0.703005254</c:v>
                 </c:pt>
                 <c:pt idx="72">
-                  <c:v>0.855525569</c:v>
+                  <c:v>0.754823797</c:v>
                 </c:pt>
                 <c:pt idx="73">
-                  <c:v>0.865659177</c:v>
+                  <c:v>0.816838657</c:v>
                 </c:pt>
                 <c:pt idx="74">
-                  <c:v>0.8104748</c:v>
+                  <c:v>0.863405787</c:v>
                 </c:pt>
                 <c:pt idx="75">
-                  <c:v>0.768474573</c:v>
+                  <c:v>0.900129636</c:v>
                 </c:pt>
                 <c:pt idx="76">
-                  <c:v>0.747903151</c:v>
+                  <c:v>0.862141047</c:v>
                 </c:pt>
                 <c:pt idx="77">
-                  <c:v>0.817858917</c:v>
+                  <c:v>0.901646928</c:v>
                 </c:pt>
                 <c:pt idx="78">
-                  <c:v>0.858439992</c:v>
+                  <c:v>0.934042426</c:v>
                 </c:pt>
                 <c:pt idx="79">
-                  <c:v>0.883196074</c:v>
+                  <c:v>0.959662493</c:v>
                 </c:pt>
                 <c:pt idx="80">
-                  <c:v>0.900635348</c:v>
+                  <c:v>0.959047041</c:v>
                 </c:pt>
                 <c:pt idx="81">
-                  <c:v>0.874453904</c:v>
+                  <c:v>0.914052988</c:v>
                 </c:pt>
                 <c:pt idx="82">
-                  <c:v>0.90394784</c:v>
+                  <c:v>0.951440102</c:v>
                 </c:pt>
                 <c:pt idx="83">
-                  <c:v>0.923596931</c:v>
+                  <c:v>0.981143912</c:v>
                 </c:pt>
                 <c:pt idx="84">
-                  <c:v>0.938090273</c:v>
+                  <c:v>0.986741446</c:v>
                 </c:pt>
                 <c:pt idx="85">
-                  <c:v>0.933160493</c:v>
+                  <c:v>0.916949478</c:v>
                 </c:pt>
                 <c:pt idx="86">
-                  <c:v>0.917547952</c:v>
+                  <c:v>0.917286808</c:v>
                 </c:pt>
                 <c:pt idx="87">
-                  <c:v>0.947034828</c:v>
+                  <c:v>0.963208734</c:v>
                 </c:pt>
                 <c:pt idx="88">
-                  <c:v>0.966417414</c:v>
+                  <c:v>0.993619285</c:v>
                 </c:pt>
                 <c:pt idx="89">
-                  <c:v>0.978548785</c:v>
+                  <c:v>0.928784659</c:v>
                 </c:pt>
                 <c:pt idx="90">
-                  <c:v>0.910881297</c:v>
+                  <c:v>0.88246936</c:v>
                 </c:pt>
                 <c:pt idx="91">
-                  <c:v>0.94263772</c:v>
+                  <c:v>0.922317668</c:v>
                 </c:pt>
                 <c:pt idx="92">
-                  <c:v>0.978294956</c:v>
+                  <c:v>0.974482644</c:v>
                 </c:pt>
                 <c:pt idx="93">
-                  <c:v>1.00057168</c:v>
+                  <c:v>0.941590199</c:v>
                 </c:pt>
                 <c:pt idx="94">
-                  <c:v>0.936665639</c:v>
+                  <c:v>0.897218263</c:v>
                 </c:pt>
                 <c:pt idx="95">
-                  <c:v>0.904589234</c:v>
+                  <c:v>0.865958735</c:v>
                 </c:pt>
                 <c:pt idx="96">
-                  <c:v>0.969289666</c:v>
+                  <c:v>0.937130619</c:v>
                 </c:pt>
                 <c:pt idx="97">
-                  <c:v>1.00660331</c:v>
+                  <c:v>0.960077657</c:v>
                 </c:pt>
                 <c:pt idx="98">
-                  <c:v>0.9517671</c:v>
+                  <c:v>0.915820174</c:v>
                 </c:pt>
                 <c:pt idx="99">
-                  <c:v>0.921959166</c:v>
+                  <c:v>0.883673841</c:v>
                 </c:pt>
                 <c:pt idx="100">
-                  <c:v>0.932468431</c:v>
+                  <c:v>0.88691697</c:v>
                 </c:pt>
                 <c:pt idx="101">
-                  <c:v>0.995035844</c:v>
+                  <c:v>0.958204146</c:v>
                 </c:pt>
                 <c:pt idx="102">
-                  <c:v>0.956229154</c:v>
+                  <c:v>0.935364429</c:v>
                 </c:pt>
                 <c:pt idx="103">
-                  <c:v>0.931389109</c:v>
+                  <c:v>0.902183679</c:v>
                 </c:pt>
                 <c:pt idx="104">
-                  <c:v>0.918879982</c:v>
+                  <c:v>0.878051779</c:v>
                 </c:pt>
                 <c:pt idx="105">
-                  <c:v>0.959630657</c:v>
+                  <c:v>0.871197841</c:v>
                 </c:pt>
                 <c:pt idx="106">
-                  <c:v>0.950068325</c:v>
+                  <c:v>0.874627847</c:v>
                 </c:pt>
                 <c:pt idx="107">
-                  <c:v>0.932006946</c:v>
+                  <c:v>0.859392989</c:v>
                 </c:pt>
                 <c:pt idx="108">
-                  <c:v>0.922860187</c:v>
+                  <c:v>0.848227723</c:v>
                 </c:pt>
                 <c:pt idx="109">
-                  <c:v>0.918423472</c:v>
+                  <c:v>0.840329637</c:v>
                 </c:pt>
                 <c:pt idx="110">
-                  <c:v>0.930436865</c:v>
+                  <c:v>0.849439352</c:v>
                 </c:pt>
                 <c:pt idx="111">
-                  <c:v>0.923112028</c:v>
+                  <c:v>0.860522476</c:v>
                 </c:pt>
                 <c:pt idx="112">
-                  <c:v>0.919539207</c:v>
+                  <c:v>0.866489783</c:v>
                 </c:pt>
                 <c:pt idx="113">
-                  <c:v>0.917740794</c:v>
+                  <c:v>0.854832742</c:v>
                 </c:pt>
                 <c:pt idx="114">
-                  <c:v>0.913190432</c:v>
+                  <c:v>0.846777709</c:v>
                 </c:pt>
                 <c:pt idx="115">
-                  <c:v>0.91447604</c:v>
+                  <c:v>0.85961643</c:v>
                 </c:pt>
                 <c:pt idx="116">
-                  <c:v>0.915110875</c:v>
+                  <c:v>0.869452231</c:v>
                 </c:pt>
                 <c:pt idx="117">
-                  <c:v>0.915422111</c:v>
+                  <c:v>0.876912094</c:v>
                 </c:pt>
                 <c:pt idx="118">
-                  <c:v>0.915569162</c:v>
+                  <c:v>0.873637237</c:v>
                 </c:pt>
                 <c:pt idx="119">
-                  <c:v>0.908514462</c:v>
+                  <c:v>0.867602105</c:v>
                 </c:pt>
                 <c:pt idx="120">
-                  <c:v>0.911667579</c:v>
+                  <c:v>0.876696522</c:v>
                 </c:pt>
                 <c:pt idx="121">
-                  <c:v>0.913239263</c:v>
+                  <c:v>0.883757065</c:v>
                 </c:pt>
                 <c:pt idx="122">
-                  <c:v>0.914043293</c:v>
+                  <c:v>0.889334687</c:v>
                 </c:pt>
                 <c:pt idx="123">
-                  <c:v>0.910717007</c:v>
+                  <c:v>0.888690495</c:v>
                 </c:pt>
                 <c:pt idx="124">
-                  <c:v>0.906106566</c:v>
+                  <c:v>0.885616923</c:v>
                 </c:pt>
                 <c:pt idx="125">
-                  <c:v>0.909819642</c:v>
+                  <c:v>0.892007843</c:v>
                 </c:pt>
                 <c:pt idx="126">
-                  <c:v>0.911709138</c:v>
+                  <c:v>0.897112499</c:v>
                 </c:pt>
                 <c:pt idx="127">
-                  <c:v>0.912645316</c:v>
+                  <c:v>0.901434646</c:v>
                 </c:pt>
                 <c:pt idx="128">
-                  <c:v>0.902057353</c:v>
+                  <c:v>0.897455368</c:v>
                 </c:pt>
                 <c:pt idx="129">
-                  <c:v>0.904398221</c:v>
+                  <c:v>0.898857381</c:v>
                 </c:pt>
                 <c:pt idx="130">
-                  <c:v>0.908218029</c:v>
+                  <c:v>0.903953852</c:v>
                 </c:pt>
                 <c:pt idx="131">
-                  <c:v>0.910010119</c:v>
+                  <c:v>0.908214166</c:v>
                 </c:pt>
                 <c:pt idx="132">
-                  <c:v>0.910913462</c:v>
+                  <c:v>0.911813616</c:v>
                 </c:pt>
                 <c:pt idx="133">
-                  <c:v>0.895930975</c:v>
+                  <c:v>0.902064138</c:v>
                 </c:pt>
                 <c:pt idx="134">
-                  <c:v>0.902993903</c:v>
+                  <c:v>0.908256494</c:v>
                 </c:pt>
                 <c:pt idx="135">
-                  <c:v>0.906575599</c:v>
+                  <c:v>0.913191493</c:v>
                 </c:pt>
                 <c:pt idx="136">
-                  <c:v>0.908232378</c:v>
+                  <c:v>0.917216497</c:v>
                 </c:pt>
                 <c:pt idx="137">
-                  <c:v>0.902665165</c:v>
+                  <c:v>0.917868143</c:v>
                 </c:pt>
                 <c:pt idx="138">
-                  <c:v>0.895401534</c:v>
+                  <c:v>0.908666054</c:v>
                 </c:pt>
                 <c:pt idx="139">
-                  <c:v>0.901779501</c:v>
+                  <c:v>0.91525611</c:v>
                 </c:pt>
                 <c:pt idx="140">
-                  <c:v>0.90483628</c:v>
+                  <c:v>0.920540019</c:v>
                 </c:pt>
                 <c:pt idx="141">
-                  <c:v>0.906377972</c:v>
+                  <c:v>0.924830788</c:v>
                 </c:pt>
                 <c:pt idx="142">
-                  <c:v>0.896034192</c:v>
+                  <c:v>0.9152792</c:v>
                 </c:pt>
                 <c:pt idx="143">
-                  <c:v>0.895106407</c:v>
+                  <c:v>0.913746585</c:v>
                 </c:pt>
                 <c:pt idx="144">
-                  <c:v>0.900456143</c:v>
+                  <c:v>0.921085823</c:v>
                 </c:pt>
                 <c:pt idx="145">
-                  <c:v>0.903118955</c:v>
+                  <c:v>0.926842783</c:v>
                 </c:pt>
                 <c:pt idx="146">
-                  <c:v>0.904407308</c:v>
+                  <c:v>0.926219252</c:v>
                 </c:pt>
                 <c:pt idx="147">
-                  <c:v>0.890557836</c:v>
+                  <c:v>0.912654406</c:v>
                 </c:pt>
                 <c:pt idx="148">
-                  <c:v>0.894736277</c:v>
+                  <c:v>0.918310865</c:v>
                 </c:pt>
                 <c:pt idx="149">
-                  <c:v>0.899233592</c:v>
+                  <c:v>0.926370812</c:v>
                 </c:pt>
                 <c:pt idx="150">
-                  <c:v>0.901376622</c:v>
+                  <c:v>0.932547097</c:v>
                 </c:pt>
                 <c:pt idx="151">
-                  <c:v>0.901092968</c:v>
+                  <c:v>0.920944333</c:v>
                 </c:pt>
                 <c:pt idx="152">
-                  <c:v>0.886906519</c:v>
+                  <c:v>0.911356196</c:v>
                 </c:pt>
                 <c:pt idx="153">
-                  <c:v>0.894299166</c:v>
+                  <c:v>0.922617858</c:v>
                 </c:pt>
                 <c:pt idx="154">
-                  <c:v>0.898011171</c:v>
+                  <c:v>0.931275321</c:v>
                 </c:pt>
                 <c:pt idx="155">
-                  <c:v>0.899815048</c:v>
+                  <c:v>0.927740697</c:v>
                 </c:pt>
                 <c:pt idx="156">
-                  <c:v>0.895738026</c:v>
+                  <c:v>0.916819857</c:v>
                 </c:pt>
                 <c:pt idx="157">
-                  <c:v>0.888054227</c:v>
+                  <c:v>0.915129337</c:v>
                 </c:pt>
                 <c:pt idx="158">
-                  <c:v>0.89397813</c:v>
+                  <c:v>0.926866428</c:v>
                 </c:pt>
                 <c:pt idx="159">
-                  <c:v>0.896894485</c:v>
+                  <c:v>0.93291784</c:v>
                 </c:pt>
                 <c:pt idx="160">
-                  <c:v>0.89824489</c:v>
+                  <c:v>0.921898236</c:v>
                 </c:pt>
                 <c:pt idx="161">
-                  <c:v>0.891501799</c:v>
+                  <c:v>0.913871656</c:v>
                 </c:pt>
                 <c:pt idx="162">
-                  <c:v>0.889135122</c:v>
+                  <c:v>0.919154065</c:v>
                 </c:pt>
                 <c:pt idx="163">
-                  <c:v>0.893668852</c:v>
+                  <c:v>0.931082668</c:v>
                 </c:pt>
                 <c:pt idx="164">
-                  <c:v>0.895863939</c:v>
+                  <c:v>0.925567845</c:v>
                 </c:pt>
                 <c:pt idx="165">
-                  <c:v>0.896893187</c:v>
+                  <c:v>0.917560827</c:v>
                 </c:pt>
                 <c:pt idx="166">
-                  <c:v>0.887976006</c:v>
+                  <c:v>0.911787021</c:v>
                 </c:pt>
                 <c:pt idx="167">
-                  <c:v>0.890057388</c:v>
+                  <c:v>0.923141926</c:v>
                 </c:pt>
                 <c:pt idx="168">
-                  <c:v>0.893411552</c:v>
+                  <c:v>0.927807046</c:v>
                 </c:pt>
                 <c:pt idx="169">
-                  <c:v>0.895035076</c:v>
+                  <c:v>0.920055791</c:v>
                 </c:pt>
                 <c:pt idx="170">
-                  <c:v>0.895779466</c:v>
+                  <c:v>0.914395381</c:v>
                 </c:pt>
                 <c:pt idx="171">
-                  <c:v>0.886217262</c:v>
+                  <c:v>0.911418251</c:v>
                 </c:pt>
                 <c:pt idx="172">
-                  <c:v>0.890902985</c:v>
+                  <c:v>0.927176465</c:v>
                 </c:pt>
                 <c:pt idx="173">
-                  <c:v>0.893261279</c:v>
+                  <c:v>0.921161271</c:v>
                 </c:pt>
                 <c:pt idx="174">
-                  <c:v>0.894400846</c:v>
+                  <c:v>0.915914153</c:v>
                 </c:pt>
                 <c:pt idx="175">
-                  <c:v>0.894957519</c:v>
+                  <c:v>0.912081976</c:v>
                 </c:pt>
                 <c:pt idx="176">
-                  <c:v>0.888720931</c:v>
+                  <c:v>0.915650973</c:v>
                 </c:pt>
                 <c:pt idx="177">
-                  <c:v>0.891703982</c:v>
+                  <c:v>0.921176546</c:v>
                 </c:pt>
                 <c:pt idx="178">
-                  <c:v>0.893201927</c:v>
+                  <c:v>0.916302121</c:v>
                 </c:pt>
                 <c:pt idx="179">
-                  <c:v>0.89396543</c:v>
+                  <c:v>0.912862251</c:v>
                 </c:pt>
                 <c:pt idx="180">
-                  <c:v>0.894352538</c:v>
+                  <c:v>0.910355268</c:v>
                 </c:pt>
                 <c:pt idx="181">
-                  <c:v>0.890855377</c:v>
+                  <c:v>0.919691813</c:v>
                 </c:pt>
                 <c:pt idx="182">
-                  <c:v>0.892503554</c:v>
+                  <c:v>0.915584547</c:v>
                 </c:pt>
                 <c:pt idx="183">
-                  <c:v>0.893301263</c:v>
+                  <c:v>0.912626357</c:v>
                 </c:pt>
                 <c:pt idx="184">
-                  <c:v>0.89375401</c:v>
+                  <c:v>0.910499901</c:v>
                 </c:pt>
                 <c:pt idx="185">
-                  <c:v>0.893989655</c:v>
+                  <c:v>0.909032133</c:v>
                 </c:pt>
                 <c:pt idx="186">
-                  <c:v>0.892649705</c:v>
+                  <c:v>0.913869663</c:v>
                 </c:pt>
                 <c:pt idx="187">
-                  <c:v>0.893262848</c:v>
+                  <c:v>0.911570078</c:v>
                 </c:pt>
                 <c:pt idx="188">
-                  <c:v>0.893566951</c:v>
+                  <c:v>0.909897601</c:v>
                 </c:pt>
                 <c:pt idx="189">
-                  <c:v>0.893761866</c:v>
+                  <c:v>0.908756284</c:v>
                 </c:pt>
                 <c:pt idx="190">
-                  <c:v>0.894267315</c:v>
+                  <c:v>0.909267261</c:v>
                 </c:pt>
                 <c:pt idx="191">
-                  <c:v>0.894132685</c:v>
+                  <c:v>0.909545424</c:v>
                 </c:pt>
                 <c:pt idx="192">
-                  <c:v>0.893992133</c:v>
+                  <c:v>0.908515265</c:v>
                 </c:pt>
                 <c:pt idx="193">
-                  <c:v>0.893963687</c:v>
+                  <c:v>0.907897225</c:v>
                 </c:pt>
                 <c:pt idx="194">
-                  <c:v>0.894005645</c:v>
+                  <c:v>0.907384296</c:v>
                 </c:pt>
                 <c:pt idx="195">
-                  <c:v>0.896505034</c:v>
+                  <c:v>0.90664173</c:v>
                 </c:pt>
                 <c:pt idx="196">
-                  <c:v>0.895308575</c:v>
+                  <c:v>0.906527539</c:v>
                 </c:pt>
                 <c:pt idx="197">
-                  <c:v>0.894766827</c:v>
+                  <c:v>0.90639214</c:v>
                 </c:pt>
                 <c:pt idx="198">
-                  <c:v>0.894526227</c:v>
+                  <c:v>0.906244331</c:v>
                 </c:pt>
                 <c:pt idx="199">
-                  <c:v>0.894397887</c:v>
+                  <c:v>0.906252657</c:v>
                 </c:pt>
                 <c:pt idx="200">
-                  <c:v>0.89804363</c:v>
+                  <c:v>0.903714766</c:v>
                 </c:pt>
                 <c:pt idx="201">
-                  <c:v>0.896371454</c:v>
+                  <c:v>0.904344738</c:v>
                 </c:pt>
                 <c:pt idx="202">
-                  <c:v>0.895553254</c:v>
+                  <c:v>0.904734553</c:v>
                 </c:pt>
                 <c:pt idx="203">
-                  <c:v>0.895087749</c:v>
+                  <c:v>0.904995316</c:v>
                 </c:pt>
                 <c:pt idx="204">
-                  <c:v>0.894868621</c:v>
+                  <c:v>0.90414779</c:v>
                 </c:pt>
                 <c:pt idx="205">
-                  <c:v>0.899206809</c:v>
+                  <c:v>0.901761857</c:v>
                 </c:pt>
                 <c:pt idx="206">
-                  <c:v>0.89718662</c:v>
+                  <c:v>0.902836776</c:v>
                 </c:pt>
                 <c:pt idx="207">
-                  <c:v>0.896217446</c:v>
+                  <c:v>0.90348306</c:v>
                 </c:pt>
                 <c:pt idx="208">
-                  <c:v>0.895799333</c:v>
+                  <c:v>0.904077813</c:v>
                 </c:pt>
                 <c:pt idx="209">
-                  <c:v>0.897137455</c:v>
+                  <c:v>0.898761437</c:v>
                 </c:pt>
                 <c:pt idx="210">
-                  <c:v>0.899894008</c:v>
+                  <c:v>0.900540522</c:v>
                 </c:pt>
                 <c:pt idx="211">
-                  <c:v>0.897971047</c:v>
+                  <c:v>0.9016897</c:v>
                 </c:pt>
                 <c:pt idx="212">
-                  <c:v>0.896945898</c:v>
+                  <c:v>0.902619119</c:v>
                 </c:pt>
                 <c:pt idx="213">
-                  <c:v>0.896492456</c:v>
+                  <c:v>0.903177062</c:v>
                 </c:pt>
                 <c:pt idx="214">
-                  <c:v>0.902742434</c:v>
+                  <c:v>0.897909507</c:v>
                 </c:pt>
                 <c:pt idx="215">
-                  <c:v>0.900390313</c:v>
+                  <c:v>0.899656642</c:v>
                 </c:pt>
                 <c:pt idx="216">
-                  <c:v>0.898621263</c:v>
+                  <c:v>0.900975526</c:v>
                 </c:pt>
                 <c:pt idx="217">
-                  <c:v>0.897688986</c:v>
+                  <c:v>0.901884977</c:v>
                 </c:pt>
                 <c:pt idx="218">
-                  <c:v>0.897233679</c:v>
+                  <c:v>0.902550777</c:v>
                 </c:pt>
                 <c:pt idx="219">
-                  <c:v>0.90411582</c:v>
+                  <c:v>0.897540366</c:v>
                 </c:pt>
                 <c:pt idx="220">
-                  <c:v>0.900767052</c:v>
+                  <c:v>0.899188003</c:v>
                 </c:pt>
                 <c:pt idx="221">
-                  <c:v>0.899230967</c:v>
+                  <c:v>0.900474117</c:v>
                 </c:pt>
                 <c:pt idx="222">
-                  <c:v>0.898360515</c:v>
+                  <c:v>0.90130545</c:v>
                 </c:pt>
                 <c:pt idx="223">
-                  <c:v>0.898021739</c:v>
+                  <c:v>0.898599765</c:v>
                 </c:pt>
                 <c:pt idx="224">
-                  <c:v>0.903798058</c:v>
+                  <c:v>0.897396157</c:v>
                 </c:pt>
                 <c:pt idx="225">
-                  <c:v>0.901085798</c:v>
+                  <c:v>0.898911981</c:v>
                 </c:pt>
                 <c:pt idx="226">
-                  <c:v>0.89977309</c:v>
+                  <c:v>0.90009618</c:v>
                 </c:pt>
                 <c:pt idx="227">
-                  <c:v>0.899064987</c:v>
+                  <c:v>0.900858855</c:v>
                 </c:pt>
                 <c:pt idx="228">
-                  <c:v>0.900626891</c:v>
+                  <c:v>0.895522003</c:v>
                 </c:pt>
                 <c:pt idx="229">
-                  <c:v>0.903469826</c:v>
+                  <c:v>0.897496639</c:v>
                 </c:pt>
                 <c:pt idx="230">
-                  <c:v>0.901357054</c:v>
+                  <c:v>0.898815188</c:v>
                 </c:pt>
                 <c:pt idx="231">
-                  <c:v>0.900224037</c:v>
+                  <c:v>0.899861903</c:v>
                 </c:pt>
                 <c:pt idx="232">
-                  <c:v>0.899764564</c:v>
+                  <c:v>0.900524346</c:v>
                 </c:pt>
                 <c:pt idx="233">
-                  <c:v>0.906136245</c:v>
+                  <c:v>0.895960904</c:v>
                 </c:pt>
                 <c:pt idx="234">
-                  <c:v>0.90325282</c:v>
+                  <c:v>0.897680088</c:v>
                 </c:pt>
                 <c:pt idx="235">
-                  <c:v>0.90151287</c:v>
+                  <c:v>0.898792418</c:v>
                 </c:pt>
                 <c:pt idx="236">
-                  <c:v>0.900768048</c:v>
+                  <c:v>0.899683749</c:v>
                 </c:pt>
                 <c:pt idx="237">
-                  <c:v>0.900290473</c:v>
+                  <c:v>0.900283879</c:v>
                 </c:pt>
                 <c:pt idx="238">
-                  <c:v>0.905537973</c:v>
+                  <c:v>0.896463732</c:v>
                 </c:pt>
                 <c:pt idx="239">
-                  <c:v>0.902972303</c:v>
+                  <c:v>0.897907814</c:v>
                 </c:pt>
                 <c:pt idx="240">
-                  <c:v>0.901822572</c:v>
+                  <c:v>0.898874717</c:v>
                 </c:pt>
                 <c:pt idx="241">
-                  <c:v>0.901136507</c:v>
+                  <c:v>0.899540065</c:v>
                 </c:pt>
                 <c:pt idx="242">
-                  <c:v>0.900909999</c:v>
+                  <c:v>0.898573953</c:v>
                 </c:pt>
                 <c:pt idx="243">
-                  <c:v>0.904548531</c:v>
+                  <c:v>0.896958344</c:v>
                 </c:pt>
                 <c:pt idx="244">
-                  <c:v>0.902866605</c:v>
+                  <c:v>0.89811434</c:v>
                 </c:pt>
                 <c:pt idx="245">
-                  <c:v>0.901937222</c:v>
+                  <c:v>0.89893845</c:v>
                 </c:pt>
                 <c:pt idx="246">
-                  <c:v>0.901585337</c:v>
+                  <c:v>0.899440193</c:v>
                 </c:pt>
                 <c:pt idx="247">
-                  <c:v>0.903421664</c:v>
+                  <c:v>0.896300085</c:v>
                 </c:pt>
                 <c:pt idx="248">
-                  <c:v>0.903931725</c:v>
+                  <c:v>0.897518925</c:v>
                 </c:pt>
                 <c:pt idx="249">
-                  <c:v>0.902729388</c:v>
+                  <c:v>0.89836518</c:v>
                 </c:pt>
                 <c:pt idx="250">
-                  <c:v>0.902179238</c:v>
+                  <c:v>0.899021907</c:v>
                 </c:pt>
                 <c:pt idx="251">
-                  <c:v>0.901861919</c:v>
+                  <c:v>0.899411494</c:v>
                 </c:pt>
                 <c:pt idx="252">
-                  <c:v>0.90484581</c:v>
+                  <c:v>0.897034804</c:v>
                 </c:pt>
                 <c:pt idx="253">
-                  <c:v>0.90335801</c:v>
+                  <c:v>0.897994325</c:v>
                 </c:pt>
                 <c:pt idx="254">
-                  <c:v>0.902605936</c:v>
+                  <c:v>0.898578548</c:v>
                 </c:pt>
                 <c:pt idx="255">
-                  <c:v>0.902276338</c:v>
+                  <c:v>0.899119884</c:v>
                 </c:pt>
                 <c:pt idx="256">
-                  <c:v>0.902062742</c:v>
+                  <c:v>0.899421236</c:v>
                 </c:pt>
                 <c:pt idx="257">
-                  <c:v>0.903804813</c:v>
+                  <c:v>0.897623979</c:v>
                 </c:pt>
                 <c:pt idx="258">
-                  <c:v>0.902916863</c:v>
+                  <c:v>0.898375246</c:v>
                 </c:pt>
                 <c:pt idx="259">
-                  <c:v>0.902570355</c:v>
+                  <c:v>0.89880983</c:v>
                 </c:pt>
                 <c:pt idx="260">
-                  <c:v>0.902312005</c:v>
+                  <c:v>0.899193982</c:v>
                 </c:pt>
                 <c:pt idx="261">
-                  <c:v>0.902275012</c:v>
+                  <c:v>0.899453151</c:v>
                 </c:pt>
                 <c:pt idx="262">
-                  <c:v>0.902956035</c:v>
+                  <c:v>0.898133668</c:v>
                 </c:pt>
                 <c:pt idx="263">
-                  <c:v>0.902659926</c:v>
+                  <c:v>0.898692602</c:v>
                 </c:pt>
                 <c:pt idx="264">
-                  <c:v>0.902409554</c:v>
+                  <c:v>0.899021056</c:v>
                 </c:pt>
                 <c:pt idx="265">
-                  <c:v>0.9023878</c:v>
+                  <c:v>0.899261856</c:v>
                 </c:pt>
                 <c:pt idx="266">
-                  <c:v>0.902494063</c:v>
+                  <c:v>0.898120983</c:v>
                 </c:pt>
                 <c:pt idx="267">
-                  <c:v>0.902444537</c:v>
+                  <c:v>0.898525528</c:v>
                 </c:pt>
                 <c:pt idx="268">
-                  <c:v>0.90231451</c:v>
+                  <c:v>0.898931135</c:v>
                 </c:pt>
                 <c:pt idx="269">
-                  <c:v>0.902354422</c:v>
+                  <c:v>0.899153115</c:v>
                 </c:pt>
                 <c:pt idx="270">
-                  <c:v>0.90226795</c:v>
+                  <c:v>0.899310095</c:v>
                 </c:pt>
                 <c:pt idx="271">
-                  <c:v>0.901723821</c:v>
+                  <c:v>0.898637202</c:v>
                 </c:pt>
                 <c:pt idx="272">
-                  <c:v>0.901918226</c:v>
+                  <c:v>0.898867955</c:v>
                 </c:pt>
                 <c:pt idx="273">
-                  <c:v>0.902124114</c:v>
+                  <c:v>0.89914535</c:v>
                 </c:pt>
                 <c:pt idx="274">
-                  <c:v>0.902117823</c:v>
+                  <c:v>0.899293902</c:v>
                 </c:pt>
                 <c:pt idx="275">
-                  <c:v>0.90222502</c:v>
+                  <c:v>0.899377758</c:v>
                 </c:pt>
                 <c:pt idx="276">
-                  <c:v>0.901112929</c:v>
+                  <c:v>0.899006832</c:v>
                 </c:pt>
                 <c:pt idx="277">
-                  <c:v>0.901654302</c:v>
+                  <c:v>0.899119629</c:v>
                 </c:pt>
                 <c:pt idx="278">
-                  <c:v>0.901817033</c:v>
+                  <c:v>0.89929683</c:v>
                 </c:pt>
                 <c:pt idx="279">
-                  <c:v>0.901992981</c:v>
+                  <c:v>0.899391117</c:v>
                 </c:pt>
                 <c:pt idx="280">
-                  <c:v>0.901981716</c:v>
+                  <c:v>0.899459123</c:v>
                 </c:pt>
                 <c:pt idx="281">
-                  <c:v>0.900781225</c:v>
+                  <c:v>0.899309837</c:v>
                 </c:pt>
                 <c:pt idx="282">
-                  <c:v>0.901284704</c:v>
+                  <c:v>0.89932767</c:v>
                 </c:pt>
                 <c:pt idx="283">
-                  <c:v>0.901606808</c:v>
+                  <c:v>0.899459827</c:v>
                 </c:pt>
                 <c:pt idx="284">
-                  <c:v>0.901710213</c:v>
+                  <c:v>0.899470396</c:v>
                 </c:pt>
                 <c:pt idx="285">
-                  <c:v>0.899294439</c:v>
+                  <c:v>0.899435619</c:v>
                 </c:pt>
                 <c:pt idx="286">
-                  <c:v>0.900497481</c:v>
+                  <c:v>0.899532005</c:v>
                 </c:pt>
                 <c:pt idx="287">
-                  <c:v>0.901054902</c:v>
+                  <c:v>0.899486691</c:v>
                 </c:pt>
                 <c:pt idx="288">
-                  <c:v>0.901367707</c:v>
+                  <c:v>0.899568226</c:v>
                 </c:pt>
                 <c:pt idx="289">
-                  <c:v>0.901449382</c:v>
+                  <c:v>0.899532151</c:v>
                 </c:pt>
                 <c:pt idx="290">
-                  <c:v>0.899194053</c:v>
+                  <c:v>0.899669696</c:v>
                 </c:pt>
                 <c:pt idx="291">
-                  <c:v>0.900217533</c:v>
+                  <c:v>0.899672447</c:v>
                 </c:pt>
                 <c:pt idx="292">
-                  <c:v>0.900812575</c:v>
+                  <c:v>0.899597803</c:v>
                 </c:pt>
                 <c:pt idx="293">
-                  <c:v>0.901038284</c:v>
+                  <c:v>0.899660135</c:v>
                 </c:pt>
                 <c:pt idx="294">
-                  <c:v>0.901214474</c:v>
+                  <c:v>0.899577805</c:v>
                 </c:pt>
                 <c:pt idx="295">
-                  <c:v>0.899090008</c:v>
+                  <c:v>0.899873982</c:v>
                 </c:pt>
                 <c:pt idx="296">
-                  <c:v>0.900040237</c:v>
+                  <c:v>0.899779318</c:v>
                 </c:pt>
                 <c:pt idx="297">
-                  <c:v>0.90057018</c:v>
+                  <c:v>0.899717098</c:v>
                 </c:pt>
                 <c:pt idx="298">
-                  <c:v>0.900732136</c:v>
+                  <c:v>0.899749394</c:v>
                 </c:pt>
                 <c:pt idx="299">
-                  <c:v>0.899639121</c:v>
+                  <c:v>0.899659011</c:v>
                 </c:pt>
                 <c:pt idx="300">
-                  <c:v>0.8990178</c:v>
+                  <c:v>0.899964445</c:v>
                 </c:pt>
                 <c:pt idx="301">
-                  <c:v>0.899894477</c:v>
+                  <c:v>0.899825882</c:v>
                 </c:pt>
                 <c:pt idx="302">
-                  <c:v>0.900314988</c:v>
+                  <c:v>0.899824124</c:v>
                 </c:pt>
                 <c:pt idx="303">
-                  <c:v>0.900486671</c:v>
+                  <c:v>0.899777536</c:v>
                 </c:pt>
                 <c:pt idx="304">
-                  <c:v>0.897710289</c:v>
+                  <c:v>0.900096068</c:v>
                 </c:pt>
                 <c:pt idx="305">
-                  <c:v>0.899013754</c:v>
+                  <c:v>0.900042893</c:v>
                 </c:pt>
                 <c:pt idx="306">
-                  <c:v>0.899759874</c:v>
+                  <c:v>0.899880938</c:v>
                 </c:pt>
                 <c:pt idx="307">
-                  <c:v>0.900060209</c:v>
+                  <c:v>0.899882828</c:v>
                 </c:pt>
                 <c:pt idx="308">
-                  <c:v>0.900236382</c:v>
+                  <c:v>0.899786228</c:v>
                 </c:pt>
                 <c:pt idx="309">
-                  <c:v>0.89798101</c:v>
+                  <c:v>0.900147715</c:v>
                 </c:pt>
                 <c:pt idx="310">
-                  <c:v>0.898996714</c:v>
+                  <c:v>0.900038647</c:v>
                 </c:pt>
                 <c:pt idx="311">
-                  <c:v>0.899590859</c:v>
+                  <c:v>0.899908521</c:v>
                 </c:pt>
                 <c:pt idx="312">
-                  <c:v>0.899827536</c:v>
+                  <c:v>0.89992258</c:v>
                 </c:pt>
                 <c:pt idx="313">
-                  <c:v>0.899984135</c:v>
+                  <c:v>0.899800428</c:v>
                 </c:pt>
                 <c:pt idx="314">
-                  <c:v>0.898225807</c:v>
+                  <c:v>0.90017356</c:v>
                 </c:pt>
                 <c:pt idx="315">
-                  <c:v>0.898983755</c:v>
+                  <c:v>0.900011775</c:v>
                 </c:pt>
                 <c:pt idx="316">
-                  <c:v>0.899452633</c:v>
+                  <c:v>0.899958699</c:v>
                 </c:pt>
                 <c:pt idx="317">
-                  <c:v>0.899607052</c:v>
+                  <c:v>0.899934092</c:v>
                 </c:pt>
                 <c:pt idx="318">
-                  <c:v>0.899083721</c:v>
+                  <c:v>0.899869543</c:v>
                 </c:pt>
                 <c:pt idx="319">
-                  <c:v>0.898424419</c:v>
+                  <c:v>0.900146564</c:v>
                 </c:pt>
                 <c:pt idx="320">
-                  <c:v>0.89896027</c:v>
+                  <c:v>0.899986154</c:v>
                 </c:pt>
                 <c:pt idx="321">
-                  <c:v>0.899323843</c:v>
+                  <c:v>0.899993146</c:v>
                 </c:pt>
                 <c:pt idx="322">
-                  <c:v>0.899435007</c:v>
+                  <c:v>0.899892467</c:v>
                 </c:pt>
                 <c:pt idx="323">
-                  <c:v>0.897687141</c:v>
+                  <c:v>0.900223126</c:v>
                 </c:pt>
                 <c:pt idx="324">
-                  <c:v>0.898613465</c:v>
+                  <c:v>0.900139916</c:v>
                 </c:pt>
                 <c:pt idx="325">
-                  <c:v>0.898961461</c:v>
+                  <c:v>0.900025188</c:v>
                 </c:pt>
                 <c:pt idx="326">
-                  <c:v>0.899220681</c:v>
+                  <c:v>0.900015487</c:v>
                 </c:pt>
                 <c:pt idx="327">
-                  <c:v>0.899305169</c:v>
+                  <c:v>0.899899036</c:v>
                 </c:pt>
                 <c:pt idx="328">
-                  <c:v>0.898088718</c:v>
+                  <c:v>0.90024509</c:v>
                 </c:pt>
                 <c:pt idx="329">
-                  <c:v>0.898729206</c:v>
+                  <c:v>0.900087292</c:v>
                 </c:pt>
                 <c:pt idx="330">
-                  <c:v>0.898957635</c:v>
+                  <c:v>0.900047701</c:v>
                 </c:pt>
                 <c:pt idx="331">
-                  <c:v>0.899146055</c:v>
+                  <c:v>0.900016662</c:v>
                 </c:pt>
                 <c:pt idx="332">
-                  <c:v>0.899204782</c:v>
+                  <c:v>0.899944568</c:v>
                 </c:pt>
                 <c:pt idx="333">
-                  <c:v>0.898458492</c:v>
+                  <c:v>0.900211602</c:v>
                 </c:pt>
                 <c:pt idx="334">
-                  <c:v>0.898865557</c:v>
+                  <c:v>0.900058641</c:v>
                 </c:pt>
                 <c:pt idx="335">
-                  <c:v>0.898984925</c:v>
+                  <c:v>0.900059676</c:v>
                 </c:pt>
                 <c:pt idx="336">
-                  <c:v>0.899091007</c:v>
+                  <c:v>0.899969095</c:v>
                 </c:pt>
                 <c:pt idx="337">
-                  <c:v>0.899144648</c:v>
+                  <c:v>0.899998544</c:v>
                 </c:pt>
                 <c:pt idx="338">
-                  <c:v>0.898697295</c:v>
+                  <c:v>0.900149253</c:v>
                 </c:pt>
                 <c:pt idx="339">
-                  <c:v>0.89894733</c:v>
+                  <c:v>0.900064496</c:v>
                 </c:pt>
                 <c:pt idx="340">
-                  <c:v>0.899010924</c:v>
+                  <c:v>0.900062096</c:v>
                 </c:pt>
                 <c:pt idx="341">
-                  <c:v>0.899053251</c:v>
+                  <c:v>0.899956201</c:v>
                 </c:pt>
                 <c:pt idx="342">
-                  <c:v>0.898872369</c:v>
+                  <c:v>0.900165509</c:v>
                 </c:pt>
                 <c:pt idx="343">
-                  <c:v>0.89891476</c:v>
+                  <c:v>0.900056077</c:v>
                 </c:pt>
                 <c:pt idx="344">
-                  <c:v>0.899040305</c:v>
+                  <c:v>0.900062561</c:v>
                 </c:pt>
                 <c:pt idx="345">
-                  <c:v>0.899032922</c:v>
+                  <c:v>0.900019677</c:v>
                 </c:pt>
                 <c:pt idx="346">
-                  <c:v>0.899050117</c:v>
+                  <c:v>0.899978946</c:v>
                 </c:pt>
                 <c:pt idx="347">
-                  <c:v>0.899232158</c:v>
+                  <c:v>0.900164054</c:v>
                 </c:pt>
                 <c:pt idx="348">
-                  <c:v>0.899096263</c:v>
+                  <c:v>0.900034455</c:v>
                 </c:pt>
                 <c:pt idx="349">
-                  <c:v>0.899129476</c:v>
+                  <c:v>0.900064878</c:v>
                 </c:pt>
                 <c:pt idx="350">
-                  <c:v>0.899091726</c:v>
+                  <c:v>0.899982008</c:v>
                 </c:pt>
                 <c:pt idx="351">
-                  <c:v>0.899082741</c:v>
+                  <c:v>0.900014012</c:v>
                 </c:pt>
                 <c:pt idx="352">
-                  <c:v>0.899431804</c:v>
+                  <c:v>0.90009602</c:v>
                 </c:pt>
                 <c:pt idx="353">
-                  <c:v>0.899220312</c:v>
+                  <c:v>0.900048958</c:v>
                 </c:pt>
                 <c:pt idx="354">
-                  <c:v>0.899208639</c:v>
+                  <c:v>0.90005673</c:v>
                 </c:pt>
                 <c:pt idx="355">
-                  <c:v>0.899148026</c:v>
+                  <c:v>0.899966008</c:v>
                 </c:pt>
                 <c:pt idx="356">
-                  <c:v>0.899160298</c:v>
+                  <c:v>0.900027119</c:v>
                 </c:pt>
                 <c:pt idx="357">
-                  <c:v>0.899603839</c:v>
+                  <c:v>0.899997284</c:v>
                 </c:pt>
                 <c:pt idx="358">
-                  <c:v>0.89934255</c:v>
+                  <c:v>0.900033748</c:v>
                 </c:pt>
                 <c:pt idx="359">
-                  <c:v>0.899317324</c:v>
+                  <c:v>0.900021623</c:v>
                 </c:pt>
                 <c:pt idx="360">
-                  <c:v>0.899217816</c:v>
+                  <c:v>0.899983316</c:v>
                 </c:pt>
                 <c:pt idx="361">
-                  <c:v>0.900108037</c:v>
+                  <c:v>0.900074217</c:v>
                 </c:pt>
                 <c:pt idx="362">
-                  <c:v>0.899728464</c:v>
+                  <c:v>0.899979003</c:v>
                 </c:pt>
                 <c:pt idx="363">
-                  <c:v>0.899464249</c:v>
+                  <c:v>0.900039716</c:v>
                 </c:pt>
                 <c:pt idx="364">
-                  <c:v>0.899417751</c:v>
+                  <c:v>0.89996048</c:v>
                 </c:pt>
                 <c:pt idx="365">
-                  <c:v>0.899303472</c:v>
+                  <c:v>0.900009831</c:v>
                 </c:pt>
                 <c:pt idx="366">
-                  <c:v>0.900227694</c:v>
+                  <c:v>0.900051248</c:v>
                 </c:pt>
                 <c:pt idx="367">
-                  <c:v>0.899795619</c:v>
+                  <c:v>0.900002129</c:v>
                 </c:pt>
                 <c:pt idx="368">
-                  <c:v>0.899561322</c:v>
+                  <c:v>0.900042313</c:v>
                 </c:pt>
                 <c:pt idx="369">
-                  <c:v>0.89953023</c:v>
+                  <c:v>0.899960098</c:v>
                 </c:pt>
                 <c:pt idx="370">
-                  <c:v>0.899400222</c:v>
+                  <c:v>0.900022353</c:v>
                 </c:pt>
                 <c:pt idx="371">
-                  <c:v>0.900291841</c:v>
+                  <c:v>0.89995819</c:v>
                 </c:pt>
                 <c:pt idx="372">
-                  <c:v>0.899853096</c:v>
+                  <c:v>0.900012577</c:v>
                 </c:pt>
                 <c:pt idx="373">
-                  <c:v>0.899686613</c:v>
+                  <c:v>0.900006345</c:v>
                 </c:pt>
                 <c:pt idx="374">
-                  <c:v>0.899628989</c:v>
+                  <c:v>0.899973141</c:v>
                 </c:pt>
                 <c:pt idx="375">
-                  <c:v>0.899545262</c:v>
+                  <c:v>0.900011314</c:v>
                 </c:pt>
                 <c:pt idx="376">
-                  <c:v>0.900329437</c:v>
+                  <c:v>0.899939106</c:v>
                 </c:pt>
                 <c:pt idx="377">
-                  <c:v>0.899921207</c:v>
+                  <c:v>0.900011852</c:v>
                 </c:pt>
                 <c:pt idx="378">
-                  <c:v>0.899826109</c:v>
+                  <c:v>0.899957789</c:v>
                 </c:pt>
                 <c:pt idx="379">
-                  <c:v>0.899694951</c:v>
+                  <c:v>0.899998942</c:v>
                 </c:pt>
                 <c:pt idx="380">
-                  <c:v>0.900823524</c:v>
+                  <c:v>0.899996957</c:v>
                 </c:pt>
                 <c:pt idx="381">
-                  <c:v>0.900313168</c:v>
+                  <c:v>0.899960129</c:v>
                 </c:pt>
                 <c:pt idx="382">
-                  <c:v>0.900000855</c:v>
+                  <c:v>0.900006419</c:v>
                 </c:pt>
                 <c:pt idx="383">
-                  <c:v>0.899917929</c:v>
+                  <c:v>0.899933596</c:v>
                 </c:pt>
                 <c:pt idx="384">
-                  <c:v>0.899777087</c:v>
+                  <c:v>0.900007181</c:v>
                 </c:pt>
                 <c:pt idx="385">
-                  <c:v>0.900748277</c:v>
+                  <c:v>0.899950115</c:v>
                 </c:pt>
                 <c:pt idx="386">
-                  <c:v>0.900254835</c:v>
+                  <c:v>0.899989539</c:v>
                 </c:pt>
                 <c:pt idx="387">
-                  <c:v>0.900072362</c:v>
+                  <c:v>0.900004251</c:v>
                 </c:pt>
                 <c:pt idx="388">
-                  <c:v>0.899986681</c:v>
+                  <c:v>0.899965976</c:v>
                 </c:pt>
                 <c:pt idx="389">
-                  <c:v>0.89989776</c:v>
+                  <c:v>0.900011197</c:v>
                 </c:pt>
                 <c:pt idx="390">
-                  <c:v>0.900691641</c:v>
+                  <c:v>0.899936537</c:v>
                 </c:pt>
                 <c:pt idx="391">
-                  <c:v>0.900273209</c:v>
+                  <c:v>0.900009469</c:v>
                 </c:pt>
                 <c:pt idx="392">
-                  <c:v>0.900160779</c:v>
+                  <c:v>0.899958148</c:v>
                 </c:pt>
                 <c:pt idx="393">
-                  <c:v>0.900019671</c:v>
+                  <c:v>0.899996846</c:v>
                 </c:pt>
                 <c:pt idx="394">
-                  <c:v>0.900042285</c:v>
+                  <c:v>0.89997663</c:v>
                 </c:pt>
                 <c:pt idx="395">
-                  <c:v>0.900586608</c:v>
+                  <c:v>0.899956406</c:v>
                 </c:pt>
                 <c:pt idx="396">
-                  <c:v>0.900334412</c:v>
+                  <c:v>0.900008881</c:v>
                 </c:pt>
                 <c:pt idx="397">
-                  <c:v>0.900230037</c:v>
+                  <c:v>0.899938102</c:v>
                 </c:pt>
                 <c:pt idx="398">
-                  <c:v>0.900102048</c:v>
+                  <c:v>0.900006049</c:v>
                 </c:pt>
                 <c:pt idx="399">
-                  <c:v>0.900907404</c:v>
+                  <c:v>0.899898346</c:v>
                 </c:pt>
                 <c:pt idx="400">
-                  <c:v>0.900468066</c:v>
+                  <c:v>0.899950164</c:v>
                 </c:pt>
                 <c:pt idx="401">
-                  <c:v>0.900355089</c:v>
+                  <c:v>0.899937794</c:v>
                 </c:pt>
                 <c:pt idx="402">
-                  <c:v>0.900206743</c:v>
+                  <c:v>0.89992207</c:v>
                 </c:pt>
               </c:numCache>
             </c:numRef>
@@ -8466,7 +8898,7 @@
               <c:strCache>
                 <c:ptCount val="1"/>
                 <c:pt idx="0">
-                  <c:v>transistor-level transient (577 ns)</c:v>
+                  <c:v>original R2 = 1.7 kΩ (ζ ≈ 0.33): 577 ns</c:v>
                 </c:pt>
               </c:strCache>
             </c:strRef>
@@ -8474,7 +8906,7 @@
           <c:spPr>
             <a:ln w="28575">
               <a:solidFill>
-                <a:srgbClr val="2A9D8F"/>
+                <a:srgbClr val="E07A1F"/>
               </a:solidFill>
             </a:ln>
           </c:spPr>
@@ -10928,17 +11360,16 @@
               <c:strCache>
                 <c:ptCount val="1"/>
                 <c:pt idx="0">
-                  <c:v>averaged behavioural model (573 ns)</c:v>
+                  <c:v>retuned R2 = 3.6 kΩ (ζ ≈ 0.70): 503 ns</c:v>
                 </c:pt>
               </c:strCache>
             </c:strRef>
           </c:tx>
           <c:spPr>
-            <a:ln w="19050">
+            <a:ln w="28575">
               <a:solidFill>
-                <a:srgbClr val="E07A1F"/>
+                <a:srgbClr val="1D2F82"/>
               </a:solidFill>
-              <a:prstDash val="dash"/>
             </a:ln>
           </c:spPr>
           <c:marker>
@@ -10946,918 +11377,2436 @@
           </c:marker>
           <c:xVal>
             <c:numRef>
-              <c:f>Sheet1!$A$407:$A$556</c:f>
+              <c:f>Sheet1!$A$407:$A$809</c:f>
               <c:numCache>
                 <c:formatCode>General</c:formatCode>
-                <c:ptCount val="150"/>
+                <c:ptCount val="403"/>
                 <c:pt idx="0">
-                  <c:v>0.2</c:v>
+                  <c:v>0.0002</c:v>
                 </c:pt>
                 <c:pt idx="1">
-                  <c:v>20.19999999999997</c:v>
+                  <c:v>4.67</c:v>
                 </c:pt>
                 <c:pt idx="2">
-                  <c:v>40.19999999999999</c:v>
+                  <c:v>9.67</c:v>
                 </c:pt>
                 <c:pt idx="3">
-                  <c:v>60.200000000000166</c:v>
+                  <c:v>14.67</c:v>
                 </c:pt>
                 <c:pt idx="4">
-                  <c:v>80.20000000000034</c:v>
+                  <c:v>19.556</c:v>
                 </c:pt>
                 <c:pt idx="5">
-                  <c:v>100.20000000000053</c:v>
+                  <c:v>24.556</c:v>
                 </c:pt>
                 <c:pt idx="6">
-                  <c:v>120.20000000000064</c:v>
+                  <c:v>29.556</c:v>
                 </c:pt>
                 <c:pt idx="7">
-                  <c:v>140.1999999999995</c:v>
+                  <c:v>34.556000000000004</c:v>
                 </c:pt>
                 <c:pt idx="8">
-                  <c:v>160.19999999999834</c:v>
+                  <c:v>39.441</c:v>
                 </c:pt>
                 <c:pt idx="9">
-                  <c:v>180.1999999999972</c:v>
+                  <c:v>44.441</c:v>
                 </c:pt>
                 <c:pt idx="10">
-                  <c:v>200.19999999999607</c:v>
+                  <c:v>49.441</c:v>
                 </c:pt>
                 <c:pt idx="11">
-                  <c:v>220.19999999999493</c:v>
+                  <c:v>54.327</c:v>
                 </c:pt>
                 <c:pt idx="12">
-                  <c:v>240.19999999999402</c:v>
+                  <c:v>59.327</c:v>
                 </c:pt>
                 <c:pt idx="13">
-                  <c:v>260.1999999999955</c:v>
+                  <c:v>64.327</c:v>
                 </c:pt>
                 <c:pt idx="14">
-                  <c:v>280.19999999999703</c:v>
+                  <c:v>69.327</c:v>
                 </c:pt>
                 <c:pt idx="15">
-                  <c:v>300.1999999999985</c:v>
+                  <c:v>74.212</c:v>
                 </c:pt>
                 <c:pt idx="16">
-                  <c:v>320.20000000000005</c:v>
+                  <c:v>79.21199999999999</c:v>
                 </c:pt>
                 <c:pt idx="17">
-                  <c:v>340.2000000000015</c:v>
+                  <c:v>84.212</c:v>
                 </c:pt>
                 <c:pt idx="18">
-                  <c:v>360.200000000003</c:v>
+                  <c:v>89.098</c:v>
                 </c:pt>
                 <c:pt idx="19">
-                  <c:v>380.20000000000454</c:v>
+                  <c:v>94.098</c:v>
                 </c:pt>
                 <c:pt idx="20">
-                  <c:v>400.200000000006</c:v>
+                  <c:v>99.098</c:v>
                 </c:pt>
                 <c:pt idx="21">
-                  <c:v>420.20000000000755</c:v>
+                  <c:v>104.098</c:v>
                 </c:pt>
                 <c:pt idx="22">
-                  <c:v>440.200000000009</c:v>
+                  <c:v>108.983</c:v>
                 </c:pt>
                 <c:pt idx="23">
-                  <c:v>460.20000000001056</c:v>
+                  <c:v>113.98299999999999</c:v>
                 </c:pt>
                 <c:pt idx="24">
-                  <c:v>480.20000000001204</c:v>
+                  <c:v>118.983</c:v>
                 </c:pt>
                 <c:pt idx="25">
-                  <c:v>500.2000000000135</c:v>
+                  <c:v>123.929</c:v>
                 </c:pt>
                 <c:pt idx="26">
-                  <c:v>520.200000000015</c:v>
+                  <c:v>128.869</c:v>
                 </c:pt>
                 <c:pt idx="27">
-                  <c:v>540.2000000000165</c:v>
+                  <c:v>133.869</c:v>
                 </c:pt>
                 <c:pt idx="28">
-                  <c:v>560.200000000018</c:v>
+                  <c:v>138.869</c:v>
                 </c:pt>
                 <c:pt idx="29">
-                  <c:v>580.2000000000196</c:v>
+                  <c:v>143.754</c:v>
                 </c:pt>
                 <c:pt idx="30">
-                  <c:v>600.2000000000211</c:v>
+                  <c:v>148.75400000000002</c:v>
                 </c:pt>
                 <c:pt idx="31">
-                  <c:v>620.2000000000226</c:v>
+                  <c:v>153.754</c:v>
                 </c:pt>
                 <c:pt idx="32">
-                  <c:v>640.200000000024</c:v>
+                  <c:v>158.754</c:v>
                 </c:pt>
                 <c:pt idx="33">
-                  <c:v>660.2000000000255</c:v>
+                  <c:v>163.64000000000001</c:v>
                 </c:pt>
                 <c:pt idx="34">
-                  <c:v>680.2000000000271</c:v>
+                  <c:v>168.64000000000001</c:v>
                 </c:pt>
                 <c:pt idx="35">
-                  <c:v>700.2000000000286</c:v>
+                  <c:v>173.64000000000001</c:v>
                 </c:pt>
                 <c:pt idx="36">
-                  <c:v>720.2000000000301</c:v>
+                  <c:v>178.525</c:v>
                 </c:pt>
                 <c:pt idx="37">
-                  <c:v>740.2000000000315</c:v>
+                  <c:v>183.525</c:v>
                 </c:pt>
                 <c:pt idx="38">
-                  <c:v>760.2000000000331</c:v>
+                  <c:v>188.525</c:v>
                 </c:pt>
                 <c:pt idx="39">
-                  <c:v>780.2000000000346</c:v>
+                  <c:v>193.525</c:v>
                 </c:pt>
                 <c:pt idx="40">
-                  <c:v>800.2000000000361</c:v>
+                  <c:v>198.411</c:v>
                 </c:pt>
                 <c:pt idx="41">
-                  <c:v>820.2000000000376</c:v>
+                  <c:v>203.411</c:v>
                 </c:pt>
                 <c:pt idx="42">
-                  <c:v>840.200000000039</c:v>
+                  <c:v>208.411</c:v>
                 </c:pt>
                 <c:pt idx="43">
-                  <c:v>860.2000000000406</c:v>
+                  <c:v>213.296</c:v>
                 </c:pt>
                 <c:pt idx="44">
-                  <c:v>880.2000000000421</c:v>
+                  <c:v>218.29600000000002</c:v>
                 </c:pt>
                 <c:pt idx="45">
-                  <c:v>900.2000000000436</c:v>
+                  <c:v>223.296</c:v>
                 </c:pt>
                 <c:pt idx="46">
-                  <c:v>920.2000000000451</c:v>
+                  <c:v>228.296</c:v>
                 </c:pt>
                 <c:pt idx="47">
-                  <c:v>940.2000000000467</c:v>
+                  <c:v>233.18200000000002</c:v>
                 </c:pt>
                 <c:pt idx="48">
-                  <c:v>960.200000000048</c:v>
+                  <c:v>238.18200000000002</c:v>
                 </c:pt>
                 <c:pt idx="49">
-                  <c:v>980.2000000000495</c:v>
+                  <c:v>243.182</c:v>
                 </c:pt>
                 <c:pt idx="50">
-                  <c:v>1000.200000000051</c:v>
+                  <c:v>248.067</c:v>
                 </c:pt>
                 <c:pt idx="51">
-                  <c:v>1020.2000000000525</c:v>
+                  <c:v>253.067</c:v>
                 </c:pt>
                 <c:pt idx="52">
-                  <c:v>1040.200000000054</c:v>
+                  <c:v>258.067</c:v>
                 </c:pt>
                 <c:pt idx="53">
-                  <c:v>1060.2000000000555</c:v>
+                  <c:v>263.067</c:v>
                 </c:pt>
                 <c:pt idx="54">
-                  <c:v>1080.2000000000571</c:v>
+                  <c:v>267.953</c:v>
                 </c:pt>
                 <c:pt idx="55">
-                  <c:v>1100.2000000000585</c:v>
+                  <c:v>272.953</c:v>
                 </c:pt>
                 <c:pt idx="56">
-                  <c:v>1120.20000000006</c:v>
+                  <c:v>277.953</c:v>
                 </c:pt>
                 <c:pt idx="57">
-                  <c:v>1140.2000000000614</c:v>
+                  <c:v>282.95300000000003</c:v>
                 </c:pt>
                 <c:pt idx="58">
-                  <c:v>1160.200000000063</c:v>
+                  <c:v>287.838</c:v>
                 </c:pt>
                 <c:pt idx="59">
-                  <c:v>1180.2000000000646</c:v>
+                  <c:v>292.838</c:v>
                 </c:pt>
                 <c:pt idx="60">
-                  <c:v>1200.200000000066</c:v>
+                  <c:v>297.838</c:v>
                 </c:pt>
                 <c:pt idx="61">
-                  <c:v>1220.2000000000676</c:v>
+                  <c:v>302.724</c:v>
                 </c:pt>
                 <c:pt idx="62">
-                  <c:v>1240.200000000069</c:v>
+                  <c:v>307.724</c:v>
                 </c:pt>
                 <c:pt idx="63">
-                  <c:v>1260.2000000000705</c:v>
+                  <c:v>312.724</c:v>
                 </c:pt>
                 <c:pt idx="64">
-                  <c:v>1280.2000000000721</c:v>
+                  <c:v>317.72400000000005</c:v>
                 </c:pt>
                 <c:pt idx="65">
-                  <c:v>1300.2000000000735</c:v>
+                  <c:v>322.609</c:v>
                 </c:pt>
                 <c:pt idx="66">
-                  <c:v>1320.200000000075</c:v>
+                  <c:v>327.609</c:v>
                 </c:pt>
                 <c:pt idx="67">
-                  <c:v>1340.2000000000764</c:v>
+                  <c:v>332.609</c:v>
                 </c:pt>
                 <c:pt idx="68">
-                  <c:v>1360.200000000078</c:v>
+                  <c:v>337.495</c:v>
                 </c:pt>
                 <c:pt idx="69">
-                  <c:v>1380.2000000000796</c:v>
+                  <c:v>342.495</c:v>
                 </c:pt>
                 <c:pt idx="70">
-                  <c:v>1400.200000000081</c:v>
+                  <c:v>347.49499999999995</c:v>
                 </c:pt>
                 <c:pt idx="71">
-                  <c:v>1420.2000000000826</c:v>
+                  <c:v>352.495</c:v>
                 </c:pt>
                 <c:pt idx="72">
-                  <c:v>1440.2000000000842</c:v>
+                  <c:v>357.38</c:v>
                 </c:pt>
                 <c:pt idx="73">
-                  <c:v>1460.2000000000855</c:v>
+                  <c:v>362.38</c:v>
                 </c:pt>
                 <c:pt idx="74">
-                  <c:v>1480.2000000000871</c:v>
+                  <c:v>367.38</c:v>
                 </c:pt>
                 <c:pt idx="75">
-                  <c:v>1500.2000000000885</c:v>
+                  <c:v>372.26599999999996</c:v>
                 </c:pt>
                 <c:pt idx="76">
-                  <c:v>1520.20000000009</c:v>
+                  <c:v>377.26599999999996</c:v>
                 </c:pt>
                 <c:pt idx="77">
-                  <c:v>1540.2000000000917</c:v>
+                  <c:v>382.26599999999996</c:v>
                 </c:pt>
                 <c:pt idx="78">
-                  <c:v>1560.200000000093</c:v>
+                  <c:v>387.266</c:v>
                 </c:pt>
                 <c:pt idx="79">
-                  <c:v>1580.2000000000946</c:v>
+                  <c:v>392.151</c:v>
                 </c:pt>
                 <c:pt idx="80">
-                  <c:v>1600.200000000096</c:v>
+                  <c:v>397.151</c:v>
                 </c:pt>
                 <c:pt idx="81">
-                  <c:v>1620.2000000000976</c:v>
+                  <c:v>402.151</c:v>
                 </c:pt>
                 <c:pt idx="82">
-                  <c:v>1640.2000000000992</c:v>
+                  <c:v>407.037</c:v>
                 </c:pt>
                 <c:pt idx="83">
-                  <c:v>1660.2000000001005</c:v>
+                  <c:v>412.037</c:v>
                 </c:pt>
                 <c:pt idx="84">
-                  <c:v>1680.2000000001021</c:v>
+                  <c:v>417.037</c:v>
                 </c:pt>
                 <c:pt idx="85">
-                  <c:v>1700.2000000001035</c:v>
+                  <c:v>422.03700000000003</c:v>
                 </c:pt>
                 <c:pt idx="86">
-                  <c:v>1720.200000000105</c:v>
+                  <c:v>426.922</c:v>
                 </c:pt>
                 <c:pt idx="87">
-                  <c:v>1740.2000000001067</c:v>
+                  <c:v>431.922</c:v>
                 </c:pt>
                 <c:pt idx="88">
-                  <c:v>1760.200000000108</c:v>
+                  <c:v>436.922</c:v>
                 </c:pt>
                 <c:pt idx="89">
-                  <c:v>1780.2000000001096</c:v>
+                  <c:v>441.92199999999997</c:v>
                 </c:pt>
                 <c:pt idx="90">
-                  <c:v>1800.200000000111</c:v>
+                  <c:v>446.808</c:v>
                 </c:pt>
                 <c:pt idx="91">
-                  <c:v>1820.2000000001126</c:v>
+                  <c:v>451.808</c:v>
                 </c:pt>
                 <c:pt idx="92">
-                  <c:v>1840.2000000001142</c:v>
+                  <c:v>456.80800000000005</c:v>
                 </c:pt>
                 <c:pt idx="93">
-                  <c:v>1860.2000000001156</c:v>
+                  <c:v>461.693</c:v>
                 </c:pt>
                 <c:pt idx="94">
-                  <c:v>1880.2000000001171</c:v>
+                  <c:v>466.693</c:v>
                 </c:pt>
                 <c:pt idx="95">
-                  <c:v>1900.2000000001185</c:v>
+                  <c:v>471.693</c:v>
                 </c:pt>
                 <c:pt idx="96">
-                  <c:v>1920.20000000012</c:v>
+                  <c:v>476.693</c:v>
                 </c:pt>
                 <c:pt idx="97">
-                  <c:v>1940.2000000001217</c:v>
+                  <c:v>481.579</c:v>
                 </c:pt>
                 <c:pt idx="98">
-                  <c:v>1960.200000000123</c:v>
+                  <c:v>486.57899999999995</c:v>
                 </c:pt>
                 <c:pt idx="99">
-                  <c:v>1980.2000000001246</c:v>
+                  <c:v>491.57900000000006</c:v>
                 </c:pt>
                 <c:pt idx="100">
-                  <c:v>2000.2000000001262</c:v>
+                  <c:v>496.464</c:v>
                 </c:pt>
                 <c:pt idx="101">
-                  <c:v>2020.2000000001276</c:v>
+                  <c:v>501.46400000000006</c:v>
                 </c:pt>
                 <c:pt idx="102">
-                  <c:v>2040.2000000001292</c:v>
+                  <c:v>506.464</c:v>
                 </c:pt>
                 <c:pt idx="103">
-                  <c:v>2060.200000000131</c:v>
+                  <c:v>511.46399999999994</c:v>
                 </c:pt>
                 <c:pt idx="104">
-                  <c:v>2080.200000000132</c:v>
+                  <c:v>516.35</c:v>
                 </c:pt>
                 <c:pt idx="105">
-                  <c:v>2100.2000000001335</c:v>
+                  <c:v>521.35</c:v>
                 </c:pt>
                 <c:pt idx="106">
-                  <c:v>2120.2000000001353</c:v>
+                  <c:v>526.35</c:v>
                 </c:pt>
                 <c:pt idx="107">
-                  <c:v>2140.2000000001367</c:v>
+                  <c:v>531.235</c:v>
                 </c:pt>
                 <c:pt idx="108">
-                  <c:v>2160.200000000138</c:v>
+                  <c:v>536.235</c:v>
                 </c:pt>
                 <c:pt idx="109">
-                  <c:v>2180.20000000014</c:v>
+                  <c:v>541.235</c:v>
                 </c:pt>
                 <c:pt idx="110">
-                  <c:v>2200.2000000001412</c:v>
+                  <c:v>546.235</c:v>
                 </c:pt>
                 <c:pt idx="111">
-                  <c:v>2220.2000000001426</c:v>
+                  <c:v>551.121</c:v>
                 </c:pt>
                 <c:pt idx="112">
-                  <c:v>2240.200000000144</c:v>
+                  <c:v>556.121</c:v>
                 </c:pt>
                 <c:pt idx="113">
-                  <c:v>2260.200000000146</c:v>
+                  <c:v>561.121</c:v>
                 </c:pt>
                 <c:pt idx="114">
-                  <c:v>2280.200000000147</c:v>
+                  <c:v>566.0379999999999</c:v>
                 </c:pt>
                 <c:pt idx="115">
-                  <c:v>2300.2000000001485</c:v>
+                  <c:v>571.006</c:v>
                 </c:pt>
                 <c:pt idx="116">
-                  <c:v>2320.2000000001503</c:v>
+                  <c:v>576.0060000000001</c:v>
                 </c:pt>
                 <c:pt idx="117">
-                  <c:v>2340.2000000001517</c:v>
+                  <c:v>581.006</c:v>
                 </c:pt>
                 <c:pt idx="118">
-                  <c:v>2360.200000000153</c:v>
+                  <c:v>585.8919999999999</c:v>
                 </c:pt>
                 <c:pt idx="119">
-                  <c:v>2380.200000000155</c:v>
+                  <c:v>590.892</c:v>
                 </c:pt>
                 <c:pt idx="120">
-                  <c:v>2400.2000000001563</c:v>
+                  <c:v>595.8919999999999</c:v>
                 </c:pt>
                 <c:pt idx="121">
-                  <c:v>2420.2000000001576</c:v>
+                  <c:v>600.892</c:v>
                 </c:pt>
                 <c:pt idx="122">
-                  <c:v>2440.200000000159</c:v>
+                  <c:v>605.7769999999999</c:v>
                 </c:pt>
                 <c:pt idx="123">
-                  <c:v>2460.200000000161</c:v>
+                  <c:v>610.777</c:v>
                 </c:pt>
                 <c:pt idx="124">
-                  <c:v>2480.200000000162</c:v>
+                  <c:v>615.777</c:v>
                 </c:pt>
                 <c:pt idx="125">
-                  <c:v>2500.2000000001635</c:v>
+                  <c:v>620.663</c:v>
                 </c:pt>
                 <c:pt idx="126">
-                  <c:v>2520.2000000001653</c:v>
+                  <c:v>625.663</c:v>
                 </c:pt>
                 <c:pt idx="127">
-                  <c:v>2540.2000000001667</c:v>
+                  <c:v>630.663</c:v>
                 </c:pt>
                 <c:pt idx="128">
-                  <c:v>2560.200000000168</c:v>
+                  <c:v>635.663</c:v>
                 </c:pt>
                 <c:pt idx="129">
-                  <c:v>2580.20000000017</c:v>
+                  <c:v>640.548</c:v>
                 </c:pt>
                 <c:pt idx="130">
-                  <c:v>2600.2000000001713</c:v>
+                  <c:v>645.548</c:v>
                 </c:pt>
                 <c:pt idx="131">
-                  <c:v>2620.2000000001726</c:v>
+                  <c:v>650.548</c:v>
                 </c:pt>
                 <c:pt idx="132">
-                  <c:v>2640.2000000001744</c:v>
+                  <c:v>655.434</c:v>
                 </c:pt>
                 <c:pt idx="133">
-                  <c:v>2660.200000000176</c:v>
+                  <c:v>660.4340000000001</c:v>
                 </c:pt>
                 <c:pt idx="134">
-                  <c:v>2680.200000000177</c:v>
+                  <c:v>665.434</c:v>
                 </c:pt>
                 <c:pt idx="135">
-                  <c:v>2700.2000000001785</c:v>
+                  <c:v>670.434</c:v>
                 </c:pt>
                 <c:pt idx="136">
-                  <c:v>2720.2000000001804</c:v>
+                  <c:v>675.319</c:v>
                 </c:pt>
                 <c:pt idx="137">
-                  <c:v>2740.2000000001817</c:v>
+                  <c:v>680.319</c:v>
                 </c:pt>
                 <c:pt idx="138">
-                  <c:v>2760.200000000183</c:v>
+                  <c:v>685.3190000000001</c:v>
                 </c:pt>
                 <c:pt idx="139">
-                  <c:v>2780.200000000185</c:v>
+                  <c:v>690.205</c:v>
                 </c:pt>
                 <c:pt idx="140">
-                  <c:v>2800.2000000001863</c:v>
+                  <c:v>695.2049999999999</c:v>
                 </c:pt>
                 <c:pt idx="141">
-                  <c:v>2820.2000000001876</c:v>
+                  <c:v>700.205</c:v>
                 </c:pt>
                 <c:pt idx="142">
-                  <c:v>2840.2000000001894</c:v>
+                  <c:v>705.2049999999999</c:v>
                 </c:pt>
                 <c:pt idx="143">
-                  <c:v>2860.200000000191</c:v>
+                  <c:v>710.09</c:v>
                 </c:pt>
                 <c:pt idx="144">
-                  <c:v>2880.200000000192</c:v>
+                  <c:v>715.09</c:v>
                 </c:pt>
                 <c:pt idx="145">
-                  <c:v>2900.2000000001935</c:v>
+                  <c:v>720.09</c:v>
                 </c:pt>
                 <c:pt idx="146">
-                  <c:v>2920.2000000001954</c:v>
+                  <c:v>725.09</c:v>
                 </c:pt>
                 <c:pt idx="147">
-                  <c:v>2940.2000000001967</c:v>
+                  <c:v>729.976</c:v>
                 </c:pt>
                 <c:pt idx="148">
-                  <c:v>2960.200000000198</c:v>
+                  <c:v>734.976</c:v>
                 </c:pt>
                 <c:pt idx="149">
-                  <c:v>2980.2000000002</c:v>
+                  <c:v>739.976</c:v>
+                </c:pt>
+                <c:pt idx="150">
+                  <c:v>744.861</c:v>
+                </c:pt>
+                <c:pt idx="151">
+                  <c:v>749.861</c:v>
+                </c:pt>
+                <c:pt idx="152">
+                  <c:v>754.8610000000001</c:v>
+                </c:pt>
+                <c:pt idx="153">
+                  <c:v>759.861</c:v>
+                </c:pt>
+                <c:pt idx="154">
+                  <c:v>764.747</c:v>
+                </c:pt>
+                <c:pt idx="155">
+                  <c:v>769.7470000000001</c:v>
+                </c:pt>
+                <c:pt idx="156">
+                  <c:v>774.747</c:v>
+                </c:pt>
+                <c:pt idx="157">
+                  <c:v>779.632</c:v>
+                </c:pt>
+                <c:pt idx="158">
+                  <c:v>784.6320000000001</c:v>
+                </c:pt>
+                <c:pt idx="159">
+                  <c:v>789.632</c:v>
+                </c:pt>
+                <c:pt idx="160">
+                  <c:v>794.6320000000001</c:v>
+                </c:pt>
+                <c:pt idx="161">
+                  <c:v>799.518</c:v>
+                </c:pt>
+                <c:pt idx="162">
+                  <c:v>804.5179999999999</c:v>
+                </c:pt>
+                <c:pt idx="163">
+                  <c:v>809.518</c:v>
+                </c:pt>
+                <c:pt idx="164">
+                  <c:v>814.403</c:v>
+                </c:pt>
+                <c:pt idx="165">
+                  <c:v>819.403</c:v>
+                </c:pt>
+                <c:pt idx="166">
+                  <c:v>824.403</c:v>
+                </c:pt>
+                <c:pt idx="167">
+                  <c:v>829.403</c:v>
+                </c:pt>
+                <c:pt idx="168">
+                  <c:v>834.289</c:v>
+                </c:pt>
+                <c:pt idx="169">
+                  <c:v>839.289</c:v>
+                </c:pt>
+                <c:pt idx="170">
+                  <c:v>844.289</c:v>
+                </c:pt>
+                <c:pt idx="171">
+                  <c:v>849.174</c:v>
+                </c:pt>
+                <c:pt idx="172">
+                  <c:v>854.1740000000001</c:v>
+                </c:pt>
+                <c:pt idx="173">
+                  <c:v>859.174</c:v>
+                </c:pt>
+                <c:pt idx="174">
+                  <c:v>864.1740000000001</c:v>
+                </c:pt>
+                <c:pt idx="175">
+                  <c:v>869.0600000000001</c:v>
+                </c:pt>
+                <c:pt idx="176">
+                  <c:v>874.06</c:v>
+                </c:pt>
+                <c:pt idx="177">
+                  <c:v>879.0600000000001</c:v>
+                </c:pt>
+                <c:pt idx="178">
+                  <c:v>884.06</c:v>
+                </c:pt>
+                <c:pt idx="179">
+                  <c:v>888.945</c:v>
+                </c:pt>
+                <c:pt idx="180">
+                  <c:v>893.945</c:v>
+                </c:pt>
+                <c:pt idx="181">
+                  <c:v>898.9449999999999</c:v>
+                </c:pt>
+                <c:pt idx="182">
+                  <c:v>903.831</c:v>
+                </c:pt>
+                <c:pt idx="183">
+                  <c:v>908.831</c:v>
+                </c:pt>
+                <c:pt idx="184">
+                  <c:v>913.831</c:v>
+                </c:pt>
+                <c:pt idx="185">
+                  <c:v>918.831</c:v>
+                </c:pt>
+                <c:pt idx="186">
+                  <c:v>923.716</c:v>
+                </c:pt>
+                <c:pt idx="187">
+                  <c:v>928.716</c:v>
+                </c:pt>
+                <c:pt idx="188">
+                  <c:v>933.716</c:v>
+                </c:pt>
+                <c:pt idx="189">
+                  <c:v>938.602</c:v>
+                </c:pt>
+                <c:pt idx="190">
+                  <c:v>943.602</c:v>
+                </c:pt>
+                <c:pt idx="191">
+                  <c:v>948.602</c:v>
+                </c:pt>
+                <c:pt idx="192">
+                  <c:v>953.602</c:v>
+                </c:pt>
+                <c:pt idx="193">
+                  <c:v>958.4870000000001</c:v>
+                </c:pt>
+                <c:pt idx="194">
+                  <c:v>963.4870000000001</c:v>
+                </c:pt>
+                <c:pt idx="195">
+                  <c:v>968.487</c:v>
+                </c:pt>
+                <c:pt idx="196">
+                  <c:v>973.3729999999999</c:v>
+                </c:pt>
+                <c:pt idx="197">
+                  <c:v>978.3729999999999</c:v>
+                </c:pt>
+                <c:pt idx="198">
+                  <c:v>983.373</c:v>
+                </c:pt>
+                <c:pt idx="199">
+                  <c:v>988.373</c:v>
+                </c:pt>
+                <c:pt idx="200">
+                  <c:v>993.258</c:v>
+                </c:pt>
+                <c:pt idx="201">
+                  <c:v>998.2579999999999</c:v>
+                </c:pt>
+                <c:pt idx="202">
+                  <c:v>1003.2580000000002</c:v>
+                </c:pt>
+                <c:pt idx="203">
+                  <c:v>1008.2040000000001</c:v>
+                </c:pt>
+                <c:pt idx="204">
+                  <c:v>1013.144</c:v>
+                </c:pt>
+                <c:pt idx="205">
+                  <c:v>1018.144</c:v>
+                </c:pt>
+                <c:pt idx="206">
+                  <c:v>1023.1439999999999</c:v>
+                </c:pt>
+                <c:pt idx="207">
+                  <c:v>1028.029</c:v>
+                </c:pt>
+                <c:pt idx="208">
+                  <c:v>1033.029</c:v>
+                </c:pt>
+                <c:pt idx="209">
+                  <c:v>1038.029</c:v>
+                </c:pt>
+                <c:pt idx="210">
+                  <c:v>1043.029</c:v>
+                </c:pt>
+                <c:pt idx="211">
+                  <c:v>1047.915</c:v>
+                </c:pt>
+                <c:pt idx="212">
+                  <c:v>1052.915</c:v>
+                </c:pt>
+                <c:pt idx="213">
+                  <c:v>1057.915</c:v>
+                </c:pt>
+                <c:pt idx="214">
+                  <c:v>1062.8</c:v>
+                </c:pt>
+                <c:pt idx="215">
+                  <c:v>1067.8</c:v>
+                </c:pt>
+                <c:pt idx="216">
+                  <c:v>1072.8</c:v>
+                </c:pt>
+                <c:pt idx="217">
+                  <c:v>1077.8000000000002</c:v>
+                </c:pt>
+                <c:pt idx="218">
+                  <c:v>1082.6860000000001</c:v>
+                </c:pt>
+                <c:pt idx="219">
+                  <c:v>1087.686</c:v>
+                </c:pt>
+                <c:pt idx="220">
+                  <c:v>1092.686</c:v>
+                </c:pt>
+                <c:pt idx="221">
+                  <c:v>1097.571</c:v>
+                </c:pt>
+                <c:pt idx="222">
+                  <c:v>1102.5710000000001</c:v>
+                </c:pt>
+                <c:pt idx="223">
+                  <c:v>1107.5710000000001</c:v>
+                </c:pt>
+                <c:pt idx="224">
+                  <c:v>1112.571</c:v>
+                </c:pt>
+                <c:pt idx="225">
+                  <c:v>1117.4569999999999</c:v>
+                </c:pt>
+                <c:pt idx="226">
+                  <c:v>1122.4569999999999</c:v>
+                </c:pt>
+                <c:pt idx="227">
+                  <c:v>1127.457</c:v>
+                </c:pt>
+                <c:pt idx="228">
+                  <c:v>1132.342</c:v>
+                </c:pt>
+                <c:pt idx="229">
+                  <c:v>1137.342</c:v>
+                </c:pt>
+                <c:pt idx="230">
+                  <c:v>1142.3419999999999</c:v>
+                </c:pt>
+                <c:pt idx="231">
+                  <c:v>1147.3419999999999</c:v>
+                </c:pt>
+                <c:pt idx="232">
+                  <c:v>1152.228</c:v>
+                </c:pt>
+                <c:pt idx="233">
+                  <c:v>1157.228</c:v>
+                </c:pt>
+                <c:pt idx="234">
+                  <c:v>1162.228</c:v>
+                </c:pt>
+                <c:pt idx="235">
+                  <c:v>1167.2279999999998</c:v>
+                </c:pt>
+                <c:pt idx="236">
+                  <c:v>1172.1129999999998</c:v>
+                </c:pt>
+                <c:pt idx="237">
+                  <c:v>1177.113</c:v>
+                </c:pt>
+                <c:pt idx="238">
+                  <c:v>1182.113</c:v>
+                </c:pt>
+                <c:pt idx="239">
+                  <c:v>1186.999</c:v>
+                </c:pt>
+                <c:pt idx="240">
+                  <c:v>1191.999</c:v>
+                </c:pt>
+                <c:pt idx="241">
+                  <c:v>1196.9989999999998</c:v>
+                </c:pt>
+                <c:pt idx="242">
+                  <c:v>1201.999</c:v>
+                </c:pt>
+                <c:pt idx="243">
+                  <c:v>1206.884</c:v>
+                </c:pt>
+                <c:pt idx="244">
+                  <c:v>1211.884</c:v>
+                </c:pt>
+                <c:pt idx="245">
+                  <c:v>1216.884</c:v>
+                </c:pt>
+                <c:pt idx="246">
+                  <c:v>1221.77</c:v>
+                </c:pt>
+                <c:pt idx="247">
+                  <c:v>1226.77</c:v>
+                </c:pt>
+                <c:pt idx="248">
+                  <c:v>1231.77</c:v>
+                </c:pt>
+                <c:pt idx="249">
+                  <c:v>1236.77</c:v>
+                </c:pt>
+                <c:pt idx="250">
+                  <c:v>1241.655</c:v>
+                </c:pt>
+                <c:pt idx="251">
+                  <c:v>1246.6550000000002</c:v>
+                </c:pt>
+                <c:pt idx="252">
+                  <c:v>1251.655</c:v>
+                </c:pt>
+                <c:pt idx="253">
+                  <c:v>1256.541</c:v>
+                </c:pt>
+                <c:pt idx="254">
+                  <c:v>1261.541</c:v>
+                </c:pt>
+                <c:pt idx="255">
+                  <c:v>1266.541</c:v>
+                </c:pt>
+                <c:pt idx="256">
+                  <c:v>1271.5410000000002</c:v>
+                </c:pt>
+                <c:pt idx="257">
+                  <c:v>1276.4260000000002</c:v>
+                </c:pt>
+                <c:pt idx="258">
+                  <c:v>1281.426</c:v>
+                </c:pt>
+                <c:pt idx="259">
+                  <c:v>1286.426</c:v>
+                </c:pt>
+                <c:pt idx="260">
+                  <c:v>1291.312</c:v>
+                </c:pt>
+                <c:pt idx="261">
+                  <c:v>1296.3120000000001</c:v>
+                </c:pt>
+                <c:pt idx="262">
+                  <c:v>1301.3120000000001</c:v>
+                </c:pt>
+                <c:pt idx="263">
+                  <c:v>1306.312</c:v>
+                </c:pt>
+                <c:pt idx="264">
+                  <c:v>1311.197</c:v>
+                </c:pt>
+                <c:pt idx="265">
+                  <c:v>1316.197</c:v>
+                </c:pt>
+                <c:pt idx="266">
+                  <c:v>1321.1970000000001</c:v>
+                </c:pt>
+                <c:pt idx="267">
+                  <c:v>1326.1970000000001</c:v>
+                </c:pt>
+                <c:pt idx="268">
+                  <c:v>1331.083</c:v>
+                </c:pt>
+                <c:pt idx="269">
+                  <c:v>1336.0829999999999</c:v>
+                </c:pt>
+                <c:pt idx="270">
+                  <c:v>1341.0829999999999</c:v>
+                </c:pt>
+                <c:pt idx="271">
+                  <c:v>1345.968</c:v>
+                </c:pt>
+                <c:pt idx="272">
+                  <c:v>1350.968</c:v>
+                </c:pt>
+                <c:pt idx="273">
+                  <c:v>1355.968</c:v>
+                </c:pt>
+                <c:pt idx="274">
+                  <c:v>1360.9679999999998</c:v>
+                </c:pt>
+                <c:pt idx="275">
+                  <c:v>1365.8539999999998</c:v>
+                </c:pt>
+                <c:pt idx="276">
+                  <c:v>1370.854</c:v>
+                </c:pt>
+                <c:pt idx="277">
+                  <c:v>1375.854</c:v>
+                </c:pt>
+                <c:pt idx="278">
+                  <c:v>1380.739</c:v>
+                </c:pt>
+                <c:pt idx="279">
+                  <c:v>1385.739</c:v>
+                </c:pt>
+                <c:pt idx="280">
+                  <c:v>1390.739</c:v>
+                </c:pt>
+                <c:pt idx="281">
+                  <c:v>1395.739</c:v>
+                </c:pt>
+                <c:pt idx="282">
+                  <c:v>1400.625</c:v>
+                </c:pt>
+                <c:pt idx="283">
+                  <c:v>1405.625</c:v>
+                </c:pt>
+                <c:pt idx="284">
+                  <c:v>1410.625</c:v>
+                </c:pt>
+                <c:pt idx="285">
+                  <c:v>1415.51</c:v>
+                </c:pt>
+                <c:pt idx="286">
+                  <c:v>1420.51</c:v>
+                </c:pt>
+                <c:pt idx="287">
+                  <c:v>1425.51</c:v>
+                </c:pt>
+                <c:pt idx="288">
+                  <c:v>1430.51</c:v>
+                </c:pt>
+                <c:pt idx="289">
+                  <c:v>1435.396</c:v>
+                </c:pt>
+                <c:pt idx="290">
+                  <c:v>1440.396</c:v>
+                </c:pt>
+                <c:pt idx="291">
+                  <c:v>1445.396</c:v>
+                </c:pt>
+                <c:pt idx="292">
+                  <c:v>1450.313</c:v>
+                </c:pt>
+                <c:pt idx="293">
+                  <c:v>1455.281</c:v>
+                </c:pt>
+                <c:pt idx="294">
+                  <c:v>1460.281</c:v>
+                </c:pt>
+                <c:pt idx="295">
+                  <c:v>1465.2810000000002</c:v>
+                </c:pt>
+                <c:pt idx="296">
+                  <c:v>1470.1670000000001</c:v>
+                </c:pt>
+                <c:pt idx="297">
+                  <c:v>1475.167</c:v>
+                </c:pt>
+                <c:pt idx="298">
+                  <c:v>1480.167</c:v>
+                </c:pt>
+                <c:pt idx="299">
+                  <c:v>1485.167</c:v>
+                </c:pt>
+                <c:pt idx="300">
+                  <c:v>1490.0520000000001</c:v>
+                </c:pt>
+                <c:pt idx="301">
+                  <c:v>1495.0520000000001</c:v>
+                </c:pt>
+                <c:pt idx="302">
+                  <c:v>1500.052</c:v>
+                </c:pt>
+                <c:pt idx="303">
+                  <c:v>1504.9379999999999</c:v>
+                </c:pt>
+                <c:pt idx="304">
+                  <c:v>1509.9379999999999</c:v>
+                </c:pt>
+                <c:pt idx="305">
+                  <c:v>1514.938</c:v>
+                </c:pt>
+                <c:pt idx="306">
+                  <c:v>1519.938</c:v>
+                </c:pt>
+                <c:pt idx="307">
+                  <c:v>1524.823</c:v>
+                </c:pt>
+                <c:pt idx="308">
+                  <c:v>1529.8229999999999</c:v>
+                </c:pt>
+                <c:pt idx="309">
+                  <c:v>1534.8229999999999</c:v>
+                </c:pt>
+                <c:pt idx="310">
+                  <c:v>1539.709</c:v>
+                </c:pt>
+                <c:pt idx="311">
+                  <c:v>1544.709</c:v>
+                </c:pt>
+                <c:pt idx="312">
+                  <c:v>1549.709</c:v>
+                </c:pt>
+                <c:pt idx="313">
+                  <c:v>1554.709</c:v>
+                </c:pt>
+                <c:pt idx="314">
+                  <c:v>1559.5939999999998</c:v>
+                </c:pt>
+                <c:pt idx="315">
+                  <c:v>1564.594</c:v>
+                </c:pt>
+                <c:pt idx="316">
+                  <c:v>1569.594</c:v>
+                </c:pt>
+                <c:pt idx="317">
+                  <c:v>1574.48</c:v>
+                </c:pt>
+                <c:pt idx="318">
+                  <c:v>1579.48</c:v>
+                </c:pt>
+                <c:pt idx="319">
+                  <c:v>1584.48</c:v>
+                </c:pt>
+                <c:pt idx="320">
+                  <c:v>1589.48</c:v>
+                </c:pt>
+                <c:pt idx="321">
+                  <c:v>1594.365</c:v>
+                </c:pt>
+                <c:pt idx="322">
+                  <c:v>1599.365</c:v>
+                </c:pt>
+                <c:pt idx="323">
+                  <c:v>1604.365</c:v>
+                </c:pt>
+                <c:pt idx="324">
+                  <c:v>1609.365</c:v>
+                </c:pt>
+                <c:pt idx="325">
+                  <c:v>1614.251</c:v>
+                </c:pt>
+                <c:pt idx="326">
+                  <c:v>1619.251</c:v>
+                </c:pt>
+                <c:pt idx="327">
+                  <c:v>1624.251</c:v>
+                </c:pt>
+                <c:pt idx="328">
+                  <c:v>1629.136</c:v>
+                </c:pt>
+                <c:pt idx="329">
+                  <c:v>1634.1360000000002</c:v>
+                </c:pt>
+                <c:pt idx="330">
+                  <c:v>1639.136</c:v>
+                </c:pt>
+                <c:pt idx="331">
+                  <c:v>1644.136</c:v>
+                </c:pt>
+                <c:pt idx="332">
+                  <c:v>1649.022</c:v>
+                </c:pt>
+                <c:pt idx="333">
+                  <c:v>1654.022</c:v>
+                </c:pt>
+                <c:pt idx="334">
+                  <c:v>1659.0220000000002</c:v>
+                </c:pt>
+                <c:pt idx="335">
+                  <c:v>1663.9070000000002</c:v>
+                </c:pt>
+                <c:pt idx="336">
+                  <c:v>1668.907</c:v>
+                </c:pt>
+                <c:pt idx="337">
+                  <c:v>1673.907</c:v>
+                </c:pt>
+                <c:pt idx="338">
+                  <c:v>1678.907</c:v>
+                </c:pt>
+                <c:pt idx="339">
+                  <c:v>1683.7930000000001</c:v>
+                </c:pt>
+                <c:pt idx="340">
+                  <c:v>1688.7930000000001</c:v>
+                </c:pt>
+                <c:pt idx="341">
+                  <c:v>1693.793</c:v>
+                </c:pt>
+                <c:pt idx="342">
+                  <c:v>1698.6779999999999</c:v>
+                </c:pt>
+                <c:pt idx="343">
+                  <c:v>1703.6779999999999</c:v>
+                </c:pt>
+                <c:pt idx="344">
+                  <c:v>1708.678</c:v>
+                </c:pt>
+                <c:pt idx="345">
+                  <c:v>1713.678</c:v>
+                </c:pt>
+                <c:pt idx="346">
+                  <c:v>1718.564</c:v>
+                </c:pt>
+                <c:pt idx="347">
+                  <c:v>1723.5639999999999</c:v>
+                </c:pt>
+                <c:pt idx="348">
+                  <c:v>1728.5639999999999</c:v>
+                </c:pt>
+                <c:pt idx="349">
+                  <c:v>1733.449</c:v>
+                </c:pt>
+                <c:pt idx="350">
+                  <c:v>1738.449</c:v>
+                </c:pt>
+                <c:pt idx="351">
+                  <c:v>1743.449</c:v>
+                </c:pt>
+                <c:pt idx="352">
+                  <c:v>1748.4489999999998</c:v>
+                </c:pt>
+                <c:pt idx="353">
+                  <c:v>1753.3349999999998</c:v>
+                </c:pt>
+                <c:pt idx="354">
+                  <c:v>1758.335</c:v>
+                </c:pt>
+                <c:pt idx="355">
+                  <c:v>1763.335</c:v>
+                </c:pt>
+                <c:pt idx="356">
+                  <c:v>1768.335</c:v>
+                </c:pt>
+                <c:pt idx="357">
+                  <c:v>1773.22</c:v>
+                </c:pt>
+                <c:pt idx="358">
+                  <c:v>1778.22</c:v>
+                </c:pt>
+                <c:pt idx="359">
+                  <c:v>1783.22</c:v>
+                </c:pt>
+                <c:pt idx="360">
+                  <c:v>1788.106</c:v>
+                </c:pt>
+                <c:pt idx="361">
+                  <c:v>1793.106</c:v>
+                </c:pt>
+                <c:pt idx="362">
+                  <c:v>1798.106</c:v>
+                </c:pt>
+                <c:pt idx="363">
+                  <c:v>1803.106</c:v>
+                </c:pt>
+                <c:pt idx="364">
+                  <c:v>1807.991</c:v>
+                </c:pt>
+                <c:pt idx="365">
+                  <c:v>1812.991</c:v>
+                </c:pt>
+                <c:pt idx="366">
+                  <c:v>1817.991</c:v>
+                </c:pt>
+                <c:pt idx="367">
+                  <c:v>1822.877</c:v>
+                </c:pt>
+                <c:pt idx="368">
+                  <c:v>1827.877</c:v>
+                </c:pt>
+                <c:pt idx="369">
+                  <c:v>1832.877</c:v>
+                </c:pt>
+                <c:pt idx="370">
+                  <c:v>1837.877</c:v>
+                </c:pt>
+                <c:pt idx="371">
+                  <c:v>1842.762</c:v>
+                </c:pt>
+                <c:pt idx="372">
+                  <c:v>1847.762</c:v>
+                </c:pt>
+                <c:pt idx="373">
+                  <c:v>1852.7620000000002</c:v>
+                </c:pt>
+                <c:pt idx="374">
+                  <c:v>1857.6480000000001</c:v>
+                </c:pt>
+                <c:pt idx="375">
+                  <c:v>1862.648</c:v>
+                </c:pt>
+                <c:pt idx="376">
+                  <c:v>1867.648</c:v>
+                </c:pt>
+                <c:pt idx="377">
+                  <c:v>1872.648</c:v>
+                </c:pt>
+                <c:pt idx="378">
+                  <c:v>1877.5330000000001</c:v>
+                </c:pt>
+                <c:pt idx="379">
+                  <c:v>1882.5330000000001</c:v>
+                </c:pt>
+                <c:pt idx="380">
+                  <c:v>1887.533</c:v>
+                </c:pt>
+                <c:pt idx="381">
+                  <c:v>1892.479</c:v>
+                </c:pt>
+                <c:pt idx="382">
+                  <c:v>1897.4189999999999</c:v>
+                </c:pt>
+                <c:pt idx="383">
+                  <c:v>1902.419</c:v>
+                </c:pt>
+                <c:pt idx="384">
+                  <c:v>1907.419</c:v>
+                </c:pt>
+                <c:pt idx="385">
+                  <c:v>1912.304</c:v>
+                </c:pt>
+                <c:pt idx="386">
+                  <c:v>1917.3039999999999</c:v>
+                </c:pt>
+                <c:pt idx="387">
+                  <c:v>1922.3039999999999</c:v>
+                </c:pt>
+                <c:pt idx="388">
+                  <c:v>1927.3039999999999</c:v>
+                </c:pt>
+                <c:pt idx="389">
+                  <c:v>1932.19</c:v>
+                </c:pt>
+                <c:pt idx="390">
+                  <c:v>1937.19</c:v>
+                </c:pt>
+                <c:pt idx="391">
+                  <c:v>1942.19</c:v>
+                </c:pt>
+                <c:pt idx="392">
+                  <c:v>1947.0749999999998</c:v>
+                </c:pt>
+                <c:pt idx="393">
+                  <c:v>1952.0749999999998</c:v>
+                </c:pt>
+                <c:pt idx="394">
+                  <c:v>1957.0749999999998</c:v>
+                </c:pt>
+                <c:pt idx="395">
+                  <c:v>1962.0750000000003</c:v>
+                </c:pt>
+                <c:pt idx="396">
+                  <c:v>1966.961</c:v>
+                </c:pt>
+                <c:pt idx="397">
+                  <c:v>1971.961</c:v>
+                </c:pt>
+                <c:pt idx="398">
+                  <c:v>1976.9609999999998</c:v>
+                </c:pt>
+                <c:pt idx="399">
+                  <c:v>1981.8459999999998</c:v>
+                </c:pt>
+                <c:pt idx="400">
+                  <c:v>1986.8460000000002</c:v>
+                </c:pt>
+                <c:pt idx="401">
+                  <c:v>1991.8460000000002</c:v>
+                </c:pt>
+                <c:pt idx="402">
+                  <c:v>1996.846</c:v>
                 </c:pt>
               </c:numCache>
             </c:numRef>
           </c:xVal>
           <c:yVal>
             <c:numRef>
-              <c:f>Sheet1!$B$407:$B$556</c:f>
+              <c:f>Sheet1!$B$407:$B$809</c:f>
               <c:numCache>
                 <c:formatCode>General</c:formatCode>
-                <c:ptCount val="150"/>
+                <c:ptCount val="403"/>
                 <c:pt idx="0">
-                  <c:v>0.85</c:v>
+                  <c:v>0.850577088</c:v>
                 </c:pt>
                 <c:pt idx="1">
-                  <c:v>0.8543157291048418</c:v>
+                  <c:v>0.862101619</c:v>
                 </c:pt>
                 <c:pt idx="2">
-                  <c:v>0.8589027030962246</c:v>
+                  <c:v>0.873168534</c:v>
                 </c:pt>
                 <c:pt idx="3">
-                  <c:v>0.8636732839258702</c:v>
+                  <c:v>0.882241574</c:v>
                 </c:pt>
                 <c:pt idx="4">
-                  <c:v>0.8685444289478741</c:v>
+                  <c:v>0.889654152</c:v>
                 </c:pt>
                 <c:pt idx="5">
-                  <c:v>0.8734384954441365</c:v>
+                  <c:v>0.896025959</c:v>
                 </c:pt>
                 <c:pt idx="6">
-                  <c:v>0.8782904638583512</c:v>
+                  <c:v>0.901344818</c:v>
                 </c:pt>
                 <c:pt idx="7">
-                  <c:v>0.8830568553391512</c:v>
+                  <c:v>0.905814559</c:v>
                 </c:pt>
                 <c:pt idx="8">
-                  <c:v>0.8876821750815724</c:v>
+                  <c:v>0.903304051</c:v>
                 </c:pt>
                 <c:pt idx="9">
-                  <c:v>0.8921156983043147</c:v>
+                  <c:v>0.894617623</c:v>
                 </c:pt>
                 <c:pt idx="10">
-                  <c:v>0.8963131542115823</c:v>
+                  <c:v>0.887647554</c:v>
                 </c:pt>
                 <c:pt idx="11">
-                  <c:v>0.9002368673492809</c:v>
+                  <c:v>0.88217211</c:v>
                 </c:pt>
                 <c:pt idx="12">
-                  <c:v>0.9038719170092868</c:v>
+                  <c:v>0.877735504</c:v>
                 </c:pt>
                 <c:pt idx="13">
-                  <c:v>0.9072064910239869</c:v>
+                  <c:v>0.874190205</c:v>
                 </c:pt>
                 <c:pt idx="14">
-                  <c:v>0.9102212743293345</c:v>
+                  <c:v>0.871335038</c:v>
                 </c:pt>
                 <c:pt idx="15">
-                  <c:v>0.9129021623419571</c:v>
+                  <c:v>0.878015729</c:v>
                 </c:pt>
                 <c:pt idx="16">
-                  <c:v>0.9152400677948725</c:v>
+                  <c:v>0.876416158</c:v>
                 </c:pt>
                 <c:pt idx="17">
-                  <c:v>0.9172306804445577</c:v>
+                  <c:v>0.873334312</c:v>
                 </c:pt>
                 <c:pt idx="18">
-                  <c:v>0.9188741858401552</c:v>
+                  <c:v>0.870903145</c:v>
                 </c:pt>
                 <c:pt idx="19">
-                  <c:v>0.9201749494081439</c:v>
+                  <c:v>0.868902448</c:v>
                 </c:pt>
                 <c:pt idx="20">
-                  <c:v>0.9211411720884838</c:v>
+                  <c:v>0.867284533</c:v>
                 </c:pt>
                 <c:pt idx="21">
-                  <c:v>0.9217845236667862</c:v>
+                  <c:v>0.866004812</c:v>
                 </c:pt>
                 <c:pt idx="22">
-                  <c:v>0.922119759787781</c:v>
+                  <c:v>0.872462063</c:v>
                 </c:pt>
                 <c:pt idx="23">
-                  <c:v>0.9221643284148551</c:v>
+                  <c:v>0.88349098</c:v>
                 </c:pt>
                 <c:pt idx="24">
-                  <c:v>0.9219379712257297</c:v>
+                  <c:v>0.881957792</c:v>
                 </c:pt>
                 <c:pt idx="25">
-                  <c:v>0.9214623251124554</c:v>
+                  <c:v>0.878294911</c:v>
                 </c:pt>
                 <c:pt idx="26">
-                  <c:v>0.920760528592058</c:v>
+                  <c:v>0.875336647</c:v>
                 </c:pt>
                 <c:pt idx="27">
-                  <c:v>0.9198568375395151</c:v>
+                  <c:v>0.872936411</c:v>
                 </c:pt>
                 <c:pt idx="28">
-                  <c:v>0.9187762542343284</c:v>
+                  <c:v>0.87101313</c:v>
                 </c:pt>
                 <c:pt idx="29">
-                  <c:v>0.9175441732726566</c:v>
+                  <c:v>0.875285594</c:v>
                 </c:pt>
                 <c:pt idx="30">
-                  <c:v>0.9161860474454444</c:v>
+                  <c:v>0.886249476</c:v>
                 </c:pt>
                 <c:pt idx="31">
-                  <c:v>0.9147270762254632</c:v>
+                  <c:v>0.895219745</c:v>
                 </c:pt>
                 <c:pt idx="32">
-                  <c:v>0.9131919190487113</c:v>
+                  <c:v>0.889823642</c:v>
                 </c:pt>
                 <c:pt idx="33">
-                  <c:v>0.9116044351236117</c:v>
+                  <c:v>0.885283085</c:v>
                 </c:pt>
                 <c:pt idx="34">
-                  <c:v>0.9099874510600836</c:v>
+                  <c:v>0.881482075</c:v>
                 </c:pt>
                 <c:pt idx="35">
-                  <c:v>0.9083625571843679</c:v>
+                  <c:v>0.878478022</c:v>
                 </c:pt>
                 <c:pt idx="36">
-                  <c:v>0.9067499329985598</c:v>
+                  <c:v>0.880305332</c:v>
                 </c:pt>
                 <c:pt idx="37">
-                  <c:v>0.9051682018597408</c:v>
+                  <c:v>0.890914391</c:v>
                 </c:pt>
                 <c:pt idx="38">
-                  <c:v>0.9036343145954204</c:v>
+                  <c:v>0.899553473</c:v>
                 </c:pt>
                 <c:pt idx="39">
-                  <c:v>0.9021634614422375</c:v>
+                  <c:v>0.900525616</c:v>
                 </c:pt>
                 <c:pt idx="40">
-                  <c:v>0.9007690113954966</c:v>
+                  <c:v>0.894551621</c:v>
                 </c:pt>
                 <c:pt idx="41">
-                  <c:v>0.8994633415905177</c:v>
+                  <c:v>0.88977063</c:v>
                 </c:pt>
                 <c:pt idx="42">
-                  <c:v>0.8982635653340961</c:v>
+                  <c:v>0.885816904</c:v>
                 </c:pt>
                 <c:pt idx="43">
-                  <c:v>0.8971790823274429</c:v>
+                  <c:v>0.885295137</c:v>
                 </c:pt>
                 <c:pt idx="44">
-                  <c:v>0.8962154633556673</c:v>
+                  <c:v>0.895630837</c:v>
                 </c:pt>
                 <c:pt idx="45">
-                  <c:v>0.8953762418413285</c:v>
+                  <c:v>0.904076745</c:v>
                 </c:pt>
                 <c:pt idx="46">
-                  <c:v>0.8946630234805052</c:v>
+                  <c:v>0.908720617</c:v>
                 </c:pt>
                 <c:pt idx="47">
-                  <c:v>0.8940756131101252</c:v>
+                  <c:v>0.902044313</c:v>
                 </c:pt>
                 <c:pt idx="48">
-                  <c:v>0.8936121557925786</c:v>
+                  <c:v>0.896498833</c:v>
                 </c:pt>
                 <c:pt idx="49">
-                  <c:v>0.8932692891461576</c:v>
+                  <c:v>0.892043458</c:v>
                 </c:pt>
                 <c:pt idx="50">
-                  <c:v>0.8930423040286596</c:v>
+                  <c:v>0.889360498</c:v>
                 </c:pt>
                 <c:pt idx="51">
-                  <c:v>0.8929253107927345</c:v>
+                  <c:v>0.899644636</c:v>
                 </c:pt>
                 <c:pt idx="52">
-                  <c:v>0.8929114084712914</c:v>
+                  <c:v>0.90810573</c:v>
                 </c:pt>
                 <c:pt idx="53">
-                  <c:v>0.8929928544153981</c:v>
+                  <c:v>0.914513645</c:v>
                 </c:pt>
                 <c:pt idx="54">
-                  <c:v>0.8931612320916316</c:v>
+                  <c:v>0.907388292</c:v>
                 </c:pt>
                 <c:pt idx="55">
-                  <c:v>0.8934076149466512</c:v>
+                  <c:v>0.901584667</c:v>
                 </c:pt>
                 <c:pt idx="56">
-                  <c:v>0.8937227244600459</c:v>
+                  <c:v>0.896994864</c:v>
                 </c:pt>
                 <c:pt idx="57">
-                  <c:v>0.894097080728325</c:v>
+                  <c:v>0.893212595</c:v>
                 </c:pt>
                 <c:pt idx="58">
-                  <c:v>0.8945211441498181</c:v>
+                  <c:v>0.902806484</c:v>
                 </c:pt>
                 <c:pt idx="59">
-                  <c:v>0.8949854470086803</c:v>
+                  <c:v>0.911396914</c:v>
                 </c:pt>
                 <c:pt idx="60">
-                  <c:v>0.8954807139830918</c:v>
+                  <c:v>0.918034724</c:v>
                 </c:pt>
                 <c:pt idx="61">
-                  <c:v>0.8959979708251549</c:v>
+                  <c:v>0.910991074</c:v>
                 </c:pt>
                 <c:pt idx="62">
-                  <c:v>0.8965286406753166</c:v>
+                  <c:v>0.905222483</c:v>
                 </c:pt>
                 <c:pt idx="63">
-                  <c:v>0.8970646276800678</c:v>
+                  <c:v>0.900692424</c:v>
                 </c:pt>
                 <c:pt idx="64">
-                  <c:v>0.8975983877761652</c:v>
+                  <c:v>0.89700265</c:v>
                 </c:pt>
                 <c:pt idx="65">
-                  <c:v>0.8981229866859758</c:v>
+                  <c:v>0.90503767</c:v>
                 </c:pt>
                 <c:pt idx="66">
-                  <c:v>0.8986321453353722</c:v>
+                  <c:v>0.913973694</c:v>
                 </c:pt>
                 <c:pt idx="67">
-                  <c:v>0.8991202730567656</c:v>
+                  <c:v>0.919797288</c:v>
                 </c:pt>
                 <c:pt idx="68">
-                  <c:v>0.899582489074609</c:v>
+                  <c:v>0.913180041</c:v>
                 </c:pt>
                 <c:pt idx="69">
-                  <c:v>0.9000146343464409</c:v>
+                  <c:v>0.907719349</c:v>
                 </c:pt>
                 <c:pt idx="70">
-                  <c:v>0.9004149745323579</c:v>
+                  <c:v>0.903342324</c:v>
                 </c:pt>
                 <c:pt idx="71">
-                  <c:v>0.9007822841489054</c:v>
+                  <c:v>0.899799893</c:v>
                 </c:pt>
                 <c:pt idx="72">
-                  <c:v>0.9011144309035377</c:v>
+                  <c:v>0.906598521</c:v>
                 </c:pt>
                 <c:pt idx="73">
-                  <c:v>0.9014098560188047</c:v>
+                  <c:v>0.915863162</c:v>
                 </c:pt>
                 <c:pt idx="74">
-                  <c:v>0.9016675530468606</c:v>
+                  <c:v>0.920277196</c:v>
                 </c:pt>
                 <c:pt idx="75">
-                  <c:v>0.9018870414903323</c:v>
+                  <c:v>0.914174048</c:v>
                 </c:pt>
                 <c:pt idx="76">
-                  <c:v>0.902068335910539</c:v>
+                  <c:v>0.909175688</c:v>
                 </c:pt>
                 <c:pt idx="77">
-                  <c:v>0.9022119112110736</c:v>
+                  <c:v>0.905137945</c:v>
                 </c:pt>
                 <c:pt idx="78">
-                  <c:v>0.9023186647829459</c:v>
+                  <c:v>0.901945226</c:v>
                 </c:pt>
                 <c:pt idx="79">
-                  <c:v>0.902389876187508</c:v>
+                  <c:v>0.907399619</c:v>
                 </c:pt>
                 <c:pt idx="80">
-                  <c:v>0.9024271650359673</c:v>
+                  <c:v>0.917136628</c:v>
                 </c:pt>
                 <c:pt idx="81">
-                  <c:v>0.9024324477000973</c:v>
+                  <c:v>0.919772759</c:v>
                 </c:pt>
                 <c:pt idx="82">
-                  <c:v>0.9024078934585953</c:v>
+                  <c:v>0.914351983</c:v>
                 </c:pt>
                 <c:pt idx="83">
-                  <c:v>0.9023558806481856</c:v>
+                  <c:v>0.90990125</c:v>
                 </c:pt>
                 <c:pt idx="84">
-                  <c:v>0.9022789533488098</c:v>
+                  <c:v>0.906292519</c:v>
                 </c:pt>
                 <c:pt idx="85">
-                  <c:v>0.902179779088845</c:v>
+                  <c:v>0.903452702</c:v>
                 </c:pt>
                 <c:pt idx="86">
-                  <c:v>0.9020611080100762</c:v>
+                  <c:v>0.90761678</c:v>
                 </c:pt>
                 <c:pt idx="87">
-                  <c:v>0.901925733883845</c:v>
+                  <c:v>0.91785552</c:v>
                 </c:pt>
                 <c:pt idx="88">
-                  <c:v>0.9017764573201014</c:v>
+                  <c:v>0.91862799</c:v>
                 </c:pt>
                 <c:pt idx="89">
-                  <c:v>0.9016160514607764</c:v>
+                  <c:v>0.913837004</c:v>
                 </c:pt>
                 <c:pt idx="90">
-                  <c:v>0.9014472303985452</c:v>
+                  <c:v>0.910056671</c:v>
                 </c:pt>
                 <c:pt idx="91">
-                  <c:v>0.9012726205123052</c:v>
+                  <c:v>0.906937939</c:v>
                 </c:pt>
                 <c:pt idx="92">
-                  <c:v>0.9010947348621158</c:v>
+                  <c:v>0.904459124</c:v>
                 </c:pt>
                 <c:pt idx="93">
-                  <c:v>0.9009159507394383</c:v>
+                  <c:v>0.907312447</c:v>
                 </c:pt>
                 <c:pt idx="94">
-                  <c:v>0.9007384904236994</c:v>
+                  <c:v>0.918095452</c:v>
                 </c:pt>
                 <c:pt idx="95">
-                  <c:v>0.9005644051539197</c:v>
+                  <c:v>0.917085695</c:v>
                 </c:pt>
                 <c:pt idx="96">
-                  <c:v>0.9003955622847076</c:v>
+                  <c:v>0.913025972</c:v>
                 </c:pt>
                 <c:pt idx="97">
-                  <c:v>0.9002336355595874</c:v>
+                  <c:v>0.909830882</c:v>
                 </c:pt>
                 <c:pt idx="98">
-                  <c:v>0.9000800984016522</c:v>
+                  <c:v>0.907174431</c:v>
                 </c:pt>
                 <c:pt idx="99">
-                  <c:v>0.8999363307366542</c:v>
+                  <c:v>0.905088347</c:v>
                 </c:pt>
                 <c:pt idx="100">
-                  <c:v>0.8998042257463015</c:v>
+                  <c:v>0.90658152</c:v>
                 </c:pt>
                 <c:pt idx="101">
-                  <c:v>0.8996848001947872</c:v>
+                  <c:v>0.91790725</c:v>
                 </c:pt>
                 <c:pt idx="102">
-                  <c:v>0.8995786688480406</c:v>
+                  <c:v>0.915288592</c:v>
                 </c:pt>
                 <c:pt idx="103">
-                  <c:v>0.899486222221052</c:v>
+                  <c:v>0.911942687</c:v>
                 </c:pt>
                 <c:pt idx="104">
-                  <c:v>0.8994076386242114</c:v>
+                  <c:v>0.909275833</c:v>
                 </c:pt>
                 <c:pt idx="105">
-                  <c:v>0.8993428981081949</c:v>
+                  <c:v>0.907104149</c:v>
                 </c:pt>
                 <c:pt idx="106">
-                  <c:v>0.8992917979757635</c:v>
+                  <c:v>0.905400653</c:v>
                 </c:pt>
                 <c:pt idx="107">
-                  <c:v>0.8992539695334723</c:v>
+                  <c:v>0.9054665</c:v>
                 </c:pt>
                 <c:pt idx="108">
-                  <c:v>0.899228895764952</c:v>
+                  <c:v>0.916658981</c:v>
                 </c:pt>
                 <c:pt idx="109">
-                  <c:v>0.8992159296196152</c:v>
+                  <c:v>0.913320436</c:v>
                 </c:pt>
                 <c:pt idx="110">
-                  <c:v>0.8992143126259937</c:v>
+                  <c:v>0.910624786</c:v>
                 </c:pt>
                 <c:pt idx="111">
-                  <c:v>0.8992231935569723</c:v>
+                  <c:v>0.908493694</c:v>
                 </c:pt>
                 <c:pt idx="112">
-                  <c:v>0.8992416468944365</c:v>
+                  <c:v>0.906794631</c:v>
                 </c:pt>
                 <c:pt idx="113">
-                  <c:v>0.8992686908629641</c:v>
+                  <c:v>0.905477926</c:v>
                 </c:pt>
                 <c:pt idx="114">
-                  <c:v>0.8993033048256316</c:v>
+                  <c:v>0.904367121</c:v>
                 </c:pt>
                 <c:pt idx="115">
-                  <c:v>0.8993444458594072</c:v>
+                  <c:v>0.913869639</c:v>
                 </c:pt>
                 <c:pt idx="116">
-                  <c:v>0.8993910643525738</c:v>
+                  <c:v>0.91127736</c:v>
                 </c:pt>
                 <c:pt idx="117">
-                  <c:v>0.8994421184917414</c:v>
+                  <c:v>0.909221828</c:v>
                 </c:pt>
                 <c:pt idx="118">
-                  <c:v>0.8994965875309971</c:v>
+                  <c:v>0.907674672</c:v>
                 </c:pt>
                 <c:pt idx="119">
-                  <c:v>0.899553483760194</c:v>
+                  <c:v>0.906346789</c:v>
                 </c:pt>
                 <c:pt idx="120">
-                  <c:v>0.8996118631130979</c:v>
+                  <c:v>0.905252644</c:v>
                 </c:pt>
                 <c:pt idx="121">
-                  <c:v>0.8996708343787723</c:v>
+                  <c:v>0.904365691</c:v>
                 </c:pt>
                 <c:pt idx="122">
-                  <c:v>0.8997295670009761</c:v>
+                  <c:v>0.911265022</c:v>
                 </c:pt>
                 <c:pt idx="123">
-                  <c:v>0.8997872974703437</c:v>
+                  <c:v>0.909392891</c:v>
                 </c:pt>
                 <c:pt idx="124">
-                  <c:v>0.8998433343324601</c:v>
+                  <c:v>0.907867017</c:v>
                 </c:pt>
                 <c:pt idx="125">
-                  <c:v>0.8998970618516032</c:v>
+                  <c:v>0.90662838</c:v>
                 </c:pt>
                 <c:pt idx="126">
-                  <c:v>0.8999479423847592</c:v>
+                  <c:v>0.905648313</c:v>
                 </c:pt>
                 <c:pt idx="127">
-                  <c:v>0.8999955175334904</c:v>
+                  <c:v>0.904926667</c:v>
                 </c:pt>
                 <c:pt idx="128">
-                  <c:v>0.900039549196252</c:v>
+                  <c:v>0.904303382</c:v>
                 </c:pt>
                 <c:pt idx="129">
-                  <c:v>0.9000799432933446</c:v>
+                  <c:v>0.908780137</c:v>
                 </c:pt>
                 <c:pt idx="130">
-                  <c:v>0.900116467418084</c:v>
+                  <c:v>0.907473634</c:v>
                 </c:pt>
                 <c:pt idx="131">
-                  <c:v>0.9001489503936806</c:v>
+                  <c:v>0.906466525</c:v>
                 </c:pt>
                 <c:pt idx="132">
-                  <c:v>0.90017728180082</c:v>
+                  <c:v>0.905680084</c:v>
                 </c:pt>
                 <c:pt idx="133">
-                  <c:v>0.9002014090723756</c:v>
+                  <c:v>0.904964829</c:v>
                 </c:pt>
                 <c:pt idx="134">
-                  <c:v>0.9002213340919999</c:v>
+                  <c:v>0.904403365</c:v>
                 </c:pt>
                 <c:pt idx="135">
-                  <c:v>0.9002371093723138</c:v>
+                  <c:v>0.904029908</c:v>
                 </c:pt>
                 <c:pt idx="136">
-                  <c:v>0.9002488338881728</c:v>
+                  <c:v>0.90659231</c:v>
                 </c:pt>
                 <c:pt idx="137">
-                  <c:v>0.9002566486394237</c:v>
+                  <c:v>0.905755587</c:v>
                 </c:pt>
                 <c:pt idx="138">
-                  <c:v>0.9002607320156111</c:v>
+                  <c:v>0.905105646</c:v>
                 </c:pt>
                 <c:pt idx="139">
-                  <c:v>0.9002612950324527</c:v>
+                  <c:v>0.90467773</c:v>
                 </c:pt>
                 <c:pt idx="140">
-                  <c:v>0.9002585765065619</c:v>
+                  <c:v>0.904244746</c:v>
                 </c:pt>
                 <c:pt idx="141">
-                  <c:v>0.9002528382310198</c:v>
+                  <c:v>0.903864094</c:v>
                 </c:pt>
                 <c:pt idx="142">
-                  <c:v>0.900244360210009</c:v>
+                  <c:v>0.903626309</c:v>
                 </c:pt>
                 <c:pt idx="143">
-                  <c:v>0.9002334360059502</c:v>
+                  <c:v>0.904573132</c:v>
                 </c:pt>
                 <c:pt idx="144">
-                  <c:v>0.9002203682475003</c:v>
+                  <c:v>0.904162558</c:v>
                 </c:pt>
                 <c:pt idx="145">
-                  <c:v>0.900205464341445</c:v>
+                  <c:v>0.903852194</c:v>
                 </c:pt>
                 <c:pt idx="146">
-                  <c:v>0.9001890324260555</c:v>
+                  <c:v>0.903685608</c:v>
                 </c:pt>
                 <c:pt idx="147">
-                  <c:v>0.9001713775979503</c:v>
+                  <c:v>0.903464327</c:v>
                 </c:pt>
                 <c:pt idx="148">
-                  <c:v>0.9001527984389489</c:v>
+                  <c:v>0.903272439</c:v>
                 </c:pt>
                 <c:pt idx="149">
-                  <c:v>0.9001335838639453</c:v>
+                  <c:v>0.903207912</c:v>
+                </c:pt>
+                <c:pt idx="150">
+                  <c:v>0.902816642</c:v>
+                </c:pt>
+                <c:pt idx="151">
+                  <c:v>0.902743347</c:v>
+                </c:pt>
+                <c:pt idx="152">
+                  <c:v>0.902773056</c:v>
+                </c:pt>
+                <c:pt idx="153">
+                  <c:v>0.902775167</c:v>
+                </c:pt>
+                <c:pt idx="154">
+                  <c:v>0.902690318</c:v>
+                </c:pt>
+                <c:pt idx="155">
+                  <c:v>0.902728078</c:v>
+                </c:pt>
+                <c:pt idx="156">
+                  <c:v>0.902739617</c:v>
+                </c:pt>
+                <c:pt idx="157">
+                  <c:v>0.901327755</c:v>
+                </c:pt>
+                <c:pt idx="158">
+                  <c:v>0.901624587</c:v>
+                </c:pt>
+                <c:pt idx="159">
+                  <c:v>0.901819241</c:v>
+                </c:pt>
+                <c:pt idx="160">
+                  <c:v>0.901919349</c:v>
+                </c:pt>
+                <c:pt idx="161">
+                  <c:v>0.902091109</c:v>
+                </c:pt>
+                <c:pt idx="162">
+                  <c:v>0.902180598</c:v>
+                </c:pt>
+                <c:pt idx="163">
+                  <c:v>0.902203435</c:v>
+                </c:pt>
+                <c:pt idx="164">
+                  <c:v>0.900182122</c:v>
+                </c:pt>
+                <c:pt idx="165">
+                  <c:v>0.900603604</c:v>
+                </c:pt>
+                <c:pt idx="166">
+                  <c:v>0.900901774</c:v>
+                </c:pt>
+                <c:pt idx="167">
+                  <c:v>0.901247645</c:v>
+                </c:pt>
+                <c:pt idx="168">
+                  <c:v>0.901450301</c:v>
+                </c:pt>
+                <c:pt idx="169">
+                  <c:v>0.901588555</c:v>
+                </c:pt>
+                <c:pt idx="170">
+                  <c:v>0.901801135</c:v>
+                </c:pt>
+                <c:pt idx="171">
+                  <c:v>0.899165399</c:v>
+                </c:pt>
+                <c:pt idx="172">
+                  <c:v>0.899736902</c:v>
+                </c:pt>
+                <c:pt idx="173">
+                  <c:v>0.90025083</c:v>
+                </c:pt>
+                <c:pt idx="174">
+                  <c:v>0.900574258</c:v>
+                </c:pt>
+                <c:pt idx="175">
+                  <c:v>0.900915464</c:v>
+                </c:pt>
+                <c:pt idx="176">
+                  <c:v>0.901157567</c:v>
+                </c:pt>
+                <c:pt idx="177">
+                  <c:v>0.901281385</c:v>
+                </c:pt>
+                <c:pt idx="178">
+                  <c:v>0.89973154</c:v>
+                </c:pt>
+                <c:pt idx="179">
+                  <c:v>0.899146719</c:v>
+                </c:pt>
+                <c:pt idx="180">
+                  <c:v>0.89964394</c:v>
+                </c:pt>
+                <c:pt idx="181">
+                  <c:v>0.900135286</c:v>
+                </c:pt>
+                <c:pt idx="182">
+                  <c:v>0.900401676</c:v>
+                </c:pt>
+                <c:pt idx="183">
+                  <c:v>0.900728231</c:v>
+                </c:pt>
+                <c:pt idx="184">
+                  <c:v>0.90096411</c:v>
+                </c:pt>
+                <c:pt idx="185">
+                  <c:v>0.900985076</c:v>
+                </c:pt>
+                <c:pt idx="186">
+                  <c:v>0.89872595</c:v>
+                </c:pt>
+                <c:pt idx="187">
+                  <c:v>0.899254997</c:v>
+                </c:pt>
+                <c:pt idx="188">
+                  <c:v>0.899684544</c:v>
+                </c:pt>
+                <c:pt idx="189">
+                  <c:v>0.900088235</c:v>
+                </c:pt>
+                <c:pt idx="190">
+                  <c:v>0.900324255</c:v>
+                </c:pt>
+                <c:pt idx="191">
+                  <c:v>0.900619711</c:v>
+                </c:pt>
+                <c:pt idx="192">
+                  <c:v>0.900813988</c:v>
+                </c:pt>
+                <c:pt idx="193">
+                  <c:v>0.898339807</c:v>
+                </c:pt>
+                <c:pt idx="194">
+                  <c:v>0.898970825</c:v>
+                </c:pt>
+                <c:pt idx="195">
+                  <c:v>0.899380525</c:v>
+                </c:pt>
+                <c:pt idx="196">
+                  <c:v>0.899799042</c:v>
+                </c:pt>
+                <c:pt idx="197">
+                  <c:v>0.900074851</c:v>
+                </c:pt>
+                <c:pt idx="198">
+                  <c:v>0.900267847</c:v>
+                </c:pt>
+                <c:pt idx="199">
+                  <c:v>0.900531628</c:v>
+                </c:pt>
+                <c:pt idx="200">
+                  <c:v>0.898091163</c:v>
+                </c:pt>
+                <c:pt idx="201">
+                  <c:v>0.898709621</c:v>
+                </c:pt>
+                <c:pt idx="202">
+                  <c:v>0.899173734</c:v>
+                </c:pt>
+                <c:pt idx="203">
+                  <c:v>0.899479047</c:v>
+                </c:pt>
+                <c:pt idx="204">
+                  <c:v>0.899845923</c:v>
+                </c:pt>
+                <c:pt idx="205">
+                  <c:v>0.900028182</c:v>
+                </c:pt>
+                <c:pt idx="206">
+                  <c:v>0.900216631</c:v>
+                </c:pt>
+                <c:pt idx="207">
+                  <c:v>0.898072851</c:v>
+                </c:pt>
+                <c:pt idx="208">
+                  <c:v>0.898553308</c:v>
+                </c:pt>
+                <c:pt idx="209">
+                  <c:v>0.899063621</c:v>
+                </c:pt>
+                <c:pt idx="210">
+                  <c:v>0.899372326</c:v>
+                </c:pt>
+                <c:pt idx="211">
+                  <c:v>0.899654345</c:v>
+                </c:pt>
+                <c:pt idx="212">
+                  <c:v>0.899894053</c:v>
+                </c:pt>
+                <c:pt idx="213">
+                  <c:v>0.900004899</c:v>
+                </c:pt>
+                <c:pt idx="214">
+                  <c:v>0.898095169</c:v>
+                </c:pt>
+                <c:pt idx="215">
+                  <c:v>0.898546134</c:v>
+                </c:pt>
+                <c:pt idx="216">
+                  <c:v>0.898940808</c:v>
+                </c:pt>
+                <c:pt idx="217">
+                  <c:v>0.899307255</c:v>
+                </c:pt>
+                <c:pt idx="218">
+                  <c:v>0.899489718</c:v>
+                </c:pt>
+                <c:pt idx="219">
+                  <c:v>0.899767848</c:v>
+                </c:pt>
+                <c:pt idx="220">
+                  <c:v>0.899905366</c:v>
+                </c:pt>
+                <c:pt idx="221">
+                  <c:v>0.898112027</c:v>
+                </c:pt>
+                <c:pt idx="222">
+                  <c:v>0.898587294</c:v>
+                </c:pt>
+                <c:pt idx="223">
+                  <c:v>0.898888738</c:v>
+                </c:pt>
+                <c:pt idx="224">
+                  <c:v>0.89924794</c:v>
+                </c:pt>
+                <c:pt idx="225">
+                  <c:v>0.899429809</c:v>
+                </c:pt>
+                <c:pt idx="226">
+                  <c:v>0.89962571</c:v>
+                </c:pt>
+                <c:pt idx="227">
+                  <c:v>0.899802414</c:v>
+                </c:pt>
+                <c:pt idx="228">
+                  <c:v>0.898238417</c:v>
+                </c:pt>
+                <c:pt idx="229">
+                  <c:v>0.898702248</c:v>
+                </c:pt>
+                <c:pt idx="230">
+                  <c:v>0.898965082</c:v>
+                </c:pt>
+                <c:pt idx="231">
+                  <c:v>0.899200607</c:v>
+                </c:pt>
+                <c:pt idx="232">
+                  <c:v>0.899441973</c:v>
+                </c:pt>
+                <c:pt idx="233">
+                  <c:v>0.899538749</c:v>
+                </c:pt>
+                <c:pt idx="234">
+                  <c:v>0.89973991</c:v>
+                </c:pt>
+                <c:pt idx="235">
+                  <c:v>0.899097013</c:v>
+                </c:pt>
+                <c:pt idx="236">
+                  <c:v>0.898761775</c:v>
+                </c:pt>
+                <c:pt idx="237">
+                  <c:v>0.899064476</c:v>
+                </c:pt>
+                <c:pt idx="238">
+                  <c:v>0.89920731</c:v>
+                </c:pt>
+                <c:pt idx="239">
+                  <c:v>0.899449874</c:v>
+                </c:pt>
+                <c:pt idx="240">
+                  <c:v>0.899549998</c:v>
+                </c:pt>
+                <c:pt idx="241">
+                  <c:v>0.89962731</c:v>
+                </c:pt>
+                <c:pt idx="242">
+                  <c:v>0.899779886</c:v>
+                </c:pt>
+                <c:pt idx="243">
+                  <c:v>0.898874827</c:v>
+                </c:pt>
+                <c:pt idx="244">
+                  <c:v>0.899163062</c:v>
+                </c:pt>
+                <c:pt idx="245">
+                  <c:v>0.899320993</c:v>
+                </c:pt>
+                <c:pt idx="246">
+                  <c:v>0.899420368</c:v>
+                </c:pt>
+                <c:pt idx="247">
+                  <c:v>0.899573947</c:v>
+                </c:pt>
+                <c:pt idx="248">
+                  <c:v>0.899606868</c:v>
+                </c:pt>
+                <c:pt idx="249">
+                  <c:v>0.899717408</c:v>
+                </c:pt>
+                <c:pt idx="250">
+                  <c:v>0.899061657</c:v>
+                </c:pt>
+                <c:pt idx="251">
+                  <c:v>0.899195723</c:v>
+                </c:pt>
+                <c:pt idx="252">
+                  <c:v>0.899394097</c:v>
+                </c:pt>
+                <c:pt idx="253">
+                  <c:v>0.899431227</c:v>
+                </c:pt>
+                <c:pt idx="254">
+                  <c:v>0.899583027</c:v>
+                </c:pt>
+                <c:pt idx="255">
+                  <c:v>0.899644524</c:v>
+                </c:pt>
+                <c:pt idx="256">
+                  <c:v>0.899650511</c:v>
+                </c:pt>
+                <c:pt idx="257">
+                  <c:v>0.899227932</c:v>
+                </c:pt>
+                <c:pt idx="258">
+                  <c:v>0.89930879</c:v>
+                </c:pt>
+                <c:pt idx="259">
+                  <c:v>0.899448005</c:v>
+                </c:pt>
+                <c:pt idx="260">
+                  <c:v>0.899532372</c:v>
+                </c:pt>
+                <c:pt idx="261">
+                  <c:v>0.899552952</c:v>
+                </c:pt>
+                <c:pt idx="262">
+                  <c:v>0.899681351</c:v>
+                </c:pt>
+                <c:pt idx="263">
+                  <c:v>0.899677794</c:v>
+                </c:pt>
+                <c:pt idx="264">
+                  <c:v>0.899366309</c:v>
+                </c:pt>
+                <c:pt idx="265">
+                  <c:v>0.899469557</c:v>
+                </c:pt>
+                <c:pt idx="266">
+                  <c:v>0.899482652</c:v>
+                </c:pt>
+                <c:pt idx="267">
+                  <c:v>0.899615529</c:v>
+                </c:pt>
+                <c:pt idx="268">
+                  <c:v>0.89961596</c:v>
+                </c:pt>
+                <c:pt idx="269">
+                  <c:v>0.899649205</c:v>
+                </c:pt>
+                <c:pt idx="270">
+                  <c:v>0.899732509</c:v>
+                </c:pt>
+                <c:pt idx="271">
+                  <c:v>0.899469922</c:v>
+                </c:pt>
+                <c:pt idx="272">
+                  <c:v>0.899606416</c:v>
+                </c:pt>
+                <c:pt idx="273">
+                  <c:v>0.899633836</c:v>
+                </c:pt>
+                <c:pt idx="274">
+                  <c:v>0.899617671</c:v>
+                </c:pt>
+                <c:pt idx="275">
+                  <c:v>0.899716845</c:v>
+                </c:pt>
+                <c:pt idx="276">
+                  <c:v>0.899676055</c:v>
+                </c:pt>
+                <c:pt idx="277">
+                  <c:v>0.899735433</c:v>
+                </c:pt>
+                <c:pt idx="278">
+                  <c:v>0.899646089</c:v>
+                </c:pt>
+                <c:pt idx="279">
+                  <c:v>0.899624976</c:v>
+                </c:pt>
+                <c:pt idx="280">
+                  <c:v>0.899726001</c:v>
+                </c:pt>
+                <c:pt idx="281">
+                  <c:v>0.899709473</c:v>
+                </c:pt>
+                <c:pt idx="282">
+                  <c:v>0.899736476</c:v>
+                </c:pt>
+                <c:pt idx="283">
+                  <c:v>0.899770537</c:v>
+                </c:pt>
+                <c:pt idx="284">
+                  <c:v>0.899712054</c:v>
+                </c:pt>
+                <c:pt idx="285">
+                  <c:v>0.899795947</c:v>
+                </c:pt>
+                <c:pt idx="286">
+                  <c:v>0.899764136</c:v>
+                </c:pt>
+                <c:pt idx="287">
+                  <c:v>0.899741447</c:v>
+                </c:pt>
+                <c:pt idx="288">
+                  <c:v>0.899805782</c:v>
+                </c:pt>
+                <c:pt idx="289">
+                  <c:v>0.899740996</c:v>
+                </c:pt>
+                <c:pt idx="290">
+                  <c:v>0.899809533</c:v>
+                </c:pt>
+                <c:pt idx="291">
+                  <c:v>0.899811905</c:v>
+                </c:pt>
+                <c:pt idx="292">
+                  <c:v>0.899761872</c:v>
+                </c:pt>
+                <c:pt idx="293">
+                  <c:v>0.899867728</c:v>
+                </c:pt>
+                <c:pt idx="294">
+                  <c:v>0.899811276</c:v>
+                </c:pt>
+                <c:pt idx="295">
+                  <c:v>0.899804963</c:v>
+                </c:pt>
+                <c:pt idx="296">
+                  <c:v>0.899831303</c:v>
+                </c:pt>
+                <c:pt idx="297">
+                  <c:v>0.899776223</c:v>
+                </c:pt>
+                <c:pt idx="298">
+                  <c:v>0.899846312</c:v>
+                </c:pt>
+                <c:pt idx="299">
+                  <c:v>0.899830256</c:v>
+                </c:pt>
+                <c:pt idx="300">
+                  <c:v>0.899905111</c:v>
+                </c:pt>
+                <c:pt idx="301">
+                  <c:v>0.899914228</c:v>
+                </c:pt>
+                <c:pt idx="302">
+                  <c:v>0.899843008</c:v>
+                </c:pt>
+                <c:pt idx="303">
+                  <c:v>0.89989242</c:v>
+                </c:pt>
+                <c:pt idx="304">
+                  <c:v>0.89985506</c:v>
+                </c:pt>
+                <c:pt idx="305">
+                  <c:v>0.899806131</c:v>
+                </c:pt>
+                <c:pt idx="306">
+                  <c:v>0.899873016</c:v>
+                </c:pt>
+                <c:pt idx="307">
+                  <c:v>0.899957083</c:v>
+                </c:pt>
+                <c:pt idx="308">
+                  <c:v>0.899963001</c:v>
+                </c:pt>
+                <c:pt idx="309">
+                  <c:v>0.899951065</c:v>
+                </c:pt>
+                <c:pt idx="310">
+                  <c:v>0.899868874</c:v>
+                </c:pt>
+                <c:pt idx="311">
+                  <c:v>0.899926985</c:v>
+                </c:pt>
+                <c:pt idx="312">
+                  <c:v>0.899874845</c:v>
+                </c:pt>
+                <c:pt idx="313">
+                  <c:v>0.899835257</c:v>
+                </c:pt>
+                <c:pt idx="314">
+                  <c:v>0.900041286</c:v>
+                </c:pt>
+                <c:pt idx="315">
+                  <c:v>0.899948789</c:v>
+                </c:pt>
+                <c:pt idx="316">
+                  <c:v>0.899973414</c:v>
+                </c:pt>
+                <c:pt idx="317">
+                  <c:v>0.899937897</c:v>
+                </c:pt>
+                <c:pt idx="318">
+                  <c:v>0.899878132</c:v>
+                </c:pt>
+                <c:pt idx="319">
+                  <c:v>0.899936332</c:v>
+                </c:pt>
+                <c:pt idx="320">
+                  <c:v>0.89987727</c:v>
+                </c:pt>
+                <c:pt idx="321">
+                  <c:v>0.900050595</c:v>
+                </c:pt>
+                <c:pt idx="322">
+                  <c:v>0.900027236</c:v>
+                </c:pt>
+                <c:pt idx="323">
+                  <c:v>0.899937739</c:v>
+                </c:pt>
+                <c:pt idx="324">
+                  <c:v>0.899976821</c:v>
+                </c:pt>
+                <c:pt idx="325">
+                  <c:v>0.899932347</c:v>
+                </c:pt>
+                <c:pt idx="326">
+                  <c:v>0.899885561</c:v>
+                </c:pt>
+                <c:pt idx="327">
+                  <c:v>0.89994219</c:v>
+                </c:pt>
+                <c:pt idx="328">
+                  <c:v>0.900018556</c:v>
+                </c:pt>
+                <c:pt idx="329">
+                  <c:v>0.900042733</c:v>
+                </c:pt>
+                <c:pt idx="330">
+                  <c:v>0.900016812</c:v>
+                </c:pt>
+                <c:pt idx="331">
+                  <c:v>0.899931046</c:v>
+                </c:pt>
+                <c:pt idx="332">
+                  <c:v>0.899987274</c:v>
+                </c:pt>
+                <c:pt idx="333">
+                  <c:v>0.8999287</c:v>
+                </c:pt>
+                <c:pt idx="334">
+                  <c:v>0.89989496</c:v>
+                </c:pt>
+                <c:pt idx="335">
+                  <c:v>0.900105804</c:v>
+                </c:pt>
+                <c:pt idx="336">
+                  <c:v>0.900000329</c:v>
+                </c:pt>
+                <c:pt idx="337">
+                  <c:v>0.900037266</c:v>
+                </c:pt>
+                <c:pt idx="338">
+                  <c:v>0.900010647</c:v>
+                </c:pt>
+                <c:pt idx="339">
+                  <c:v>0.899935819</c:v>
+                </c:pt>
+                <c:pt idx="340">
+                  <c:v>0.899989126</c:v>
+                </c:pt>
+                <c:pt idx="341">
+                  <c:v>0.899928379</c:v>
+                </c:pt>
+                <c:pt idx="342">
+                  <c:v>0.900121058</c:v>
+                </c:pt>
+                <c:pt idx="343">
+                  <c:v>0.90008716</c:v>
+                </c:pt>
+                <c:pt idx="344">
+                  <c:v>0.899988595</c:v>
+                </c:pt>
+                <c:pt idx="345">
+                  <c:v>0.900034941</c:v>
+                </c:pt>
+                <c:pt idx="346">
+                  <c:v>0.899984457</c:v>
+                </c:pt>
+                <c:pt idx="347">
+                  <c:v>0.899940522</c:v>
+                </c:pt>
+                <c:pt idx="348">
+                  <c:v>0.899993444</c:v>
+                </c:pt>
+                <c:pt idx="349">
+                  <c:v>0.90002558</c:v>
+                </c:pt>
+                <c:pt idx="350">
+                  <c:v>0.900058574</c:v>
+                </c:pt>
+                <c:pt idx="351">
+                  <c:v>0.900035354</c:v>
+                </c:pt>
+                <c:pt idx="352">
+                  <c:v>0.899949715</c:v>
+                </c:pt>
+                <c:pt idx="353">
+                  <c:v>0.900011158</c:v>
+                </c:pt>
+                <c:pt idx="354">
+                  <c:v>0.899958037</c:v>
+                </c:pt>
+                <c:pt idx="355">
+                  <c:v>0.899929092</c:v>
+                </c:pt>
+                <c:pt idx="356">
+                  <c:v>0.899982644</c:v>
+                </c:pt>
+                <c:pt idx="357">
+                  <c:v>0.900000474</c:v>
+                </c:pt>
+                <c:pt idx="358">
+                  <c:v>0.900044638</c:v>
+                </c:pt>
+                <c:pt idx="359">
+                  <c:v>0.900022299</c:v>
+                </c:pt>
+                <c:pt idx="360">
+                  <c:v>0.899952499</c:v>
+                </c:pt>
+                <c:pt idx="361">
+                  <c:v>0.900005194</c:v>
+                </c:pt>
+                <c:pt idx="362">
+                  <c:v>0.899952203</c:v>
+                </c:pt>
+                <c:pt idx="363">
+                  <c:v>0.899934444</c:v>
+                </c:pt>
+                <c:pt idx="364">
+                  <c:v>0.900080364</c:v>
+                </c:pt>
+                <c:pt idx="365">
+                  <c:v>0.899989767</c:v>
+                </c:pt>
+                <c:pt idx="366">
+                  <c:v>0.900041045</c:v>
+                </c:pt>
+                <c:pt idx="367">
+                  <c:v>0.899991604</c:v>
+                </c:pt>
+                <c:pt idx="368">
+                  <c:v>0.899955074</c:v>
+                </c:pt>
+                <c:pt idx="369">
+                  <c:v>0.900005266</c:v>
+                </c:pt>
+                <c:pt idx="370">
+                  <c:v>0.899951536</c:v>
+                </c:pt>
+                <c:pt idx="371">
+                  <c:v>0.900038487</c:v>
+                </c:pt>
+                <c:pt idx="372">
+                  <c:v>0.900027628</c:v>
+                </c:pt>
+                <c:pt idx="373">
+                  <c:v>0.899949979</c:v>
+                </c:pt>
+                <c:pt idx="374">
+                  <c:v>0.900013525</c:v>
+                </c:pt>
+                <c:pt idx="375">
+                  <c:v>0.899962205</c:v>
+                </c:pt>
+                <c:pt idx="376">
+                  <c:v>0.89994079</c:v>
+                </c:pt>
+                <c:pt idx="377">
+                  <c:v>0.899989743</c:v>
+                </c:pt>
+                <c:pt idx="378">
+                  <c:v>0.899971959</c:v>
+                </c:pt>
+                <c:pt idx="379">
+                  <c:v>0.900027292</c:v>
+                </c:pt>
+                <c:pt idx="380">
+                  <c:v>0.900015288</c:v>
+                </c:pt>
+                <c:pt idx="381">
+                  <c:v>0.899950117</c:v>
+                </c:pt>
+                <c:pt idx="382">
+                  <c:v>0.900006458</c:v>
+                </c:pt>
+                <c:pt idx="383">
+                  <c:v>0.899953799</c:v>
+                </c:pt>
+                <c:pt idx="384">
+                  <c:v>0.89994442</c:v>
+                </c:pt>
+                <c:pt idx="385">
+                  <c:v>0.900030591</c:v>
+                </c:pt>
+                <c:pt idx="386">
+                  <c:v>0.89996473</c:v>
+                </c:pt>
+                <c:pt idx="387">
+                  <c:v>0.900025642</c:v>
+                </c:pt>
+                <c:pt idx="388">
+                  <c:v>0.900010574</c:v>
+                </c:pt>
+                <c:pt idx="389">
+                  <c:v>0.899969467</c:v>
+                </c:pt>
+                <c:pt idx="390">
+                  <c:v>0.900004753</c:v>
+                </c:pt>
+                <c:pt idx="391">
+                  <c:v>0.899949932</c:v>
+                </c:pt>
+                <c:pt idx="392">
+                  <c:v>0.900049934</c:v>
+                </c:pt>
+                <c:pt idx="393">
+                  <c:v>0.900022194</c:v>
+                </c:pt>
+                <c:pt idx="394">
+                  <c:v>0.899961642</c:v>
+                </c:pt>
+                <c:pt idx="395">
+                  <c:v>0.900026297</c:v>
+                </c:pt>
+                <c:pt idx="396">
+                  <c:v>0.899973436</c:v>
+                </c:pt>
+                <c:pt idx="397">
+                  <c:v>0.899976243</c:v>
+                </c:pt>
+                <c:pt idx="398">
+                  <c:v>0.900004887</c:v>
+                </c:pt>
+                <c:pt idx="399">
+                  <c:v>0.899990014</c:v>
+                </c:pt>
+                <c:pt idx="400">
+                  <c:v>0.900047151</c:v>
+                </c:pt>
+                <c:pt idx="401">
+                  <c:v>0.900015784</c:v>
+                </c:pt>
+                <c:pt idx="402">
+                  <c:v>0.899960709</c:v>
                 </c:pt>
               </c:numCache>
             </c:numRef>
@@ -11871,7 +13820,7 @@
         <c:axId val="-2128940872"/>
         <c:scaling>
           <c:orientation val="minMax"/>
-          <c:max val="3000.0"/>
+          <c:max val="2000.0"/>
           <c:min val="0.0"/>
         </c:scaling>
         <c:delete val="0"/>
@@ -11913,8 +13862,8 @@
         <c:axId val="-2129643912"/>
         <c:scaling>
           <c:orientation val="minMax"/>
-          <c:max val="1.0"/>
-          <c:min val="0.8"/>
+          <c:max val="0.96"/>
+          <c:min val="0.82"/>
         </c:scaling>
         <c:delete val="0"/>
         <c:axPos val="l"/>
@@ -11999,12 +13948,13 @@
 
 <file path=ppt/charts/chart9.xml><?xml version="1.0" encoding="utf-8"?>
 <c:chartSpace xmlns:c="http://schemas.openxmlformats.org/drawingml/2006/chart" xmlns:a="http://schemas.openxmlformats.org/drawingml/2006/main" xmlns:r="http://schemas.openxmlformats.org/officeDocument/2006/relationships">
+  <c:date1904 val="0"/>
   <c:chart>
     <c:autoTitleDeleted val="1"/>
     <c:plotArea>
-      <c:scatterChart>
-        <c:scatterStyle val="lineMarker"/>
-        <c:varyColors val="0"/>
+      <c:barChart>
+        <c:barDir val="col"/>
+        <c:grouping val="clustered"/>
         <c:ser>
           <c:idx val="0"/>
           <c:order val="0"/>
@@ -12014,296 +13964,129 @@
               <c:strCache>
                 <c:ptCount val="1"/>
                 <c:pt idx="0">
-                  <c:v>one mismatch sample (seed)</c:v>
+                  <c:v>lock time (ns)</c:v>
                 </c:pt>
               </c:strCache>
             </c:strRef>
           </c:tx>
           <c:spPr>
-            <a:ln>
-              <a:noFill/>
-            </a:ln>
+            <a:solidFill/>
           </c:spPr>
-          <c:marker>
-            <c:symbol val="diamond"/>
-            <c:size val="8"/>
+          <c:dPt>
+            <c:idx val="0"/>
+            <c:spPr>
+              <a:solidFill>
+                <a:srgbClr val="E07A1F"/>
+              </a:solidFill>
+            </c:spPr>
+          </c:dPt>
+          <c:dPt>
+            <c:idx val="1"/>
+            <c:spPr>
+              <a:solidFill>
+                <a:srgbClr val="2A9D8F"/>
+              </a:solidFill>
+            </c:spPr>
+          </c:dPt>
+          <c:dPt>
+            <c:idx val="2"/>
             <c:spPr>
               <a:solidFill>
                 <a:srgbClr val="1D2F82"/>
               </a:solidFill>
-              <a:ln>
-                <a:solidFill>
-                  <a:srgbClr val="1D2F82"/>
-                </a:solidFill>
-              </a:ln>
             </c:spPr>
-          </c:marker>
-          <c:xVal>
+          </c:dPt>
+          <c:dPt>
+            <c:idx val="3"/>
+            <c:spPr>
+              <a:solidFill>
+                <a:srgbClr val="C0392B"/>
+              </a:solidFill>
+            </c:spPr>
+          </c:dPt>
+          <c:dPt>
+            <c:idx val="4"/>
+            <c:spPr>
+              <a:solidFill>
+                <a:srgbClr val="6A3D9A"/>
+              </a:solidFill>
+            </c:spPr>
+          </c:dPt>
+          <c:cat>
+            <c:strRef>
+              <c:f>Sheet1!$A$2:$A$6</c:f>
+              <c:strCache>
+                <c:ptCount val="5"/>
+                <c:pt idx="0">
+                  <c:v>ff</c:v>
+                </c:pt>
+                <c:pt idx="1">
+                  <c:v>sf</c:v>
+                </c:pt>
+                <c:pt idx="2">
+                  <c:v>tt</c:v>
+                </c:pt>
+                <c:pt idx="3">
+                  <c:v>fs</c:v>
+                </c:pt>
+                <c:pt idx="4">
+                  <c:v>ss</c:v>
+                </c:pt>
+              </c:strCache>
+            </c:strRef>
+          </c:cat>
+          <c:val>
             <c:numRef>
-              <c:f>Sheet1!$A$2:$A$31</c:f>
+              <c:f>Sheet1!$B$2:$B$6</c:f>
               <c:numCache>
                 <c:formatCode>General</c:formatCode>
-                <c:ptCount val="30"/>
+                <c:ptCount val="5"/>
                 <c:pt idx="0">
-                  <c:v>1.1537029941431456</c:v>
+                  <c:v>241.1</c:v>
                 </c:pt>
                 <c:pt idx="1">
-                  <c:v>8.640458363324</c:v>
+                  <c:v>419.2</c:v>
                 </c:pt>
                 <c:pt idx="2">
-                  <c:v>5.6690017407786115</c:v>
+                  <c:v>503.1</c:v>
                 </c:pt>
                 <c:pt idx="3">
-                  <c:v>2.2448358320205557</c:v>
+                  <c:v>575.6</c:v>
                 </c:pt>
                 <c:pt idx="4">
-                  <c:v>9.58542009738619</c:v>
-                </c:pt>
-                <c:pt idx="5">
-                  <c:v>10.335970311657235</c:v>
-                </c:pt>
-                <c:pt idx="6">
-                  <c:v>4.870823962301472</c:v>
-                </c:pt>
-                <c:pt idx="7">
-                  <c:v>0.9323409747617291</c:v>
-                </c:pt>
-                <c:pt idx="8">
-                  <c:v>4.862134551367404</c:v>
-                </c:pt>
-                <c:pt idx="9">
-                  <c:v>8.913721257168248</c:v>
-                </c:pt>
-                <c:pt idx="10">
-                  <c:v>5.584980329335451</c:v>
-                </c:pt>
-                <c:pt idx="11">
-                  <c:v>11.026122757231747</c:v>
-                </c:pt>
-                <c:pt idx="12">
-                  <c:v>10.986658991488525</c:v>
-                </c:pt>
-                <c:pt idx="13">
-                  <c:v>5.3256497329858234</c:v>
-                </c:pt>
-                <c:pt idx="14">
-                  <c:v>6.426030525425546</c:v>
-                </c:pt>
-                <c:pt idx="15">
-                  <c:v>10.265433625927585</c:v>
-                </c:pt>
-                <c:pt idx="16">
-                  <c:v>2.8653404507835205</c:v>
-                </c:pt>
-                <c:pt idx="17">
-                  <c:v>5.084656477163179</c:v>
-                </c:pt>
-                <c:pt idx="18">
-                  <c:v>9.458758595392283</c:v>
-                </c:pt>
-                <c:pt idx="19">
-                  <c:v>7.0532532663401355</c:v>
-                </c:pt>
-                <c:pt idx="20">
-                  <c:v>7.7103041126266305</c:v>
-                </c:pt>
-                <c:pt idx="21">
-                  <c:v>4.888840801641038</c:v>
-                </c:pt>
-                <c:pt idx="22">
-                  <c:v>1.3849672604091268</c:v>
-                </c:pt>
-                <c:pt idx="23">
-                  <c:v>9.097053735245993</c:v>
-                </c:pt>
-                <c:pt idx="24">
-                  <c:v>2.9111485504091092</c:v>
-                </c:pt>
-                <c:pt idx="25">
-                  <c:v>8.18486739254493</c:v>
-                </c:pt>
-                <c:pt idx="26">
-                  <c:v>2.180846103669978</c:v>
-                </c:pt>
-                <c:pt idx="27">
-                  <c:v>1.4730638678668981</c:v>
-                </c:pt>
-                <c:pt idx="28">
-                  <c:v>5.9907220077638215</c:v>
-                </c:pt>
-                <c:pt idx="29">
-                  <c:v>0.5422711364629151</c:v>
+                  <c:v>966.7</c:v>
                 </c:pt>
               </c:numCache>
             </c:numRef>
-          </c:xVal>
-          <c:yVal>
-            <c:numRef>
-              <c:f>Sheet1!$B$2:$B$31</c:f>
-              <c:numCache>
-                <c:formatCode>General</c:formatCode>
-                <c:ptCount val="30"/>
-                <c:pt idx="0">
-                  <c:v>5.000154675904582</c:v>
-                </c:pt>
-                <c:pt idx="1">
-                  <c:v>0.7719357772297997</c:v>
-                </c:pt>
-                <c:pt idx="2">
-                  <c:v>0.3850189796386303</c:v>
-                </c:pt>
-                <c:pt idx="3">
-                  <c:v>9.689649051350898</c:v>
-                </c:pt>
-                <c:pt idx="4">
-                  <c:v>2.2400585783824454</c:v>
-                </c:pt>
-                <c:pt idx="5">
-                  <c:v>2.909281963766972</c:v>
-                </c:pt>
-                <c:pt idx="6">
-                  <c:v>2.742800501007281</c:v>
-                </c:pt>
-                <c:pt idx="7">
-                  <c:v>2.6134651611668573</c:v>
-                </c:pt>
-                <c:pt idx="8">
-                  <c:v>3.0019139774422854</c:v>
-                </c:pt>
-                <c:pt idx="9">
-                  <c:v>1.1615538380850694</c:v>
-                </c:pt>
-                <c:pt idx="10">
-                  <c:v>1.26639026432494</c:v>
-                </c:pt>
-                <c:pt idx="11">
-                  <c:v>7.519996206686159</c:v>
-                </c:pt>
-                <c:pt idx="12">
-                  <c:v>5.380585377735571</c:v>
-                </c:pt>
-                <c:pt idx="13">
-                  <c:v>10.412402886607424</c:v>
-                </c:pt>
-                <c:pt idx="14">
-                  <c:v>6.197966117928189</c:v>
-                </c:pt>
-                <c:pt idx="15">
-                  <c:v>3.116043215288016</c:v>
-                </c:pt>
-                <c:pt idx="16">
-                  <c:v>4.119589346609587</c:v>
-                </c:pt>
-                <c:pt idx="17">
-                  <c:v>1.010266889321116</c:v>
-                </c:pt>
-                <c:pt idx="18">
-                  <c:v>5.376494168516928</c:v>
-                </c:pt>
-                <c:pt idx="19">
-                  <c:v>0.08198286038896185</c:v>
-                </c:pt>
-                <c:pt idx="20">
-                  <c:v>0.7442914059852797</c:v>
-                </c:pt>
-                <c:pt idx="21">
-                  <c:v>3.2653102087044203</c:v>
-                </c:pt>
-                <c:pt idx="22">
-                  <c:v>1.0710245150384878</c:v>
-                </c:pt>
-                <c:pt idx="23">
-                  <c:v>2.4121407422191226</c:v>
-                </c:pt>
-                <c:pt idx="24">
-                  <c:v>2.458641156206255</c:v>
-                </c:pt>
-                <c:pt idx="25">
-                  <c:v>0.14678076440785048</c:v>
-                </c:pt>
-                <c:pt idx="26">
-                  <c:v>2.076328107148271</c:v>
-                </c:pt>
-                <c:pt idx="27">
-                  <c:v>7.840686308281988</c:v>
-                </c:pt>
-                <c:pt idx="28">
-                  <c:v>5.174064755073573</c:v>
-                </c:pt>
-                <c:pt idx="29">
-                  <c:v>1.0027334011448659</c:v>
-                </c:pt>
-              </c:numCache>
-            </c:numRef>
-          </c:yVal>
-          <c:smooth val="0"/>
+          </c:val>
         </c:ser>
-        <c:ser>
-          <c:idx val="1"/>
-          <c:order val="1"/>
-          <c:tx>
-            <c:strRef>
-              <c:f>Sheet1!$B$33</c:f>
-              <c:strCache>
-                <c:ptCount val="1"/>
-                <c:pt idx="0">
-                  <c:v>equal drift (y = x)</c:v>
-                </c:pt>
-              </c:strCache>
-            </c:strRef>
-          </c:tx>
-          <c:spPr>
-            <a:ln w="19050">
-              <a:solidFill>
-                <a:srgbClr val="9AA0A6"/>
-              </a:solidFill>
-              <a:prstDash val="dash"/>
-            </a:ln>
-          </c:spPr>
-          <c:marker>
-            <c:symbol val="none"/>
-          </c:marker>
-          <c:xVal>
-            <c:numRef>
-              <c:f>Sheet1!$A$34:$A$35</c:f>
-              <c:numCache>
-                <c:formatCode>General</c:formatCode>
-                <c:ptCount val="2"/>
-                <c:pt idx="0">
-                  <c:v>0</c:v>
-                </c:pt>
-                <c:pt idx="1">
-                  <c:v>16</c:v>
-                </c:pt>
-              </c:numCache>
-            </c:numRef>
-          </c:xVal>
-          <c:yVal>
-            <c:numRef>
-              <c:f>Sheet1!$B$34:$B$35</c:f>
-              <c:numCache>
-                <c:formatCode>General</c:formatCode>
-                <c:ptCount val="2"/>
-                <c:pt idx="0">
-                  <c:v>0</c:v>
-                </c:pt>
-                <c:pt idx="1">
-                  <c:v>16</c:v>
-                </c:pt>
-              </c:numCache>
-            </c:numRef>
-          </c:yVal>
-          <c:smooth val="0"/>
-        </c:ser>
-        <c:axId val="-2128940872"/>
-        <c:axId val="-2129643912"/>
-      </c:scatterChart>
-      <c:valAx>
-        <c:axId val="-2128940872"/>
+        <c:dLbls>
+          <c:numFmt formatCode="0" sourceLinked="0"/>
+          <c:txPr>
+            <a:bodyPr/>
+            <a:lstStyle/>
+            <a:p>
+              <a:pPr>
+                <a:defRPr sz="1000"/>
+              </a:pPr>
+            </a:p>
+          </c:txPr>
+          <c:showLegendKey val="0"/>
+          <c:showVal val="1"/>
+          <c:showCatName val="0"/>
+          <c:showSerName val="0"/>
+          <c:showPercent val="0"/>
+          <c:showBubbleSize val="0"/>
+          <c:showLeaderLines val="1"/>
+        </c:dLbls>
+        <c:gapWidth val="60"/>
+        <c:axId val="-2068027336"/>
+        <c:axId val="-2113994440"/>
+      </c:barChart>
+      <c:catAx>
+        <c:axId val="-2068027336"/>
         <c:scaling>
           <c:orientation val="minMax"/>
-          <c:max val="16.0"/>
-          <c:min val="0.0"/>
         </c:scaling>
         <c:delete val="0"/>
         <c:axPos val="b"/>
@@ -12315,7 +14098,7 @@
               <a:p>
                 <a:r>
                   <a:rPr sz="1100"/>
-                  <a:t>1st-order |drift| (MHz)</a:t>
+                  <a:t>process corner (retuned loop, R2 = 3.6 kΩ)</a:t>
                 </a:r>
               </a:p>
             </c:rich>
@@ -12323,7 +14106,6 @@
           <c:layout/>
           <c:overlay val="0"/>
         </c:title>
-        <c:numFmt formatCode="General" sourceLinked="1"/>
         <c:majorTickMark val="out"/>
         <c:minorTickMark val="none"/>
         <c:tickLblPos val="nextTo"/>
@@ -12336,15 +14118,17 @@
             </a:pPr>
           </a:p>
         </c:txPr>
-        <c:crossAx val="-2129643912"/>
+        <c:crossAx val="-2113994440"/>
         <c:crosses val="min"/>
-        <c:crossBetween val="midCat"/>
-      </c:valAx>
+        <c:auto val="1"/>
+        <c:lblAlgn val="ctr"/>
+        <c:lblOffset val="100"/>
+        <c:noMultiLvlLbl val="0"/>
+      </c:catAx>
       <c:valAx>
-        <c:axId val="-2129643912"/>
+        <c:axId val="-2113994440"/>
         <c:scaling>
-          <c:orientation val="minMax"/>
-          <c:max val="16.0"/>
+          <c:max val="2200.0"/>
           <c:min val="0.0"/>
         </c:scaling>
         <c:delete val="0"/>
@@ -12366,7 +14150,7 @@
               <a:p>
                 <a:r>
                   <a:rPr sz="1100"/>
-                  <a:t>2nd-order |drift| (MHz)</a:t>
+                  <a:t>lock time from 0.85 V start (ns)</a:t>
                 </a:r>
               </a:p>
             </c:rich>
@@ -12374,7 +14158,6 @@
           <c:layout/>
           <c:overlay val="0"/>
         </c:title>
-        <c:numFmt formatCode="General" sourceLinked="1"/>
         <c:majorTickMark val="out"/>
         <c:minorTickMark val="none"/>
         <c:tickLblPos val="nextTo"/>
@@ -12387,28 +14170,11 @@
             </a:pPr>
           </a:p>
         </c:txPr>
-        <c:crossAx val="-2128940872"/>
-        <c:crosses val="min"/>
-        <c:crossBetween val="midCat"/>
+        <c:crossAx val="-2068027336"/>
+        <c:crosses val="autoZero"/>
       </c:valAx>
     </c:plotArea>
-    <c:legend>
-      <c:legendPos val="b"/>
-      <c:layout/>
-      <c:overlay val="0"/>
-      <c:txPr>
-        <a:bodyPr/>
-        <a:lstStyle/>
-        <a:p>
-          <a:pPr>
-            <a:defRPr sz="1000"/>
-          </a:pPr>
-        </a:p>
-      </c:txPr>
-    </c:legend>
-    <c:plotVisOnly val="1"/>
     <c:dispBlanksAs val="gap"/>
-    <c:showDLblsOverMax val="0"/>
   </c:chart>
   <c:txPr>
     <a:bodyPr/>
@@ -14548,7 +16314,7 @@
                 </a:solidFill>
                 <a:latin typeface="Calibri"/>
               </a:rPr>
-              <a:t>21</a:t>
+              <a:t>22</a:t>
             </a:r>
           </a:p>
         </p:txBody>
@@ -15249,7 +17015,7 @@
                           </a:solidFill>
                           <a:latin typeface="Calibri"/>
                         </a:rPr>
-                        <a:t>839 ns (0V cold start)</a:t>
+                        <a:t>1352 ns (0V cold start)</a:t>
                       </a:r>
                     </a:p>
                   </a:txBody>
@@ -15674,7 +17440,7 @@
                 <a:ea typeface="Calibri" pitchFamily="34" charset="-122"/>
                 <a:cs typeface="Calibri" pitchFamily="34" charset="-120"/>
               </a:rPr>
-              <a:t>24</a:t>
+              <a:t>25</a:t>
             </a:r>
             <a:endParaRPr lang="en-US" sz="1000" dirty="0"/>
           </a:p>
@@ -15897,7 +17663,7 @@
                 </a:solidFill>
                 <a:latin typeface="Calibri"/>
               </a:rPr>
-              <a:t>Retune the loop (zeta ~0.33 now; R2 ~3.6 kOhm for zeta ~0.7) and re-verify lock; transistor-level charge pump; layout in Magic, DRC, LVS (netgen), post-layout re-simulation.</a:t>
+              <a:t>Re-verify the retuned loop (zeta ~0.7, R2 = 3.6 kOhm) with a transistor-level charge pump; layout in Magic, DRC, LVS (netgen), post-layout re-simulation.</a:t>
             </a:r>
           </a:p>
           <a:p>
@@ -16019,7 +17785,7 @@
                 <a:ea typeface="Calibri" pitchFamily="34" charset="-122"/>
                 <a:cs typeface="Calibri" pitchFamily="34" charset="-120"/>
               </a:rPr>
-              <a:t>25</a:t>
+              <a:t>26</a:t>
             </a:r>
             <a:endParaRPr lang="en-US" sz="1000" dirty="0"/>
           </a:p>
@@ -16432,7 +18198,7 @@
                 <a:ea typeface="Calibri" pitchFamily="34" charset="-122"/>
                 <a:cs typeface="Calibri" pitchFamily="34" charset="-120"/>
               </a:rPr>
-              <a:t>26</a:t>
+              <a:t>27</a:t>
             </a:r>
             <a:endParaRPr lang="en-US" sz="1000" dirty="0"/>
           </a:p>
@@ -17321,7 +19087,7 @@
                 </a:solidFill>
                 <a:latin typeface="Calibri"/>
               </a:rPr>
-              <a:t>Scope: compensation is an ideal behavioural correction voltage (transistor-level in Review 3); closed-loop results are tt / 27 °C.</a:t>
+              <a:t>Scope: compensation is an ideal behavioural correction voltage (transistor-level in Review 3); closed-loop results are tt / 27 °C (corner lock tests: coarse start).</a:t>
             </a:r>
           </a:p>
         </p:txBody>
@@ -17547,7 +19313,7 @@
                 </a:solidFill>
                 <a:latin typeface="Calibri"/>
               </a:rPr>
-              <a:t>Charge pump runs at 5 × I_cp until the divider's first edge, then a one-shot latch drops it to the nominal 20 µA. Result: lock in 839 ns from 0 V (&lt; 2 µs spec).</a:t>
+              <a:t>Charge pump runs at 5 × I_cp until the divider's first edge, then a one-shot latch drops it to the nominal 20 µA. Result: lock in 1352 ns from 0 V with the retuned loop filter (839 ns with the original), inside the 2 µs spec.</a:t>
             </a:r>
           </a:p>
         </p:txBody>
@@ -18726,7 +20492,7 @@
                 </a:solidFill>
                 <a:latin typeface="Calibri"/>
               </a:rPr>
-              <a:t>Cold-start acquisition risk (flagged as open in Review 1) fixed and verified: a true 0V cold start now locks in 839 ns.</a:t>
+              <a:t>Cold-start acquisition risk (flagged as open in Review 1) fixed and verified: a true 0V cold start now locks in 1352 ns (retuned loop filter).</a:t>
             </a:r>
           </a:p>
           <a:p>
@@ -19420,7 +21186,7 @@
                 </a:solidFill>
                 <a:latin typeface="Calibri"/>
               </a:rPr>
-              <a:t>Scope: compensation is an ideal behavioural correction voltage (transistor-level in Review 3); closed-loop results are tt / 27 °C.</a:t>
+              <a:t>Scope: compensation is an ideal behavioural correction voltage (transistor-level in Review 3); closed-loop results are tt / 27 °C (corner lock tests: coarse start).</a:t>
             </a:r>
           </a:p>
         </p:txBody>
@@ -19928,7 +21694,7 @@
                 </a:solidFill>
                 <a:latin typeface="Calibri"/>
               </a:rPr>
-              <a:t>Scope: compensation is an ideal behavioural correction voltage (transistor-level in Review 3); closed-loop results are tt / 27 °C.</a:t>
+              <a:t>Scope: compensation is an ideal behavioural correction voltage (transistor-level in Review 3); closed-loop results are tt / 27 °C (corner lock tests: coarse start).</a:t>
             </a:r>
           </a:p>
         </p:txBody>
@@ -20019,7 +21785,7 @@
                 </a:solidFill>
                 <a:latin typeface="Calibri"/>
               </a:rPr>
-              <a:t>Closed-Loop Lock Transient</a:t>
+              <a:t>Closed-Loop Lock Transient (Retuned Loop)</a:t>
             </a:r>
           </a:p>
         </p:txBody>
@@ -20075,7 +21841,7 @@
         <p:spPr>
           <a:xfrm>
             <a:off x="8500000" y="1325880"/>
-            <a:ext cx="3000000" cy="1100000"/>
+            <a:ext cx="3000000" cy="1050000"/>
           </a:xfrm>
           <a:prstGeom prst="rect">
             <a:avLst/>
@@ -20115,7 +21881,7 @@
                 </a:solidFill>
                 <a:latin typeface="Calibri"/>
               </a:rPr>
-              <a:t>839 ns</a:t>
+              <a:t>1352 ns</a:t>
             </a:r>
           </a:p>
           <a:p>
@@ -20127,7 +21893,7 @@
                 </a:solidFill>
                 <a:latin typeface="Calibri"/>
               </a:rPr>
-              <a:t>lock from 0 V cold start</a:t>
+              <a:t>lock from 0 V cold start (was 839 ns)</a:t>
             </a:r>
           </a:p>
         </p:txBody>
@@ -20140,8 +21906,8 @@
         </p:nvSpPr>
         <p:spPr>
           <a:xfrm>
-            <a:off x="8500000" y="2575880"/>
-            <a:ext cx="3000000" cy="1100000"/>
+            <a:off x="8500000" y="2475880"/>
+            <a:ext cx="3000000" cy="1050000"/>
           </a:xfrm>
           <a:prstGeom prst="rect">
             <a:avLst/>
@@ -20181,7 +21947,7 @@
                 </a:solidFill>
                 <a:latin typeface="Calibri"/>
               </a:rPr>
-              <a:t>577 ns</a:t>
+              <a:t>503 ns</a:t>
             </a:r>
           </a:p>
           <a:p>
@@ -20193,7 +21959,7 @@
                 </a:solidFill>
                 <a:latin typeface="Calibri"/>
               </a:rPr>
-              <a:t>lock from 0.85 V</a:t>
+              <a:t>lock from 0.85 V (was 577 ns)</a:t>
             </a:r>
           </a:p>
         </p:txBody>
@@ -20206,8 +21972,8 @@
         </p:nvSpPr>
         <p:spPr>
           <a:xfrm>
-            <a:off x="8500000" y="3825880"/>
-            <a:ext cx="3000000" cy="1100000"/>
+            <a:off x="8500000" y="3625880"/>
+            <a:ext cx="3000000" cy="1050000"/>
           </a:xfrm>
           <a:prstGeom prst="rect">
             <a:avLst/>
@@ -20259,7 +22025,7 @@
                 </a:solidFill>
                 <a:latin typeface="Calibri"/>
               </a:rPr>
-              <a:t>spec (averaged model: 573 ns)</a:t>
+              <a:t>spec: met at both starts</a:t>
             </a:r>
           </a:p>
         </p:txBody>
@@ -20272,8 +22038,8 @@
         </p:nvSpPr>
         <p:spPr>
           <a:xfrm>
-            <a:off x="8500000" y="5075880"/>
-            <a:ext cx="3000000" cy="900000"/>
+            <a:off x="8500000" y="4775880"/>
+            <a:ext cx="3000000" cy="1200000"/>
           </a:xfrm>
           <a:prstGeom prst="rect">
             <a:avLst/>
@@ -20299,6 +22065,22 @@
                 <a:latin typeface="Calibri"/>
               </a:rPr>
               <a:t>Lock = V_ctrl within ±2 % of 0.9 V and staying there.</a:t>
+            </a:r>
+          </a:p>
+          <a:p>
+            <a:pPr>
+              <a:spcAft>
+                <a:spcPts val="600"/>
+              </a:spcAft>
+            </a:pPr>
+            <a:r>
+              <a:rPr sz="1100" b="0">
+                <a:solidFill>
+                  <a:srgbClr val="333333"/>
+                </a:solidFill>
+                <a:latin typeface="Calibri"/>
+              </a:rPr>
+              <a:t>R2 = 3.6 kΩ. The retune makes the cold start slower (+61 %) but well damped.</a:t>
             </a:r>
           </a:p>
         </p:txBody>
@@ -20337,7 +22119,7 @@
                 </a:solidFill>
                 <a:latin typeface="Calibri"/>
               </a:rPr>
-              <a:t>Scope: compensation is an ideal behavioural correction voltage (transistor-level in Review 3); closed-loop results are tt / 27 °C.</a:t>
+              <a:t>Scope: compensation is an ideal behavioural correction voltage (transistor-level in Review 3); closed-loop results are tt / 27 °C (corner lock tests: coarse start).</a:t>
             </a:r>
           </a:p>
         </p:txBody>
@@ -20428,7 +22210,7 @@
                 </a:solidFill>
                 <a:latin typeface="Calibri"/>
               </a:rPr>
-              <a:t>Loop Dynamics: Corrected Numbers</a:t>
+              <a:t>Loop Dynamics: Found, Fixed, Verified</a:t>
             </a:r>
           </a:p>
         </p:txBody>
@@ -20494,7 +22276,7 @@
           </a:solidFill>
           <a:ln>
             <a:solidFill>
-              <a:srgbClr val="C0392B"/>
+              <a:srgbClr val="1D2F82"/>
             </a:solidFill>
           </a:ln>
         </p:spPr>
@@ -20518,13 +22300,13 @@
           <a:p>
             <a:pPr algn="ctr"/>
             <a:r>
-              <a:rPr sz="2200" b="1">
+              <a:rPr sz="2000" b="1">
                 <a:solidFill>
-                  <a:srgbClr val="C0392B"/>
+                  <a:srgbClr val="1D2F82"/>
                 </a:solidFill>
                 <a:latin typeface="Calibri"/>
               </a:rPr>
-              <a:t>ζ ≈ 0.33</a:t>
+              <a:t>ζ 0.33 → 0.70</a:t>
             </a:r>
           </a:p>
           <a:p>
@@ -20560,7 +22342,7 @@
           </a:solidFill>
           <a:ln>
             <a:solidFill>
-              <a:srgbClr val="C0392B"/>
+              <a:srgbClr val="1D2F82"/>
             </a:solidFill>
           </a:ln>
         </p:spPr>
@@ -20586,11 +22368,11 @@
             <a:r>
               <a:rPr sz="2000" b="1">
                 <a:solidFill>
-                  <a:srgbClr val="C0392B"/>
+                  <a:srgbClr val="1D2F82"/>
                 </a:solidFill>
                 <a:latin typeface="Calibri"/>
               </a:rPr>
-              <a:t>f_n ≈ 0.9 MHz</a:t>
+              <a:t>≈ 30° → 65°+</a:t>
             </a:r>
           </a:p>
           <a:p>
@@ -20602,7 +22384,7 @@
                 </a:solidFill>
                 <a:latin typeface="Calibri"/>
               </a:rPr>
-              <a:t>natural freq. (claimed 2 MHz)</a:t>
+              <a:t>phase margin (100·ζ rule)</a:t>
             </a:r>
           </a:p>
         </p:txBody>
@@ -20626,7 +22408,7 @@
           </a:solidFill>
           <a:ln>
             <a:solidFill>
-              <a:srgbClr val="C0392B"/>
+              <a:srgbClr val="2E8B57"/>
             </a:solidFill>
           </a:ln>
         </p:spPr>
@@ -20650,13 +22432,13 @@
           <a:p>
             <a:pPr algn="ctr"/>
             <a:r>
-              <a:rPr sz="2200" b="1">
+              <a:rPr sz="2000" b="1">
                 <a:solidFill>
-                  <a:srgbClr val="C0392B"/>
+                  <a:srgbClr val="2E8B57"/>
                 </a:solidFill>
                 <a:latin typeface="Calibri"/>
               </a:rPr>
-              <a:t>≈ 30°</a:t>
+              <a:t>8.6 → 0.35 mV</a:t>
             </a:r>
           </a:p>
           <a:p>
@@ -20668,7 +22450,7 @@
                 </a:solidFill>
                 <a:latin typeface="Calibri"/>
               </a:rPr>
-              <a:t>phase margin (claimed 70°)</a:t>
+              <a:t>V_ctrl ripple at lock</a:t>
             </a:r>
           </a:p>
         </p:txBody>
@@ -20722,7 +22504,7 @@
                 </a:solidFill>
                 <a:latin typeface="Calibri"/>
               </a:rPr>
-              <a:t>573 vs 577 ns</a:t>
+              <a:t>0.78 → 0.008 %</a:t>
             </a:r>
           </a:p>
           <a:p>
@@ -20734,7 +22516,7 @@
                 </a:solidFill>
                 <a:latin typeface="Calibri"/>
               </a:rPr>
-              <a:t>model vs transistor lock</a:t>
+              <a:t>residual frequency error at 2 µs</a:t>
             </a:r>
           </a:p>
         </p:txBody>
@@ -20773,7 +22555,7 @@
                 </a:solidFill>
                 <a:latin typeface="Calibri"/>
               </a:rPr>
-              <a:t>What was wrong</a:t>
+              <a:t>Found</a:t>
             </a:r>
           </a:p>
           <a:p>
@@ -20789,7 +22571,7 @@
                 </a:solidFill>
                 <a:latin typeface="Calibri"/>
               </a:rPr>
-              <a:t>Review 1 dropped the 1/(2π) of the charge-pump gain in ω_n², overstating ω_n by √(2π) and ζ likewise.</a:t>
+              <a:t>Review 1 dropped the 1/(2π) of the charge-pump gain, so ζ was really 0.33, not 0.72.</a:t>
             </a:r>
           </a:p>
           <a:p>
@@ -20805,7 +22587,7 @@
                 </a:solidFill>
                 <a:latin typeface="Calibri"/>
               </a:rPr>
-              <a:t>What stands</a:t>
+              <a:t>Fixed</a:t>
             </a:r>
           </a:p>
           <a:p>
@@ -20821,7 +22603,7 @@
                 </a:solidFill>
                 <a:latin typeface="Calibri"/>
               </a:rPr>
-              <a:t>Simulated lock times (577 / 839 ns) are direct results; an independent model reproduces them. Spec &lt; 2 µs met.</a:t>
+              <a:t>R2 1.7 → 3.6 kΩ (C1, C2, I_cp unchanged), verified at transistor level.</a:t>
             </a:r>
           </a:p>
           <a:p>
@@ -20837,7 +22619,7 @@
                 </a:solidFill>
                 <a:latin typeface="Calibri"/>
               </a:rPr>
-              <a:t>Next</a:t>
+              <a:t>Cost</a:t>
             </a:r>
           </a:p>
           <a:p>
@@ -20853,7 +22635,7 @@
                 </a:solidFill>
                 <a:latin typeface="Calibri"/>
               </a:rPr>
-              <a:t>Underdamped loop: retune R2 ≈ 3.6 kΩ for ζ ≈ 0.7 and re-verify (Review 3).</a:t>
+              <a:t>0 V cold start 839 → 1352 ns; both inside the 2 µs spec.</a:t>
             </a:r>
           </a:p>
         </p:txBody>
@@ -20892,7 +22674,7 @@
                 </a:solidFill>
                 <a:latin typeface="Calibri"/>
               </a:rPr>
-              <a:t>Measured local K_VCO = 887 MHz/V (Review 1 used 669), so ζ = 0.33, not 0.29.</a:t>
+              <a:t>Measured local K_VCO = 887 MHz/V (Review 1 used 669).</a:t>
             </a:r>
           </a:p>
         </p:txBody>
@@ -20931,7 +22713,7 @@
                 </a:solidFill>
                 <a:latin typeface="Calibri"/>
               </a:rPr>
-              <a:t>Scope: compensation is an ideal behavioural correction voltage (transistor-level in Review 3); closed-loop results are tt / 27 °C.</a:t>
+              <a:t>Scope: compensation is an ideal behavioural correction voltage (transistor-level in Review 3); closed-loop results are tt / 27 °C (corner lock tests: coarse start).</a:t>
             </a:r>
           </a:p>
         </p:txBody>
@@ -20987,7 +22769,841 @@
                 <a:ea typeface="Calibri" pitchFamily="34" charset="-122"/>
                 <a:cs typeface="Calibri" pitchFamily="34" charset="-120"/>
               </a:rPr>
-              <a:t>22</a:t>
+              <a:t>21</a:t>
+            </a:r>
+            <a:endParaRPr lang="en-US" sz="1000" dirty="0"/>
+          </a:p>
+        </p:txBody>
+      </p:sp>
+      <p:sp>
+        <p:nvSpPr>
+          <p:cNvPr id="3" name="TextBox 2"/>
+          <p:cNvSpPr txBox="1"/>
+          <p:nvPr/>
+        </p:nvSpPr>
+        <p:spPr>
+          <a:xfrm>
+            <a:off x="548640" y="320040"/>
+            <a:ext cx="9601200" cy="685800"/>
+          </a:xfrm>
+          <a:prstGeom prst="rect">
+            <a:avLst/>
+          </a:prstGeom>
+          <a:noFill/>
+        </p:spPr>
+        <p:txBody>
+          <a:bodyPr wrap="square">
+            <a:spAutoFit/>
+          </a:bodyPr>
+          <a:lstStyle/>
+          <a:p>
+            <a:r>
+              <a:rPr sz="2800" b="1">
+                <a:solidFill>
+                  <a:srgbClr val="1D2F82"/>
+                </a:solidFill>
+                <a:latin typeface="Calibri"/>
+              </a:rPr>
+              <a:t>Lock Across All Five Corners</a:t>
+            </a:r>
+          </a:p>
+        </p:txBody>
+      </p:sp>
+      <p:pic>
+        <p:nvPicPr>
+          <p:cNvPr id="4" name="Picture 3" descr="image.png"/>
+          <p:cNvPicPr>
+            <a:picLocks noChangeAspect="1"/>
+          </p:cNvPicPr>
+          <p:nvPr/>
+        </p:nvPicPr>
+        <p:blipFill>
+          <a:blip r:embed="rId2"/>
+          <a:stretch>
+            <a:fillRect/>
+          </a:stretch>
+        </p:blipFill>
+        <p:spPr>
+          <a:xfrm>
+            <a:off x="10362895" y="320040"/>
+            <a:ext cx="1371600" cy="518746"/>
+          </a:xfrm>
+          <a:prstGeom prst="rect">
+            <a:avLst/>
+          </a:prstGeom>
+        </p:spPr>
+      </p:pic>
+      <p:graphicFrame>
+        <p:nvGraphicFramePr>
+          <p:cNvPr id="5" name="Chart 4"/>
+          <p:cNvGraphicFramePr>
+            <a:graphicFrameLocks noGrp="1"/>
+          </p:cNvGraphicFramePr>
+          <p:nvPr/>
+        </p:nvGraphicFramePr>
+        <p:xfrm>
+          <a:off x="640080" y="1225880"/>
+          <a:ext cx="5600000" cy="4400000"/>
+        </p:xfrm>
+        <a:graphic>
+          <a:graphicData uri="http://schemas.openxmlformats.org/drawingml/2006/chart">
+            <c:chart xmlns:c="http://schemas.openxmlformats.org/drawingml/2006/chart" r:id="rId3"/>
+          </a:graphicData>
+        </a:graphic>
+      </p:graphicFrame>
+      <p:sp>
+        <p:nvSpPr>
+          <p:cNvPr id="6" name="TextBox 5"/>
+          <p:cNvSpPr txBox="1"/>
+          <p:nvPr/>
+        </p:nvSpPr>
+        <p:spPr>
+          <a:xfrm>
+            <a:off x="6500000" y="1225880"/>
+            <a:ext cx="5000000" cy="1500000"/>
+          </a:xfrm>
+          <a:prstGeom prst="rect">
+            <a:avLst/>
+          </a:prstGeom>
+          <a:noFill/>
+        </p:spPr>
+        <p:txBody>
+          <a:bodyPr wrap="square">
+            <a:spAutoFit/>
+          </a:bodyPr>
+          <a:lstStyle/>
+          <a:p>
+            <a:pPr>
+              <a:spcAft>
+                <a:spcPts val="600"/>
+              </a:spcAft>
+            </a:pPr>
+            <a:r>
+              <a:rPr sz="1200" b="1">
+                <a:solidFill>
+                  <a:srgbClr val="1D2F82"/>
+                </a:solidFill>
+                <a:latin typeface="Calibri"/>
+              </a:rPr>
+              <a:t>Retuned loop: all five corners lock inside the 2 µs spec</a:t>
+            </a:r>
+          </a:p>
+          <a:p>
+            <a:pPr>
+              <a:spcAft>
+                <a:spcPts val="600"/>
+              </a:spcAft>
+            </a:pPr>
+            <a:r>
+              <a:rPr sz="1200" b="0">
+                <a:solidFill>
+                  <a:srgbClr val="333333"/>
+                </a:solidFill>
+                <a:latin typeface="Calibri"/>
+              </a:rPr>
+              <a:t>Settled V_ctrl differs by corner (ss needs 0.968 V, the weakest NMOS); final f_VCO within 0.1 % of 226.2 MHz at ff, sf, tt, fs.</a:t>
+            </a:r>
+          </a:p>
+        </p:txBody>
+      </p:sp>
+      <p:graphicFrame>
+        <p:nvGraphicFramePr>
+          <p:cNvPr id="7" name="Table 6"/>
+          <p:cNvGraphicFramePr>
+            <a:graphicFrameLocks noGrp="1"/>
+          </p:cNvGraphicFramePr>
+          <p:nvPr/>
+        </p:nvGraphicFramePr>
+        <p:xfrm>
+          <a:off x="6500000" y="2775880"/>
+          <a:ext cx="5000000" cy="2600000"/>
+        </p:xfrm>
+        <a:graphic>
+          <a:graphicData uri="http://schemas.openxmlformats.org/drawingml/2006/table">
+            <a:tbl>
+              <a:tblPr firstRow="1" bandRow="1">
+                <a:tableStyleId>{5C22544A-7EE6-4342-B048-85BDC9FD1C3A}</a:tableStyleId>
+              </a:tblPr>
+              <a:tblGrid>
+                <a:gridCol w="1250000"/>
+                <a:gridCol w="1250000"/>
+                <a:gridCol w="1250000"/>
+                <a:gridCol w="1250000"/>
+              </a:tblGrid>
+              <a:tr h="433333">
+                <a:tc>
+                  <a:txBody>
+                    <a:bodyPr/>
+                    <a:lstStyle/>
+                    <a:p>
+                      <a:r>
+                        <a:rPr sz="1000" b="1">
+                          <a:solidFill>
+                            <a:srgbClr val="FFFFFF"/>
+                          </a:solidFill>
+                          <a:latin typeface="Calibri"/>
+                        </a:rPr>
+                        <a:t>corner</a:t>
+                      </a:r>
+                    </a:p>
+                  </a:txBody>
+                  <a:tcPr>
+                    <a:solidFill>
+                      <a:srgbClr val="1D2F82"/>
+                    </a:solidFill>
+                  </a:tcPr>
+                </a:tc>
+                <a:tc>
+                  <a:txBody>
+                    <a:bodyPr/>
+                    <a:lstStyle/>
+                    <a:p>
+                      <a:r>
+                        <a:rPr sz="1000" b="1">
+                          <a:solidFill>
+                            <a:srgbClr val="FFFFFF"/>
+                          </a:solidFill>
+                          <a:latin typeface="Calibri"/>
+                        </a:rPr>
+                        <a:t>retuned lock</a:t>
+                      </a:r>
+                    </a:p>
+                  </a:txBody>
+                  <a:tcPr>
+                    <a:solidFill>
+                      <a:srgbClr val="1D2F82"/>
+                    </a:solidFill>
+                  </a:tcPr>
+                </a:tc>
+                <a:tc>
+                  <a:txBody>
+                    <a:bodyPr/>
+                    <a:lstStyle/>
+                    <a:p>
+                      <a:r>
+                        <a:rPr sz="1000" b="1">
+                          <a:solidFill>
+                            <a:srgbClr val="FFFFFF"/>
+                          </a:solidFill>
+                          <a:latin typeface="Calibri"/>
+                        </a:rPr>
+                        <a:t>final f_VCO</a:t>
+                      </a:r>
+                    </a:p>
+                  </a:txBody>
+                  <a:tcPr>
+                    <a:solidFill>
+                      <a:srgbClr val="1D2F82"/>
+                    </a:solidFill>
+                  </a:tcPr>
+                </a:tc>
+                <a:tc>
+                  <a:txBody>
+                    <a:bodyPr/>
+                    <a:lstStyle/>
+                    <a:p>
+                      <a:r>
+                        <a:rPr sz="1000" b="1">
+                          <a:solidFill>
+                            <a:srgbClr val="FFFFFF"/>
+                          </a:solidFill>
+                          <a:latin typeface="Calibri"/>
+                        </a:rPr>
+                        <a:t>original loop</a:t>
+                      </a:r>
+                    </a:p>
+                  </a:txBody>
+                  <a:tcPr>
+                    <a:solidFill>
+                      <a:srgbClr val="1D2F82"/>
+                    </a:solidFill>
+                  </a:tcPr>
+                </a:tc>
+              </a:tr>
+              <a:tr h="433333">
+                <a:tc>
+                  <a:txBody>
+                    <a:bodyPr/>
+                    <a:lstStyle/>
+                    <a:p>
+                      <a:r>
+                        <a:rPr sz="1000" b="0">
+                          <a:solidFill>
+                            <a:srgbClr val="333333"/>
+                          </a:solidFill>
+                          <a:latin typeface="Calibri"/>
+                        </a:rPr>
+                        <a:t>ff</a:t>
+                      </a:r>
+                    </a:p>
+                  </a:txBody>
+                  <a:tcPr>
+                    <a:solidFill>
+                      <a:srgbClr val="F2F4FB"/>
+                    </a:solidFill>
+                  </a:tcPr>
+                </a:tc>
+                <a:tc>
+                  <a:txBody>
+                    <a:bodyPr/>
+                    <a:lstStyle/>
+                    <a:p>
+                      <a:r>
+                        <a:rPr sz="1000" b="0">
+                          <a:solidFill>
+                            <a:srgbClr val="333333"/>
+                          </a:solidFill>
+                          <a:latin typeface="Calibri"/>
+                        </a:rPr>
+                        <a:t>241 ns</a:t>
+                      </a:r>
+                    </a:p>
+                  </a:txBody>
+                  <a:tcPr>
+                    <a:solidFill>
+                      <a:srgbClr val="F2F4FB"/>
+                    </a:solidFill>
+                  </a:tcPr>
+                </a:tc>
+                <a:tc>
+                  <a:txBody>
+                    <a:bodyPr/>
+                    <a:lstStyle/>
+                    <a:p>
+                      <a:r>
+                        <a:rPr sz="1000" b="0">
+                          <a:solidFill>
+                            <a:srgbClr val="333333"/>
+                          </a:solidFill>
+                          <a:latin typeface="Calibri"/>
+                        </a:rPr>
+                        <a:t>226.2 MHz</a:t>
+                      </a:r>
+                    </a:p>
+                  </a:txBody>
+                  <a:tcPr>
+                    <a:solidFill>
+                      <a:srgbClr val="F2F4FB"/>
+                    </a:solidFill>
+                  </a:tcPr>
+                </a:tc>
+                <a:tc>
+                  <a:txBody>
+                    <a:bodyPr/>
+                    <a:lstStyle/>
+                    <a:p>
+                      <a:r>
+                        <a:rPr sz="1000" b="0">
+                          <a:solidFill>
+                            <a:srgbClr val="333333"/>
+                          </a:solidFill>
+                          <a:latin typeface="Calibri"/>
+                        </a:rPr>
+                        <a:t>not settled at 2 µs (225.2 MHz)</a:t>
+                      </a:r>
+                    </a:p>
+                  </a:txBody>
+                  <a:tcPr>
+                    <a:solidFill>
+                      <a:srgbClr val="F2F4FB"/>
+                    </a:solidFill>
+                  </a:tcPr>
+                </a:tc>
+              </a:tr>
+              <a:tr h="433333">
+                <a:tc>
+                  <a:txBody>
+                    <a:bodyPr/>
+                    <a:lstStyle/>
+                    <a:p>
+                      <a:r>
+                        <a:rPr sz="1000" b="0">
+                          <a:solidFill>
+                            <a:srgbClr val="333333"/>
+                          </a:solidFill>
+                          <a:latin typeface="Calibri"/>
+                        </a:rPr>
+                        <a:t>sf</a:t>
+                      </a:r>
+                    </a:p>
+                  </a:txBody>
+                  <a:tcPr>
+                    <a:solidFill>
+                      <a:srgbClr val="FFFFFF"/>
+                    </a:solidFill>
+                  </a:tcPr>
+                </a:tc>
+                <a:tc>
+                  <a:txBody>
+                    <a:bodyPr/>
+                    <a:lstStyle/>
+                    <a:p>
+                      <a:r>
+                        <a:rPr sz="1000" b="0">
+                          <a:solidFill>
+                            <a:srgbClr val="333333"/>
+                          </a:solidFill>
+                          <a:latin typeface="Calibri"/>
+                        </a:rPr>
+                        <a:t>419 ns</a:t>
+                      </a:r>
+                    </a:p>
+                  </a:txBody>
+                  <a:tcPr>
+                    <a:solidFill>
+                      <a:srgbClr val="FFFFFF"/>
+                    </a:solidFill>
+                  </a:tcPr>
+                </a:tc>
+                <a:tc>
+                  <a:txBody>
+                    <a:bodyPr/>
+                    <a:lstStyle/>
+                    <a:p>
+                      <a:r>
+                        <a:rPr sz="1000" b="0">
+                          <a:solidFill>
+                            <a:srgbClr val="333333"/>
+                          </a:solidFill>
+                          <a:latin typeface="Calibri"/>
+                        </a:rPr>
+                        <a:t>226.4 MHz</a:t>
+                      </a:r>
+                    </a:p>
+                  </a:txBody>
+                  <a:tcPr>
+                    <a:solidFill>
+                      <a:srgbClr val="FFFFFF"/>
+                    </a:solidFill>
+                  </a:tcPr>
+                </a:tc>
+                <a:tc>
+                  <a:txBody>
+                    <a:bodyPr/>
+                    <a:lstStyle/>
+                    <a:p>
+                      <a:r>
+                        <a:rPr sz="1000" b="0">
+                          <a:solidFill>
+                            <a:srgbClr val="333333"/>
+                          </a:solidFill>
+                          <a:latin typeface="Calibri"/>
+                        </a:rPr>
+                        <a:t>not settled at 2 µs (229.1 MHz)</a:t>
+                      </a:r>
+                    </a:p>
+                  </a:txBody>
+                  <a:tcPr>
+                    <a:solidFill>
+                      <a:srgbClr val="FFFFFF"/>
+                    </a:solidFill>
+                  </a:tcPr>
+                </a:tc>
+              </a:tr>
+              <a:tr h="433333">
+                <a:tc>
+                  <a:txBody>
+                    <a:bodyPr/>
+                    <a:lstStyle/>
+                    <a:p>
+                      <a:r>
+                        <a:rPr sz="1000" b="0">
+                          <a:solidFill>
+                            <a:srgbClr val="333333"/>
+                          </a:solidFill>
+                          <a:latin typeface="Calibri"/>
+                        </a:rPr>
+                        <a:t>tt</a:t>
+                      </a:r>
+                    </a:p>
+                  </a:txBody>
+                  <a:tcPr>
+                    <a:solidFill>
+                      <a:srgbClr val="F2F4FB"/>
+                    </a:solidFill>
+                  </a:tcPr>
+                </a:tc>
+                <a:tc>
+                  <a:txBody>
+                    <a:bodyPr/>
+                    <a:lstStyle/>
+                    <a:p>
+                      <a:r>
+                        <a:rPr sz="1000" b="0">
+                          <a:solidFill>
+                            <a:srgbClr val="333333"/>
+                          </a:solidFill>
+                          <a:latin typeface="Calibri"/>
+                        </a:rPr>
+                        <a:t>503 ns</a:t>
+                      </a:r>
+                    </a:p>
+                  </a:txBody>
+                  <a:tcPr>
+                    <a:solidFill>
+                      <a:srgbClr val="F2F4FB"/>
+                    </a:solidFill>
+                  </a:tcPr>
+                </a:tc>
+                <a:tc>
+                  <a:txBody>
+                    <a:bodyPr/>
+                    <a:lstStyle/>
+                    <a:p>
+                      <a:r>
+                        <a:rPr sz="1000" b="0">
+                          <a:solidFill>
+                            <a:srgbClr val="333333"/>
+                          </a:solidFill>
+                          <a:latin typeface="Calibri"/>
+                        </a:rPr>
+                        <a:t>226.2 MHz</a:t>
+                      </a:r>
+                    </a:p>
+                  </a:txBody>
+                  <a:tcPr>
+                    <a:solidFill>
+                      <a:srgbClr val="F2F4FB"/>
+                    </a:solidFill>
+                  </a:tcPr>
+                </a:tc>
+                <a:tc>
+                  <a:txBody>
+                    <a:bodyPr/>
+                    <a:lstStyle/>
+                    <a:p>
+                      <a:r>
+                        <a:rPr sz="1000" b="0">
+                          <a:solidFill>
+                            <a:srgbClr val="333333"/>
+                          </a:solidFill>
+                          <a:latin typeface="Calibri"/>
+                        </a:rPr>
+                        <a:t>577 ns</a:t>
+                      </a:r>
+                    </a:p>
+                  </a:txBody>
+                  <a:tcPr>
+                    <a:solidFill>
+                      <a:srgbClr val="F2F4FB"/>
+                    </a:solidFill>
+                  </a:tcPr>
+                </a:tc>
+              </a:tr>
+              <a:tr h="433333">
+                <a:tc>
+                  <a:txBody>
+                    <a:bodyPr/>
+                    <a:lstStyle/>
+                    <a:p>
+                      <a:r>
+                        <a:rPr sz="1000" b="0">
+                          <a:solidFill>
+                            <a:srgbClr val="333333"/>
+                          </a:solidFill>
+                          <a:latin typeface="Calibri"/>
+                        </a:rPr>
+                        <a:t>fs</a:t>
+                      </a:r>
+                    </a:p>
+                  </a:txBody>
+                  <a:tcPr>
+                    <a:solidFill>
+                      <a:srgbClr val="FFFFFF"/>
+                    </a:solidFill>
+                  </a:tcPr>
+                </a:tc>
+                <a:tc>
+                  <a:txBody>
+                    <a:bodyPr/>
+                    <a:lstStyle/>
+                    <a:p>
+                      <a:r>
+                        <a:rPr sz="1000" b="0">
+                          <a:solidFill>
+                            <a:srgbClr val="333333"/>
+                          </a:solidFill>
+                          <a:latin typeface="Calibri"/>
+                        </a:rPr>
+                        <a:t>576 ns</a:t>
+                      </a:r>
+                    </a:p>
+                  </a:txBody>
+                  <a:tcPr>
+                    <a:solidFill>
+                      <a:srgbClr val="FFFFFF"/>
+                    </a:solidFill>
+                  </a:tcPr>
+                </a:tc>
+                <a:tc>
+                  <a:txBody>
+                    <a:bodyPr/>
+                    <a:lstStyle/>
+                    <a:p>
+                      <a:r>
+                        <a:rPr sz="1000" b="0">
+                          <a:solidFill>
+                            <a:srgbClr val="333333"/>
+                          </a:solidFill>
+                          <a:latin typeface="Calibri"/>
+                        </a:rPr>
+                        <a:t>226.2 MHz</a:t>
+                      </a:r>
+                    </a:p>
+                  </a:txBody>
+                  <a:tcPr>
+                    <a:solidFill>
+                      <a:srgbClr val="FFFFFF"/>
+                    </a:solidFill>
+                  </a:tcPr>
+                </a:tc>
+                <a:tc>
+                  <a:txBody>
+                    <a:bodyPr/>
+                    <a:lstStyle/>
+                    <a:p>
+                      <a:r>
+                        <a:rPr sz="1000" b="0">
+                          <a:solidFill>
+                            <a:srgbClr val="333333"/>
+                          </a:solidFill>
+                          <a:latin typeface="Calibri"/>
+                        </a:rPr>
+                        <a:t>not settled at 2 µs (228.9 MHz)</a:t>
+                      </a:r>
+                    </a:p>
+                  </a:txBody>
+                  <a:tcPr>
+                    <a:solidFill>
+                      <a:srgbClr val="FFFFFF"/>
+                    </a:solidFill>
+                  </a:tcPr>
+                </a:tc>
+              </a:tr>
+              <a:tr h="433335">
+                <a:tc>
+                  <a:txBody>
+                    <a:bodyPr/>
+                    <a:lstStyle/>
+                    <a:p>
+                      <a:r>
+                        <a:rPr sz="1000" b="0">
+                          <a:solidFill>
+                            <a:srgbClr val="333333"/>
+                          </a:solidFill>
+                          <a:latin typeface="Calibri"/>
+                        </a:rPr>
+                        <a:t>ss</a:t>
+                      </a:r>
+                    </a:p>
+                  </a:txBody>
+                  <a:tcPr>
+                    <a:solidFill>
+                      <a:srgbClr val="F2F4FB"/>
+                    </a:solidFill>
+                  </a:tcPr>
+                </a:tc>
+                <a:tc>
+                  <a:txBody>
+                    <a:bodyPr/>
+                    <a:lstStyle/>
+                    <a:p>
+                      <a:r>
+                        <a:rPr sz="1000" b="0">
+                          <a:solidFill>
+                            <a:srgbClr val="333333"/>
+                          </a:solidFill>
+                          <a:latin typeface="Calibri"/>
+                        </a:rPr>
+                        <a:t>967 ns</a:t>
+                      </a:r>
+                    </a:p>
+                  </a:txBody>
+                  <a:tcPr>
+                    <a:solidFill>
+                      <a:srgbClr val="F2F4FB"/>
+                    </a:solidFill>
+                  </a:tcPr>
+                </a:tc>
+                <a:tc>
+                  <a:txBody>
+                    <a:bodyPr/>
+                    <a:lstStyle/>
+                    <a:p>
+                      <a:r>
+                        <a:rPr sz="1000" b="0">
+                          <a:solidFill>
+                            <a:srgbClr val="333333"/>
+                          </a:solidFill>
+                          <a:latin typeface="Calibri"/>
+                        </a:rPr>
+                        <a:t>settled (5 µs run)</a:t>
+                      </a:r>
+                    </a:p>
+                  </a:txBody>
+                  <a:tcPr>
+                    <a:solidFill>
+                      <a:srgbClr val="F2F4FB"/>
+                    </a:solidFill>
+                  </a:tcPr>
+                </a:tc>
+                <a:tc>
+                  <a:txBody>
+                    <a:bodyPr/>
+                    <a:lstStyle/>
+                    <a:p>
+                      <a:r>
+                        <a:rPr sz="1000" b="0">
+                          <a:solidFill>
+                            <a:srgbClr val="333333"/>
+                          </a:solidFill>
+                          <a:latin typeface="Calibri"/>
+                        </a:rPr>
+                        <a:t>1737 ns (5 µs run)</a:t>
+                      </a:r>
+                    </a:p>
+                  </a:txBody>
+                  <a:tcPr>
+                    <a:solidFill>
+                      <a:srgbClr val="F2F4FB"/>
+                    </a:solidFill>
+                  </a:tcPr>
+                </a:tc>
+              </a:tr>
+            </a:tbl>
+          </a:graphicData>
+        </a:graphic>
+      </p:graphicFrame>
+      <p:sp>
+        <p:nvSpPr>
+          <p:cNvPr id="8" name="TextBox 7"/>
+          <p:cNvSpPr txBox="1"/>
+          <p:nvPr/>
+        </p:nvSpPr>
+        <p:spPr>
+          <a:xfrm>
+            <a:off x="6500000" y="5475880"/>
+            <a:ext cx="5000000" cy="800000"/>
+          </a:xfrm>
+          <a:prstGeom prst="rect">
+            <a:avLst/>
+          </a:prstGeom>
+          <a:noFill/>
+        </p:spPr>
+        <p:txBody>
+          <a:bodyPr wrap="square">
+            <a:spAutoFit/>
+          </a:bodyPr>
+          <a:lstStyle/>
+          <a:p>
+            <a:pPr>
+              <a:spcAft>
+                <a:spcPts val="600"/>
+              </a:spcAft>
+            </a:pPr>
+            <a:r>
+              <a:rPr sz="1000" b="0">
+                <a:solidFill>
+                  <a:srgbClr val="333333"/>
+                </a:solidFill>
+                <a:latin typeface="Calibri"/>
+              </a:rPr>
+              <a:t>The original loop had not finished settling at ff/sf/fs/ss within the 2 µs run, so no lock time is quoted for it there. Corner runs use the coarse start; the 0 V cold start was run at tt only.</a:t>
+            </a:r>
+          </a:p>
+        </p:txBody>
+      </p:sp>
+      <p:sp>
+        <p:nvSpPr>
+          <p:cNvPr id="9" name="TextBox 8"/>
+          <p:cNvSpPr txBox="1"/>
+          <p:nvPr/>
+        </p:nvSpPr>
+        <p:spPr>
+          <a:xfrm>
+            <a:off x="640080" y="6130000"/>
+            <a:ext cx="10500000" cy="280000"/>
+          </a:xfrm>
+          <a:prstGeom prst="rect">
+            <a:avLst/>
+          </a:prstGeom>
+          <a:noFill/>
+        </p:spPr>
+        <p:txBody>
+          <a:bodyPr wrap="square">
+            <a:spAutoFit/>
+          </a:bodyPr>
+          <a:lstStyle/>
+          <a:p>
+            <a:pPr>
+              <a:spcAft>
+                <a:spcPts val="600"/>
+              </a:spcAft>
+            </a:pPr>
+            <a:r>
+              <a:rPr sz="1000" b="0">
+                <a:solidFill>
+                  <a:srgbClr val="777777"/>
+                </a:solidFill>
+                <a:latin typeface="Calibri"/>
+              </a:rPr>
+              <a:t>Scope: compensation is an ideal behavioural correction voltage (transistor-level in Review 3); closed-loop results are tt / 27 °C (corner lock tests: coarse start).</a:t>
+            </a:r>
+          </a:p>
+        </p:txBody>
+      </p:sp>
+    </p:spTree>
+  </p:cSld>
+  <p:clrMapOvr>
+    <a:masterClrMapping/>
+  </p:clrMapOvr>
+</p:sld>
+</file>
+
+<file path=ppt/slides/slide26.xml><?xml version="1.0" encoding="utf-8"?>
+<p:sld xmlns:a="http://schemas.openxmlformats.org/drawingml/2006/main" xmlns:p="http://schemas.openxmlformats.org/presentationml/2006/main" xmlns:r="http://schemas.openxmlformats.org/officeDocument/2006/relationships">
+  <p:cSld>
+    <p:spTree>
+      <p:nvGrpSpPr>
+        <p:cNvPr id="1" name=""/>
+        <p:cNvGrpSpPr/>
+        <p:nvPr/>
+      </p:nvGrpSpPr>
+      <p:grpSpPr/>
+      <p:sp>
+        <p:nvSpPr>
+          <p:cNvPr id="2" name="Text 0"/>
+          <p:cNvSpPr txBox="1"/>
+          <p:nvPr/>
+        </p:nvSpPr>
+        <p:spPr>
+          <a:xfrm>
+            <a:off x="11460175" y="6446520"/>
+            <a:ext cx="457200" cy="274320"/>
+          </a:xfrm>
+          <a:prstGeom prst="rect">
+            <a:avLst/>
+          </a:prstGeom>
+          <a:noFill/>
+          <a:ln/>
+        </p:spPr>
+        <p:txBody>
+          <a:bodyPr wrap="square" lIns="0" tIns="0" rIns="0" bIns="0" rtlCol="0" anchor="ctr"/>
+          <a:lstStyle/>
+          <a:p>
+            <a:pPr marL="0" indent="0" algn="r">
+              <a:buNone/>
+            </a:pPr>
+            <a:r>
+              <a:rPr lang="en-US" sz="1000" dirty="0">
+                <a:solidFill>
+                  <a:srgbClr val="808080"/>
+                </a:solidFill>
+                <a:latin typeface="Calibri" pitchFamily="34" charset="0"/>
+                <a:ea typeface="Calibri" pitchFamily="34" charset="-122"/>
+                <a:cs typeface="Calibri" pitchFamily="34" charset="-120"/>
+              </a:rPr>
+              <a:t>23</a:t>
             </a:r>
             <a:endParaRPr lang="en-US" sz="1000" dirty="0"/>
           </a:p>
@@ -21332,7 +23948,7 @@
 </p:sld>
 </file>
 
-<file path=ppt/slides/slide26.xml><?xml version="1.0" encoding="utf-8"?>
+<file path=ppt/slides/slide27.xml><?xml version="1.0" encoding="utf-8"?>
 <p:sld xmlns:a="http://schemas.openxmlformats.org/drawingml/2006/main" xmlns:p="http://schemas.openxmlformats.org/presentationml/2006/main" xmlns:r="http://schemas.openxmlformats.org/officeDocument/2006/relationships">
   <p:cSld>
     <p:spTree>
@@ -21375,7 +23991,7 @@
                 <a:ea typeface="Calibri" pitchFamily="34" charset="-122"/>
                 <a:cs typeface="Calibri" pitchFamily="34" charset="-120"/>
               </a:rPr>
-              <a:t>23</a:t>
+              <a:t>24</a:t>
             </a:r>
             <a:endParaRPr lang="en-US" sz="1000" dirty="0"/>
           </a:p>
@@ -21884,7 +24500,7 @@
                 </a:solidFill>
                 <a:latin typeface="Calibri"/>
               </a:rPr>
-              <a:t>839 ns</a:t>
+              <a:t>1352 ns</a:t>
             </a:r>
           </a:p>
           <a:p>
@@ -21896,7 +24512,7 @@
                 </a:solidFill>
                 <a:latin typeface="Calibri"/>
               </a:rPr>
-              <a:t>lock from a true 0 V cold start (&lt; 2 µs)</a:t>
+              <a:t>lock from a true 0 V cold start, retuned loop (&lt; 2 µs)</a:t>
             </a:r>
           </a:p>
         </p:txBody>
@@ -22001,7 +24617,7 @@
                 </a:solidFill>
                 <a:latin typeface="Calibri"/>
               </a:rPr>
-              <a:t>Scope: compensation is an ideal behavioural correction voltage (transistor-level in Review 3); closed-loop results are tt / 27 °C.</a:t>
+              <a:t>Scope: compensation is an ideal behavioural correction voltage (transistor-level in Review 3); closed-loop results are tt / 27 °C (corner lock tests: coarse start).</a:t>
             </a:r>
           </a:p>
         </p:txBody>
@@ -26982,7 +29598,7 @@
                           </a:solidFill>
                           <a:latin typeface="Calibri"/>
                         </a:rPr>
-                        <a:t>Coarse-tuned start (0.85V)</a:t>
+                        <a:t>Coarse-tuned start (0.85V), R2 = 3.6k</a:t>
                       </a:r>
                     </a:p>
                   </a:txBody>
@@ -27004,7 +29620,7 @@
                           </a:solidFill>
                           <a:latin typeface="Calibri"/>
                         </a:rPr>
-                        <a:t>TRUE cold start (0V, boosted)</a:t>
+                        <a:t>TRUE cold start (0V, boosted), R2 = 3.6k</a:t>
                       </a:r>
                     </a:p>
                   </a:txBody>
@@ -27050,7 +29666,7 @@
                           </a:solidFill>
                           <a:latin typeface="Calibri"/>
                         </a:rPr>
-                        <a:t>577 ns</a:t>
+                        <a:t>503 ns (was 577 ns)</a:t>
                       </a:r>
                     </a:p>
                   </a:txBody>
@@ -27072,7 +29688,7 @@
                           </a:solidFill>
                           <a:latin typeface="Calibri"/>
                         </a:rPr>
-                        <a:t>839 ns</a:t>
+                        <a:t>1352 ns (was 839 ns)</a:t>
                       </a:r>
                     </a:p>
                   </a:txBody>
@@ -27118,7 +29734,7 @@
                           </a:solidFill>
                           <a:latin typeface="Calibri"/>
                         </a:rPr>
-                        <a:t>0.902 V</a:t>
+                        <a:t>0.9000 V (was 0.902)</a:t>
                       </a:r>
                     </a:p>
                   </a:txBody>
@@ -27140,7 +29756,7 @@
                           </a:solidFill>
                           <a:latin typeface="Calibri"/>
                         </a:rPr>
-                        <a:t>0.9002 V</a:t>
+                        <a:t>0.9000 V</a:t>
                       </a:r>
                     </a:p>
                   </a:txBody>
@@ -27186,7 +29802,7 @@
                           </a:solidFill>
                           <a:latin typeface="Calibri"/>
                         </a:rPr>
-                        <a:t>227.96 MHz</a:t>
+                        <a:t>226.18 MHz (was 227.96)</a:t>
                       </a:r>
                     </a:p>
                   </a:txBody>
@@ -27208,7 +29824,7 @@
                           </a:solidFill>
                           <a:latin typeface="Calibri"/>
                         </a:rPr>
-                        <a:t>226.42 MHz</a:t>
+                        <a:t>225.98 MHz (was 226.42)</a:t>
                       </a:r>
                     </a:p>
                   </a:txBody>
@@ -27254,7 +29870,7 @@
                           </a:solidFill>
                           <a:latin typeface="Calibri"/>
                         </a:rPr>
-                        <a:t>&lt; 2us spec; 573 ns averaged model</a:t>
+                        <a:t>&lt; 2us spec</a:t>
                       </a:r>
                     </a:p>
                   </a:txBody>
@@ -27343,7 +29959,7 @@
                 </a:solidFill>
                 <a:latin typeface="Calibri"/>
               </a:rPr>
-              <a:t>Simulated from a TRUE 0V cold start (not the coarse-tuned 0.85V assumption): locks in 839 ns, comfortably inside the 2us spec -- worked on the first simulation attempt.</a:t>
+              <a:t>Simulated from a TRUE 0V cold start (not the coarse-tuned 0.85V assumption): locks in 1352 ns with the retuned loop filter (839 ns with the original R2 = 1.7 kOhm), inside the 2us spec.</a:t>
             </a:r>
           </a:p>
           <a:p>
